--- a/msa-ppt/3. 데이터 쓰기 API 구현.pptx
+++ b/msa-ppt/3. 데이터 쓰기 API 구현.pptx
@@ -16,6 +16,11 @@
     <p:sldId id="264" r:id="rId10"/>
     <p:sldId id="265" r:id="rId11"/>
     <p:sldId id="266" r:id="rId12"/>
+    <p:sldId id="271" r:id="rId13"/>
+    <p:sldId id="268" r:id="rId14"/>
+    <p:sldId id="269" r:id="rId15"/>
+    <p:sldId id="270" r:id="rId16"/>
+    <p:sldId id="272" r:id="rId17"/>
   </p:sldIdLst>
   <p:sldSz cx="12192000" cy="6858000"/>
   <p:notesSz cx="6858000" cy="9144000"/>
@@ -140,7 +145,19 @@
             <p14:sldId id="266"/>
           </p14:sldIdLst>
         </p14:section>
+        <p14:section name="회원가입시 포인트 추가 기능" id="{F2316319-8974-485C-8745-FA4662AF2A53}">
+          <p14:sldIdLst>
+            <p14:sldId id="271"/>
+            <p14:sldId id="268"/>
+            <p14:sldId id="269"/>
+            <p14:sldId id="270"/>
+            <p14:sldId id="272"/>
+          </p14:sldIdLst>
+        </p14:section>
       </p14:sectionLst>
+    </p:ext>
+    <p:ext uri="{EFAFB233-063F-42B5-8137-9DF3F51BA10A}">
+      <p15:sldGuideLst xmlns:p15="http://schemas.microsoft.com/office/powerpoint/2012/main"/>
     </p:ext>
   </p:extLst>
 </p:presentation>
@@ -7442,6 +7459,5241 @@
 </p:sld>
 </file>
 
+<file path=ppt/slides/slide12.xml><?xml version="1.0" encoding="utf-8"?>
+<p:sld xmlns:a="http://schemas.openxmlformats.org/drawingml/2006/main" xmlns:r="http://schemas.openxmlformats.org/officeDocument/2006/relationships" xmlns:p="http://schemas.openxmlformats.org/presentationml/2006/main">
+  <p:cSld>
+    <p:spTree>
+      <p:nvGrpSpPr>
+        <p:cNvPr id="1" name=""/>
+        <p:cNvGrpSpPr/>
+        <p:nvPr/>
+      </p:nvGrpSpPr>
+      <p:grpSpPr>
+        <a:xfrm>
+          <a:off x="0" y="0"/>
+          <a:ext cx="0" cy="0"/>
+          <a:chOff x="0" y="0"/>
+          <a:chExt cx="0" cy="0"/>
+        </a:xfrm>
+      </p:grpSpPr>
+      <p:sp>
+        <p:nvSpPr>
+          <p:cNvPr id="2" name="제목 1">
+            <a:extLst>
+              <a:ext uri="{FF2B5EF4-FFF2-40B4-BE49-F238E27FC236}">
+                <a16:creationId xmlns:a16="http://schemas.microsoft.com/office/drawing/2014/main" id="{1D63EF95-96C4-3FA8-4DE1-B41535CEA1C5}"/>
+              </a:ext>
+            </a:extLst>
+          </p:cNvPr>
+          <p:cNvSpPr>
+            <a:spLocks noGrp="1"/>
+          </p:cNvSpPr>
+          <p:nvPr>
+            <p:ph type="title"/>
+          </p:nvPr>
+        </p:nvSpPr>
+        <p:spPr/>
+        <p:txBody>
+          <a:bodyPr>
+            <a:normAutofit/>
+          </a:bodyPr>
+          <a:lstStyle/>
+          <a:p>
+            <a:r>
+              <a:rPr lang="en-US" altLang="ko-KR" sz="4000"/>
+              <a:t>application.yml </a:t>
+            </a:r>
+            <a:r>
+              <a:rPr lang="ko-KR" altLang="en-US" sz="4000"/>
+              <a:t>에 </a:t>
+            </a:r>
+            <a:r>
+              <a:rPr lang="en-US" altLang="ko-KR" sz="4000"/>
+              <a:t>point-service</a:t>
+            </a:r>
+            <a:r>
+              <a:rPr lang="ko-KR" altLang="en-US" sz="4000"/>
+              <a:t>정보 추가</a:t>
+            </a:r>
+          </a:p>
+        </p:txBody>
+      </p:sp>
+      <p:grpSp>
+        <p:nvGrpSpPr>
+          <p:cNvPr id="6" name="그룹 5">
+            <a:extLst>
+              <a:ext uri="{FF2B5EF4-FFF2-40B4-BE49-F238E27FC236}">
+                <a16:creationId xmlns:a16="http://schemas.microsoft.com/office/drawing/2014/main" id="{F5222D05-13A6-A1EE-F129-78A40A285C0E}"/>
+              </a:ext>
+            </a:extLst>
+          </p:cNvPr>
+          <p:cNvGrpSpPr/>
+          <p:nvPr/>
+        </p:nvGrpSpPr>
+        <p:grpSpPr>
+          <a:xfrm>
+            <a:off x="3358134" y="1837144"/>
+            <a:ext cx="6094476" cy="4415696"/>
+            <a:chOff x="3358134" y="1837144"/>
+            <a:chExt cx="6094476" cy="4415696"/>
+          </a:xfrm>
+        </p:grpSpPr>
+        <p:sp>
+          <p:nvSpPr>
+            <p:cNvPr id="4" name="TextBox 3">
+              <a:extLst>
+                <a:ext uri="{FF2B5EF4-FFF2-40B4-BE49-F238E27FC236}">
+                  <a16:creationId xmlns:a16="http://schemas.microsoft.com/office/drawing/2014/main" id="{7CA6C9DF-B2B0-A01F-AFF5-41EB438791A6}"/>
+                </a:ext>
+              </a:extLst>
+            </p:cNvPr>
+            <p:cNvSpPr txBox="1"/>
+            <p:nvPr/>
+          </p:nvSpPr>
+          <p:spPr>
+            <a:xfrm>
+              <a:off x="3358134" y="1837144"/>
+              <a:ext cx="6094476" cy="4415696"/>
+            </a:xfrm>
+            <a:prstGeom prst="rect">
+              <a:avLst/>
+            </a:prstGeom>
+            <a:solidFill>
+              <a:schemeClr val="tx1"/>
+            </a:solidFill>
+          </p:spPr>
+          <p:txBody>
+            <a:bodyPr wrap="square">
+              <a:spAutoFit/>
+            </a:bodyPr>
+            <a:lstStyle/>
+            <a:p>
+              <a:pPr>
+                <a:lnSpc>
+                  <a:spcPts val="1425"/>
+                </a:lnSpc>
+                <a:buNone/>
+              </a:pPr>
+              <a:r>
+                <a:rPr lang="en-US" altLang="ko-KR" sz="1200" b="0">
+                  <a:solidFill>
+                    <a:srgbClr val="7EE787"/>
+                  </a:solidFill>
+                  <a:effectLst/>
+                  <a:latin typeface="Consolas" panose="020B0609020204030204" pitchFamily="49" charset="0"/>
+                </a:rPr>
+                <a:t>server</a:t>
+              </a:r>
+              <a:r>
+                <a:rPr lang="en-US" altLang="ko-KR" sz="1200" b="0">
+                  <a:solidFill>
+                    <a:srgbClr val="BBBEBF"/>
+                  </a:solidFill>
+                  <a:effectLst/>
+                  <a:latin typeface="Consolas" panose="020B0609020204030204" pitchFamily="49" charset="0"/>
+                </a:rPr>
+                <a:t>:</a:t>
+              </a:r>
+            </a:p>
+            <a:p>
+              <a:pPr>
+                <a:lnSpc>
+                  <a:spcPts val="1425"/>
+                </a:lnSpc>
+                <a:buNone/>
+              </a:pPr>
+              <a:r>
+                <a:rPr lang="en-US" altLang="ko-KR" sz="1200" b="0">
+                  <a:solidFill>
+                    <a:srgbClr val="BBBEBF"/>
+                  </a:solidFill>
+                  <a:effectLst/>
+                  <a:latin typeface="Consolas" panose="020B0609020204030204" pitchFamily="49" charset="0"/>
+                </a:rPr>
+                <a:t>    </a:t>
+              </a:r>
+              <a:r>
+                <a:rPr lang="en-US" altLang="ko-KR" sz="1200" b="0">
+                  <a:solidFill>
+                    <a:srgbClr val="7EE787"/>
+                  </a:solidFill>
+                  <a:effectLst/>
+                  <a:latin typeface="Consolas" panose="020B0609020204030204" pitchFamily="49" charset="0"/>
+                </a:rPr>
+                <a:t>port</a:t>
+              </a:r>
+              <a:r>
+                <a:rPr lang="en-US" altLang="ko-KR" sz="1200" b="0">
+                  <a:solidFill>
+                    <a:srgbClr val="BBBEBF"/>
+                  </a:solidFill>
+                  <a:effectLst/>
+                  <a:latin typeface="Consolas" panose="020B0609020204030204" pitchFamily="49" charset="0"/>
+                </a:rPr>
+                <a:t>: </a:t>
+              </a:r>
+              <a:r>
+                <a:rPr lang="en-US" altLang="ko-KR" sz="1200" b="0">
+                  <a:solidFill>
+                    <a:srgbClr val="B5CEA8"/>
+                  </a:solidFill>
+                  <a:effectLst/>
+                  <a:latin typeface="Consolas" panose="020B0609020204030204" pitchFamily="49" charset="0"/>
+                </a:rPr>
+                <a:t>8080</a:t>
+              </a:r>
+              <a:endParaRPr lang="en-US" altLang="ko-KR" sz="1200" b="0">
+                <a:solidFill>
+                  <a:srgbClr val="BBBEBF"/>
+                </a:solidFill>
+                <a:effectLst/>
+                <a:latin typeface="Consolas" panose="020B0609020204030204" pitchFamily="49" charset="0"/>
+              </a:endParaRPr>
+            </a:p>
+            <a:p>
+              <a:pPr>
+                <a:lnSpc>
+                  <a:spcPts val="1425"/>
+                </a:lnSpc>
+                <a:buNone/>
+              </a:pPr>
+              <a:br>
+                <a:rPr lang="en-US" altLang="ko-KR" sz="1200" b="0">
+                  <a:solidFill>
+                    <a:srgbClr val="BBBEBF"/>
+                  </a:solidFill>
+                  <a:effectLst/>
+                  <a:latin typeface="Consolas" panose="020B0609020204030204" pitchFamily="49" charset="0"/>
+                </a:rPr>
+              </a:br>
+              <a:endParaRPr lang="en-US" altLang="ko-KR" sz="1200" b="0">
+                <a:solidFill>
+                  <a:srgbClr val="BBBEBF"/>
+                </a:solidFill>
+                <a:effectLst/>
+                <a:latin typeface="Consolas" panose="020B0609020204030204" pitchFamily="49" charset="0"/>
+              </a:endParaRPr>
+            </a:p>
+            <a:p>
+              <a:pPr>
+                <a:lnSpc>
+                  <a:spcPts val="1425"/>
+                </a:lnSpc>
+                <a:buNone/>
+              </a:pPr>
+              <a:r>
+                <a:rPr lang="en-US" altLang="ko-KR" sz="1200" b="0">
+                  <a:solidFill>
+                    <a:srgbClr val="7EE787"/>
+                  </a:solidFill>
+                  <a:effectLst/>
+                  <a:latin typeface="Consolas" panose="020B0609020204030204" pitchFamily="49" charset="0"/>
+                </a:rPr>
+                <a:t>spring</a:t>
+              </a:r>
+              <a:r>
+                <a:rPr lang="en-US" altLang="ko-KR" sz="1200" b="0">
+                  <a:solidFill>
+                    <a:srgbClr val="BBBEBF"/>
+                  </a:solidFill>
+                  <a:effectLst/>
+                  <a:latin typeface="Consolas" panose="020B0609020204030204" pitchFamily="49" charset="0"/>
+                </a:rPr>
+                <a:t>:</a:t>
+              </a:r>
+            </a:p>
+            <a:p>
+              <a:pPr>
+                <a:lnSpc>
+                  <a:spcPts val="1425"/>
+                </a:lnSpc>
+                <a:buNone/>
+              </a:pPr>
+              <a:r>
+                <a:rPr lang="en-US" altLang="ko-KR" sz="1200" b="0">
+                  <a:solidFill>
+                    <a:srgbClr val="BBBEBF"/>
+                  </a:solidFill>
+                  <a:effectLst/>
+                  <a:latin typeface="Consolas" panose="020B0609020204030204" pitchFamily="49" charset="0"/>
+                </a:rPr>
+                <a:t>    </a:t>
+              </a:r>
+              <a:r>
+                <a:rPr lang="en-US" altLang="ko-KR" sz="1200" b="0">
+                  <a:solidFill>
+                    <a:srgbClr val="7EE787"/>
+                  </a:solidFill>
+                  <a:effectLst/>
+                  <a:latin typeface="Consolas" panose="020B0609020204030204" pitchFamily="49" charset="0"/>
+                </a:rPr>
+                <a:t>datasource</a:t>
+              </a:r>
+              <a:r>
+                <a:rPr lang="en-US" altLang="ko-KR" sz="1200" b="0">
+                  <a:solidFill>
+                    <a:srgbClr val="BBBEBF"/>
+                  </a:solidFill>
+                  <a:effectLst/>
+                  <a:latin typeface="Consolas" panose="020B0609020204030204" pitchFamily="49" charset="0"/>
+                </a:rPr>
+                <a:t>:</a:t>
+              </a:r>
+            </a:p>
+            <a:p>
+              <a:pPr>
+                <a:lnSpc>
+                  <a:spcPts val="1425"/>
+                </a:lnSpc>
+                <a:buNone/>
+              </a:pPr>
+              <a:r>
+                <a:rPr lang="en-US" altLang="ko-KR" sz="1200" b="0">
+                  <a:solidFill>
+                    <a:srgbClr val="BBBEBF"/>
+                  </a:solidFill>
+                  <a:effectLst/>
+                  <a:latin typeface="Consolas" panose="020B0609020204030204" pitchFamily="49" charset="0"/>
+                </a:rPr>
+                <a:t>        </a:t>
+              </a:r>
+              <a:r>
+                <a:rPr lang="en-US" altLang="ko-KR" sz="1200" b="0">
+                  <a:solidFill>
+                    <a:srgbClr val="7EE787"/>
+                  </a:solidFill>
+                  <a:effectLst/>
+                  <a:latin typeface="Consolas" panose="020B0609020204030204" pitchFamily="49" charset="0"/>
+                </a:rPr>
+                <a:t>url</a:t>
+              </a:r>
+              <a:r>
+                <a:rPr lang="en-US" altLang="ko-KR" sz="1200" b="0">
+                  <a:solidFill>
+                    <a:srgbClr val="BBBEBF"/>
+                  </a:solidFill>
+                  <a:effectLst/>
+                  <a:latin typeface="Consolas" panose="020B0609020204030204" pitchFamily="49" charset="0"/>
+                </a:rPr>
+                <a:t>: </a:t>
+              </a:r>
+              <a:r>
+                <a:rPr lang="en-US" altLang="ko-KR" sz="1200" b="0">
+                  <a:solidFill>
+                    <a:srgbClr val="A5D6FF"/>
+                  </a:solidFill>
+                  <a:effectLst/>
+                  <a:latin typeface="Consolas" panose="020B0609020204030204" pitchFamily="49" charset="0"/>
+                </a:rPr>
+                <a:t>jdbc:mysql://localhost:3320/user-db</a:t>
+              </a:r>
+              <a:endParaRPr lang="en-US" altLang="ko-KR" sz="1200" b="0">
+                <a:solidFill>
+                  <a:srgbClr val="BBBEBF"/>
+                </a:solidFill>
+                <a:effectLst/>
+                <a:latin typeface="Consolas" panose="020B0609020204030204" pitchFamily="49" charset="0"/>
+              </a:endParaRPr>
+            </a:p>
+            <a:p>
+              <a:pPr>
+                <a:lnSpc>
+                  <a:spcPts val="1425"/>
+                </a:lnSpc>
+                <a:buNone/>
+              </a:pPr>
+              <a:r>
+                <a:rPr lang="en-US" altLang="ko-KR" sz="1200" b="0">
+                  <a:solidFill>
+                    <a:srgbClr val="BBBEBF"/>
+                  </a:solidFill>
+                  <a:effectLst/>
+                  <a:latin typeface="Consolas" panose="020B0609020204030204" pitchFamily="49" charset="0"/>
+                </a:rPr>
+                <a:t>        </a:t>
+              </a:r>
+              <a:r>
+                <a:rPr lang="en-US" altLang="ko-KR" sz="1200" b="0">
+                  <a:solidFill>
+                    <a:srgbClr val="7EE787"/>
+                  </a:solidFill>
+                  <a:effectLst/>
+                  <a:latin typeface="Consolas" panose="020B0609020204030204" pitchFamily="49" charset="0"/>
+                </a:rPr>
+                <a:t>username</a:t>
+              </a:r>
+              <a:r>
+                <a:rPr lang="en-US" altLang="ko-KR" sz="1200" b="0">
+                  <a:solidFill>
+                    <a:srgbClr val="BBBEBF"/>
+                  </a:solidFill>
+                  <a:effectLst/>
+                  <a:latin typeface="Consolas" panose="020B0609020204030204" pitchFamily="49" charset="0"/>
+                </a:rPr>
+                <a:t>: </a:t>
+              </a:r>
+              <a:r>
+                <a:rPr lang="en-US" altLang="ko-KR" sz="1200" b="0">
+                  <a:solidFill>
+                    <a:srgbClr val="A5D6FF"/>
+                  </a:solidFill>
+                  <a:effectLst/>
+                  <a:latin typeface="Consolas" panose="020B0609020204030204" pitchFamily="49" charset="0"/>
+                </a:rPr>
+                <a:t>root</a:t>
+              </a:r>
+              <a:endParaRPr lang="en-US" altLang="ko-KR" sz="1200" b="0">
+                <a:solidFill>
+                  <a:srgbClr val="BBBEBF"/>
+                </a:solidFill>
+                <a:effectLst/>
+                <a:latin typeface="Consolas" panose="020B0609020204030204" pitchFamily="49" charset="0"/>
+              </a:endParaRPr>
+            </a:p>
+            <a:p>
+              <a:pPr>
+                <a:lnSpc>
+                  <a:spcPts val="1425"/>
+                </a:lnSpc>
+                <a:buNone/>
+              </a:pPr>
+              <a:r>
+                <a:rPr lang="en-US" altLang="ko-KR" sz="1200" b="0">
+                  <a:solidFill>
+                    <a:srgbClr val="BBBEBF"/>
+                  </a:solidFill>
+                  <a:effectLst/>
+                  <a:latin typeface="Consolas" panose="020B0609020204030204" pitchFamily="49" charset="0"/>
+                </a:rPr>
+                <a:t>        </a:t>
+              </a:r>
+              <a:r>
+                <a:rPr lang="en-US" altLang="ko-KR" sz="1200" b="0">
+                  <a:solidFill>
+                    <a:srgbClr val="7EE787"/>
+                  </a:solidFill>
+                  <a:effectLst/>
+                  <a:latin typeface="Consolas" panose="020B0609020204030204" pitchFamily="49" charset="0"/>
+                </a:rPr>
+                <a:t>password</a:t>
+              </a:r>
+              <a:r>
+                <a:rPr lang="en-US" altLang="ko-KR" sz="1200" b="0">
+                  <a:solidFill>
+                    <a:srgbClr val="BBBEBF"/>
+                  </a:solidFill>
+                  <a:effectLst/>
+                  <a:latin typeface="Consolas" panose="020B0609020204030204" pitchFamily="49" charset="0"/>
+                </a:rPr>
+                <a:t>: </a:t>
+              </a:r>
+              <a:r>
+                <a:rPr lang="en-US" altLang="ko-KR" sz="1200" b="0">
+                  <a:solidFill>
+                    <a:srgbClr val="A5D6FF"/>
+                  </a:solidFill>
+                  <a:effectLst/>
+                  <a:latin typeface="Consolas" panose="020B0609020204030204" pitchFamily="49" charset="0"/>
+                </a:rPr>
+                <a:t>password</a:t>
+              </a:r>
+              <a:endParaRPr lang="en-US" altLang="ko-KR" sz="1200" b="0">
+                <a:solidFill>
+                  <a:srgbClr val="BBBEBF"/>
+                </a:solidFill>
+                <a:effectLst/>
+                <a:latin typeface="Consolas" panose="020B0609020204030204" pitchFamily="49" charset="0"/>
+              </a:endParaRPr>
+            </a:p>
+            <a:p>
+              <a:pPr>
+                <a:lnSpc>
+                  <a:spcPts val="1425"/>
+                </a:lnSpc>
+                <a:buNone/>
+              </a:pPr>
+              <a:r>
+                <a:rPr lang="en-US" altLang="ko-KR" sz="1200" b="0">
+                  <a:solidFill>
+                    <a:srgbClr val="BBBEBF"/>
+                  </a:solidFill>
+                  <a:effectLst/>
+                  <a:latin typeface="Consolas" panose="020B0609020204030204" pitchFamily="49" charset="0"/>
+                </a:rPr>
+                <a:t>        </a:t>
+              </a:r>
+              <a:r>
+                <a:rPr lang="en-US" altLang="ko-KR" sz="1200" b="0">
+                  <a:solidFill>
+                    <a:srgbClr val="7EE787"/>
+                  </a:solidFill>
+                  <a:effectLst/>
+                  <a:latin typeface="Consolas" panose="020B0609020204030204" pitchFamily="49" charset="0"/>
+                </a:rPr>
+                <a:t>driver-class-name</a:t>
+              </a:r>
+              <a:r>
+                <a:rPr lang="en-US" altLang="ko-KR" sz="1200" b="0">
+                  <a:solidFill>
+                    <a:srgbClr val="BBBEBF"/>
+                  </a:solidFill>
+                  <a:effectLst/>
+                  <a:latin typeface="Consolas" panose="020B0609020204030204" pitchFamily="49" charset="0"/>
+                </a:rPr>
+                <a:t>: </a:t>
+              </a:r>
+              <a:r>
+                <a:rPr lang="en-US" altLang="ko-KR" sz="1200" b="0">
+                  <a:solidFill>
+                    <a:srgbClr val="A5D6FF"/>
+                  </a:solidFill>
+                  <a:effectLst/>
+                  <a:latin typeface="Consolas" panose="020B0609020204030204" pitchFamily="49" charset="0"/>
+                </a:rPr>
+                <a:t>com.mysql.cj.jdbc.Driver</a:t>
+              </a:r>
+              <a:endParaRPr lang="en-US" altLang="ko-KR" sz="1200" b="0">
+                <a:solidFill>
+                  <a:srgbClr val="BBBEBF"/>
+                </a:solidFill>
+                <a:effectLst/>
+                <a:latin typeface="Consolas" panose="020B0609020204030204" pitchFamily="49" charset="0"/>
+              </a:endParaRPr>
+            </a:p>
+            <a:p>
+              <a:pPr>
+                <a:lnSpc>
+                  <a:spcPts val="1425"/>
+                </a:lnSpc>
+                <a:buNone/>
+              </a:pPr>
+              <a:br>
+                <a:rPr lang="en-US" altLang="ko-KR" sz="1200" b="0">
+                  <a:solidFill>
+                    <a:srgbClr val="BBBEBF"/>
+                  </a:solidFill>
+                  <a:effectLst/>
+                  <a:latin typeface="Consolas" panose="020B0609020204030204" pitchFamily="49" charset="0"/>
+                </a:rPr>
+              </a:br>
+              <a:endParaRPr lang="en-US" altLang="ko-KR" sz="1200" b="0">
+                <a:solidFill>
+                  <a:srgbClr val="BBBEBF"/>
+                </a:solidFill>
+                <a:effectLst/>
+                <a:latin typeface="Consolas" panose="020B0609020204030204" pitchFamily="49" charset="0"/>
+              </a:endParaRPr>
+            </a:p>
+            <a:p>
+              <a:pPr>
+                <a:lnSpc>
+                  <a:spcPts val="1425"/>
+                </a:lnSpc>
+                <a:buNone/>
+              </a:pPr>
+              <a:r>
+                <a:rPr lang="en-US" altLang="ko-KR" sz="1200" b="0">
+                  <a:solidFill>
+                    <a:srgbClr val="BBBEBF"/>
+                  </a:solidFill>
+                  <a:effectLst/>
+                  <a:latin typeface="Consolas" panose="020B0609020204030204" pitchFamily="49" charset="0"/>
+                </a:rPr>
+                <a:t>    </a:t>
+              </a:r>
+              <a:r>
+                <a:rPr lang="en-US" altLang="ko-KR" sz="1200" b="0">
+                  <a:solidFill>
+                    <a:srgbClr val="7EE787"/>
+                  </a:solidFill>
+                  <a:effectLst/>
+                  <a:latin typeface="Consolas" panose="020B0609020204030204" pitchFamily="49" charset="0"/>
+                </a:rPr>
+                <a:t>jpa</a:t>
+              </a:r>
+              <a:r>
+                <a:rPr lang="en-US" altLang="ko-KR" sz="1200" b="0">
+                  <a:solidFill>
+                    <a:srgbClr val="BBBEBF"/>
+                  </a:solidFill>
+                  <a:effectLst/>
+                  <a:latin typeface="Consolas" panose="020B0609020204030204" pitchFamily="49" charset="0"/>
+                </a:rPr>
+                <a:t>:</a:t>
+              </a:r>
+            </a:p>
+            <a:p>
+              <a:pPr>
+                <a:lnSpc>
+                  <a:spcPts val="1425"/>
+                </a:lnSpc>
+                <a:buNone/>
+              </a:pPr>
+              <a:r>
+                <a:rPr lang="en-US" altLang="ko-KR" sz="1200" b="0">
+                  <a:solidFill>
+                    <a:srgbClr val="BBBEBF"/>
+                  </a:solidFill>
+                  <a:effectLst/>
+                  <a:latin typeface="Consolas" panose="020B0609020204030204" pitchFamily="49" charset="0"/>
+                </a:rPr>
+                <a:t>        </a:t>
+              </a:r>
+              <a:r>
+                <a:rPr lang="en-US" altLang="ko-KR" sz="1200" b="0">
+                  <a:solidFill>
+                    <a:srgbClr val="7EE787"/>
+                  </a:solidFill>
+                  <a:effectLst/>
+                  <a:latin typeface="Consolas" panose="020B0609020204030204" pitchFamily="49" charset="0"/>
+                </a:rPr>
+                <a:t>hibernate</a:t>
+              </a:r>
+              <a:r>
+                <a:rPr lang="en-US" altLang="ko-KR" sz="1200" b="0">
+                  <a:solidFill>
+                    <a:srgbClr val="BBBEBF"/>
+                  </a:solidFill>
+                  <a:effectLst/>
+                  <a:latin typeface="Consolas" panose="020B0609020204030204" pitchFamily="49" charset="0"/>
+                </a:rPr>
+                <a:t>:</a:t>
+              </a:r>
+            </a:p>
+            <a:p>
+              <a:pPr>
+                <a:lnSpc>
+                  <a:spcPts val="1425"/>
+                </a:lnSpc>
+                <a:buNone/>
+              </a:pPr>
+              <a:r>
+                <a:rPr lang="en-US" altLang="ko-KR" sz="1200" b="0">
+                  <a:solidFill>
+                    <a:srgbClr val="BBBEBF"/>
+                  </a:solidFill>
+                  <a:effectLst/>
+                  <a:latin typeface="Consolas" panose="020B0609020204030204" pitchFamily="49" charset="0"/>
+                </a:rPr>
+                <a:t>            </a:t>
+              </a:r>
+              <a:r>
+                <a:rPr lang="en-US" altLang="ko-KR" sz="1200" b="0">
+                  <a:solidFill>
+                    <a:srgbClr val="7EE787"/>
+                  </a:solidFill>
+                  <a:effectLst/>
+                  <a:latin typeface="Consolas" panose="020B0609020204030204" pitchFamily="49" charset="0"/>
+                </a:rPr>
+                <a:t>ddl-auto</a:t>
+              </a:r>
+              <a:r>
+                <a:rPr lang="en-US" altLang="ko-KR" sz="1200" b="0">
+                  <a:solidFill>
+                    <a:srgbClr val="BBBEBF"/>
+                  </a:solidFill>
+                  <a:effectLst/>
+                  <a:latin typeface="Consolas" panose="020B0609020204030204" pitchFamily="49" charset="0"/>
+                </a:rPr>
+                <a:t>: </a:t>
+              </a:r>
+              <a:r>
+                <a:rPr lang="en-US" altLang="ko-KR" sz="1200" b="0">
+                  <a:solidFill>
+                    <a:srgbClr val="A5D6FF"/>
+                  </a:solidFill>
+                  <a:effectLst/>
+                  <a:latin typeface="Consolas" panose="020B0609020204030204" pitchFamily="49" charset="0"/>
+                </a:rPr>
+                <a:t>update</a:t>
+              </a:r>
+              <a:endParaRPr lang="en-US" altLang="ko-KR" sz="1200" b="0">
+                <a:solidFill>
+                  <a:srgbClr val="BBBEBF"/>
+                </a:solidFill>
+                <a:effectLst/>
+                <a:latin typeface="Consolas" panose="020B0609020204030204" pitchFamily="49" charset="0"/>
+              </a:endParaRPr>
+            </a:p>
+            <a:p>
+              <a:pPr>
+                <a:lnSpc>
+                  <a:spcPts val="1425"/>
+                </a:lnSpc>
+                <a:buNone/>
+              </a:pPr>
+              <a:r>
+                <a:rPr lang="en-US" altLang="ko-KR" sz="1200" b="0">
+                  <a:solidFill>
+                    <a:srgbClr val="BBBEBF"/>
+                  </a:solidFill>
+                  <a:effectLst/>
+                  <a:latin typeface="Consolas" panose="020B0609020204030204" pitchFamily="49" charset="0"/>
+                </a:rPr>
+                <a:t>        </a:t>
+              </a:r>
+              <a:r>
+                <a:rPr lang="en-US" altLang="ko-KR" sz="1200" b="0">
+                  <a:solidFill>
+                    <a:srgbClr val="7EE787"/>
+                  </a:solidFill>
+                  <a:effectLst/>
+                  <a:latin typeface="Consolas" panose="020B0609020204030204" pitchFamily="49" charset="0"/>
+                </a:rPr>
+                <a:t>show-sql</a:t>
+              </a:r>
+              <a:r>
+                <a:rPr lang="en-US" altLang="ko-KR" sz="1200" b="0">
+                  <a:solidFill>
+                    <a:srgbClr val="BBBEBF"/>
+                  </a:solidFill>
+                  <a:effectLst/>
+                  <a:latin typeface="Consolas" panose="020B0609020204030204" pitchFamily="49" charset="0"/>
+                </a:rPr>
+                <a:t>: </a:t>
+              </a:r>
+              <a:r>
+                <a:rPr lang="en-US" altLang="ko-KR" sz="1200" b="0">
+                  <a:solidFill>
+                    <a:srgbClr val="569CD6"/>
+                  </a:solidFill>
+                  <a:effectLst/>
+                  <a:latin typeface="Consolas" panose="020B0609020204030204" pitchFamily="49" charset="0"/>
+                </a:rPr>
+                <a:t>true</a:t>
+              </a:r>
+              <a:endParaRPr lang="en-US" altLang="ko-KR" sz="1200" b="0">
+                <a:solidFill>
+                  <a:srgbClr val="BBBEBF"/>
+                </a:solidFill>
+                <a:effectLst/>
+                <a:latin typeface="Consolas" panose="020B0609020204030204" pitchFamily="49" charset="0"/>
+              </a:endParaRPr>
+            </a:p>
+            <a:p>
+              <a:pPr>
+                <a:lnSpc>
+                  <a:spcPts val="1425"/>
+                </a:lnSpc>
+                <a:buNone/>
+              </a:pPr>
+              <a:r>
+                <a:rPr lang="en-US" altLang="ko-KR" sz="1200" b="0">
+                  <a:solidFill>
+                    <a:srgbClr val="BBBEBF"/>
+                  </a:solidFill>
+                  <a:effectLst/>
+                  <a:latin typeface="Consolas" panose="020B0609020204030204" pitchFamily="49" charset="0"/>
+                </a:rPr>
+                <a:t>        </a:t>
+              </a:r>
+            </a:p>
+            <a:p>
+              <a:pPr>
+                <a:lnSpc>
+                  <a:spcPts val="1425"/>
+                </a:lnSpc>
+                <a:buNone/>
+              </a:pPr>
+              <a:r>
+                <a:rPr lang="en-US" altLang="ko-KR" sz="1200" b="0">
+                  <a:solidFill>
+                    <a:srgbClr val="BBBEBF"/>
+                  </a:solidFill>
+                  <a:effectLst/>
+                  <a:latin typeface="Consolas" panose="020B0609020204030204" pitchFamily="49" charset="0"/>
+                </a:rPr>
+                <a:t>    </a:t>
+              </a:r>
+              <a:r>
+                <a:rPr lang="en-US" altLang="ko-KR" sz="1200" b="0">
+                  <a:solidFill>
+                    <a:srgbClr val="7EE787"/>
+                  </a:solidFill>
+                  <a:effectLst/>
+                  <a:latin typeface="Consolas" panose="020B0609020204030204" pitchFamily="49" charset="0"/>
+                </a:rPr>
+                <a:t>application</a:t>
+              </a:r>
+              <a:r>
+                <a:rPr lang="en-US" altLang="ko-KR" sz="1200" b="0">
+                  <a:solidFill>
+                    <a:srgbClr val="BBBEBF"/>
+                  </a:solidFill>
+                  <a:effectLst/>
+                  <a:latin typeface="Consolas" panose="020B0609020204030204" pitchFamily="49" charset="0"/>
+                </a:rPr>
+                <a:t>:</a:t>
+              </a:r>
+            </a:p>
+            <a:p>
+              <a:pPr>
+                <a:lnSpc>
+                  <a:spcPts val="1425"/>
+                </a:lnSpc>
+                <a:buNone/>
+              </a:pPr>
+              <a:r>
+                <a:rPr lang="en-US" altLang="ko-KR" sz="1200" b="0">
+                  <a:solidFill>
+                    <a:srgbClr val="BBBEBF"/>
+                  </a:solidFill>
+                  <a:effectLst/>
+                  <a:latin typeface="Consolas" panose="020B0609020204030204" pitchFamily="49" charset="0"/>
+                </a:rPr>
+                <a:t>        </a:t>
+              </a:r>
+              <a:r>
+                <a:rPr lang="en-US" altLang="ko-KR" sz="1200" b="0">
+                  <a:solidFill>
+                    <a:srgbClr val="7EE787"/>
+                  </a:solidFill>
+                  <a:effectLst/>
+                  <a:latin typeface="Consolas" panose="020B0609020204030204" pitchFamily="49" charset="0"/>
+                </a:rPr>
+                <a:t>name</a:t>
+              </a:r>
+              <a:r>
+                <a:rPr lang="en-US" altLang="ko-KR" sz="1200" b="0">
+                  <a:solidFill>
+                    <a:srgbClr val="BBBEBF"/>
+                  </a:solidFill>
+                  <a:effectLst/>
+                  <a:latin typeface="Consolas" panose="020B0609020204030204" pitchFamily="49" charset="0"/>
+                </a:rPr>
+                <a:t>: </a:t>
+              </a:r>
+              <a:r>
+                <a:rPr lang="en-US" altLang="ko-KR" sz="1200" b="0">
+                  <a:solidFill>
+                    <a:srgbClr val="A5D6FF"/>
+                  </a:solidFill>
+                  <a:effectLst/>
+                  <a:latin typeface="Consolas" panose="020B0609020204030204" pitchFamily="49" charset="0"/>
+                </a:rPr>
+                <a:t>user-service</a:t>
+              </a:r>
+              <a:endParaRPr lang="en-US" altLang="ko-KR" sz="1200" b="0">
+                <a:solidFill>
+                  <a:srgbClr val="BBBEBF"/>
+                </a:solidFill>
+                <a:effectLst/>
+                <a:latin typeface="Consolas" panose="020B0609020204030204" pitchFamily="49" charset="0"/>
+              </a:endParaRPr>
+            </a:p>
+            <a:p>
+              <a:pPr>
+                <a:lnSpc>
+                  <a:spcPts val="1425"/>
+                </a:lnSpc>
+                <a:buNone/>
+              </a:pPr>
+              <a:br>
+                <a:rPr lang="en-US" altLang="ko-KR" sz="1200" b="0">
+                  <a:solidFill>
+                    <a:srgbClr val="BBBEBF"/>
+                  </a:solidFill>
+                  <a:effectLst/>
+                  <a:latin typeface="Consolas" panose="020B0609020204030204" pitchFamily="49" charset="0"/>
+                </a:rPr>
+              </a:br>
+              <a:endParaRPr lang="en-US" altLang="ko-KR" sz="1200" b="0">
+                <a:solidFill>
+                  <a:srgbClr val="BBBEBF"/>
+                </a:solidFill>
+                <a:effectLst/>
+                <a:latin typeface="Consolas" panose="020B0609020204030204" pitchFamily="49" charset="0"/>
+              </a:endParaRPr>
+            </a:p>
+            <a:p>
+              <a:pPr>
+                <a:lnSpc>
+                  <a:spcPts val="1425"/>
+                </a:lnSpc>
+                <a:buNone/>
+              </a:pPr>
+              <a:r>
+                <a:rPr lang="en-US" altLang="ko-KR" sz="1200" b="0">
+                  <a:solidFill>
+                    <a:srgbClr val="7EE787"/>
+                  </a:solidFill>
+                  <a:effectLst/>
+                  <a:latin typeface="Consolas" panose="020B0609020204030204" pitchFamily="49" charset="0"/>
+                </a:rPr>
+                <a:t>client</a:t>
+              </a:r>
+              <a:r>
+                <a:rPr lang="en-US" altLang="ko-KR" sz="1200" b="0">
+                  <a:solidFill>
+                    <a:srgbClr val="BBBEBF"/>
+                  </a:solidFill>
+                  <a:effectLst/>
+                  <a:latin typeface="Consolas" panose="020B0609020204030204" pitchFamily="49" charset="0"/>
+                </a:rPr>
+                <a:t>:</a:t>
+              </a:r>
+            </a:p>
+            <a:p>
+              <a:pPr>
+                <a:lnSpc>
+                  <a:spcPts val="1425"/>
+                </a:lnSpc>
+                <a:buNone/>
+              </a:pPr>
+              <a:r>
+                <a:rPr lang="en-US" altLang="ko-KR" sz="1200" b="0">
+                  <a:solidFill>
+                    <a:srgbClr val="BBBEBF"/>
+                  </a:solidFill>
+                  <a:effectLst/>
+                  <a:latin typeface="Consolas" panose="020B0609020204030204" pitchFamily="49" charset="0"/>
+                </a:rPr>
+                <a:t>    </a:t>
+              </a:r>
+              <a:r>
+                <a:rPr lang="en-US" altLang="ko-KR" sz="1200" b="0">
+                  <a:solidFill>
+                    <a:srgbClr val="7EE787"/>
+                  </a:solidFill>
+                  <a:effectLst/>
+                  <a:latin typeface="Consolas" panose="020B0609020204030204" pitchFamily="49" charset="0"/>
+                </a:rPr>
+                <a:t>point-service</a:t>
+              </a:r>
+              <a:r>
+                <a:rPr lang="en-US" altLang="ko-KR" sz="1200" b="0">
+                  <a:solidFill>
+                    <a:srgbClr val="BBBEBF"/>
+                  </a:solidFill>
+                  <a:effectLst/>
+                  <a:latin typeface="Consolas" panose="020B0609020204030204" pitchFamily="49" charset="0"/>
+                </a:rPr>
+                <a:t>:</a:t>
+              </a:r>
+            </a:p>
+            <a:p>
+              <a:pPr>
+                <a:lnSpc>
+                  <a:spcPts val="1425"/>
+                </a:lnSpc>
+                <a:buNone/>
+              </a:pPr>
+              <a:r>
+                <a:rPr lang="en-US" altLang="ko-KR" sz="1200" b="0">
+                  <a:solidFill>
+                    <a:srgbClr val="BBBEBF"/>
+                  </a:solidFill>
+                  <a:effectLst/>
+                  <a:latin typeface="Consolas" panose="020B0609020204030204" pitchFamily="49" charset="0"/>
+                </a:rPr>
+                <a:t>        </a:t>
+              </a:r>
+              <a:r>
+                <a:rPr lang="en-US" altLang="ko-KR" sz="1200" b="0">
+                  <a:solidFill>
+                    <a:srgbClr val="7EE787"/>
+                  </a:solidFill>
+                  <a:effectLst/>
+                  <a:latin typeface="Consolas" panose="020B0609020204030204" pitchFamily="49" charset="0"/>
+                </a:rPr>
+                <a:t>url</a:t>
+              </a:r>
+              <a:r>
+                <a:rPr lang="en-US" altLang="ko-KR" sz="1200" b="0">
+                  <a:solidFill>
+                    <a:srgbClr val="BBBEBF"/>
+                  </a:solidFill>
+                  <a:effectLst/>
+                  <a:latin typeface="Consolas" panose="020B0609020204030204" pitchFamily="49" charset="0"/>
+                </a:rPr>
+                <a:t>: </a:t>
+              </a:r>
+              <a:r>
+                <a:rPr lang="en-US" altLang="ko-KR" sz="1200" b="0">
+                  <a:solidFill>
+                    <a:srgbClr val="A5D6FF"/>
+                  </a:solidFill>
+                  <a:effectLst/>
+                  <a:latin typeface="Consolas" panose="020B0609020204030204" pitchFamily="49" charset="0"/>
+                </a:rPr>
+                <a:t>http://localhost:8082</a:t>
+              </a:r>
+              <a:endParaRPr lang="en-US" altLang="ko-KR" sz="1200" b="0">
+                <a:solidFill>
+                  <a:srgbClr val="BBBEBF"/>
+                </a:solidFill>
+                <a:effectLst/>
+                <a:latin typeface="Consolas" panose="020B0609020204030204" pitchFamily="49" charset="0"/>
+              </a:endParaRPr>
+            </a:p>
+          </p:txBody>
+        </p:sp>
+        <p:sp>
+          <p:nvSpPr>
+            <p:cNvPr id="5" name="직사각형 4">
+              <a:extLst>
+                <a:ext uri="{FF2B5EF4-FFF2-40B4-BE49-F238E27FC236}">
+                  <a16:creationId xmlns:a16="http://schemas.microsoft.com/office/drawing/2014/main" id="{54467E26-C454-A505-08EB-EECB90442AB1}"/>
+                </a:ext>
+              </a:extLst>
+            </p:cNvPr>
+            <p:cNvSpPr/>
+            <p:nvPr/>
+          </p:nvSpPr>
+          <p:spPr>
+            <a:xfrm>
+              <a:off x="3392424" y="5577840"/>
+              <a:ext cx="3035808" cy="640080"/>
+            </a:xfrm>
+            <a:prstGeom prst="rect">
+              <a:avLst/>
+            </a:prstGeom>
+            <a:noFill/>
+            <a:ln>
+              <a:solidFill>
+                <a:srgbClr val="FF0000"/>
+              </a:solidFill>
+            </a:ln>
+          </p:spPr>
+          <p:style>
+            <a:lnRef idx="2">
+              <a:schemeClr val="accent1">
+                <a:shade val="15000"/>
+              </a:schemeClr>
+            </a:lnRef>
+            <a:fillRef idx="1">
+              <a:schemeClr val="accent1"/>
+            </a:fillRef>
+            <a:effectRef idx="0">
+              <a:schemeClr val="accent1"/>
+            </a:effectRef>
+            <a:fontRef idx="minor">
+              <a:schemeClr val="lt1"/>
+            </a:fontRef>
+          </p:style>
+          <p:txBody>
+            <a:bodyPr rtlCol="0" anchor="ctr"/>
+            <a:lstStyle/>
+            <a:p>
+              <a:pPr algn="ctr"/>
+              <a:endParaRPr lang="ko-KR" altLang="en-US"/>
+            </a:p>
+          </p:txBody>
+        </p:sp>
+      </p:grpSp>
+    </p:spTree>
+    <p:extLst>
+      <p:ext uri="{BB962C8B-B14F-4D97-AF65-F5344CB8AC3E}">
+        <p14:creationId xmlns:p14="http://schemas.microsoft.com/office/powerpoint/2010/main" val="2639760869"/>
+      </p:ext>
+    </p:extLst>
+  </p:cSld>
+  <p:clrMapOvr>
+    <a:masterClrMapping/>
+  </p:clrMapOvr>
+</p:sld>
+</file>
+
+<file path=ppt/slides/slide13.xml><?xml version="1.0" encoding="utf-8"?>
+<p:sld xmlns:a="http://schemas.openxmlformats.org/drawingml/2006/main" xmlns:r="http://schemas.openxmlformats.org/officeDocument/2006/relationships" xmlns:p="http://schemas.openxmlformats.org/presentationml/2006/main">
+  <p:cSld>
+    <p:spTree>
+      <p:nvGrpSpPr>
+        <p:cNvPr id="1" name=""/>
+        <p:cNvGrpSpPr/>
+        <p:nvPr/>
+      </p:nvGrpSpPr>
+      <p:grpSpPr>
+        <a:xfrm>
+          <a:off x="0" y="0"/>
+          <a:ext cx="0" cy="0"/>
+          <a:chOff x="0" y="0"/>
+          <a:chExt cx="0" cy="0"/>
+        </a:xfrm>
+      </p:grpSpPr>
+      <p:sp>
+        <p:nvSpPr>
+          <p:cNvPr id="2" name="제목 1">
+            <a:extLst>
+              <a:ext uri="{FF2B5EF4-FFF2-40B4-BE49-F238E27FC236}">
+                <a16:creationId xmlns:a16="http://schemas.microsoft.com/office/drawing/2014/main" id="{648B416B-0392-8899-65C6-6C2BA554FCE9}"/>
+              </a:ext>
+            </a:extLst>
+          </p:cNvPr>
+          <p:cNvSpPr>
+            <a:spLocks noGrp="1"/>
+          </p:cNvSpPr>
+          <p:nvPr>
+            <p:ph type="title"/>
+          </p:nvPr>
+        </p:nvSpPr>
+        <p:spPr/>
+        <p:txBody>
+          <a:bodyPr>
+            <a:normAutofit/>
+          </a:bodyPr>
+          <a:lstStyle/>
+          <a:p>
+            <a:r>
+              <a:rPr lang="ko-KR" altLang="en-US" sz="4000"/>
+              <a:t>사용자 서비스 </a:t>
+            </a:r>
+            <a:r>
+              <a:rPr lang="en-US" altLang="ko-KR" sz="4000"/>
+              <a:t>- AddPointRequestDto </a:t>
+            </a:r>
+            <a:r>
+              <a:rPr lang="ko-KR" altLang="en-US" sz="4000"/>
+              <a:t>작성</a:t>
+            </a:r>
+          </a:p>
+        </p:txBody>
+      </p:sp>
+      <p:pic>
+        <p:nvPicPr>
+          <p:cNvPr id="4" name="그림 3">
+            <a:extLst>
+              <a:ext uri="{FF2B5EF4-FFF2-40B4-BE49-F238E27FC236}">
+                <a16:creationId xmlns:a16="http://schemas.microsoft.com/office/drawing/2014/main" id="{BA36982E-CB92-9CAB-570D-F20BA9F4902B}"/>
+              </a:ext>
+            </a:extLst>
+          </p:cNvPr>
+          <p:cNvPicPr>
+            <a:picLocks noChangeAspect="1"/>
+          </p:cNvPicPr>
+          <p:nvPr/>
+        </p:nvPicPr>
+        <p:blipFill>
+          <a:blip r:embed="rId2"/>
+          <a:stretch>
+            <a:fillRect/>
+          </a:stretch>
+        </p:blipFill>
+        <p:spPr>
+          <a:xfrm>
+            <a:off x="639899" y="1910268"/>
+            <a:ext cx="2591162" cy="3210373"/>
+          </a:xfrm>
+          <a:prstGeom prst="rect">
+            <a:avLst/>
+          </a:prstGeom>
+        </p:spPr>
+      </p:pic>
+      <p:sp>
+        <p:nvSpPr>
+          <p:cNvPr id="5" name="직사각형 4">
+            <a:extLst>
+              <a:ext uri="{FF2B5EF4-FFF2-40B4-BE49-F238E27FC236}">
+                <a16:creationId xmlns:a16="http://schemas.microsoft.com/office/drawing/2014/main" id="{A64FB67E-3C1B-4170-0EBD-A162934FB7D4}"/>
+              </a:ext>
+            </a:extLst>
+          </p:cNvPr>
+          <p:cNvSpPr/>
+          <p:nvPr/>
+        </p:nvSpPr>
+        <p:spPr>
+          <a:xfrm>
+            <a:off x="995164" y="4237104"/>
+            <a:ext cx="1583444" cy="252600"/>
+          </a:xfrm>
+          <a:prstGeom prst="rect">
+            <a:avLst/>
+          </a:prstGeom>
+          <a:noFill/>
+          <a:ln>
+            <a:solidFill>
+              <a:srgbClr val="FF0000"/>
+            </a:solidFill>
+          </a:ln>
+        </p:spPr>
+        <p:style>
+          <a:lnRef idx="2">
+            <a:schemeClr val="accent1">
+              <a:shade val="15000"/>
+            </a:schemeClr>
+          </a:lnRef>
+          <a:fillRef idx="1">
+            <a:schemeClr val="accent1"/>
+          </a:fillRef>
+          <a:effectRef idx="0">
+            <a:schemeClr val="accent1"/>
+          </a:effectRef>
+          <a:fontRef idx="minor">
+            <a:schemeClr val="lt1"/>
+          </a:fontRef>
+        </p:style>
+        <p:txBody>
+          <a:bodyPr rtlCol="0" anchor="ctr"/>
+          <a:lstStyle/>
+          <a:p>
+            <a:pPr algn="ctr"/>
+            <a:endParaRPr lang="ko-KR" altLang="en-US"/>
+          </a:p>
+        </p:txBody>
+      </p:sp>
+      <p:sp>
+        <p:nvSpPr>
+          <p:cNvPr id="7" name="TextBox 6">
+            <a:extLst>
+              <a:ext uri="{FF2B5EF4-FFF2-40B4-BE49-F238E27FC236}">
+                <a16:creationId xmlns:a16="http://schemas.microsoft.com/office/drawing/2014/main" id="{6BC7AF18-568D-5648-2BE1-89075A749525}"/>
+              </a:ext>
+            </a:extLst>
+          </p:cNvPr>
+          <p:cNvSpPr txBox="1"/>
+          <p:nvPr/>
+        </p:nvSpPr>
+        <p:spPr>
+          <a:xfrm>
+            <a:off x="3485742" y="1910268"/>
+            <a:ext cx="6094476" cy="3315395"/>
+          </a:xfrm>
+          <a:prstGeom prst="rect">
+            <a:avLst/>
+          </a:prstGeom>
+          <a:solidFill>
+            <a:schemeClr val="tx1"/>
+          </a:solidFill>
+        </p:spPr>
+        <p:txBody>
+          <a:bodyPr wrap="square">
+            <a:spAutoFit/>
+          </a:bodyPr>
+          <a:lstStyle/>
+          <a:p>
+            <a:pPr>
+              <a:lnSpc>
+                <a:spcPts val="1425"/>
+              </a:lnSpc>
+              <a:buNone/>
+            </a:pPr>
+            <a:r>
+              <a:rPr lang="en-US" altLang="ko-KR" sz="1100" b="0">
+                <a:solidFill>
+                  <a:srgbClr val="569CD6"/>
+                </a:solidFill>
+                <a:effectLst/>
+                <a:latin typeface="Consolas" panose="020B0609020204030204" pitchFamily="49" charset="0"/>
+              </a:rPr>
+              <a:t>public</a:t>
+            </a:r>
+            <a:r>
+              <a:rPr lang="en-US" altLang="ko-KR" sz="1100" b="0">
+                <a:solidFill>
+                  <a:srgbClr val="BBBEBF"/>
+                </a:solidFill>
+                <a:effectLst/>
+                <a:latin typeface="Consolas" panose="020B0609020204030204" pitchFamily="49" charset="0"/>
+              </a:rPr>
+              <a:t> </a:t>
+            </a:r>
+            <a:r>
+              <a:rPr lang="en-US" altLang="ko-KR" sz="1100" b="0">
+                <a:solidFill>
+                  <a:srgbClr val="569CD6"/>
+                </a:solidFill>
+                <a:effectLst/>
+                <a:latin typeface="Consolas" panose="020B0609020204030204" pitchFamily="49" charset="0"/>
+              </a:rPr>
+              <a:t>class</a:t>
+            </a:r>
+            <a:r>
+              <a:rPr lang="en-US" altLang="ko-KR" sz="1100" b="0">
+                <a:solidFill>
+                  <a:srgbClr val="BBBEBF"/>
+                </a:solidFill>
+                <a:effectLst/>
+                <a:latin typeface="Consolas" panose="020B0609020204030204" pitchFamily="49" charset="0"/>
+              </a:rPr>
+              <a:t> </a:t>
+            </a:r>
+            <a:r>
+              <a:rPr lang="en-US" altLang="ko-KR" sz="1100" b="0">
+                <a:solidFill>
+                  <a:srgbClr val="4EC9B0"/>
+                </a:solidFill>
+                <a:effectLst/>
+                <a:latin typeface="Consolas" panose="020B0609020204030204" pitchFamily="49" charset="0"/>
+              </a:rPr>
+              <a:t>AddPointRequestDto</a:t>
+            </a:r>
+            <a:r>
+              <a:rPr lang="en-US" altLang="ko-KR" sz="1100" b="0">
+                <a:solidFill>
+                  <a:srgbClr val="BBBEBF"/>
+                </a:solidFill>
+                <a:effectLst/>
+                <a:latin typeface="Consolas" panose="020B0609020204030204" pitchFamily="49" charset="0"/>
+              </a:rPr>
+              <a:t> {</a:t>
+            </a:r>
+          </a:p>
+          <a:p>
+            <a:pPr>
+              <a:lnSpc>
+                <a:spcPts val="1425"/>
+              </a:lnSpc>
+              <a:buNone/>
+            </a:pPr>
+            <a:r>
+              <a:rPr lang="en-US" altLang="ko-KR" sz="1100" b="0">
+                <a:solidFill>
+                  <a:srgbClr val="BBBEBF"/>
+                </a:solidFill>
+                <a:effectLst/>
+                <a:latin typeface="Consolas" panose="020B0609020204030204" pitchFamily="49" charset="0"/>
+              </a:rPr>
+              <a:t>    </a:t>
+            </a:r>
+            <a:r>
+              <a:rPr lang="en-US" altLang="ko-KR" sz="1100" b="0">
+                <a:solidFill>
+                  <a:srgbClr val="569CD6"/>
+                </a:solidFill>
+                <a:effectLst/>
+                <a:latin typeface="Consolas" panose="020B0609020204030204" pitchFamily="49" charset="0"/>
+              </a:rPr>
+              <a:t>private</a:t>
+            </a:r>
+            <a:r>
+              <a:rPr lang="en-US" altLang="ko-KR" sz="1100" b="0">
+                <a:solidFill>
+                  <a:srgbClr val="BBBEBF"/>
+                </a:solidFill>
+                <a:effectLst/>
+                <a:latin typeface="Consolas" panose="020B0609020204030204" pitchFamily="49" charset="0"/>
+              </a:rPr>
+              <a:t> </a:t>
+            </a:r>
+            <a:r>
+              <a:rPr lang="en-US" altLang="ko-KR" sz="1100" b="0">
+                <a:solidFill>
+                  <a:srgbClr val="4EC9B0"/>
+                </a:solidFill>
+                <a:effectLst/>
+                <a:latin typeface="Consolas" panose="020B0609020204030204" pitchFamily="49" charset="0"/>
+              </a:rPr>
+              <a:t>Long</a:t>
+            </a:r>
+            <a:r>
+              <a:rPr lang="en-US" altLang="ko-KR" sz="1100" b="0">
+                <a:solidFill>
+                  <a:srgbClr val="FFA657"/>
+                </a:solidFill>
+                <a:effectLst/>
+                <a:latin typeface="Consolas" panose="020B0609020204030204" pitchFamily="49" charset="0"/>
+              </a:rPr>
+              <a:t> </a:t>
+            </a:r>
+            <a:r>
+              <a:rPr lang="en-US" altLang="ko-KR" sz="1100" b="0">
+                <a:solidFill>
+                  <a:srgbClr val="C9D1D9"/>
+                </a:solidFill>
+                <a:effectLst/>
+                <a:latin typeface="Consolas" panose="020B0609020204030204" pitchFamily="49" charset="0"/>
+              </a:rPr>
+              <a:t>userId</a:t>
+            </a:r>
+            <a:r>
+              <a:rPr lang="en-US" altLang="ko-KR" sz="1100" b="0">
+                <a:solidFill>
+                  <a:srgbClr val="BBBEBF"/>
+                </a:solidFill>
+                <a:effectLst/>
+                <a:latin typeface="Consolas" panose="020B0609020204030204" pitchFamily="49" charset="0"/>
+              </a:rPr>
+              <a:t>;</a:t>
+            </a:r>
+          </a:p>
+          <a:p>
+            <a:pPr>
+              <a:lnSpc>
+                <a:spcPts val="1425"/>
+              </a:lnSpc>
+              <a:buNone/>
+            </a:pPr>
+            <a:r>
+              <a:rPr lang="en-US" altLang="ko-KR" sz="1100" b="0">
+                <a:solidFill>
+                  <a:srgbClr val="BBBEBF"/>
+                </a:solidFill>
+                <a:effectLst/>
+                <a:latin typeface="Consolas" panose="020B0609020204030204" pitchFamily="49" charset="0"/>
+              </a:rPr>
+              <a:t>    </a:t>
+            </a:r>
+            <a:r>
+              <a:rPr lang="en-US" altLang="ko-KR" sz="1100" b="0">
+                <a:solidFill>
+                  <a:srgbClr val="569CD6"/>
+                </a:solidFill>
+                <a:effectLst/>
+                <a:latin typeface="Consolas" panose="020B0609020204030204" pitchFamily="49" charset="0"/>
+              </a:rPr>
+              <a:t>private</a:t>
+            </a:r>
+            <a:r>
+              <a:rPr lang="en-US" altLang="ko-KR" sz="1100" b="0">
+                <a:solidFill>
+                  <a:srgbClr val="BBBEBF"/>
+                </a:solidFill>
+                <a:effectLst/>
+                <a:latin typeface="Consolas" panose="020B0609020204030204" pitchFamily="49" charset="0"/>
+              </a:rPr>
+              <a:t> </a:t>
+            </a:r>
+            <a:r>
+              <a:rPr lang="en-US" altLang="ko-KR" sz="1100" b="0">
+                <a:solidFill>
+                  <a:srgbClr val="4EC9B0"/>
+                </a:solidFill>
+                <a:effectLst/>
+                <a:latin typeface="Consolas" panose="020B0609020204030204" pitchFamily="49" charset="0"/>
+              </a:rPr>
+              <a:t>int</a:t>
+            </a:r>
+            <a:r>
+              <a:rPr lang="en-US" altLang="ko-KR" sz="1100" b="0">
+                <a:solidFill>
+                  <a:srgbClr val="FFA657"/>
+                </a:solidFill>
+                <a:effectLst/>
+                <a:latin typeface="Consolas" panose="020B0609020204030204" pitchFamily="49" charset="0"/>
+              </a:rPr>
+              <a:t> </a:t>
+            </a:r>
+            <a:r>
+              <a:rPr lang="en-US" altLang="ko-KR" sz="1100" b="0">
+                <a:solidFill>
+                  <a:srgbClr val="C9D1D9"/>
+                </a:solidFill>
+                <a:effectLst/>
+                <a:latin typeface="Consolas" panose="020B0609020204030204" pitchFamily="49" charset="0"/>
+              </a:rPr>
+              <a:t>amount</a:t>
+            </a:r>
+            <a:r>
+              <a:rPr lang="en-US" altLang="ko-KR" sz="1100" b="0">
+                <a:solidFill>
+                  <a:srgbClr val="BBBEBF"/>
+                </a:solidFill>
+                <a:effectLst/>
+                <a:latin typeface="Consolas" panose="020B0609020204030204" pitchFamily="49" charset="0"/>
+              </a:rPr>
+              <a:t>;</a:t>
+            </a:r>
+          </a:p>
+          <a:p>
+            <a:pPr>
+              <a:lnSpc>
+                <a:spcPts val="1425"/>
+              </a:lnSpc>
+              <a:buNone/>
+            </a:pPr>
+            <a:br>
+              <a:rPr lang="en-US" altLang="ko-KR" sz="1100" b="0">
+                <a:solidFill>
+                  <a:srgbClr val="BBBEBF"/>
+                </a:solidFill>
+                <a:effectLst/>
+                <a:latin typeface="Consolas" panose="020B0609020204030204" pitchFamily="49" charset="0"/>
+              </a:rPr>
+            </a:br>
+            <a:endParaRPr lang="en-US" altLang="ko-KR" sz="1100" b="0">
+              <a:solidFill>
+                <a:srgbClr val="BBBEBF"/>
+              </a:solidFill>
+              <a:effectLst/>
+              <a:latin typeface="Consolas" panose="020B0609020204030204" pitchFamily="49" charset="0"/>
+            </a:endParaRPr>
+          </a:p>
+          <a:p>
+            <a:pPr>
+              <a:lnSpc>
+                <a:spcPts val="1425"/>
+              </a:lnSpc>
+              <a:buNone/>
+            </a:pPr>
+            <a:r>
+              <a:rPr lang="en-US" altLang="ko-KR" sz="1100" b="0">
+                <a:solidFill>
+                  <a:srgbClr val="BBBEBF"/>
+                </a:solidFill>
+                <a:effectLst/>
+                <a:latin typeface="Consolas" panose="020B0609020204030204" pitchFamily="49" charset="0"/>
+              </a:rPr>
+              <a:t>    </a:t>
+            </a:r>
+            <a:r>
+              <a:rPr lang="en-US" altLang="ko-KR" sz="1100" b="0">
+                <a:solidFill>
+                  <a:srgbClr val="569CD6"/>
+                </a:solidFill>
+                <a:effectLst/>
+                <a:latin typeface="Consolas" panose="020B0609020204030204" pitchFamily="49" charset="0"/>
+              </a:rPr>
+              <a:t>public</a:t>
+            </a:r>
+            <a:r>
+              <a:rPr lang="en-US" altLang="ko-KR" sz="1100" b="0">
+                <a:solidFill>
+                  <a:srgbClr val="BBBEBF"/>
+                </a:solidFill>
+                <a:effectLst/>
+                <a:latin typeface="Consolas" panose="020B0609020204030204" pitchFamily="49" charset="0"/>
+              </a:rPr>
+              <a:t> </a:t>
+            </a:r>
+            <a:r>
+              <a:rPr lang="en-US" altLang="ko-KR" sz="1100" b="0">
+                <a:solidFill>
+                  <a:srgbClr val="D2A8FF"/>
+                </a:solidFill>
+                <a:effectLst/>
+                <a:latin typeface="Consolas" panose="020B0609020204030204" pitchFamily="49" charset="0"/>
+              </a:rPr>
+              <a:t>AddPointRequestDto</a:t>
+            </a:r>
+            <a:r>
+              <a:rPr lang="en-US" altLang="ko-KR" sz="1100" b="0">
+                <a:solidFill>
+                  <a:srgbClr val="BBBEBF"/>
+                </a:solidFill>
+                <a:effectLst/>
+                <a:latin typeface="Consolas" panose="020B0609020204030204" pitchFamily="49" charset="0"/>
+              </a:rPr>
+              <a:t>() {</a:t>
+            </a:r>
+          </a:p>
+          <a:p>
+            <a:pPr>
+              <a:lnSpc>
+                <a:spcPts val="1425"/>
+              </a:lnSpc>
+              <a:buNone/>
+            </a:pPr>
+            <a:r>
+              <a:rPr lang="en-US" altLang="ko-KR" sz="1100" b="0">
+                <a:solidFill>
+                  <a:srgbClr val="BBBEBF"/>
+                </a:solidFill>
+                <a:effectLst/>
+                <a:latin typeface="Consolas" panose="020B0609020204030204" pitchFamily="49" charset="0"/>
+              </a:rPr>
+              <a:t>    }</a:t>
+            </a:r>
+          </a:p>
+          <a:p>
+            <a:pPr>
+              <a:lnSpc>
+                <a:spcPts val="1425"/>
+              </a:lnSpc>
+              <a:buNone/>
+            </a:pPr>
+            <a:r>
+              <a:rPr lang="en-US" altLang="ko-KR" sz="1100" b="0">
+                <a:solidFill>
+                  <a:srgbClr val="BBBEBF"/>
+                </a:solidFill>
+                <a:effectLst/>
+                <a:latin typeface="Consolas" panose="020B0609020204030204" pitchFamily="49" charset="0"/>
+              </a:rPr>
+              <a:t>    </a:t>
+            </a:r>
+            <a:r>
+              <a:rPr lang="en-US" altLang="ko-KR" sz="1100" b="0">
+                <a:solidFill>
+                  <a:srgbClr val="569CD6"/>
+                </a:solidFill>
+                <a:effectLst/>
+                <a:latin typeface="Consolas" panose="020B0609020204030204" pitchFamily="49" charset="0"/>
+              </a:rPr>
+              <a:t>public</a:t>
+            </a:r>
+            <a:r>
+              <a:rPr lang="en-US" altLang="ko-KR" sz="1100" b="0">
+                <a:solidFill>
+                  <a:srgbClr val="BBBEBF"/>
+                </a:solidFill>
+                <a:effectLst/>
+                <a:latin typeface="Consolas" panose="020B0609020204030204" pitchFamily="49" charset="0"/>
+              </a:rPr>
+              <a:t> </a:t>
+            </a:r>
+            <a:r>
+              <a:rPr lang="en-US" altLang="ko-KR" sz="1100" b="0">
+                <a:solidFill>
+                  <a:srgbClr val="D2A8FF"/>
+                </a:solidFill>
+                <a:effectLst/>
+                <a:latin typeface="Consolas" panose="020B0609020204030204" pitchFamily="49" charset="0"/>
+              </a:rPr>
+              <a:t>AddPointRequestDto</a:t>
+            </a:r>
+            <a:r>
+              <a:rPr lang="en-US" altLang="ko-KR" sz="1100" b="0">
+                <a:solidFill>
+                  <a:srgbClr val="BBBEBF"/>
+                </a:solidFill>
+                <a:effectLst/>
+                <a:latin typeface="Consolas" panose="020B0609020204030204" pitchFamily="49" charset="0"/>
+              </a:rPr>
+              <a:t>(</a:t>
+            </a:r>
+            <a:r>
+              <a:rPr lang="en-US" altLang="ko-KR" sz="1100" b="0">
+                <a:solidFill>
+                  <a:srgbClr val="4EC9B0"/>
+                </a:solidFill>
+                <a:effectLst/>
+                <a:latin typeface="Consolas" panose="020B0609020204030204" pitchFamily="49" charset="0"/>
+              </a:rPr>
+              <a:t>Long</a:t>
+            </a:r>
+            <a:r>
+              <a:rPr lang="en-US" altLang="ko-KR" sz="1100" b="0">
+                <a:solidFill>
+                  <a:srgbClr val="BBBEBF"/>
+                </a:solidFill>
+                <a:effectLst/>
+                <a:latin typeface="Consolas" panose="020B0609020204030204" pitchFamily="49" charset="0"/>
+              </a:rPr>
+              <a:t> </a:t>
+            </a:r>
+            <a:r>
+              <a:rPr lang="en-US" altLang="ko-KR" sz="1100" b="0">
+                <a:solidFill>
+                  <a:srgbClr val="FFA657"/>
+                </a:solidFill>
+                <a:effectLst/>
+                <a:latin typeface="Consolas" panose="020B0609020204030204" pitchFamily="49" charset="0"/>
+              </a:rPr>
+              <a:t>userId</a:t>
+            </a:r>
+            <a:r>
+              <a:rPr lang="en-US" altLang="ko-KR" sz="1100" b="0">
+                <a:solidFill>
+                  <a:srgbClr val="BBBEBF"/>
+                </a:solidFill>
+                <a:effectLst/>
+                <a:latin typeface="Consolas" panose="020B0609020204030204" pitchFamily="49" charset="0"/>
+              </a:rPr>
+              <a:t>, </a:t>
+            </a:r>
+            <a:r>
+              <a:rPr lang="en-US" altLang="ko-KR" sz="1100" b="0">
+                <a:solidFill>
+                  <a:srgbClr val="4EC9B0"/>
+                </a:solidFill>
+                <a:effectLst/>
+                <a:latin typeface="Consolas" panose="020B0609020204030204" pitchFamily="49" charset="0"/>
+              </a:rPr>
+              <a:t>int</a:t>
+            </a:r>
+            <a:r>
+              <a:rPr lang="en-US" altLang="ko-KR" sz="1100" b="0">
+                <a:solidFill>
+                  <a:srgbClr val="BBBEBF"/>
+                </a:solidFill>
+                <a:effectLst/>
+                <a:latin typeface="Consolas" panose="020B0609020204030204" pitchFamily="49" charset="0"/>
+              </a:rPr>
+              <a:t> </a:t>
+            </a:r>
+            <a:r>
+              <a:rPr lang="en-US" altLang="ko-KR" sz="1100" b="0">
+                <a:solidFill>
+                  <a:srgbClr val="FFA657"/>
+                </a:solidFill>
+                <a:effectLst/>
+                <a:latin typeface="Consolas" panose="020B0609020204030204" pitchFamily="49" charset="0"/>
+              </a:rPr>
+              <a:t>amount</a:t>
+            </a:r>
+            <a:r>
+              <a:rPr lang="en-US" altLang="ko-KR" sz="1100" b="0">
+                <a:solidFill>
+                  <a:srgbClr val="BBBEBF"/>
+                </a:solidFill>
+                <a:effectLst/>
+                <a:latin typeface="Consolas" panose="020B0609020204030204" pitchFamily="49" charset="0"/>
+              </a:rPr>
+              <a:t>) {</a:t>
+            </a:r>
+          </a:p>
+          <a:p>
+            <a:pPr>
+              <a:lnSpc>
+                <a:spcPts val="1425"/>
+              </a:lnSpc>
+              <a:buNone/>
+            </a:pPr>
+            <a:r>
+              <a:rPr lang="en-US" altLang="ko-KR" sz="1100" b="0">
+                <a:solidFill>
+                  <a:srgbClr val="BBBEBF"/>
+                </a:solidFill>
+                <a:effectLst/>
+                <a:latin typeface="Consolas" panose="020B0609020204030204" pitchFamily="49" charset="0"/>
+              </a:rPr>
+              <a:t>        </a:t>
+            </a:r>
+            <a:r>
+              <a:rPr lang="en-US" altLang="ko-KR" sz="1100" b="0">
+                <a:solidFill>
+                  <a:srgbClr val="79C0FF"/>
+                </a:solidFill>
+                <a:effectLst/>
+                <a:latin typeface="Consolas" panose="020B0609020204030204" pitchFamily="49" charset="0"/>
+              </a:rPr>
+              <a:t>this</a:t>
+            </a:r>
+            <a:r>
+              <a:rPr lang="en-US" altLang="ko-KR" sz="1100" b="0">
+                <a:solidFill>
+                  <a:srgbClr val="BBBEBF"/>
+                </a:solidFill>
+                <a:effectLst/>
+                <a:latin typeface="Consolas" panose="020B0609020204030204" pitchFamily="49" charset="0"/>
+              </a:rPr>
+              <a:t>.</a:t>
+            </a:r>
+            <a:r>
+              <a:rPr lang="en-US" altLang="ko-KR" sz="1100" b="0">
+                <a:solidFill>
+                  <a:srgbClr val="C9D1D9"/>
+                </a:solidFill>
+                <a:effectLst/>
+                <a:latin typeface="Consolas" panose="020B0609020204030204" pitchFamily="49" charset="0"/>
+              </a:rPr>
+              <a:t>userId</a:t>
+            </a:r>
+            <a:r>
+              <a:rPr lang="en-US" altLang="ko-KR" sz="1100" b="0">
+                <a:solidFill>
+                  <a:srgbClr val="BBBEBF"/>
+                </a:solidFill>
+                <a:effectLst/>
+                <a:latin typeface="Consolas" panose="020B0609020204030204" pitchFamily="49" charset="0"/>
+              </a:rPr>
+              <a:t> </a:t>
+            </a:r>
+            <a:r>
+              <a:rPr lang="en-US" altLang="ko-KR" sz="1100" b="0">
+                <a:solidFill>
+                  <a:srgbClr val="D4D4D4"/>
+                </a:solidFill>
+                <a:effectLst/>
+                <a:latin typeface="Consolas" panose="020B0609020204030204" pitchFamily="49" charset="0"/>
+              </a:rPr>
+              <a:t>=</a:t>
+            </a:r>
+            <a:r>
+              <a:rPr lang="en-US" altLang="ko-KR" sz="1100" b="0">
+                <a:solidFill>
+                  <a:srgbClr val="BBBEBF"/>
+                </a:solidFill>
+                <a:effectLst/>
+                <a:latin typeface="Consolas" panose="020B0609020204030204" pitchFamily="49" charset="0"/>
+              </a:rPr>
+              <a:t> </a:t>
+            </a:r>
+            <a:r>
+              <a:rPr lang="en-US" altLang="ko-KR" sz="1100" b="0">
+                <a:solidFill>
+                  <a:srgbClr val="FFA657"/>
+                </a:solidFill>
+                <a:effectLst/>
+                <a:latin typeface="Consolas" panose="020B0609020204030204" pitchFamily="49" charset="0"/>
+              </a:rPr>
+              <a:t>userId</a:t>
+            </a:r>
+            <a:r>
+              <a:rPr lang="en-US" altLang="ko-KR" sz="1100" b="0">
+                <a:solidFill>
+                  <a:srgbClr val="BBBEBF"/>
+                </a:solidFill>
+                <a:effectLst/>
+                <a:latin typeface="Consolas" panose="020B0609020204030204" pitchFamily="49" charset="0"/>
+              </a:rPr>
+              <a:t>;</a:t>
+            </a:r>
+          </a:p>
+          <a:p>
+            <a:pPr>
+              <a:lnSpc>
+                <a:spcPts val="1425"/>
+              </a:lnSpc>
+              <a:buNone/>
+            </a:pPr>
+            <a:r>
+              <a:rPr lang="en-US" altLang="ko-KR" sz="1100" b="0">
+                <a:solidFill>
+                  <a:srgbClr val="BBBEBF"/>
+                </a:solidFill>
+                <a:effectLst/>
+                <a:latin typeface="Consolas" panose="020B0609020204030204" pitchFamily="49" charset="0"/>
+              </a:rPr>
+              <a:t>        </a:t>
+            </a:r>
+            <a:r>
+              <a:rPr lang="en-US" altLang="ko-KR" sz="1100" b="0">
+                <a:solidFill>
+                  <a:srgbClr val="79C0FF"/>
+                </a:solidFill>
+                <a:effectLst/>
+                <a:latin typeface="Consolas" panose="020B0609020204030204" pitchFamily="49" charset="0"/>
+              </a:rPr>
+              <a:t>this</a:t>
+            </a:r>
+            <a:r>
+              <a:rPr lang="en-US" altLang="ko-KR" sz="1100" b="0">
+                <a:solidFill>
+                  <a:srgbClr val="BBBEBF"/>
+                </a:solidFill>
+                <a:effectLst/>
+                <a:latin typeface="Consolas" panose="020B0609020204030204" pitchFamily="49" charset="0"/>
+              </a:rPr>
+              <a:t>.</a:t>
+            </a:r>
+            <a:r>
+              <a:rPr lang="en-US" altLang="ko-KR" sz="1100" b="0">
+                <a:solidFill>
+                  <a:srgbClr val="C9D1D9"/>
+                </a:solidFill>
+                <a:effectLst/>
+                <a:latin typeface="Consolas" panose="020B0609020204030204" pitchFamily="49" charset="0"/>
+              </a:rPr>
+              <a:t>amount</a:t>
+            </a:r>
+            <a:r>
+              <a:rPr lang="en-US" altLang="ko-KR" sz="1100" b="0">
+                <a:solidFill>
+                  <a:srgbClr val="BBBEBF"/>
+                </a:solidFill>
+                <a:effectLst/>
+                <a:latin typeface="Consolas" panose="020B0609020204030204" pitchFamily="49" charset="0"/>
+              </a:rPr>
+              <a:t> </a:t>
+            </a:r>
+            <a:r>
+              <a:rPr lang="en-US" altLang="ko-KR" sz="1100" b="0">
+                <a:solidFill>
+                  <a:srgbClr val="D4D4D4"/>
+                </a:solidFill>
+                <a:effectLst/>
+                <a:latin typeface="Consolas" panose="020B0609020204030204" pitchFamily="49" charset="0"/>
+              </a:rPr>
+              <a:t>=</a:t>
+            </a:r>
+            <a:r>
+              <a:rPr lang="en-US" altLang="ko-KR" sz="1100" b="0">
+                <a:solidFill>
+                  <a:srgbClr val="BBBEBF"/>
+                </a:solidFill>
+                <a:effectLst/>
+                <a:latin typeface="Consolas" panose="020B0609020204030204" pitchFamily="49" charset="0"/>
+              </a:rPr>
+              <a:t> </a:t>
+            </a:r>
+            <a:r>
+              <a:rPr lang="en-US" altLang="ko-KR" sz="1100" b="0">
+                <a:solidFill>
+                  <a:srgbClr val="FFA657"/>
+                </a:solidFill>
+                <a:effectLst/>
+                <a:latin typeface="Consolas" panose="020B0609020204030204" pitchFamily="49" charset="0"/>
+              </a:rPr>
+              <a:t>amount</a:t>
+            </a:r>
+            <a:r>
+              <a:rPr lang="en-US" altLang="ko-KR" sz="1100" b="0">
+                <a:solidFill>
+                  <a:srgbClr val="BBBEBF"/>
+                </a:solidFill>
+                <a:effectLst/>
+                <a:latin typeface="Consolas" panose="020B0609020204030204" pitchFamily="49" charset="0"/>
+              </a:rPr>
+              <a:t>;</a:t>
+            </a:r>
+          </a:p>
+          <a:p>
+            <a:pPr>
+              <a:lnSpc>
+                <a:spcPts val="1425"/>
+              </a:lnSpc>
+              <a:buNone/>
+            </a:pPr>
+            <a:r>
+              <a:rPr lang="en-US" altLang="ko-KR" sz="1100" b="0">
+                <a:solidFill>
+                  <a:srgbClr val="BBBEBF"/>
+                </a:solidFill>
+                <a:effectLst/>
+                <a:latin typeface="Consolas" panose="020B0609020204030204" pitchFamily="49" charset="0"/>
+              </a:rPr>
+              <a:t>    }</a:t>
+            </a:r>
+          </a:p>
+          <a:p>
+            <a:pPr>
+              <a:lnSpc>
+                <a:spcPts val="1425"/>
+              </a:lnSpc>
+              <a:buNone/>
+            </a:pPr>
+            <a:r>
+              <a:rPr lang="en-US" altLang="ko-KR" sz="1100" b="0">
+                <a:solidFill>
+                  <a:srgbClr val="BBBEBF"/>
+                </a:solidFill>
+                <a:effectLst/>
+                <a:latin typeface="Consolas" panose="020B0609020204030204" pitchFamily="49" charset="0"/>
+              </a:rPr>
+              <a:t>    </a:t>
+            </a:r>
+            <a:r>
+              <a:rPr lang="en-US" altLang="ko-KR" sz="1100" b="0">
+                <a:solidFill>
+                  <a:srgbClr val="569CD6"/>
+                </a:solidFill>
+                <a:effectLst/>
+                <a:latin typeface="Consolas" panose="020B0609020204030204" pitchFamily="49" charset="0"/>
+              </a:rPr>
+              <a:t>public</a:t>
+            </a:r>
+            <a:r>
+              <a:rPr lang="en-US" altLang="ko-KR" sz="1100" b="0">
+                <a:solidFill>
+                  <a:srgbClr val="BBBEBF"/>
+                </a:solidFill>
+                <a:effectLst/>
+                <a:latin typeface="Consolas" panose="020B0609020204030204" pitchFamily="49" charset="0"/>
+              </a:rPr>
+              <a:t> </a:t>
+            </a:r>
+            <a:r>
+              <a:rPr lang="en-US" altLang="ko-KR" sz="1100" b="0">
+                <a:solidFill>
+                  <a:srgbClr val="4EC9B0"/>
+                </a:solidFill>
+                <a:effectLst/>
+                <a:latin typeface="Consolas" panose="020B0609020204030204" pitchFamily="49" charset="0"/>
+              </a:rPr>
+              <a:t>Long</a:t>
+            </a:r>
+            <a:r>
+              <a:rPr lang="en-US" altLang="ko-KR" sz="1100" b="0">
+                <a:solidFill>
+                  <a:srgbClr val="BBBEBF"/>
+                </a:solidFill>
+                <a:effectLst/>
+                <a:latin typeface="Consolas" panose="020B0609020204030204" pitchFamily="49" charset="0"/>
+              </a:rPr>
+              <a:t> </a:t>
+            </a:r>
+            <a:r>
+              <a:rPr lang="en-US" altLang="ko-KR" sz="1100" b="0">
+                <a:solidFill>
+                  <a:srgbClr val="D2A8FF"/>
+                </a:solidFill>
+                <a:effectLst/>
+                <a:latin typeface="Consolas" panose="020B0609020204030204" pitchFamily="49" charset="0"/>
+              </a:rPr>
+              <a:t>getUserId</a:t>
+            </a:r>
+            <a:r>
+              <a:rPr lang="en-US" altLang="ko-KR" sz="1100" b="0">
+                <a:solidFill>
+                  <a:srgbClr val="BBBEBF"/>
+                </a:solidFill>
+                <a:effectLst/>
+                <a:latin typeface="Consolas" panose="020B0609020204030204" pitchFamily="49" charset="0"/>
+              </a:rPr>
+              <a:t>() {</a:t>
+            </a:r>
+          </a:p>
+          <a:p>
+            <a:pPr>
+              <a:lnSpc>
+                <a:spcPts val="1425"/>
+              </a:lnSpc>
+              <a:buNone/>
+            </a:pPr>
+            <a:r>
+              <a:rPr lang="en-US" altLang="ko-KR" sz="1100" b="0">
+                <a:solidFill>
+                  <a:srgbClr val="BBBEBF"/>
+                </a:solidFill>
+                <a:effectLst/>
+                <a:latin typeface="Consolas" panose="020B0609020204030204" pitchFamily="49" charset="0"/>
+              </a:rPr>
+              <a:t>        </a:t>
+            </a:r>
+            <a:r>
+              <a:rPr lang="en-US" altLang="ko-KR" sz="1100" b="0">
+                <a:solidFill>
+                  <a:srgbClr val="C586C0"/>
+                </a:solidFill>
+                <a:effectLst/>
+                <a:latin typeface="Consolas" panose="020B0609020204030204" pitchFamily="49" charset="0"/>
+              </a:rPr>
+              <a:t>return</a:t>
+            </a:r>
+            <a:r>
+              <a:rPr lang="en-US" altLang="ko-KR" sz="1100" b="0">
+                <a:solidFill>
+                  <a:srgbClr val="BBBEBF"/>
+                </a:solidFill>
+                <a:effectLst/>
+                <a:latin typeface="Consolas" panose="020B0609020204030204" pitchFamily="49" charset="0"/>
+              </a:rPr>
+              <a:t> </a:t>
+            </a:r>
+            <a:r>
+              <a:rPr lang="en-US" altLang="ko-KR" sz="1100" b="0">
+                <a:solidFill>
+                  <a:srgbClr val="C9D1D9"/>
+                </a:solidFill>
+                <a:effectLst/>
+                <a:latin typeface="Consolas" panose="020B0609020204030204" pitchFamily="49" charset="0"/>
+              </a:rPr>
+              <a:t>userId</a:t>
+            </a:r>
+            <a:r>
+              <a:rPr lang="en-US" altLang="ko-KR" sz="1100" b="0">
+                <a:solidFill>
+                  <a:srgbClr val="BBBEBF"/>
+                </a:solidFill>
+                <a:effectLst/>
+                <a:latin typeface="Consolas" panose="020B0609020204030204" pitchFamily="49" charset="0"/>
+              </a:rPr>
+              <a:t>;</a:t>
+            </a:r>
+          </a:p>
+          <a:p>
+            <a:pPr>
+              <a:lnSpc>
+                <a:spcPts val="1425"/>
+              </a:lnSpc>
+              <a:buNone/>
+            </a:pPr>
+            <a:r>
+              <a:rPr lang="en-US" altLang="ko-KR" sz="1100" b="0">
+                <a:solidFill>
+                  <a:srgbClr val="BBBEBF"/>
+                </a:solidFill>
+                <a:effectLst/>
+                <a:latin typeface="Consolas" panose="020B0609020204030204" pitchFamily="49" charset="0"/>
+              </a:rPr>
+              <a:t>    }</a:t>
+            </a:r>
+          </a:p>
+          <a:p>
+            <a:pPr>
+              <a:lnSpc>
+                <a:spcPts val="1425"/>
+              </a:lnSpc>
+              <a:buNone/>
+            </a:pPr>
+            <a:r>
+              <a:rPr lang="en-US" altLang="ko-KR" sz="1100" b="0">
+                <a:solidFill>
+                  <a:srgbClr val="BBBEBF"/>
+                </a:solidFill>
+                <a:effectLst/>
+                <a:latin typeface="Consolas" panose="020B0609020204030204" pitchFamily="49" charset="0"/>
+              </a:rPr>
+              <a:t>    </a:t>
+            </a:r>
+            <a:r>
+              <a:rPr lang="en-US" altLang="ko-KR" sz="1100" b="0">
+                <a:solidFill>
+                  <a:srgbClr val="569CD6"/>
+                </a:solidFill>
+                <a:effectLst/>
+                <a:latin typeface="Consolas" panose="020B0609020204030204" pitchFamily="49" charset="0"/>
+              </a:rPr>
+              <a:t>public</a:t>
+            </a:r>
+            <a:r>
+              <a:rPr lang="en-US" altLang="ko-KR" sz="1100" b="0">
+                <a:solidFill>
+                  <a:srgbClr val="BBBEBF"/>
+                </a:solidFill>
+                <a:effectLst/>
+                <a:latin typeface="Consolas" panose="020B0609020204030204" pitchFamily="49" charset="0"/>
+              </a:rPr>
+              <a:t> </a:t>
+            </a:r>
+            <a:r>
+              <a:rPr lang="en-US" altLang="ko-KR" sz="1100" b="0">
+                <a:solidFill>
+                  <a:srgbClr val="4EC9B0"/>
+                </a:solidFill>
+                <a:effectLst/>
+                <a:latin typeface="Consolas" panose="020B0609020204030204" pitchFamily="49" charset="0"/>
+              </a:rPr>
+              <a:t>int</a:t>
+            </a:r>
+            <a:r>
+              <a:rPr lang="en-US" altLang="ko-KR" sz="1100" b="0">
+                <a:solidFill>
+                  <a:srgbClr val="BBBEBF"/>
+                </a:solidFill>
+                <a:effectLst/>
+                <a:latin typeface="Consolas" panose="020B0609020204030204" pitchFamily="49" charset="0"/>
+              </a:rPr>
+              <a:t> </a:t>
+            </a:r>
+            <a:r>
+              <a:rPr lang="en-US" altLang="ko-KR" sz="1100" b="0">
+                <a:solidFill>
+                  <a:srgbClr val="D2A8FF"/>
+                </a:solidFill>
+                <a:effectLst/>
+                <a:latin typeface="Consolas" panose="020B0609020204030204" pitchFamily="49" charset="0"/>
+              </a:rPr>
+              <a:t>getAmount</a:t>
+            </a:r>
+            <a:r>
+              <a:rPr lang="en-US" altLang="ko-KR" sz="1100" b="0">
+                <a:solidFill>
+                  <a:srgbClr val="BBBEBF"/>
+                </a:solidFill>
+                <a:effectLst/>
+                <a:latin typeface="Consolas" panose="020B0609020204030204" pitchFamily="49" charset="0"/>
+              </a:rPr>
+              <a:t>() {</a:t>
+            </a:r>
+          </a:p>
+          <a:p>
+            <a:pPr>
+              <a:lnSpc>
+                <a:spcPts val="1425"/>
+              </a:lnSpc>
+              <a:buNone/>
+            </a:pPr>
+            <a:r>
+              <a:rPr lang="en-US" altLang="ko-KR" sz="1100" b="0">
+                <a:solidFill>
+                  <a:srgbClr val="BBBEBF"/>
+                </a:solidFill>
+                <a:effectLst/>
+                <a:latin typeface="Consolas" panose="020B0609020204030204" pitchFamily="49" charset="0"/>
+              </a:rPr>
+              <a:t>        </a:t>
+            </a:r>
+            <a:r>
+              <a:rPr lang="en-US" altLang="ko-KR" sz="1100" b="0">
+                <a:solidFill>
+                  <a:srgbClr val="C586C0"/>
+                </a:solidFill>
+                <a:effectLst/>
+                <a:latin typeface="Consolas" panose="020B0609020204030204" pitchFamily="49" charset="0"/>
+              </a:rPr>
+              <a:t>return</a:t>
+            </a:r>
+            <a:r>
+              <a:rPr lang="en-US" altLang="ko-KR" sz="1100" b="0">
+                <a:solidFill>
+                  <a:srgbClr val="BBBEBF"/>
+                </a:solidFill>
+                <a:effectLst/>
+                <a:latin typeface="Consolas" panose="020B0609020204030204" pitchFamily="49" charset="0"/>
+              </a:rPr>
+              <a:t> </a:t>
+            </a:r>
+            <a:r>
+              <a:rPr lang="en-US" altLang="ko-KR" sz="1100" b="0">
+                <a:solidFill>
+                  <a:srgbClr val="C9D1D9"/>
+                </a:solidFill>
+                <a:effectLst/>
+                <a:latin typeface="Consolas" panose="020B0609020204030204" pitchFamily="49" charset="0"/>
+              </a:rPr>
+              <a:t>amount</a:t>
+            </a:r>
+            <a:r>
+              <a:rPr lang="en-US" altLang="ko-KR" sz="1100" b="0">
+                <a:solidFill>
+                  <a:srgbClr val="BBBEBF"/>
+                </a:solidFill>
+                <a:effectLst/>
+                <a:latin typeface="Consolas" panose="020B0609020204030204" pitchFamily="49" charset="0"/>
+              </a:rPr>
+              <a:t>;</a:t>
+            </a:r>
+          </a:p>
+          <a:p>
+            <a:pPr>
+              <a:lnSpc>
+                <a:spcPts val="1425"/>
+              </a:lnSpc>
+              <a:buNone/>
+            </a:pPr>
+            <a:r>
+              <a:rPr lang="en-US" altLang="ko-KR" sz="1100" b="0">
+                <a:solidFill>
+                  <a:srgbClr val="BBBEBF"/>
+                </a:solidFill>
+                <a:effectLst/>
+                <a:latin typeface="Consolas" panose="020B0609020204030204" pitchFamily="49" charset="0"/>
+              </a:rPr>
+              <a:t>    }</a:t>
+            </a:r>
+          </a:p>
+          <a:p>
+            <a:pPr>
+              <a:lnSpc>
+                <a:spcPts val="1425"/>
+              </a:lnSpc>
+              <a:buNone/>
+            </a:pPr>
+            <a:r>
+              <a:rPr lang="en-US" altLang="ko-KR" sz="1100" b="0">
+                <a:solidFill>
+                  <a:srgbClr val="BBBEBF"/>
+                </a:solidFill>
+                <a:effectLst/>
+                <a:latin typeface="Consolas" panose="020B0609020204030204" pitchFamily="49" charset="0"/>
+              </a:rPr>
+              <a:t>}</a:t>
+            </a:r>
+          </a:p>
+        </p:txBody>
+      </p:sp>
+    </p:spTree>
+    <p:extLst>
+      <p:ext uri="{BB962C8B-B14F-4D97-AF65-F5344CB8AC3E}">
+        <p14:creationId xmlns:p14="http://schemas.microsoft.com/office/powerpoint/2010/main" val="3017270320"/>
+      </p:ext>
+    </p:extLst>
+  </p:cSld>
+  <p:clrMapOvr>
+    <a:masterClrMapping/>
+  </p:clrMapOvr>
+</p:sld>
+</file>
+
+<file path=ppt/slides/slide14.xml><?xml version="1.0" encoding="utf-8"?>
+<p:sld xmlns:a="http://schemas.openxmlformats.org/drawingml/2006/main" xmlns:r="http://schemas.openxmlformats.org/officeDocument/2006/relationships" xmlns:p="http://schemas.openxmlformats.org/presentationml/2006/main">
+  <p:cSld>
+    <p:spTree>
+      <p:nvGrpSpPr>
+        <p:cNvPr id="1" name=""/>
+        <p:cNvGrpSpPr/>
+        <p:nvPr/>
+      </p:nvGrpSpPr>
+      <p:grpSpPr>
+        <a:xfrm>
+          <a:off x="0" y="0"/>
+          <a:ext cx="0" cy="0"/>
+          <a:chOff x="0" y="0"/>
+          <a:chExt cx="0" cy="0"/>
+        </a:xfrm>
+      </p:grpSpPr>
+      <p:sp>
+        <p:nvSpPr>
+          <p:cNvPr id="2" name="제목 1">
+            <a:extLst>
+              <a:ext uri="{FF2B5EF4-FFF2-40B4-BE49-F238E27FC236}">
+                <a16:creationId xmlns:a16="http://schemas.microsoft.com/office/drawing/2014/main" id="{360AB1F5-995D-D0A3-A596-A81054309923}"/>
+              </a:ext>
+            </a:extLst>
+          </p:cNvPr>
+          <p:cNvSpPr>
+            <a:spLocks noGrp="1"/>
+          </p:cNvSpPr>
+          <p:nvPr>
+            <p:ph type="title"/>
+          </p:nvPr>
+        </p:nvSpPr>
+        <p:spPr/>
+        <p:txBody>
+          <a:bodyPr>
+            <a:normAutofit/>
+          </a:bodyPr>
+          <a:lstStyle/>
+          <a:p>
+            <a:r>
+              <a:rPr lang="ko-KR" altLang="en-US" sz="4000"/>
+              <a:t>사용자 서비스 </a:t>
+            </a:r>
+            <a:r>
+              <a:rPr lang="en-US" altLang="ko-KR" sz="4000"/>
+              <a:t>– </a:t>
+            </a:r>
+            <a:r>
+              <a:rPr lang="ko-KR" altLang="en-US" sz="4000"/>
+              <a:t>포인트 추가 요청 작성</a:t>
+            </a:r>
+          </a:p>
+        </p:txBody>
+      </p:sp>
+      <p:grpSp>
+        <p:nvGrpSpPr>
+          <p:cNvPr id="5" name="그룹 4">
+            <a:extLst>
+              <a:ext uri="{FF2B5EF4-FFF2-40B4-BE49-F238E27FC236}">
+                <a16:creationId xmlns:a16="http://schemas.microsoft.com/office/drawing/2014/main" id="{3F817CF6-432C-590D-DE7C-B28991B38644}"/>
+              </a:ext>
+            </a:extLst>
+          </p:cNvPr>
+          <p:cNvGrpSpPr/>
+          <p:nvPr/>
+        </p:nvGrpSpPr>
+        <p:grpSpPr>
+          <a:xfrm>
+            <a:off x="639899" y="1910268"/>
+            <a:ext cx="2591162" cy="3210373"/>
+            <a:chOff x="639899" y="1910268"/>
+            <a:chExt cx="2591162" cy="3210373"/>
+          </a:xfrm>
+        </p:grpSpPr>
+        <p:pic>
+          <p:nvPicPr>
+            <p:cNvPr id="3" name="그림 2">
+              <a:extLst>
+                <a:ext uri="{FF2B5EF4-FFF2-40B4-BE49-F238E27FC236}">
+                  <a16:creationId xmlns:a16="http://schemas.microsoft.com/office/drawing/2014/main" id="{1BDC455D-B2EE-A79D-0985-7D4C30CC74E9}"/>
+                </a:ext>
+              </a:extLst>
+            </p:cNvPr>
+            <p:cNvPicPr>
+              <a:picLocks noChangeAspect="1"/>
+            </p:cNvPicPr>
+            <p:nvPr/>
+          </p:nvPicPr>
+          <p:blipFill>
+            <a:blip r:embed="rId2"/>
+            <a:stretch>
+              <a:fillRect/>
+            </a:stretch>
+          </p:blipFill>
+          <p:spPr>
+            <a:xfrm>
+              <a:off x="639899" y="1910268"/>
+              <a:ext cx="2591162" cy="3210373"/>
+            </a:xfrm>
+            <a:prstGeom prst="rect">
+              <a:avLst/>
+            </a:prstGeom>
+          </p:spPr>
+        </p:pic>
+        <p:sp>
+          <p:nvSpPr>
+            <p:cNvPr id="4" name="직사각형 3">
+              <a:extLst>
+                <a:ext uri="{FF2B5EF4-FFF2-40B4-BE49-F238E27FC236}">
+                  <a16:creationId xmlns:a16="http://schemas.microsoft.com/office/drawing/2014/main" id="{4540976A-6E33-280C-39C6-1CB33E27B39C}"/>
+                </a:ext>
+              </a:extLst>
+            </p:cNvPr>
+            <p:cNvSpPr/>
+            <p:nvPr/>
+          </p:nvSpPr>
+          <p:spPr>
+            <a:xfrm>
+              <a:off x="960120" y="2752344"/>
+              <a:ext cx="1124712" cy="219456"/>
+            </a:xfrm>
+            <a:prstGeom prst="rect">
+              <a:avLst/>
+            </a:prstGeom>
+            <a:noFill/>
+            <a:ln>
+              <a:solidFill>
+                <a:srgbClr val="FF0000"/>
+              </a:solidFill>
+            </a:ln>
+          </p:spPr>
+          <p:style>
+            <a:lnRef idx="2">
+              <a:schemeClr val="accent1">
+                <a:shade val="15000"/>
+              </a:schemeClr>
+            </a:lnRef>
+            <a:fillRef idx="1">
+              <a:schemeClr val="accent1"/>
+            </a:fillRef>
+            <a:effectRef idx="0">
+              <a:schemeClr val="accent1"/>
+            </a:effectRef>
+            <a:fontRef idx="minor">
+              <a:schemeClr val="lt1"/>
+            </a:fontRef>
+          </p:style>
+          <p:txBody>
+            <a:bodyPr rtlCol="0" anchor="ctr"/>
+            <a:lstStyle/>
+            <a:p>
+              <a:pPr algn="ctr"/>
+              <a:endParaRPr lang="ko-KR" altLang="en-US"/>
+            </a:p>
+          </p:txBody>
+        </p:sp>
+      </p:grpSp>
+      <p:sp>
+        <p:nvSpPr>
+          <p:cNvPr id="7" name="TextBox 6">
+            <a:extLst>
+              <a:ext uri="{FF2B5EF4-FFF2-40B4-BE49-F238E27FC236}">
+                <a16:creationId xmlns:a16="http://schemas.microsoft.com/office/drawing/2014/main" id="{FC0379B0-F90E-CB81-8C7F-F21ED90E05D0}"/>
+              </a:ext>
+            </a:extLst>
+          </p:cNvPr>
+          <p:cNvSpPr txBox="1"/>
+          <p:nvPr/>
+        </p:nvSpPr>
+        <p:spPr>
+          <a:xfrm>
+            <a:off x="3404978" y="1910268"/>
+            <a:ext cx="6094476" cy="4565545"/>
+          </a:xfrm>
+          <a:prstGeom prst="rect">
+            <a:avLst/>
+          </a:prstGeom>
+          <a:solidFill>
+            <a:schemeClr val="tx1"/>
+          </a:solidFill>
+          <a:ln>
+            <a:solidFill>
+              <a:schemeClr val="tx1"/>
+            </a:solidFill>
+          </a:ln>
+        </p:spPr>
+        <p:txBody>
+          <a:bodyPr wrap="square">
+            <a:spAutoFit/>
+          </a:bodyPr>
+          <a:lstStyle/>
+          <a:p>
+            <a:pPr>
+              <a:lnSpc>
+                <a:spcPts val="1425"/>
+              </a:lnSpc>
+              <a:buNone/>
+            </a:pPr>
+            <a:r>
+              <a:rPr lang="en-US" altLang="ko-KR" sz="900" b="0">
+                <a:solidFill>
+                  <a:srgbClr val="BBBEBF"/>
+                </a:solidFill>
+                <a:effectLst/>
+                <a:latin typeface="Consolas" panose="020B0609020204030204" pitchFamily="49" charset="0"/>
+              </a:rPr>
+              <a:t>@</a:t>
+            </a:r>
+            <a:r>
+              <a:rPr lang="en-US" altLang="ko-KR" sz="900" b="0">
+                <a:solidFill>
+                  <a:srgbClr val="4EC9B0"/>
+                </a:solidFill>
+                <a:effectLst/>
+                <a:latin typeface="Consolas" panose="020B0609020204030204" pitchFamily="49" charset="0"/>
+              </a:rPr>
+              <a:t>Component</a:t>
+            </a:r>
+            <a:endParaRPr lang="en-US" altLang="ko-KR" sz="900" b="0">
+              <a:solidFill>
+                <a:srgbClr val="BBBEBF"/>
+              </a:solidFill>
+              <a:effectLst/>
+              <a:latin typeface="Consolas" panose="020B0609020204030204" pitchFamily="49" charset="0"/>
+            </a:endParaRPr>
+          </a:p>
+          <a:p>
+            <a:pPr>
+              <a:lnSpc>
+                <a:spcPts val="1425"/>
+              </a:lnSpc>
+              <a:buNone/>
+            </a:pPr>
+            <a:r>
+              <a:rPr lang="en-US" altLang="ko-KR" sz="900" b="0">
+                <a:solidFill>
+                  <a:srgbClr val="569CD6"/>
+                </a:solidFill>
+                <a:effectLst/>
+                <a:latin typeface="Consolas" panose="020B0609020204030204" pitchFamily="49" charset="0"/>
+              </a:rPr>
+              <a:t>public</a:t>
+            </a:r>
+            <a:r>
+              <a:rPr lang="en-US" altLang="ko-KR" sz="900" b="0">
+                <a:solidFill>
+                  <a:srgbClr val="BBBEBF"/>
+                </a:solidFill>
+                <a:effectLst/>
+                <a:latin typeface="Consolas" panose="020B0609020204030204" pitchFamily="49" charset="0"/>
+              </a:rPr>
+              <a:t> </a:t>
+            </a:r>
+            <a:r>
+              <a:rPr lang="en-US" altLang="ko-KR" sz="900" b="0">
+                <a:solidFill>
+                  <a:srgbClr val="569CD6"/>
+                </a:solidFill>
+                <a:effectLst/>
+                <a:latin typeface="Consolas" panose="020B0609020204030204" pitchFamily="49" charset="0"/>
+              </a:rPr>
+              <a:t>class</a:t>
+            </a:r>
+            <a:r>
+              <a:rPr lang="en-US" altLang="ko-KR" sz="900" b="0">
+                <a:solidFill>
+                  <a:srgbClr val="BBBEBF"/>
+                </a:solidFill>
+                <a:effectLst/>
+                <a:latin typeface="Consolas" panose="020B0609020204030204" pitchFamily="49" charset="0"/>
+              </a:rPr>
+              <a:t> </a:t>
+            </a:r>
+            <a:r>
+              <a:rPr lang="en-US" altLang="ko-KR" sz="900" b="0">
+                <a:solidFill>
+                  <a:srgbClr val="4EC9B0"/>
+                </a:solidFill>
+                <a:effectLst/>
+                <a:latin typeface="Consolas" panose="020B0609020204030204" pitchFamily="49" charset="0"/>
+              </a:rPr>
+              <a:t>PointClient</a:t>
+            </a:r>
+            <a:r>
+              <a:rPr lang="en-US" altLang="ko-KR" sz="900" b="0">
+                <a:solidFill>
+                  <a:srgbClr val="BBBEBF"/>
+                </a:solidFill>
+                <a:effectLst/>
+                <a:latin typeface="Consolas" panose="020B0609020204030204" pitchFamily="49" charset="0"/>
+              </a:rPr>
+              <a:t> {</a:t>
+            </a:r>
+          </a:p>
+          <a:p>
+            <a:pPr>
+              <a:lnSpc>
+                <a:spcPts val="1425"/>
+              </a:lnSpc>
+              <a:buNone/>
+            </a:pPr>
+            <a:r>
+              <a:rPr lang="en-US" altLang="ko-KR" sz="900" b="0">
+                <a:solidFill>
+                  <a:srgbClr val="BBBEBF"/>
+                </a:solidFill>
+                <a:effectLst/>
+                <a:latin typeface="Consolas" panose="020B0609020204030204" pitchFamily="49" charset="0"/>
+              </a:rPr>
+              <a:t>    </a:t>
+            </a:r>
+            <a:r>
+              <a:rPr lang="en-US" altLang="ko-KR" sz="900" b="0">
+                <a:solidFill>
+                  <a:srgbClr val="569CD6"/>
+                </a:solidFill>
+                <a:effectLst/>
+                <a:latin typeface="Consolas" panose="020B0609020204030204" pitchFamily="49" charset="0"/>
+              </a:rPr>
+              <a:t>private</a:t>
+            </a:r>
+            <a:r>
+              <a:rPr lang="en-US" altLang="ko-KR" sz="900" b="0">
+                <a:solidFill>
+                  <a:srgbClr val="BBBEBF"/>
+                </a:solidFill>
+                <a:effectLst/>
+                <a:latin typeface="Consolas" panose="020B0609020204030204" pitchFamily="49" charset="0"/>
+              </a:rPr>
+              <a:t> </a:t>
+            </a:r>
+            <a:r>
+              <a:rPr lang="en-US" altLang="ko-KR" sz="900" b="0">
+                <a:solidFill>
+                  <a:srgbClr val="569CD6"/>
+                </a:solidFill>
+                <a:effectLst/>
+                <a:latin typeface="Consolas" panose="020B0609020204030204" pitchFamily="49" charset="0"/>
+              </a:rPr>
+              <a:t>final</a:t>
+            </a:r>
+            <a:r>
+              <a:rPr lang="en-US" altLang="ko-KR" sz="900" b="0">
+                <a:solidFill>
+                  <a:srgbClr val="BBBEBF"/>
+                </a:solidFill>
+                <a:effectLst/>
+                <a:latin typeface="Consolas" panose="020B0609020204030204" pitchFamily="49" charset="0"/>
+              </a:rPr>
+              <a:t> </a:t>
+            </a:r>
+            <a:r>
+              <a:rPr lang="en-US" altLang="ko-KR" sz="900" b="0">
+                <a:solidFill>
+                  <a:srgbClr val="4EC9B0"/>
+                </a:solidFill>
+                <a:effectLst/>
+                <a:latin typeface="Consolas" panose="020B0609020204030204" pitchFamily="49" charset="0"/>
+              </a:rPr>
+              <a:t>RestClient</a:t>
+            </a:r>
+            <a:r>
+              <a:rPr lang="en-US" altLang="ko-KR" sz="900" b="0">
+                <a:solidFill>
+                  <a:srgbClr val="FFA657"/>
+                </a:solidFill>
+                <a:effectLst/>
+                <a:latin typeface="Consolas" panose="020B0609020204030204" pitchFamily="49" charset="0"/>
+              </a:rPr>
+              <a:t> </a:t>
+            </a:r>
+            <a:r>
+              <a:rPr lang="en-US" altLang="ko-KR" sz="900" b="0">
+                <a:solidFill>
+                  <a:srgbClr val="79C0FF"/>
+                </a:solidFill>
+                <a:effectLst/>
+                <a:latin typeface="Consolas" panose="020B0609020204030204" pitchFamily="49" charset="0"/>
+              </a:rPr>
+              <a:t>restClient</a:t>
+            </a:r>
+            <a:r>
+              <a:rPr lang="en-US" altLang="ko-KR" sz="900" b="0">
+                <a:solidFill>
+                  <a:srgbClr val="BBBEBF"/>
+                </a:solidFill>
+                <a:effectLst/>
+                <a:latin typeface="Consolas" panose="020B0609020204030204" pitchFamily="49" charset="0"/>
+              </a:rPr>
+              <a:t>;</a:t>
+            </a:r>
+          </a:p>
+          <a:p>
+            <a:pPr>
+              <a:lnSpc>
+                <a:spcPts val="1425"/>
+              </a:lnSpc>
+              <a:buNone/>
+            </a:pPr>
+            <a:r>
+              <a:rPr lang="en-US" altLang="ko-KR" sz="900" b="0">
+                <a:solidFill>
+                  <a:srgbClr val="BBBEBF"/>
+                </a:solidFill>
+                <a:effectLst/>
+                <a:latin typeface="Consolas" panose="020B0609020204030204" pitchFamily="49" charset="0"/>
+              </a:rPr>
+              <a:t>    </a:t>
+            </a:r>
+          </a:p>
+          <a:p>
+            <a:pPr>
+              <a:lnSpc>
+                <a:spcPts val="1425"/>
+              </a:lnSpc>
+              <a:buNone/>
+            </a:pPr>
+            <a:r>
+              <a:rPr lang="en-US" altLang="ko-KR" sz="900" b="0">
+                <a:solidFill>
+                  <a:srgbClr val="BBBEBF"/>
+                </a:solidFill>
+                <a:effectLst/>
+                <a:latin typeface="Consolas" panose="020B0609020204030204" pitchFamily="49" charset="0"/>
+              </a:rPr>
+              <a:t>    </a:t>
+            </a:r>
+            <a:r>
+              <a:rPr lang="en-US" altLang="ko-KR" sz="900" b="0">
+                <a:solidFill>
+                  <a:srgbClr val="569CD6"/>
+                </a:solidFill>
+                <a:effectLst/>
+                <a:latin typeface="Consolas" panose="020B0609020204030204" pitchFamily="49" charset="0"/>
+              </a:rPr>
+              <a:t>public</a:t>
+            </a:r>
+            <a:r>
+              <a:rPr lang="en-US" altLang="ko-KR" sz="900" b="0">
+                <a:solidFill>
+                  <a:srgbClr val="BBBEBF"/>
+                </a:solidFill>
+                <a:effectLst/>
+                <a:latin typeface="Consolas" panose="020B0609020204030204" pitchFamily="49" charset="0"/>
+              </a:rPr>
+              <a:t> </a:t>
+            </a:r>
+            <a:r>
+              <a:rPr lang="en-US" altLang="ko-KR" sz="900" b="0">
+                <a:solidFill>
+                  <a:srgbClr val="D2A8FF"/>
+                </a:solidFill>
+                <a:effectLst/>
+                <a:latin typeface="Consolas" panose="020B0609020204030204" pitchFamily="49" charset="0"/>
+              </a:rPr>
+              <a:t>PointClient</a:t>
+            </a:r>
+            <a:r>
+              <a:rPr lang="en-US" altLang="ko-KR" sz="900" b="0">
+                <a:solidFill>
+                  <a:srgbClr val="BBBEBF"/>
+                </a:solidFill>
+                <a:effectLst/>
+                <a:latin typeface="Consolas" panose="020B0609020204030204" pitchFamily="49" charset="0"/>
+              </a:rPr>
+              <a:t>(@</a:t>
+            </a:r>
+            <a:r>
+              <a:rPr lang="en-US" altLang="ko-KR" sz="900" b="0">
+                <a:solidFill>
+                  <a:srgbClr val="4EC9B0"/>
+                </a:solidFill>
+                <a:effectLst/>
+                <a:latin typeface="Consolas" panose="020B0609020204030204" pitchFamily="49" charset="0"/>
+              </a:rPr>
+              <a:t>Value</a:t>
+            </a:r>
+            <a:r>
+              <a:rPr lang="en-US" altLang="ko-KR" sz="900" b="0">
+                <a:solidFill>
+                  <a:srgbClr val="BBBEBF"/>
+                </a:solidFill>
+                <a:effectLst/>
+                <a:latin typeface="Consolas" panose="020B0609020204030204" pitchFamily="49" charset="0"/>
+              </a:rPr>
+              <a:t>(</a:t>
+            </a:r>
+            <a:r>
+              <a:rPr lang="en-US" altLang="ko-KR" sz="900" b="0">
+                <a:solidFill>
+                  <a:srgbClr val="A5D6FF"/>
+                </a:solidFill>
+                <a:effectLst/>
+                <a:latin typeface="Consolas" panose="020B0609020204030204" pitchFamily="49" charset="0"/>
+              </a:rPr>
+              <a:t>"${client.point-service.url}"</a:t>
+            </a:r>
+            <a:r>
+              <a:rPr lang="en-US" altLang="ko-KR" sz="900" b="0">
+                <a:solidFill>
+                  <a:srgbClr val="BBBEBF"/>
+                </a:solidFill>
+                <a:effectLst/>
+                <a:latin typeface="Consolas" panose="020B0609020204030204" pitchFamily="49" charset="0"/>
+              </a:rPr>
+              <a:t>) </a:t>
+            </a:r>
+            <a:r>
+              <a:rPr lang="en-US" altLang="ko-KR" sz="900" b="0">
+                <a:solidFill>
+                  <a:srgbClr val="4EC9B0"/>
+                </a:solidFill>
+                <a:effectLst/>
+                <a:latin typeface="Consolas" panose="020B0609020204030204" pitchFamily="49" charset="0"/>
+              </a:rPr>
+              <a:t>String</a:t>
+            </a:r>
+            <a:r>
+              <a:rPr lang="en-US" altLang="ko-KR" sz="900" b="0">
+                <a:solidFill>
+                  <a:srgbClr val="BBBEBF"/>
+                </a:solidFill>
+                <a:effectLst/>
+                <a:latin typeface="Consolas" panose="020B0609020204030204" pitchFamily="49" charset="0"/>
+              </a:rPr>
+              <a:t> </a:t>
+            </a:r>
+            <a:r>
+              <a:rPr lang="en-US" altLang="ko-KR" sz="900" b="0">
+                <a:solidFill>
+                  <a:srgbClr val="FFA657"/>
+                </a:solidFill>
+                <a:effectLst/>
+                <a:latin typeface="Consolas" panose="020B0609020204030204" pitchFamily="49" charset="0"/>
+              </a:rPr>
+              <a:t>pointServiceUrl</a:t>
+            </a:r>
+            <a:r>
+              <a:rPr lang="en-US" altLang="ko-KR" sz="900" b="0">
+                <a:solidFill>
+                  <a:srgbClr val="BBBEBF"/>
+                </a:solidFill>
+                <a:effectLst/>
+                <a:latin typeface="Consolas" panose="020B0609020204030204" pitchFamily="49" charset="0"/>
+              </a:rPr>
+              <a:t>) {</a:t>
+            </a:r>
+          </a:p>
+          <a:p>
+            <a:pPr>
+              <a:lnSpc>
+                <a:spcPts val="1425"/>
+              </a:lnSpc>
+              <a:buNone/>
+            </a:pPr>
+            <a:r>
+              <a:rPr lang="en-US" altLang="ko-KR" sz="900" b="0">
+                <a:solidFill>
+                  <a:srgbClr val="BBBEBF"/>
+                </a:solidFill>
+                <a:effectLst/>
+                <a:latin typeface="Consolas" panose="020B0609020204030204" pitchFamily="49" charset="0"/>
+              </a:rPr>
+              <a:t>        </a:t>
+            </a:r>
+            <a:r>
+              <a:rPr lang="en-US" altLang="ko-KR" sz="900" b="0">
+                <a:solidFill>
+                  <a:srgbClr val="79C0FF"/>
+                </a:solidFill>
+                <a:effectLst/>
+                <a:latin typeface="Consolas" panose="020B0609020204030204" pitchFamily="49" charset="0"/>
+              </a:rPr>
+              <a:t>this</a:t>
+            </a:r>
+            <a:r>
+              <a:rPr lang="en-US" altLang="ko-KR" sz="900" b="0">
+                <a:solidFill>
+                  <a:srgbClr val="BBBEBF"/>
+                </a:solidFill>
+                <a:effectLst/>
+                <a:latin typeface="Consolas" panose="020B0609020204030204" pitchFamily="49" charset="0"/>
+              </a:rPr>
+              <a:t>.</a:t>
+            </a:r>
+            <a:r>
+              <a:rPr lang="en-US" altLang="ko-KR" sz="900" b="0">
+                <a:solidFill>
+                  <a:srgbClr val="79C0FF"/>
+                </a:solidFill>
+                <a:effectLst/>
+                <a:latin typeface="Consolas" panose="020B0609020204030204" pitchFamily="49" charset="0"/>
+              </a:rPr>
+              <a:t>restClient</a:t>
+            </a:r>
+            <a:r>
+              <a:rPr lang="en-US" altLang="ko-KR" sz="900" b="0">
+                <a:solidFill>
+                  <a:srgbClr val="BBBEBF"/>
+                </a:solidFill>
+                <a:effectLst/>
+                <a:latin typeface="Consolas" panose="020B0609020204030204" pitchFamily="49" charset="0"/>
+              </a:rPr>
+              <a:t> </a:t>
+            </a:r>
+            <a:r>
+              <a:rPr lang="en-US" altLang="ko-KR" sz="900" b="0">
+                <a:solidFill>
+                  <a:srgbClr val="D4D4D4"/>
+                </a:solidFill>
+                <a:effectLst/>
+                <a:latin typeface="Consolas" panose="020B0609020204030204" pitchFamily="49" charset="0"/>
+              </a:rPr>
+              <a:t>=</a:t>
+            </a:r>
+            <a:r>
+              <a:rPr lang="en-US" altLang="ko-KR" sz="900" b="0">
+                <a:solidFill>
+                  <a:srgbClr val="BBBEBF"/>
+                </a:solidFill>
+                <a:effectLst/>
+                <a:latin typeface="Consolas" panose="020B0609020204030204" pitchFamily="49" charset="0"/>
+              </a:rPr>
+              <a:t> </a:t>
+            </a:r>
+            <a:r>
+              <a:rPr lang="en-US" altLang="ko-KR" sz="900" b="0">
+                <a:solidFill>
+                  <a:srgbClr val="4EC9B0"/>
+                </a:solidFill>
+                <a:effectLst/>
+                <a:latin typeface="Consolas" panose="020B0609020204030204" pitchFamily="49" charset="0"/>
+              </a:rPr>
+              <a:t>RestClient</a:t>
+            </a:r>
+            <a:r>
+              <a:rPr lang="en-US" altLang="ko-KR" sz="900" b="0">
+                <a:solidFill>
+                  <a:srgbClr val="BBBEBF"/>
+                </a:solidFill>
+                <a:effectLst/>
+                <a:latin typeface="Consolas" panose="020B0609020204030204" pitchFamily="49" charset="0"/>
+              </a:rPr>
+              <a:t>.</a:t>
+            </a:r>
+            <a:r>
+              <a:rPr lang="en-US" altLang="ko-KR" sz="900" b="0">
+                <a:solidFill>
+                  <a:srgbClr val="D2A8FF"/>
+                </a:solidFill>
+                <a:effectLst/>
+                <a:latin typeface="Consolas" panose="020B0609020204030204" pitchFamily="49" charset="0"/>
+              </a:rPr>
+              <a:t>builder</a:t>
+            </a:r>
+            <a:r>
+              <a:rPr lang="en-US" altLang="ko-KR" sz="900" b="0">
+                <a:solidFill>
+                  <a:srgbClr val="BBBEBF"/>
+                </a:solidFill>
+                <a:effectLst/>
+                <a:latin typeface="Consolas" panose="020B0609020204030204" pitchFamily="49" charset="0"/>
+              </a:rPr>
+              <a:t>()</a:t>
+            </a:r>
+          </a:p>
+          <a:p>
+            <a:pPr>
+              <a:lnSpc>
+                <a:spcPts val="1425"/>
+              </a:lnSpc>
+              <a:buNone/>
+            </a:pPr>
+            <a:r>
+              <a:rPr lang="en-US" altLang="ko-KR" sz="900" b="0">
+                <a:solidFill>
+                  <a:srgbClr val="BBBEBF"/>
+                </a:solidFill>
+                <a:effectLst/>
+                <a:latin typeface="Consolas" panose="020B0609020204030204" pitchFamily="49" charset="0"/>
+              </a:rPr>
+              <a:t>            .</a:t>
+            </a:r>
+            <a:r>
+              <a:rPr lang="en-US" altLang="ko-KR" sz="900" b="0">
+                <a:solidFill>
+                  <a:srgbClr val="D2A8FF"/>
+                </a:solidFill>
+                <a:effectLst/>
+                <a:latin typeface="Consolas" panose="020B0609020204030204" pitchFamily="49" charset="0"/>
+              </a:rPr>
+              <a:t>baseUrl</a:t>
+            </a:r>
+            <a:r>
+              <a:rPr lang="en-US" altLang="ko-KR" sz="900" b="0">
+                <a:solidFill>
+                  <a:srgbClr val="BBBEBF"/>
+                </a:solidFill>
+                <a:effectLst/>
+                <a:latin typeface="Consolas" panose="020B0609020204030204" pitchFamily="49" charset="0"/>
+              </a:rPr>
+              <a:t>(</a:t>
+            </a:r>
+            <a:r>
+              <a:rPr lang="en-US" altLang="ko-KR" sz="900" b="0">
+                <a:solidFill>
+                  <a:srgbClr val="FFA657"/>
+                </a:solidFill>
+                <a:effectLst/>
+                <a:latin typeface="Consolas" panose="020B0609020204030204" pitchFamily="49" charset="0"/>
+              </a:rPr>
+              <a:t>pointServiceUrl</a:t>
+            </a:r>
+            <a:r>
+              <a:rPr lang="en-US" altLang="ko-KR" sz="900" b="0">
+                <a:solidFill>
+                  <a:srgbClr val="BBBEBF"/>
+                </a:solidFill>
+                <a:effectLst/>
+                <a:latin typeface="Consolas" panose="020B0609020204030204" pitchFamily="49" charset="0"/>
+              </a:rPr>
+              <a:t>)</a:t>
+            </a:r>
+          </a:p>
+          <a:p>
+            <a:pPr>
+              <a:lnSpc>
+                <a:spcPts val="1425"/>
+              </a:lnSpc>
+              <a:buNone/>
+            </a:pPr>
+            <a:r>
+              <a:rPr lang="en-US" altLang="ko-KR" sz="900" b="0">
+                <a:solidFill>
+                  <a:srgbClr val="BBBEBF"/>
+                </a:solidFill>
+                <a:effectLst/>
+                <a:latin typeface="Consolas" panose="020B0609020204030204" pitchFamily="49" charset="0"/>
+              </a:rPr>
+              <a:t>            .</a:t>
+            </a:r>
+            <a:r>
+              <a:rPr lang="en-US" altLang="ko-KR" sz="900" b="0">
+                <a:solidFill>
+                  <a:srgbClr val="D2A8FF"/>
+                </a:solidFill>
+                <a:effectLst/>
+                <a:latin typeface="Consolas" panose="020B0609020204030204" pitchFamily="49" charset="0"/>
+              </a:rPr>
+              <a:t>build</a:t>
+            </a:r>
+            <a:r>
+              <a:rPr lang="en-US" altLang="ko-KR" sz="900" b="0">
+                <a:solidFill>
+                  <a:srgbClr val="BBBEBF"/>
+                </a:solidFill>
+                <a:effectLst/>
+                <a:latin typeface="Consolas" panose="020B0609020204030204" pitchFamily="49" charset="0"/>
+              </a:rPr>
+              <a:t>();</a:t>
+            </a:r>
+          </a:p>
+          <a:p>
+            <a:pPr>
+              <a:lnSpc>
+                <a:spcPts val="1425"/>
+              </a:lnSpc>
+              <a:buNone/>
+            </a:pPr>
+            <a:r>
+              <a:rPr lang="en-US" altLang="ko-KR" sz="900" b="0">
+                <a:solidFill>
+                  <a:srgbClr val="BBBEBF"/>
+                </a:solidFill>
+                <a:effectLst/>
+                <a:latin typeface="Consolas" panose="020B0609020204030204" pitchFamily="49" charset="0"/>
+              </a:rPr>
+              <a:t>    }</a:t>
+            </a:r>
+            <a:br>
+              <a:rPr lang="en-US" altLang="ko-KR" sz="900" b="0">
+                <a:solidFill>
+                  <a:srgbClr val="BBBEBF"/>
+                </a:solidFill>
+                <a:effectLst/>
+                <a:latin typeface="Consolas" panose="020B0609020204030204" pitchFamily="49" charset="0"/>
+              </a:rPr>
+            </a:br>
+            <a:endParaRPr lang="en-US" altLang="ko-KR" sz="900" b="0">
+              <a:solidFill>
+                <a:srgbClr val="BBBEBF"/>
+              </a:solidFill>
+              <a:effectLst/>
+              <a:latin typeface="Consolas" panose="020B0609020204030204" pitchFamily="49" charset="0"/>
+            </a:endParaRPr>
+          </a:p>
+          <a:p>
+            <a:pPr>
+              <a:lnSpc>
+                <a:spcPts val="1425"/>
+              </a:lnSpc>
+              <a:buNone/>
+            </a:pPr>
+            <a:r>
+              <a:rPr lang="en-US" altLang="ko-KR" sz="900" b="0">
+                <a:solidFill>
+                  <a:srgbClr val="BBBEBF"/>
+                </a:solidFill>
+                <a:effectLst/>
+                <a:latin typeface="Consolas" panose="020B0609020204030204" pitchFamily="49" charset="0"/>
+              </a:rPr>
+              <a:t>    </a:t>
+            </a:r>
+            <a:r>
+              <a:rPr lang="en-US" altLang="ko-KR" sz="900" b="0">
+                <a:solidFill>
+                  <a:srgbClr val="569CD6"/>
+                </a:solidFill>
+                <a:effectLst/>
+                <a:latin typeface="Consolas" panose="020B0609020204030204" pitchFamily="49" charset="0"/>
+              </a:rPr>
+              <a:t>public</a:t>
+            </a:r>
+            <a:r>
+              <a:rPr lang="en-US" altLang="ko-KR" sz="900" b="0">
+                <a:solidFill>
+                  <a:srgbClr val="BBBEBF"/>
+                </a:solidFill>
+                <a:effectLst/>
+                <a:latin typeface="Consolas" panose="020B0609020204030204" pitchFamily="49" charset="0"/>
+              </a:rPr>
+              <a:t> </a:t>
+            </a:r>
+            <a:r>
+              <a:rPr lang="en-US" altLang="ko-KR" sz="900" b="0">
+                <a:solidFill>
+                  <a:srgbClr val="4EC9B0"/>
+                </a:solidFill>
+                <a:effectLst/>
+                <a:latin typeface="Consolas" panose="020B0609020204030204" pitchFamily="49" charset="0"/>
+              </a:rPr>
+              <a:t>void</a:t>
+            </a:r>
+            <a:r>
+              <a:rPr lang="en-US" altLang="ko-KR" sz="900" b="0">
+                <a:solidFill>
+                  <a:srgbClr val="BBBEBF"/>
+                </a:solidFill>
+                <a:effectLst/>
+                <a:latin typeface="Consolas" panose="020B0609020204030204" pitchFamily="49" charset="0"/>
+              </a:rPr>
+              <a:t> </a:t>
+            </a:r>
+            <a:r>
+              <a:rPr lang="en-US" altLang="ko-KR" sz="900" b="0">
+                <a:solidFill>
+                  <a:srgbClr val="D2A8FF"/>
+                </a:solidFill>
+                <a:effectLst/>
+                <a:latin typeface="Consolas" panose="020B0609020204030204" pitchFamily="49" charset="0"/>
+              </a:rPr>
+              <a:t>addPoints</a:t>
+            </a:r>
+            <a:r>
+              <a:rPr lang="en-US" altLang="ko-KR" sz="900" b="0">
+                <a:solidFill>
+                  <a:srgbClr val="BBBEBF"/>
+                </a:solidFill>
+                <a:effectLst/>
+                <a:latin typeface="Consolas" panose="020B0609020204030204" pitchFamily="49" charset="0"/>
+              </a:rPr>
+              <a:t>(</a:t>
+            </a:r>
+            <a:r>
+              <a:rPr lang="en-US" altLang="ko-KR" sz="900" b="0">
+                <a:solidFill>
+                  <a:srgbClr val="4EC9B0"/>
+                </a:solidFill>
+                <a:effectLst/>
+                <a:latin typeface="Consolas" panose="020B0609020204030204" pitchFamily="49" charset="0"/>
+              </a:rPr>
+              <a:t>Long</a:t>
+            </a:r>
+            <a:r>
+              <a:rPr lang="en-US" altLang="ko-KR" sz="900" b="0">
+                <a:solidFill>
+                  <a:srgbClr val="BBBEBF"/>
+                </a:solidFill>
+                <a:effectLst/>
+                <a:latin typeface="Consolas" panose="020B0609020204030204" pitchFamily="49" charset="0"/>
+              </a:rPr>
+              <a:t> </a:t>
+            </a:r>
+            <a:r>
+              <a:rPr lang="en-US" altLang="ko-KR" sz="900" b="0">
+                <a:solidFill>
+                  <a:srgbClr val="FFA657"/>
+                </a:solidFill>
+                <a:effectLst/>
+                <a:latin typeface="Consolas" panose="020B0609020204030204" pitchFamily="49" charset="0"/>
+              </a:rPr>
+              <a:t>userId</a:t>
+            </a:r>
+            <a:r>
+              <a:rPr lang="en-US" altLang="ko-KR" sz="900" b="0">
+                <a:solidFill>
+                  <a:srgbClr val="BBBEBF"/>
+                </a:solidFill>
+                <a:effectLst/>
+                <a:latin typeface="Consolas" panose="020B0609020204030204" pitchFamily="49" charset="0"/>
+              </a:rPr>
+              <a:t>, </a:t>
+            </a:r>
+            <a:r>
+              <a:rPr lang="en-US" altLang="ko-KR" sz="900" b="0">
+                <a:solidFill>
+                  <a:srgbClr val="4EC9B0"/>
+                </a:solidFill>
+                <a:effectLst/>
+                <a:latin typeface="Consolas" panose="020B0609020204030204" pitchFamily="49" charset="0"/>
+              </a:rPr>
+              <a:t>int</a:t>
+            </a:r>
+            <a:r>
+              <a:rPr lang="en-US" altLang="ko-KR" sz="900" b="0">
+                <a:solidFill>
+                  <a:srgbClr val="BBBEBF"/>
+                </a:solidFill>
+                <a:effectLst/>
+                <a:latin typeface="Consolas" panose="020B0609020204030204" pitchFamily="49" charset="0"/>
+              </a:rPr>
+              <a:t> </a:t>
+            </a:r>
+            <a:r>
+              <a:rPr lang="en-US" altLang="ko-KR" sz="900" b="0">
+                <a:solidFill>
+                  <a:srgbClr val="FFA657"/>
+                </a:solidFill>
+                <a:effectLst/>
+                <a:latin typeface="Consolas" panose="020B0609020204030204" pitchFamily="49" charset="0"/>
+              </a:rPr>
+              <a:t>point</a:t>
+            </a:r>
+            <a:r>
+              <a:rPr lang="en-US" altLang="ko-KR" sz="900" b="0">
+                <a:solidFill>
+                  <a:srgbClr val="BBBEBF"/>
+                </a:solidFill>
+                <a:effectLst/>
+                <a:latin typeface="Consolas" panose="020B0609020204030204" pitchFamily="49" charset="0"/>
+              </a:rPr>
+              <a:t>){</a:t>
+            </a:r>
+          </a:p>
+          <a:p>
+            <a:pPr>
+              <a:lnSpc>
+                <a:spcPts val="1425"/>
+              </a:lnSpc>
+              <a:buNone/>
+            </a:pPr>
+            <a:r>
+              <a:rPr lang="en-US" altLang="ko-KR" sz="900" b="0">
+                <a:solidFill>
+                  <a:srgbClr val="BBBEBF"/>
+                </a:solidFill>
+                <a:effectLst/>
+                <a:latin typeface="Consolas" panose="020B0609020204030204" pitchFamily="49" charset="0"/>
+              </a:rPr>
+              <a:t>        </a:t>
+            </a:r>
+            <a:r>
+              <a:rPr lang="en-US" altLang="ko-KR" sz="900" b="0">
+                <a:solidFill>
+                  <a:srgbClr val="4EC9B0"/>
+                </a:solidFill>
+                <a:effectLst/>
+                <a:latin typeface="Consolas" panose="020B0609020204030204" pitchFamily="49" charset="0"/>
+              </a:rPr>
+              <a:t>AddPointRequestDto</a:t>
+            </a:r>
+            <a:r>
+              <a:rPr lang="en-US" altLang="ko-KR" sz="900" b="0">
+                <a:solidFill>
+                  <a:srgbClr val="FFA657"/>
+                </a:solidFill>
+                <a:effectLst/>
+                <a:latin typeface="Consolas" panose="020B0609020204030204" pitchFamily="49" charset="0"/>
+              </a:rPr>
+              <a:t> </a:t>
+            </a:r>
+            <a:r>
+              <a:rPr lang="en-US" altLang="ko-KR" sz="900" b="0">
+                <a:solidFill>
+                  <a:srgbClr val="C9D1D9"/>
+                </a:solidFill>
+                <a:effectLst/>
+                <a:latin typeface="Consolas" panose="020B0609020204030204" pitchFamily="49" charset="0"/>
+              </a:rPr>
+              <a:t>addPointRequestwDto</a:t>
+            </a:r>
+            <a:r>
+              <a:rPr lang="en-US" altLang="ko-KR" sz="900" b="0">
+                <a:solidFill>
+                  <a:srgbClr val="FFA657"/>
+                </a:solidFill>
+                <a:effectLst/>
+                <a:latin typeface="Consolas" panose="020B0609020204030204" pitchFamily="49" charset="0"/>
+              </a:rPr>
+              <a:t> </a:t>
+            </a:r>
+            <a:r>
+              <a:rPr lang="en-US" altLang="ko-KR" sz="900" b="0">
+                <a:solidFill>
+                  <a:srgbClr val="D4D4D4"/>
+                </a:solidFill>
+                <a:effectLst/>
+                <a:latin typeface="Consolas" panose="020B0609020204030204" pitchFamily="49" charset="0"/>
+              </a:rPr>
+              <a:t>=</a:t>
+            </a:r>
+            <a:endParaRPr lang="en-US" altLang="ko-KR" sz="900" b="0">
+              <a:solidFill>
+                <a:srgbClr val="BBBEBF"/>
+              </a:solidFill>
+              <a:effectLst/>
+              <a:latin typeface="Consolas" panose="020B0609020204030204" pitchFamily="49" charset="0"/>
+            </a:endParaRPr>
+          </a:p>
+          <a:p>
+            <a:pPr>
+              <a:lnSpc>
+                <a:spcPts val="1425"/>
+              </a:lnSpc>
+              <a:buNone/>
+            </a:pPr>
+            <a:r>
+              <a:rPr lang="en-US" altLang="ko-KR" sz="900" b="0">
+                <a:solidFill>
+                  <a:srgbClr val="BBBEBF"/>
+                </a:solidFill>
+                <a:effectLst/>
+                <a:latin typeface="Consolas" panose="020B0609020204030204" pitchFamily="49" charset="0"/>
+              </a:rPr>
+              <a:t>            </a:t>
+            </a:r>
+            <a:r>
+              <a:rPr lang="en-US" altLang="ko-KR" sz="900" b="0">
+                <a:solidFill>
+                  <a:srgbClr val="C586C0"/>
+                </a:solidFill>
+                <a:effectLst/>
+                <a:latin typeface="Consolas" panose="020B0609020204030204" pitchFamily="49" charset="0"/>
+              </a:rPr>
+              <a:t>new</a:t>
+            </a:r>
+            <a:r>
+              <a:rPr lang="en-US" altLang="ko-KR" sz="900" b="0">
+                <a:solidFill>
+                  <a:srgbClr val="BBBEBF"/>
+                </a:solidFill>
+                <a:effectLst/>
+                <a:latin typeface="Consolas" panose="020B0609020204030204" pitchFamily="49" charset="0"/>
+              </a:rPr>
+              <a:t> </a:t>
+            </a:r>
+            <a:r>
+              <a:rPr lang="en-US" altLang="ko-KR" sz="900" b="0">
+                <a:solidFill>
+                  <a:srgbClr val="D2A8FF"/>
+                </a:solidFill>
+                <a:effectLst/>
+                <a:latin typeface="Consolas" panose="020B0609020204030204" pitchFamily="49" charset="0"/>
+              </a:rPr>
+              <a:t>AddPointRequestDto</a:t>
+            </a:r>
+            <a:r>
+              <a:rPr lang="en-US" altLang="ko-KR" sz="900" b="0">
+                <a:solidFill>
+                  <a:srgbClr val="BBBEBF"/>
+                </a:solidFill>
+                <a:effectLst/>
+                <a:latin typeface="Consolas" panose="020B0609020204030204" pitchFamily="49" charset="0"/>
+              </a:rPr>
+              <a:t>(</a:t>
+            </a:r>
+          </a:p>
+          <a:p>
+            <a:pPr>
+              <a:lnSpc>
+                <a:spcPts val="1425"/>
+              </a:lnSpc>
+              <a:buNone/>
+            </a:pPr>
+            <a:r>
+              <a:rPr lang="en-US" altLang="ko-KR" sz="900" b="0">
+                <a:solidFill>
+                  <a:srgbClr val="BBBEBF"/>
+                </a:solidFill>
+                <a:effectLst/>
+                <a:latin typeface="Consolas" panose="020B0609020204030204" pitchFamily="49" charset="0"/>
+              </a:rPr>
+              <a:t>                </a:t>
+            </a:r>
+            <a:r>
+              <a:rPr lang="en-US" altLang="ko-KR" sz="900" b="0">
+                <a:solidFill>
+                  <a:srgbClr val="FFA657"/>
+                </a:solidFill>
+                <a:effectLst/>
+                <a:latin typeface="Consolas" panose="020B0609020204030204" pitchFamily="49" charset="0"/>
+              </a:rPr>
+              <a:t>userId</a:t>
+            </a:r>
+            <a:r>
+              <a:rPr lang="en-US" altLang="ko-KR" sz="900" b="0">
+                <a:solidFill>
+                  <a:srgbClr val="BBBEBF"/>
+                </a:solidFill>
+                <a:effectLst/>
+                <a:latin typeface="Consolas" panose="020B0609020204030204" pitchFamily="49" charset="0"/>
+              </a:rPr>
+              <a:t>,</a:t>
+            </a:r>
+          </a:p>
+          <a:p>
+            <a:pPr>
+              <a:lnSpc>
+                <a:spcPts val="1425"/>
+              </a:lnSpc>
+              <a:buNone/>
+            </a:pPr>
+            <a:r>
+              <a:rPr lang="en-US" altLang="ko-KR" sz="900" b="0">
+                <a:solidFill>
+                  <a:srgbClr val="BBBEBF"/>
+                </a:solidFill>
+                <a:effectLst/>
+                <a:latin typeface="Consolas" panose="020B0609020204030204" pitchFamily="49" charset="0"/>
+              </a:rPr>
+              <a:t>                </a:t>
+            </a:r>
+            <a:r>
+              <a:rPr lang="en-US" altLang="ko-KR" sz="900" b="0">
+                <a:solidFill>
+                  <a:srgbClr val="FFA657"/>
+                </a:solidFill>
+                <a:effectLst/>
+                <a:latin typeface="Consolas" panose="020B0609020204030204" pitchFamily="49" charset="0"/>
+              </a:rPr>
+              <a:t>point</a:t>
+            </a:r>
+            <a:endParaRPr lang="en-US" altLang="ko-KR" sz="900" b="0">
+              <a:solidFill>
+                <a:srgbClr val="BBBEBF"/>
+              </a:solidFill>
+              <a:effectLst/>
+              <a:latin typeface="Consolas" panose="020B0609020204030204" pitchFamily="49" charset="0"/>
+            </a:endParaRPr>
+          </a:p>
+          <a:p>
+            <a:pPr>
+              <a:lnSpc>
+                <a:spcPts val="1425"/>
+              </a:lnSpc>
+              <a:buNone/>
+            </a:pPr>
+            <a:r>
+              <a:rPr lang="en-US" altLang="ko-KR" sz="900" b="0">
+                <a:solidFill>
+                  <a:srgbClr val="BBBEBF"/>
+                </a:solidFill>
+                <a:effectLst/>
+                <a:latin typeface="Consolas" panose="020B0609020204030204" pitchFamily="49" charset="0"/>
+              </a:rPr>
+              <a:t>            );</a:t>
+            </a:r>
+          </a:p>
+          <a:p>
+            <a:pPr>
+              <a:lnSpc>
+                <a:spcPts val="1425"/>
+              </a:lnSpc>
+              <a:buNone/>
+            </a:pPr>
+            <a:endParaRPr lang="en-US" altLang="ko-KR" sz="900" b="0">
+              <a:solidFill>
+                <a:srgbClr val="BBBEBF"/>
+              </a:solidFill>
+              <a:effectLst/>
+              <a:latin typeface="Consolas" panose="020B0609020204030204" pitchFamily="49" charset="0"/>
+            </a:endParaRPr>
+          </a:p>
+          <a:p>
+            <a:pPr>
+              <a:lnSpc>
+                <a:spcPts val="1425"/>
+              </a:lnSpc>
+              <a:buNone/>
+            </a:pPr>
+            <a:r>
+              <a:rPr lang="en-US" altLang="ko-KR" sz="900" b="0">
+                <a:solidFill>
+                  <a:srgbClr val="BBBEBF"/>
+                </a:solidFill>
+                <a:effectLst/>
+                <a:latin typeface="Consolas" panose="020B0609020204030204" pitchFamily="49" charset="0"/>
+              </a:rPr>
+              <a:t>        </a:t>
+            </a:r>
+            <a:r>
+              <a:rPr lang="en-US" altLang="ko-KR" sz="900" b="0">
+                <a:solidFill>
+                  <a:srgbClr val="79C0FF"/>
+                </a:solidFill>
+                <a:effectLst/>
+                <a:latin typeface="Consolas" panose="020B0609020204030204" pitchFamily="49" charset="0"/>
+              </a:rPr>
+              <a:t>restClient</a:t>
+            </a:r>
+            <a:r>
+              <a:rPr lang="en-US" altLang="ko-KR" sz="900" b="0">
+                <a:solidFill>
+                  <a:srgbClr val="BBBEBF"/>
+                </a:solidFill>
+                <a:effectLst/>
+                <a:latin typeface="Consolas" panose="020B0609020204030204" pitchFamily="49" charset="0"/>
+              </a:rPr>
+              <a:t>.</a:t>
+            </a:r>
+            <a:r>
+              <a:rPr lang="en-US" altLang="ko-KR" sz="900" b="0">
+                <a:solidFill>
+                  <a:srgbClr val="D2A8FF"/>
+                </a:solidFill>
+                <a:effectLst/>
+                <a:latin typeface="Consolas" panose="020B0609020204030204" pitchFamily="49" charset="0"/>
+              </a:rPr>
+              <a:t>post</a:t>
+            </a:r>
+            <a:r>
+              <a:rPr lang="en-US" altLang="ko-KR" sz="900" b="0">
+                <a:solidFill>
+                  <a:srgbClr val="BBBEBF"/>
+                </a:solidFill>
+                <a:effectLst/>
+                <a:latin typeface="Consolas" panose="020B0609020204030204" pitchFamily="49" charset="0"/>
+              </a:rPr>
+              <a:t>()</a:t>
+            </a:r>
+          </a:p>
+          <a:p>
+            <a:pPr>
+              <a:lnSpc>
+                <a:spcPts val="1425"/>
+              </a:lnSpc>
+              <a:buNone/>
+            </a:pPr>
+            <a:r>
+              <a:rPr lang="en-US" altLang="ko-KR" sz="900" b="0">
+                <a:solidFill>
+                  <a:srgbClr val="BBBEBF"/>
+                </a:solidFill>
+                <a:effectLst/>
+                <a:latin typeface="Consolas" panose="020B0609020204030204" pitchFamily="49" charset="0"/>
+              </a:rPr>
+              <a:t>            .</a:t>
+            </a:r>
+            <a:r>
+              <a:rPr lang="en-US" altLang="ko-KR" sz="900" b="0">
+                <a:solidFill>
+                  <a:srgbClr val="D2A8FF"/>
+                </a:solidFill>
+                <a:effectLst/>
+                <a:latin typeface="Consolas" panose="020B0609020204030204" pitchFamily="49" charset="0"/>
+              </a:rPr>
+              <a:t>uri</a:t>
+            </a:r>
+            <a:r>
+              <a:rPr lang="en-US" altLang="ko-KR" sz="900" b="0">
+                <a:solidFill>
+                  <a:srgbClr val="BBBEBF"/>
+                </a:solidFill>
+                <a:effectLst/>
+                <a:latin typeface="Consolas" panose="020B0609020204030204" pitchFamily="49" charset="0"/>
+              </a:rPr>
+              <a:t>(</a:t>
+            </a:r>
+            <a:r>
+              <a:rPr lang="en-US" altLang="ko-KR" sz="900" b="0">
+                <a:solidFill>
+                  <a:srgbClr val="A5D6FF"/>
+                </a:solidFill>
+                <a:effectLst/>
+                <a:latin typeface="Consolas" panose="020B0609020204030204" pitchFamily="49" charset="0"/>
+              </a:rPr>
+              <a:t>"/points/add"</a:t>
+            </a:r>
+            <a:r>
+              <a:rPr lang="en-US" altLang="ko-KR" sz="900" b="0">
+                <a:solidFill>
+                  <a:srgbClr val="BBBEBF"/>
+                </a:solidFill>
+                <a:effectLst/>
+                <a:latin typeface="Consolas" panose="020B0609020204030204" pitchFamily="49" charset="0"/>
+              </a:rPr>
+              <a:t>)</a:t>
+            </a:r>
+          </a:p>
+          <a:p>
+            <a:pPr>
+              <a:lnSpc>
+                <a:spcPts val="1425"/>
+              </a:lnSpc>
+              <a:buNone/>
+            </a:pPr>
+            <a:r>
+              <a:rPr lang="en-US" altLang="ko-KR" sz="900" b="0">
+                <a:solidFill>
+                  <a:srgbClr val="BBBEBF"/>
+                </a:solidFill>
+                <a:effectLst/>
+                <a:latin typeface="Consolas" panose="020B0609020204030204" pitchFamily="49" charset="0"/>
+              </a:rPr>
+              <a:t>            .</a:t>
+            </a:r>
+            <a:r>
+              <a:rPr lang="en-US" altLang="ko-KR" sz="900" b="0">
+                <a:solidFill>
+                  <a:srgbClr val="D2A8FF"/>
+                </a:solidFill>
+                <a:effectLst/>
+                <a:latin typeface="Consolas" panose="020B0609020204030204" pitchFamily="49" charset="0"/>
+              </a:rPr>
+              <a:t>contentType</a:t>
+            </a:r>
+            <a:r>
+              <a:rPr lang="en-US" altLang="ko-KR" sz="900" b="0">
+                <a:solidFill>
+                  <a:srgbClr val="BBBEBF"/>
+                </a:solidFill>
+                <a:effectLst/>
+                <a:latin typeface="Consolas" panose="020B0609020204030204" pitchFamily="49" charset="0"/>
+              </a:rPr>
+              <a:t>(</a:t>
+            </a:r>
+            <a:r>
+              <a:rPr lang="en-US" altLang="ko-KR" sz="900" b="0">
+                <a:solidFill>
+                  <a:srgbClr val="4EC9B0"/>
+                </a:solidFill>
+                <a:effectLst/>
+                <a:latin typeface="Consolas" panose="020B0609020204030204" pitchFamily="49" charset="0"/>
+              </a:rPr>
+              <a:t>MediaType</a:t>
+            </a:r>
+            <a:r>
+              <a:rPr lang="en-US" altLang="ko-KR" sz="900" b="0">
+                <a:solidFill>
+                  <a:srgbClr val="BBBEBF"/>
+                </a:solidFill>
+                <a:effectLst/>
+                <a:latin typeface="Consolas" panose="020B0609020204030204" pitchFamily="49" charset="0"/>
+              </a:rPr>
+              <a:t>.</a:t>
+            </a:r>
+            <a:r>
+              <a:rPr lang="en-US" altLang="ko-KR" sz="900" b="0">
+                <a:solidFill>
+                  <a:srgbClr val="79C0FF"/>
+                </a:solidFill>
+                <a:effectLst/>
+                <a:latin typeface="Consolas" panose="020B0609020204030204" pitchFamily="49" charset="0"/>
+              </a:rPr>
+              <a:t>APPLICATION_JSON</a:t>
+            </a:r>
+            <a:r>
+              <a:rPr lang="en-US" altLang="ko-KR" sz="900" b="0">
+                <a:solidFill>
+                  <a:srgbClr val="BBBEBF"/>
+                </a:solidFill>
+                <a:effectLst/>
+                <a:latin typeface="Consolas" panose="020B0609020204030204" pitchFamily="49" charset="0"/>
+              </a:rPr>
+              <a:t>)</a:t>
+            </a:r>
+          </a:p>
+          <a:p>
+            <a:pPr>
+              <a:lnSpc>
+                <a:spcPts val="1425"/>
+              </a:lnSpc>
+              <a:buNone/>
+            </a:pPr>
+            <a:r>
+              <a:rPr lang="en-US" altLang="ko-KR" sz="900" b="0">
+                <a:solidFill>
+                  <a:srgbClr val="BBBEBF"/>
+                </a:solidFill>
+                <a:effectLst/>
+                <a:latin typeface="Consolas" panose="020B0609020204030204" pitchFamily="49" charset="0"/>
+              </a:rPr>
+              <a:t>            .</a:t>
+            </a:r>
+            <a:r>
+              <a:rPr lang="en-US" altLang="ko-KR" sz="900" b="0">
+                <a:solidFill>
+                  <a:srgbClr val="D2A8FF"/>
+                </a:solidFill>
+                <a:effectLst/>
+                <a:latin typeface="Consolas" panose="020B0609020204030204" pitchFamily="49" charset="0"/>
+              </a:rPr>
+              <a:t>body</a:t>
+            </a:r>
+            <a:r>
+              <a:rPr lang="en-US" altLang="ko-KR" sz="900" b="0">
+                <a:solidFill>
+                  <a:srgbClr val="BBBEBF"/>
+                </a:solidFill>
+                <a:effectLst/>
+                <a:latin typeface="Consolas" panose="020B0609020204030204" pitchFamily="49" charset="0"/>
+              </a:rPr>
+              <a:t>(</a:t>
+            </a:r>
+            <a:r>
+              <a:rPr lang="en-US" altLang="ko-KR" sz="900" b="0">
+                <a:solidFill>
+                  <a:srgbClr val="C9D1D9"/>
+                </a:solidFill>
+                <a:effectLst/>
+                <a:latin typeface="Consolas" panose="020B0609020204030204" pitchFamily="49" charset="0"/>
+              </a:rPr>
+              <a:t>addPointRequestwDto</a:t>
+            </a:r>
+            <a:r>
+              <a:rPr lang="en-US" altLang="ko-KR" sz="900" b="0">
+                <a:solidFill>
+                  <a:srgbClr val="BBBEBF"/>
+                </a:solidFill>
+                <a:effectLst/>
+                <a:latin typeface="Consolas" panose="020B0609020204030204" pitchFamily="49" charset="0"/>
+              </a:rPr>
+              <a:t>)</a:t>
+            </a:r>
+          </a:p>
+          <a:p>
+            <a:pPr>
+              <a:lnSpc>
+                <a:spcPts val="1425"/>
+              </a:lnSpc>
+              <a:buNone/>
+            </a:pPr>
+            <a:r>
+              <a:rPr lang="en-US" altLang="ko-KR" sz="900" b="0">
+                <a:solidFill>
+                  <a:srgbClr val="BBBEBF"/>
+                </a:solidFill>
+                <a:effectLst/>
+                <a:latin typeface="Consolas" panose="020B0609020204030204" pitchFamily="49" charset="0"/>
+              </a:rPr>
+              <a:t>            .</a:t>
+            </a:r>
+            <a:r>
+              <a:rPr lang="en-US" altLang="ko-KR" sz="900" b="0">
+                <a:solidFill>
+                  <a:srgbClr val="D2A8FF"/>
+                </a:solidFill>
+                <a:effectLst/>
+                <a:latin typeface="Consolas" panose="020B0609020204030204" pitchFamily="49" charset="0"/>
+              </a:rPr>
+              <a:t>retrieve</a:t>
+            </a:r>
+            <a:r>
+              <a:rPr lang="en-US" altLang="ko-KR" sz="900" b="0">
+                <a:solidFill>
+                  <a:srgbClr val="BBBEBF"/>
+                </a:solidFill>
+                <a:effectLst/>
+                <a:latin typeface="Consolas" panose="020B0609020204030204" pitchFamily="49" charset="0"/>
+              </a:rPr>
+              <a:t>()</a:t>
+            </a:r>
+          </a:p>
+          <a:p>
+            <a:pPr>
+              <a:lnSpc>
+                <a:spcPts val="1425"/>
+              </a:lnSpc>
+              <a:buNone/>
+            </a:pPr>
+            <a:r>
+              <a:rPr lang="en-US" altLang="ko-KR" sz="900" b="0">
+                <a:solidFill>
+                  <a:srgbClr val="BBBEBF"/>
+                </a:solidFill>
+                <a:effectLst/>
+                <a:latin typeface="Consolas" panose="020B0609020204030204" pitchFamily="49" charset="0"/>
+              </a:rPr>
+              <a:t>            .</a:t>
+            </a:r>
+            <a:r>
+              <a:rPr lang="en-US" altLang="ko-KR" sz="900" b="0">
+                <a:solidFill>
+                  <a:srgbClr val="D2A8FF"/>
+                </a:solidFill>
+                <a:effectLst/>
+                <a:latin typeface="Consolas" panose="020B0609020204030204" pitchFamily="49" charset="0"/>
+              </a:rPr>
+              <a:t>toBodilessEntity</a:t>
+            </a:r>
+            <a:r>
+              <a:rPr lang="en-US" altLang="ko-KR" sz="900" b="0">
+                <a:solidFill>
+                  <a:srgbClr val="BBBEBF"/>
+                </a:solidFill>
+                <a:effectLst/>
+                <a:latin typeface="Consolas" panose="020B0609020204030204" pitchFamily="49" charset="0"/>
+              </a:rPr>
+              <a:t>();</a:t>
+            </a:r>
+          </a:p>
+          <a:p>
+            <a:pPr>
+              <a:lnSpc>
+                <a:spcPts val="1425"/>
+              </a:lnSpc>
+              <a:buNone/>
+            </a:pPr>
+            <a:r>
+              <a:rPr lang="en-US" altLang="ko-KR" sz="900" b="0">
+                <a:solidFill>
+                  <a:srgbClr val="BBBEBF"/>
+                </a:solidFill>
+                <a:effectLst/>
+                <a:latin typeface="Consolas" panose="020B0609020204030204" pitchFamily="49" charset="0"/>
+              </a:rPr>
+              <a:t>    }</a:t>
+            </a:r>
+          </a:p>
+          <a:p>
+            <a:pPr>
+              <a:lnSpc>
+                <a:spcPts val="1425"/>
+              </a:lnSpc>
+              <a:buNone/>
+            </a:pPr>
+            <a:r>
+              <a:rPr lang="en-US" altLang="ko-KR" sz="900" b="0">
+                <a:solidFill>
+                  <a:srgbClr val="BBBEBF"/>
+                </a:solidFill>
+                <a:effectLst/>
+                <a:latin typeface="Consolas" panose="020B0609020204030204" pitchFamily="49" charset="0"/>
+              </a:rPr>
+              <a:t>}</a:t>
+            </a:r>
+          </a:p>
+        </p:txBody>
+      </p:sp>
+      <p:sp>
+        <p:nvSpPr>
+          <p:cNvPr id="8" name="직사각형 7">
+            <a:extLst>
+              <a:ext uri="{FF2B5EF4-FFF2-40B4-BE49-F238E27FC236}">
+                <a16:creationId xmlns:a16="http://schemas.microsoft.com/office/drawing/2014/main" id="{1148A36E-4085-7EDA-D6F3-3290B4A3FFC4}"/>
+              </a:ext>
+            </a:extLst>
+          </p:cNvPr>
+          <p:cNvSpPr/>
+          <p:nvPr/>
+        </p:nvSpPr>
+        <p:spPr>
+          <a:xfrm>
+            <a:off x="7150608" y="3666744"/>
+            <a:ext cx="2348846" cy="1792224"/>
+          </a:xfrm>
+          <a:prstGeom prst="rect">
+            <a:avLst/>
+          </a:prstGeom>
+        </p:spPr>
+        <p:style>
+          <a:lnRef idx="2">
+            <a:schemeClr val="accent1">
+              <a:shade val="15000"/>
+            </a:schemeClr>
+          </a:lnRef>
+          <a:fillRef idx="1">
+            <a:schemeClr val="accent1"/>
+          </a:fillRef>
+          <a:effectRef idx="0">
+            <a:schemeClr val="accent1"/>
+          </a:effectRef>
+          <a:fontRef idx="minor">
+            <a:schemeClr val="lt1"/>
+          </a:fontRef>
+        </p:style>
+        <p:txBody>
+          <a:bodyPr rtlCol="0" anchor="ctr"/>
+          <a:lstStyle/>
+          <a:p>
+            <a:pPr algn="ctr"/>
+            <a:r>
+              <a:rPr lang="en-US" altLang="ko-KR"/>
+              <a:t>toBodilesssEntity()</a:t>
+            </a:r>
+            <a:br>
+              <a:rPr lang="en-US" altLang="ko-KR"/>
+            </a:br>
+            <a:r>
+              <a:rPr lang="ko-KR" altLang="en-US"/>
+              <a:t>응답 </a:t>
+            </a:r>
+            <a:r>
+              <a:rPr lang="en-US" altLang="ko-KR"/>
+              <a:t>Body </a:t>
+            </a:r>
+            <a:r>
+              <a:rPr lang="ko-KR" altLang="en-US"/>
+              <a:t>없음을 나타냄</a:t>
+            </a:r>
+          </a:p>
+        </p:txBody>
+      </p:sp>
+    </p:spTree>
+    <p:extLst>
+      <p:ext uri="{BB962C8B-B14F-4D97-AF65-F5344CB8AC3E}">
+        <p14:creationId xmlns:p14="http://schemas.microsoft.com/office/powerpoint/2010/main" val="3071662146"/>
+      </p:ext>
+    </p:extLst>
+  </p:cSld>
+  <p:clrMapOvr>
+    <a:masterClrMapping/>
+  </p:clrMapOvr>
+</p:sld>
+</file>
+
+<file path=ppt/slides/slide15.xml><?xml version="1.0" encoding="utf-8"?>
+<p:sld xmlns:a="http://schemas.openxmlformats.org/drawingml/2006/main" xmlns:r="http://schemas.openxmlformats.org/officeDocument/2006/relationships" xmlns:p="http://schemas.openxmlformats.org/presentationml/2006/main">
+  <p:cSld>
+    <p:spTree>
+      <p:nvGrpSpPr>
+        <p:cNvPr id="1" name=""/>
+        <p:cNvGrpSpPr/>
+        <p:nvPr/>
+      </p:nvGrpSpPr>
+      <p:grpSpPr>
+        <a:xfrm>
+          <a:off x="0" y="0"/>
+          <a:ext cx="0" cy="0"/>
+          <a:chOff x="0" y="0"/>
+          <a:chExt cx="0" cy="0"/>
+        </a:xfrm>
+      </p:grpSpPr>
+      <p:sp>
+        <p:nvSpPr>
+          <p:cNvPr id="2" name="제목 1">
+            <a:extLst>
+              <a:ext uri="{FF2B5EF4-FFF2-40B4-BE49-F238E27FC236}">
+                <a16:creationId xmlns:a16="http://schemas.microsoft.com/office/drawing/2014/main" id="{6D36547D-9AFF-4438-9387-B5BEC82B74C0}"/>
+              </a:ext>
+            </a:extLst>
+          </p:cNvPr>
+          <p:cNvSpPr>
+            <a:spLocks noGrp="1"/>
+          </p:cNvSpPr>
+          <p:nvPr>
+            <p:ph type="title"/>
+          </p:nvPr>
+        </p:nvSpPr>
+        <p:spPr/>
+        <p:txBody>
+          <a:bodyPr>
+            <a:normAutofit/>
+          </a:bodyPr>
+          <a:lstStyle/>
+          <a:p>
+            <a:r>
+              <a:rPr lang="ko-KR" altLang="en-US" sz="4000"/>
+              <a:t>사용자 서비스 </a:t>
+            </a:r>
+            <a:r>
+              <a:rPr lang="en-US" altLang="ko-KR" sz="4000"/>
+              <a:t>– </a:t>
+            </a:r>
+            <a:r>
+              <a:rPr lang="ko-KR" altLang="en-US" sz="4000"/>
+              <a:t>회원가입 로직 수정</a:t>
+            </a:r>
+            <a:r>
+              <a:rPr lang="en-US" altLang="ko-KR" sz="4000"/>
+              <a:t>(</a:t>
+            </a:r>
+            <a:r>
+              <a:rPr lang="ko-KR" altLang="en-US" sz="4000"/>
+              <a:t>서비스</a:t>
+            </a:r>
+            <a:r>
+              <a:rPr lang="en-US" altLang="ko-KR" sz="4000"/>
+              <a:t>)</a:t>
+            </a:r>
+            <a:endParaRPr lang="ko-KR" altLang="en-US" sz="4000"/>
+          </a:p>
+        </p:txBody>
+      </p:sp>
+      <p:sp>
+        <p:nvSpPr>
+          <p:cNvPr id="4" name="TextBox 3">
+            <a:extLst>
+              <a:ext uri="{FF2B5EF4-FFF2-40B4-BE49-F238E27FC236}">
+                <a16:creationId xmlns:a16="http://schemas.microsoft.com/office/drawing/2014/main" id="{04E2E455-E3FB-10F9-D717-0B1471A29225}"/>
+              </a:ext>
+            </a:extLst>
+          </p:cNvPr>
+          <p:cNvSpPr txBox="1"/>
+          <p:nvPr/>
+        </p:nvSpPr>
+        <p:spPr>
+          <a:xfrm>
+            <a:off x="3056382" y="1891906"/>
+            <a:ext cx="4597146" cy="2248051"/>
+          </a:xfrm>
+          <a:prstGeom prst="rect">
+            <a:avLst/>
+          </a:prstGeom>
+          <a:solidFill>
+            <a:schemeClr val="tx1"/>
+          </a:solidFill>
+        </p:spPr>
+        <p:txBody>
+          <a:bodyPr wrap="square">
+            <a:spAutoFit/>
+          </a:bodyPr>
+          <a:lstStyle/>
+          <a:p>
+            <a:pPr>
+              <a:lnSpc>
+                <a:spcPts val="1425"/>
+              </a:lnSpc>
+              <a:buNone/>
+            </a:pPr>
+            <a:r>
+              <a:rPr lang="en-US" altLang="ko-KR" sz="1000" b="0">
+                <a:solidFill>
+                  <a:srgbClr val="BBBEBF"/>
+                </a:solidFill>
+                <a:effectLst/>
+                <a:latin typeface="Consolas" panose="020B0609020204030204" pitchFamily="49" charset="0"/>
+              </a:rPr>
+              <a:t>    @</a:t>
+            </a:r>
+            <a:r>
+              <a:rPr lang="en-US" altLang="ko-KR" sz="1000" b="0">
+                <a:solidFill>
+                  <a:srgbClr val="4EC9B0"/>
+                </a:solidFill>
+                <a:effectLst/>
+                <a:latin typeface="Consolas" panose="020B0609020204030204" pitchFamily="49" charset="0"/>
+              </a:rPr>
+              <a:t>Transactional</a:t>
+            </a:r>
+            <a:endParaRPr lang="en-US" altLang="ko-KR" sz="1000" b="0">
+              <a:solidFill>
+                <a:srgbClr val="BBBEBF"/>
+              </a:solidFill>
+              <a:effectLst/>
+              <a:latin typeface="Consolas" panose="020B0609020204030204" pitchFamily="49" charset="0"/>
+            </a:endParaRPr>
+          </a:p>
+          <a:p>
+            <a:pPr>
+              <a:lnSpc>
+                <a:spcPts val="1425"/>
+              </a:lnSpc>
+              <a:buNone/>
+            </a:pPr>
+            <a:r>
+              <a:rPr lang="en-US" altLang="ko-KR" sz="1000" b="0">
+                <a:solidFill>
+                  <a:srgbClr val="BBBEBF"/>
+                </a:solidFill>
+                <a:effectLst/>
+                <a:latin typeface="Consolas" panose="020B0609020204030204" pitchFamily="49" charset="0"/>
+              </a:rPr>
+              <a:t>    </a:t>
+            </a:r>
+            <a:r>
+              <a:rPr lang="en-US" altLang="ko-KR" sz="1000" b="0">
+                <a:solidFill>
+                  <a:srgbClr val="569CD6"/>
+                </a:solidFill>
+                <a:effectLst/>
+                <a:latin typeface="Consolas" panose="020B0609020204030204" pitchFamily="49" charset="0"/>
+              </a:rPr>
+              <a:t>public</a:t>
+            </a:r>
+            <a:r>
+              <a:rPr lang="en-US" altLang="ko-KR" sz="1000" b="0">
+                <a:solidFill>
+                  <a:srgbClr val="BBBEBF"/>
+                </a:solidFill>
+                <a:effectLst/>
+                <a:latin typeface="Consolas" panose="020B0609020204030204" pitchFamily="49" charset="0"/>
+              </a:rPr>
+              <a:t> </a:t>
+            </a:r>
+            <a:r>
+              <a:rPr lang="en-US" altLang="ko-KR" sz="1000" b="0">
+                <a:solidFill>
+                  <a:srgbClr val="4EC9B0"/>
+                </a:solidFill>
+                <a:effectLst/>
+                <a:latin typeface="Consolas" panose="020B0609020204030204" pitchFamily="49" charset="0"/>
+              </a:rPr>
+              <a:t>void</a:t>
+            </a:r>
+            <a:r>
+              <a:rPr lang="en-US" altLang="ko-KR" sz="1000" b="0">
+                <a:solidFill>
+                  <a:srgbClr val="BBBEBF"/>
+                </a:solidFill>
+                <a:effectLst/>
+                <a:latin typeface="Consolas" panose="020B0609020204030204" pitchFamily="49" charset="0"/>
+              </a:rPr>
+              <a:t> </a:t>
+            </a:r>
+            <a:r>
+              <a:rPr lang="en-US" altLang="ko-KR" sz="1000" b="0">
+                <a:solidFill>
+                  <a:srgbClr val="D2A8FF"/>
+                </a:solidFill>
+                <a:effectLst/>
+                <a:latin typeface="Consolas" panose="020B0609020204030204" pitchFamily="49" charset="0"/>
+              </a:rPr>
+              <a:t>signUp</a:t>
+            </a:r>
+            <a:r>
+              <a:rPr lang="en-US" altLang="ko-KR" sz="1000" b="0">
+                <a:solidFill>
+                  <a:srgbClr val="BBBEBF"/>
+                </a:solidFill>
+                <a:effectLst/>
+                <a:latin typeface="Consolas" panose="020B0609020204030204" pitchFamily="49" charset="0"/>
+              </a:rPr>
+              <a:t>(</a:t>
+            </a:r>
+            <a:r>
+              <a:rPr lang="en-US" altLang="ko-KR" sz="1000" b="0">
+                <a:solidFill>
+                  <a:srgbClr val="4EC9B0"/>
+                </a:solidFill>
+                <a:effectLst/>
+                <a:latin typeface="Consolas" panose="020B0609020204030204" pitchFamily="49" charset="0"/>
+              </a:rPr>
+              <a:t>SignUpRequestDto</a:t>
+            </a:r>
+            <a:r>
+              <a:rPr lang="en-US" altLang="ko-KR" sz="1000" b="0">
+                <a:solidFill>
+                  <a:srgbClr val="BBBEBF"/>
+                </a:solidFill>
+                <a:effectLst/>
+                <a:latin typeface="Consolas" panose="020B0609020204030204" pitchFamily="49" charset="0"/>
+              </a:rPr>
+              <a:t> </a:t>
+            </a:r>
+            <a:r>
+              <a:rPr lang="en-US" altLang="ko-KR" sz="1000" b="0">
+                <a:solidFill>
+                  <a:srgbClr val="FFA657"/>
+                </a:solidFill>
+                <a:effectLst/>
+                <a:latin typeface="Consolas" panose="020B0609020204030204" pitchFamily="49" charset="0"/>
+              </a:rPr>
+              <a:t>signUpRequestDto</a:t>
+            </a:r>
+            <a:r>
+              <a:rPr lang="en-US" altLang="ko-KR" sz="1000" b="0">
+                <a:solidFill>
+                  <a:srgbClr val="BBBEBF"/>
+                </a:solidFill>
+                <a:effectLst/>
+                <a:latin typeface="Consolas" panose="020B0609020204030204" pitchFamily="49" charset="0"/>
+              </a:rPr>
+              <a:t>) {</a:t>
+            </a:r>
+          </a:p>
+          <a:p>
+            <a:pPr>
+              <a:lnSpc>
+                <a:spcPts val="1425"/>
+              </a:lnSpc>
+              <a:buNone/>
+            </a:pPr>
+            <a:r>
+              <a:rPr lang="en-US" altLang="ko-KR" sz="1000" b="0">
+                <a:solidFill>
+                  <a:srgbClr val="BBBEBF"/>
+                </a:solidFill>
+                <a:effectLst/>
+                <a:latin typeface="Consolas" panose="020B0609020204030204" pitchFamily="49" charset="0"/>
+              </a:rPr>
+              <a:t>        </a:t>
+            </a:r>
+            <a:r>
+              <a:rPr lang="en-US" altLang="ko-KR" sz="1000" b="0">
+                <a:solidFill>
+                  <a:srgbClr val="4EC9B0"/>
+                </a:solidFill>
+                <a:effectLst/>
+                <a:latin typeface="Consolas" panose="020B0609020204030204" pitchFamily="49" charset="0"/>
+              </a:rPr>
+              <a:t>User</a:t>
+            </a:r>
+            <a:r>
+              <a:rPr lang="en-US" altLang="ko-KR" sz="1000" b="0">
+                <a:solidFill>
+                  <a:srgbClr val="FFA657"/>
+                </a:solidFill>
+                <a:effectLst/>
+                <a:latin typeface="Consolas" panose="020B0609020204030204" pitchFamily="49" charset="0"/>
+              </a:rPr>
+              <a:t> </a:t>
+            </a:r>
+            <a:r>
+              <a:rPr lang="en-US" altLang="ko-KR" sz="1000" b="0">
+                <a:solidFill>
+                  <a:srgbClr val="C9D1D9"/>
+                </a:solidFill>
+                <a:effectLst/>
+                <a:latin typeface="Consolas" panose="020B0609020204030204" pitchFamily="49" charset="0"/>
+              </a:rPr>
+              <a:t>user</a:t>
+            </a:r>
+            <a:r>
+              <a:rPr lang="en-US" altLang="ko-KR" sz="1000" b="0">
+                <a:solidFill>
+                  <a:srgbClr val="FFA657"/>
+                </a:solidFill>
+                <a:effectLst/>
+                <a:latin typeface="Consolas" panose="020B0609020204030204" pitchFamily="49" charset="0"/>
+              </a:rPr>
+              <a:t> </a:t>
+            </a:r>
+            <a:r>
+              <a:rPr lang="en-US" altLang="ko-KR" sz="1000" b="0">
+                <a:solidFill>
+                  <a:srgbClr val="D4D4D4"/>
+                </a:solidFill>
+                <a:effectLst/>
+                <a:latin typeface="Consolas" panose="020B0609020204030204" pitchFamily="49" charset="0"/>
+              </a:rPr>
+              <a:t>=</a:t>
+            </a:r>
+            <a:r>
+              <a:rPr lang="en-US" altLang="ko-KR" sz="1000" b="0">
+                <a:solidFill>
+                  <a:srgbClr val="BBBEBF"/>
+                </a:solidFill>
+                <a:effectLst/>
+                <a:latin typeface="Consolas" panose="020B0609020204030204" pitchFamily="49" charset="0"/>
+              </a:rPr>
+              <a:t> </a:t>
+            </a:r>
+            <a:r>
+              <a:rPr lang="en-US" altLang="ko-KR" sz="1000" b="0">
+                <a:solidFill>
+                  <a:srgbClr val="C586C0"/>
+                </a:solidFill>
+                <a:effectLst/>
+                <a:latin typeface="Consolas" panose="020B0609020204030204" pitchFamily="49" charset="0"/>
+              </a:rPr>
+              <a:t>new</a:t>
+            </a:r>
+            <a:r>
+              <a:rPr lang="en-US" altLang="ko-KR" sz="1000" b="0">
+                <a:solidFill>
+                  <a:srgbClr val="BBBEBF"/>
+                </a:solidFill>
+                <a:effectLst/>
+                <a:latin typeface="Consolas" panose="020B0609020204030204" pitchFamily="49" charset="0"/>
+              </a:rPr>
+              <a:t> </a:t>
+            </a:r>
+            <a:r>
+              <a:rPr lang="en-US" altLang="ko-KR" sz="1000" b="0">
+                <a:solidFill>
+                  <a:srgbClr val="D2A8FF"/>
+                </a:solidFill>
+                <a:effectLst/>
+                <a:latin typeface="Consolas" panose="020B0609020204030204" pitchFamily="49" charset="0"/>
+              </a:rPr>
+              <a:t>User</a:t>
+            </a:r>
+            <a:r>
+              <a:rPr lang="en-US" altLang="ko-KR" sz="1000" b="0">
+                <a:solidFill>
+                  <a:srgbClr val="BBBEBF"/>
+                </a:solidFill>
+                <a:effectLst/>
+                <a:latin typeface="Consolas" panose="020B0609020204030204" pitchFamily="49" charset="0"/>
+              </a:rPr>
+              <a:t>(</a:t>
+            </a:r>
+          </a:p>
+          <a:p>
+            <a:pPr>
+              <a:lnSpc>
+                <a:spcPts val="1425"/>
+              </a:lnSpc>
+              <a:buNone/>
+            </a:pPr>
+            <a:r>
+              <a:rPr lang="en-US" altLang="ko-KR" sz="1000" b="0">
+                <a:solidFill>
+                  <a:srgbClr val="BBBEBF"/>
+                </a:solidFill>
+                <a:effectLst/>
+                <a:latin typeface="Consolas" panose="020B0609020204030204" pitchFamily="49" charset="0"/>
+              </a:rPr>
+              <a:t>            </a:t>
+            </a:r>
+            <a:r>
+              <a:rPr lang="en-US" altLang="ko-KR" sz="1000" b="0">
+                <a:solidFill>
+                  <a:srgbClr val="FFA657"/>
+                </a:solidFill>
+                <a:effectLst/>
+                <a:latin typeface="Consolas" panose="020B0609020204030204" pitchFamily="49" charset="0"/>
+              </a:rPr>
+              <a:t>signUpRequestDto</a:t>
+            </a:r>
+            <a:r>
+              <a:rPr lang="en-US" altLang="ko-KR" sz="1000" b="0">
+                <a:solidFill>
+                  <a:srgbClr val="BBBEBF"/>
+                </a:solidFill>
+                <a:effectLst/>
+                <a:latin typeface="Consolas" panose="020B0609020204030204" pitchFamily="49" charset="0"/>
+              </a:rPr>
+              <a:t>.</a:t>
+            </a:r>
+            <a:r>
+              <a:rPr lang="en-US" altLang="ko-KR" sz="1000" b="0">
+                <a:solidFill>
+                  <a:srgbClr val="D2A8FF"/>
+                </a:solidFill>
+                <a:effectLst/>
+                <a:latin typeface="Consolas" panose="020B0609020204030204" pitchFamily="49" charset="0"/>
+              </a:rPr>
+              <a:t>getEmail</a:t>
+            </a:r>
+            <a:r>
+              <a:rPr lang="en-US" altLang="ko-KR" sz="1000" b="0">
+                <a:solidFill>
+                  <a:srgbClr val="BBBEBF"/>
+                </a:solidFill>
+                <a:effectLst/>
+                <a:latin typeface="Consolas" panose="020B0609020204030204" pitchFamily="49" charset="0"/>
+              </a:rPr>
+              <a:t>(),</a:t>
+            </a:r>
+          </a:p>
+          <a:p>
+            <a:pPr>
+              <a:lnSpc>
+                <a:spcPts val="1425"/>
+              </a:lnSpc>
+              <a:buNone/>
+            </a:pPr>
+            <a:r>
+              <a:rPr lang="en-US" altLang="ko-KR" sz="1000" b="0">
+                <a:solidFill>
+                  <a:srgbClr val="BBBEBF"/>
+                </a:solidFill>
+                <a:effectLst/>
+                <a:latin typeface="Consolas" panose="020B0609020204030204" pitchFamily="49" charset="0"/>
+              </a:rPr>
+              <a:t>            </a:t>
+            </a:r>
+            <a:r>
+              <a:rPr lang="en-US" altLang="ko-KR" sz="1000" b="0">
+                <a:solidFill>
+                  <a:srgbClr val="FFA657"/>
+                </a:solidFill>
+                <a:effectLst/>
+                <a:latin typeface="Consolas" panose="020B0609020204030204" pitchFamily="49" charset="0"/>
+              </a:rPr>
+              <a:t>signUpRequestDto</a:t>
+            </a:r>
+            <a:r>
+              <a:rPr lang="en-US" altLang="ko-KR" sz="1000" b="0">
+                <a:solidFill>
+                  <a:srgbClr val="BBBEBF"/>
+                </a:solidFill>
+                <a:effectLst/>
+                <a:latin typeface="Consolas" panose="020B0609020204030204" pitchFamily="49" charset="0"/>
+              </a:rPr>
+              <a:t>.</a:t>
+            </a:r>
+            <a:r>
+              <a:rPr lang="en-US" altLang="ko-KR" sz="1000" b="0">
+                <a:solidFill>
+                  <a:srgbClr val="D2A8FF"/>
+                </a:solidFill>
+                <a:effectLst/>
+                <a:latin typeface="Consolas" panose="020B0609020204030204" pitchFamily="49" charset="0"/>
+              </a:rPr>
+              <a:t>getName</a:t>
+            </a:r>
+            <a:r>
+              <a:rPr lang="en-US" altLang="ko-KR" sz="1000" b="0">
+                <a:solidFill>
+                  <a:srgbClr val="BBBEBF"/>
+                </a:solidFill>
+                <a:effectLst/>
+                <a:latin typeface="Consolas" panose="020B0609020204030204" pitchFamily="49" charset="0"/>
+              </a:rPr>
+              <a:t>(),</a:t>
+            </a:r>
+          </a:p>
+          <a:p>
+            <a:pPr>
+              <a:lnSpc>
+                <a:spcPts val="1425"/>
+              </a:lnSpc>
+              <a:buNone/>
+            </a:pPr>
+            <a:r>
+              <a:rPr lang="en-US" altLang="ko-KR" sz="1000" b="0">
+                <a:solidFill>
+                  <a:srgbClr val="BBBEBF"/>
+                </a:solidFill>
+                <a:effectLst/>
+                <a:latin typeface="Consolas" panose="020B0609020204030204" pitchFamily="49" charset="0"/>
+              </a:rPr>
+              <a:t>            </a:t>
+            </a:r>
+            <a:r>
+              <a:rPr lang="en-US" altLang="ko-KR" sz="1000" b="0">
+                <a:solidFill>
+                  <a:srgbClr val="FFA657"/>
+                </a:solidFill>
+                <a:effectLst/>
+                <a:latin typeface="Consolas" panose="020B0609020204030204" pitchFamily="49" charset="0"/>
+              </a:rPr>
+              <a:t>signUpRequestDto</a:t>
+            </a:r>
+            <a:r>
+              <a:rPr lang="en-US" altLang="ko-KR" sz="1000" b="0">
+                <a:solidFill>
+                  <a:srgbClr val="BBBEBF"/>
+                </a:solidFill>
+                <a:effectLst/>
+                <a:latin typeface="Consolas" panose="020B0609020204030204" pitchFamily="49" charset="0"/>
+              </a:rPr>
+              <a:t>.</a:t>
+            </a:r>
+            <a:r>
+              <a:rPr lang="en-US" altLang="ko-KR" sz="1000" b="0">
+                <a:solidFill>
+                  <a:srgbClr val="D2A8FF"/>
+                </a:solidFill>
+                <a:effectLst/>
+                <a:latin typeface="Consolas" panose="020B0609020204030204" pitchFamily="49" charset="0"/>
+              </a:rPr>
+              <a:t>getPassword</a:t>
+            </a:r>
+            <a:r>
+              <a:rPr lang="en-US" altLang="ko-KR" sz="1000" b="0">
+                <a:solidFill>
+                  <a:srgbClr val="BBBEBF"/>
+                </a:solidFill>
+                <a:effectLst/>
+                <a:latin typeface="Consolas" panose="020B0609020204030204" pitchFamily="49" charset="0"/>
+              </a:rPr>
+              <a:t>()</a:t>
+            </a:r>
+          </a:p>
+          <a:p>
+            <a:pPr>
+              <a:lnSpc>
+                <a:spcPts val="1425"/>
+              </a:lnSpc>
+              <a:buNone/>
+            </a:pPr>
+            <a:r>
+              <a:rPr lang="en-US" altLang="ko-KR" sz="1000" b="0">
+                <a:solidFill>
+                  <a:srgbClr val="BBBEBF"/>
+                </a:solidFill>
+                <a:effectLst/>
+                <a:latin typeface="Consolas" panose="020B0609020204030204" pitchFamily="49" charset="0"/>
+              </a:rPr>
+              <a:t>        );</a:t>
+            </a:r>
+          </a:p>
+          <a:p>
+            <a:pPr>
+              <a:lnSpc>
+                <a:spcPts val="1425"/>
+              </a:lnSpc>
+              <a:buNone/>
+            </a:pPr>
+            <a:r>
+              <a:rPr lang="en-US" altLang="ko-KR" sz="1000" b="0">
+                <a:solidFill>
+                  <a:srgbClr val="BBBEBF"/>
+                </a:solidFill>
+                <a:effectLst/>
+                <a:latin typeface="Consolas" panose="020B0609020204030204" pitchFamily="49" charset="0"/>
+              </a:rPr>
+              <a:t>        </a:t>
+            </a:r>
+            <a:r>
+              <a:rPr lang="en-US" altLang="ko-KR" sz="1000" b="0">
+                <a:solidFill>
+                  <a:srgbClr val="4EC9B0"/>
+                </a:solidFill>
+                <a:effectLst/>
+                <a:latin typeface="Consolas" panose="020B0609020204030204" pitchFamily="49" charset="0"/>
+              </a:rPr>
+              <a:t>User</a:t>
+            </a:r>
+            <a:r>
+              <a:rPr lang="en-US" altLang="ko-KR" sz="1000" b="0">
+                <a:solidFill>
+                  <a:srgbClr val="FFA657"/>
+                </a:solidFill>
+                <a:effectLst/>
+                <a:latin typeface="Consolas" panose="020B0609020204030204" pitchFamily="49" charset="0"/>
+              </a:rPr>
+              <a:t> </a:t>
+            </a:r>
+            <a:r>
+              <a:rPr lang="en-US" altLang="ko-KR" sz="1000" b="0">
+                <a:solidFill>
+                  <a:srgbClr val="C9D1D9"/>
+                </a:solidFill>
+                <a:effectLst/>
+                <a:latin typeface="Consolas" panose="020B0609020204030204" pitchFamily="49" charset="0"/>
+              </a:rPr>
+              <a:t>savedUser</a:t>
+            </a:r>
+            <a:r>
+              <a:rPr lang="en-US" altLang="ko-KR" sz="1000" b="0">
+                <a:solidFill>
+                  <a:srgbClr val="FFA657"/>
+                </a:solidFill>
+                <a:effectLst/>
+                <a:latin typeface="Consolas" panose="020B0609020204030204" pitchFamily="49" charset="0"/>
+              </a:rPr>
+              <a:t> </a:t>
+            </a:r>
+            <a:r>
+              <a:rPr lang="en-US" altLang="ko-KR" sz="1000" b="0">
+                <a:solidFill>
+                  <a:srgbClr val="D4D4D4"/>
+                </a:solidFill>
+                <a:effectLst/>
+                <a:latin typeface="Consolas" panose="020B0609020204030204" pitchFamily="49" charset="0"/>
+              </a:rPr>
+              <a:t>=</a:t>
+            </a:r>
+            <a:r>
+              <a:rPr lang="en-US" altLang="ko-KR" sz="1000" b="0">
+                <a:solidFill>
+                  <a:srgbClr val="BBBEBF"/>
+                </a:solidFill>
+                <a:effectLst/>
+                <a:latin typeface="Consolas" panose="020B0609020204030204" pitchFamily="49" charset="0"/>
+              </a:rPr>
+              <a:t> </a:t>
+            </a:r>
+            <a:r>
+              <a:rPr lang="en-US" altLang="ko-KR" sz="1000" b="0">
+                <a:solidFill>
+                  <a:srgbClr val="79C0FF"/>
+                </a:solidFill>
+                <a:effectLst/>
+                <a:latin typeface="Consolas" panose="020B0609020204030204" pitchFamily="49" charset="0"/>
+              </a:rPr>
+              <a:t>this</a:t>
+            </a:r>
+            <a:r>
+              <a:rPr lang="en-US" altLang="ko-KR" sz="1000" b="0">
+                <a:solidFill>
+                  <a:srgbClr val="BBBEBF"/>
+                </a:solidFill>
+                <a:effectLst/>
+                <a:latin typeface="Consolas" panose="020B0609020204030204" pitchFamily="49" charset="0"/>
+              </a:rPr>
+              <a:t>.</a:t>
+            </a:r>
+            <a:r>
+              <a:rPr lang="en-US" altLang="ko-KR" sz="1000" b="0">
+                <a:solidFill>
+                  <a:srgbClr val="79C0FF"/>
+                </a:solidFill>
+                <a:effectLst/>
+                <a:latin typeface="Consolas" panose="020B0609020204030204" pitchFamily="49" charset="0"/>
+              </a:rPr>
+              <a:t>userRepository</a:t>
+            </a:r>
+            <a:r>
+              <a:rPr lang="en-US" altLang="ko-KR" sz="1000" b="0">
+                <a:solidFill>
+                  <a:srgbClr val="BBBEBF"/>
+                </a:solidFill>
+                <a:effectLst/>
+                <a:latin typeface="Consolas" panose="020B0609020204030204" pitchFamily="49" charset="0"/>
+              </a:rPr>
+              <a:t>.</a:t>
+            </a:r>
+            <a:r>
+              <a:rPr lang="en-US" altLang="ko-KR" sz="1000" b="0">
+                <a:solidFill>
+                  <a:srgbClr val="D2A8FF"/>
+                </a:solidFill>
+                <a:effectLst/>
+                <a:latin typeface="Consolas" panose="020B0609020204030204" pitchFamily="49" charset="0"/>
+              </a:rPr>
+              <a:t>save</a:t>
+            </a:r>
+            <a:r>
+              <a:rPr lang="en-US" altLang="ko-KR" sz="1000" b="0">
+                <a:solidFill>
+                  <a:srgbClr val="BBBEBF"/>
+                </a:solidFill>
+                <a:effectLst/>
+                <a:latin typeface="Consolas" panose="020B0609020204030204" pitchFamily="49" charset="0"/>
+              </a:rPr>
+              <a:t>(</a:t>
+            </a:r>
+            <a:r>
+              <a:rPr lang="en-US" altLang="ko-KR" sz="1000" b="0">
+                <a:solidFill>
+                  <a:srgbClr val="C9D1D9"/>
+                </a:solidFill>
+                <a:effectLst/>
+                <a:latin typeface="Consolas" panose="020B0609020204030204" pitchFamily="49" charset="0"/>
+              </a:rPr>
+              <a:t>user</a:t>
+            </a:r>
+            <a:r>
+              <a:rPr lang="en-US" altLang="ko-KR" sz="1000" b="0">
+                <a:solidFill>
+                  <a:srgbClr val="BBBEBF"/>
+                </a:solidFill>
+                <a:effectLst/>
+                <a:latin typeface="Consolas" panose="020B0609020204030204" pitchFamily="49" charset="0"/>
+              </a:rPr>
+              <a:t>);</a:t>
+            </a:r>
+          </a:p>
+          <a:p>
+            <a:pPr>
+              <a:lnSpc>
+                <a:spcPts val="1425"/>
+              </a:lnSpc>
+              <a:buNone/>
+            </a:pPr>
+            <a:r>
+              <a:rPr lang="en-US" altLang="ko-KR" sz="1000" b="0">
+                <a:solidFill>
+                  <a:srgbClr val="BBBEBF"/>
+                </a:solidFill>
+                <a:effectLst/>
+                <a:latin typeface="Consolas" panose="020B0609020204030204" pitchFamily="49" charset="0"/>
+              </a:rPr>
+              <a:t>        </a:t>
+            </a:r>
+          </a:p>
+          <a:p>
+            <a:pPr>
+              <a:lnSpc>
+                <a:spcPts val="1425"/>
+              </a:lnSpc>
+              <a:buNone/>
+            </a:pPr>
+            <a:r>
+              <a:rPr lang="en-US" altLang="ko-KR" sz="1000" b="0">
+                <a:solidFill>
+                  <a:srgbClr val="BBBEBF"/>
+                </a:solidFill>
+                <a:effectLst/>
+                <a:latin typeface="Consolas" panose="020B0609020204030204" pitchFamily="49" charset="0"/>
+              </a:rPr>
+              <a:t>        </a:t>
+            </a:r>
+            <a:r>
+              <a:rPr lang="en-US" altLang="ko-KR" sz="1000" b="0">
+                <a:solidFill>
+                  <a:srgbClr val="8B949E"/>
+                </a:solidFill>
+                <a:effectLst/>
+                <a:latin typeface="Consolas" panose="020B0609020204030204" pitchFamily="49" charset="0"/>
+              </a:rPr>
+              <a:t>// </a:t>
+            </a:r>
+            <a:r>
+              <a:rPr lang="ko-KR" altLang="en-US" sz="1000" b="0">
+                <a:solidFill>
+                  <a:srgbClr val="8B949E"/>
+                </a:solidFill>
+                <a:effectLst/>
+                <a:latin typeface="Consolas" panose="020B0609020204030204" pitchFamily="49" charset="0"/>
+              </a:rPr>
+              <a:t>회원가입 포인트 </a:t>
+            </a:r>
+            <a:r>
+              <a:rPr lang="en-US" altLang="ko-KR" sz="1000" b="0">
+                <a:solidFill>
+                  <a:srgbClr val="8B949E"/>
+                </a:solidFill>
+                <a:effectLst/>
+                <a:latin typeface="Consolas" panose="020B0609020204030204" pitchFamily="49" charset="0"/>
+              </a:rPr>
+              <a:t>1000</a:t>
+            </a:r>
+            <a:r>
+              <a:rPr lang="ko-KR" altLang="en-US" sz="1000" b="0">
+                <a:solidFill>
+                  <a:srgbClr val="8B949E"/>
+                </a:solidFill>
+                <a:effectLst/>
+                <a:latin typeface="Consolas" panose="020B0609020204030204" pitchFamily="49" charset="0"/>
+              </a:rPr>
+              <a:t>점 적립</a:t>
+            </a:r>
+            <a:endParaRPr lang="ko-KR" altLang="en-US" sz="1000" b="0">
+              <a:solidFill>
+                <a:srgbClr val="BBBEBF"/>
+              </a:solidFill>
+              <a:effectLst/>
+              <a:latin typeface="Consolas" panose="020B0609020204030204" pitchFamily="49" charset="0"/>
+            </a:endParaRPr>
+          </a:p>
+          <a:p>
+            <a:pPr>
+              <a:lnSpc>
+                <a:spcPts val="1425"/>
+              </a:lnSpc>
+              <a:buNone/>
+            </a:pPr>
+            <a:r>
+              <a:rPr lang="ko-KR" altLang="en-US" sz="1000" b="0">
+                <a:solidFill>
+                  <a:srgbClr val="BBBEBF"/>
+                </a:solidFill>
+                <a:effectLst/>
+                <a:latin typeface="Consolas" panose="020B0609020204030204" pitchFamily="49" charset="0"/>
+              </a:rPr>
+              <a:t>        </a:t>
+            </a:r>
+            <a:r>
+              <a:rPr lang="en-US" altLang="ko-KR" sz="1000" b="0">
+                <a:solidFill>
+                  <a:srgbClr val="79C0FF"/>
+                </a:solidFill>
+                <a:effectLst/>
+                <a:latin typeface="Consolas" panose="020B0609020204030204" pitchFamily="49" charset="0"/>
+              </a:rPr>
+              <a:t>pointClient</a:t>
+            </a:r>
+            <a:r>
+              <a:rPr lang="en-US" altLang="ko-KR" sz="1000" b="0">
+                <a:solidFill>
+                  <a:srgbClr val="BBBEBF"/>
+                </a:solidFill>
+                <a:effectLst/>
+                <a:latin typeface="Consolas" panose="020B0609020204030204" pitchFamily="49" charset="0"/>
+              </a:rPr>
+              <a:t>.</a:t>
+            </a:r>
+            <a:r>
+              <a:rPr lang="en-US" altLang="ko-KR" sz="1000" b="0">
+                <a:solidFill>
+                  <a:srgbClr val="D2A8FF"/>
+                </a:solidFill>
+                <a:effectLst/>
+                <a:latin typeface="Consolas" panose="020B0609020204030204" pitchFamily="49" charset="0"/>
+              </a:rPr>
+              <a:t>addPoints</a:t>
+            </a:r>
+            <a:r>
+              <a:rPr lang="en-US" altLang="ko-KR" sz="1000" b="0">
+                <a:solidFill>
+                  <a:srgbClr val="BBBEBF"/>
+                </a:solidFill>
+                <a:effectLst/>
+                <a:latin typeface="Consolas" panose="020B0609020204030204" pitchFamily="49" charset="0"/>
+              </a:rPr>
+              <a:t>(</a:t>
+            </a:r>
+            <a:r>
+              <a:rPr lang="en-US" altLang="ko-KR" sz="1000" b="0">
+                <a:solidFill>
+                  <a:srgbClr val="C9D1D9"/>
+                </a:solidFill>
+                <a:effectLst/>
+                <a:latin typeface="Consolas" panose="020B0609020204030204" pitchFamily="49" charset="0"/>
+              </a:rPr>
+              <a:t>savedUser</a:t>
+            </a:r>
+            <a:r>
+              <a:rPr lang="en-US" altLang="ko-KR" sz="1000" b="0">
+                <a:solidFill>
+                  <a:srgbClr val="BBBEBF"/>
+                </a:solidFill>
+                <a:effectLst/>
+                <a:latin typeface="Consolas" panose="020B0609020204030204" pitchFamily="49" charset="0"/>
+              </a:rPr>
+              <a:t>.</a:t>
+            </a:r>
+            <a:r>
+              <a:rPr lang="en-US" altLang="ko-KR" sz="1000" b="0">
+                <a:solidFill>
+                  <a:srgbClr val="D2A8FF"/>
+                </a:solidFill>
+                <a:effectLst/>
+                <a:latin typeface="Consolas" panose="020B0609020204030204" pitchFamily="49" charset="0"/>
+              </a:rPr>
+              <a:t>getUserId</a:t>
+            </a:r>
+            <a:r>
+              <a:rPr lang="en-US" altLang="ko-KR" sz="1000" b="0">
+                <a:solidFill>
+                  <a:srgbClr val="BBBEBF"/>
+                </a:solidFill>
+                <a:effectLst/>
+                <a:latin typeface="Consolas" panose="020B0609020204030204" pitchFamily="49" charset="0"/>
+              </a:rPr>
+              <a:t>(), </a:t>
+            </a:r>
+            <a:r>
+              <a:rPr lang="en-US" altLang="ko-KR" sz="1000" b="0">
+                <a:solidFill>
+                  <a:srgbClr val="B5CEA8"/>
+                </a:solidFill>
+                <a:effectLst/>
+                <a:latin typeface="Consolas" panose="020B0609020204030204" pitchFamily="49" charset="0"/>
+              </a:rPr>
+              <a:t>1000</a:t>
+            </a:r>
+            <a:r>
+              <a:rPr lang="en-US" altLang="ko-KR" sz="1000" b="0">
+                <a:solidFill>
+                  <a:srgbClr val="BBBEBF"/>
+                </a:solidFill>
+                <a:effectLst/>
+                <a:latin typeface="Consolas" panose="020B0609020204030204" pitchFamily="49" charset="0"/>
+              </a:rPr>
+              <a:t>);</a:t>
+            </a:r>
+          </a:p>
+          <a:p>
+            <a:pPr>
+              <a:lnSpc>
+                <a:spcPts val="1425"/>
+              </a:lnSpc>
+              <a:buNone/>
+            </a:pPr>
+            <a:r>
+              <a:rPr lang="en-US" altLang="ko-KR" sz="1000" b="0">
+                <a:solidFill>
+                  <a:srgbClr val="BBBEBF"/>
+                </a:solidFill>
+                <a:effectLst/>
+                <a:latin typeface="Consolas" panose="020B0609020204030204" pitchFamily="49" charset="0"/>
+              </a:rPr>
+              <a:t>    }</a:t>
+            </a:r>
+          </a:p>
+        </p:txBody>
+      </p:sp>
+      <p:grpSp>
+        <p:nvGrpSpPr>
+          <p:cNvPr id="8" name="그룹 7">
+            <a:extLst>
+              <a:ext uri="{FF2B5EF4-FFF2-40B4-BE49-F238E27FC236}">
+                <a16:creationId xmlns:a16="http://schemas.microsoft.com/office/drawing/2014/main" id="{3194747D-5F7C-C60F-59E7-096C0FBC92AD}"/>
+              </a:ext>
+            </a:extLst>
+          </p:cNvPr>
+          <p:cNvGrpSpPr/>
+          <p:nvPr/>
+        </p:nvGrpSpPr>
+        <p:grpSpPr>
+          <a:xfrm>
+            <a:off x="438556" y="1891906"/>
+            <a:ext cx="2372056" cy="3810532"/>
+            <a:chOff x="904900" y="2029066"/>
+            <a:chExt cx="2372056" cy="3810532"/>
+          </a:xfrm>
+        </p:grpSpPr>
+        <p:pic>
+          <p:nvPicPr>
+            <p:cNvPr id="6" name="그림 5">
+              <a:extLst>
+                <a:ext uri="{FF2B5EF4-FFF2-40B4-BE49-F238E27FC236}">
+                  <a16:creationId xmlns:a16="http://schemas.microsoft.com/office/drawing/2014/main" id="{7EBA0269-AFFF-FBAC-A231-4E0CEBC5EC40}"/>
+                </a:ext>
+              </a:extLst>
+            </p:cNvPr>
+            <p:cNvPicPr>
+              <a:picLocks noChangeAspect="1"/>
+            </p:cNvPicPr>
+            <p:nvPr/>
+          </p:nvPicPr>
+          <p:blipFill>
+            <a:blip r:embed="rId2"/>
+            <a:stretch>
+              <a:fillRect/>
+            </a:stretch>
+          </p:blipFill>
+          <p:spPr>
+            <a:xfrm>
+              <a:off x="904900" y="2029066"/>
+              <a:ext cx="2372056" cy="3810532"/>
+            </a:xfrm>
+            <a:prstGeom prst="rect">
+              <a:avLst/>
+            </a:prstGeom>
+          </p:spPr>
+        </p:pic>
+        <p:sp>
+          <p:nvSpPr>
+            <p:cNvPr id="7" name="직사각형 6">
+              <a:extLst>
+                <a:ext uri="{FF2B5EF4-FFF2-40B4-BE49-F238E27FC236}">
+                  <a16:creationId xmlns:a16="http://schemas.microsoft.com/office/drawing/2014/main" id="{0275E715-84C8-5493-CA89-654738BB0FC1}"/>
+                </a:ext>
+              </a:extLst>
+            </p:cNvPr>
+            <p:cNvSpPr/>
+            <p:nvPr/>
+          </p:nvSpPr>
+          <p:spPr>
+            <a:xfrm>
+              <a:off x="1307592" y="5404104"/>
+              <a:ext cx="1124712" cy="219456"/>
+            </a:xfrm>
+            <a:prstGeom prst="rect">
+              <a:avLst/>
+            </a:prstGeom>
+            <a:noFill/>
+            <a:ln>
+              <a:solidFill>
+                <a:srgbClr val="FF0000"/>
+              </a:solidFill>
+            </a:ln>
+          </p:spPr>
+          <p:style>
+            <a:lnRef idx="2">
+              <a:schemeClr val="accent1">
+                <a:shade val="15000"/>
+              </a:schemeClr>
+            </a:lnRef>
+            <a:fillRef idx="1">
+              <a:schemeClr val="accent1"/>
+            </a:fillRef>
+            <a:effectRef idx="0">
+              <a:schemeClr val="accent1"/>
+            </a:effectRef>
+            <a:fontRef idx="minor">
+              <a:schemeClr val="lt1"/>
+            </a:fontRef>
+          </p:style>
+          <p:txBody>
+            <a:bodyPr rtlCol="0" anchor="ctr"/>
+            <a:lstStyle/>
+            <a:p>
+              <a:pPr algn="ctr"/>
+              <a:endParaRPr lang="ko-KR" altLang="en-US"/>
+            </a:p>
+          </p:txBody>
+        </p:sp>
+      </p:grpSp>
+      <p:sp>
+        <p:nvSpPr>
+          <p:cNvPr id="9" name="TextBox 8">
+            <a:extLst>
+              <a:ext uri="{FF2B5EF4-FFF2-40B4-BE49-F238E27FC236}">
+                <a16:creationId xmlns:a16="http://schemas.microsoft.com/office/drawing/2014/main" id="{E19AA20D-8DE0-58F4-0A56-EEA1B2E1F161}"/>
+              </a:ext>
+            </a:extLst>
+          </p:cNvPr>
+          <p:cNvSpPr txBox="1"/>
+          <p:nvPr/>
+        </p:nvSpPr>
+        <p:spPr>
+          <a:xfrm>
+            <a:off x="3056382" y="4261104"/>
+            <a:ext cx="8455914" cy="646331"/>
+          </a:xfrm>
+          <a:prstGeom prst="rect">
+            <a:avLst/>
+          </a:prstGeom>
+          <a:noFill/>
+        </p:spPr>
+        <p:txBody>
+          <a:bodyPr wrap="square" rtlCol="0">
+            <a:spAutoFit/>
+          </a:bodyPr>
+          <a:lstStyle/>
+          <a:p>
+            <a:pPr marL="342900" indent="-342900">
+              <a:buAutoNum type="arabicPeriod"/>
+            </a:pPr>
+            <a:r>
+              <a:rPr lang="en-US" altLang="ko-KR"/>
+              <a:t>DataJpa</a:t>
+            </a:r>
+            <a:r>
+              <a:rPr lang="ko-KR" altLang="en-US"/>
+              <a:t>로 회원가입 정보저장 </a:t>
+            </a:r>
+            <a:r>
+              <a:rPr lang="en-US" altLang="ko-KR">
+                <a:sym typeface="Wingdings" panose="05000000000000000000" pitchFamily="2" charset="2"/>
+              </a:rPr>
+              <a:t> UserId </a:t>
+            </a:r>
+            <a:r>
+              <a:rPr lang="ko-KR" altLang="en-US">
+                <a:sym typeface="Wingdings" panose="05000000000000000000" pitchFamily="2" charset="2"/>
+              </a:rPr>
+              <a:t>생성</a:t>
+            </a:r>
+            <a:endParaRPr lang="en-US" altLang="ko-KR">
+              <a:sym typeface="Wingdings" panose="05000000000000000000" pitchFamily="2" charset="2"/>
+            </a:endParaRPr>
+          </a:p>
+          <a:p>
+            <a:pPr marL="342900" indent="-342900">
+              <a:buAutoNum type="arabicPeriod"/>
+            </a:pPr>
+            <a:r>
+              <a:rPr lang="en-US" altLang="ko-KR">
+                <a:sym typeface="Wingdings" panose="05000000000000000000" pitchFamily="2" charset="2"/>
+              </a:rPr>
+              <a:t>Point </a:t>
+            </a:r>
+            <a:r>
+              <a:rPr lang="ko-KR" altLang="en-US">
+                <a:sym typeface="Wingdings" panose="05000000000000000000" pitchFamily="2" charset="2"/>
+              </a:rPr>
+              <a:t>추가 </a:t>
+            </a:r>
+            <a:r>
+              <a:rPr lang="en-US" altLang="ko-KR">
+                <a:sym typeface="Wingdings" panose="05000000000000000000" pitchFamily="2" charset="2"/>
+              </a:rPr>
+              <a:t>API </a:t>
+            </a:r>
+            <a:r>
+              <a:rPr lang="ko-KR" altLang="en-US">
+                <a:sym typeface="Wingdings" panose="05000000000000000000" pitchFamily="2" charset="2"/>
+              </a:rPr>
+              <a:t>요청 </a:t>
+            </a:r>
+            <a:endParaRPr lang="ko-KR" altLang="en-US"/>
+          </a:p>
+        </p:txBody>
+      </p:sp>
+    </p:spTree>
+    <p:extLst>
+      <p:ext uri="{BB962C8B-B14F-4D97-AF65-F5344CB8AC3E}">
+        <p14:creationId xmlns:p14="http://schemas.microsoft.com/office/powerpoint/2010/main" val="578395473"/>
+      </p:ext>
+    </p:extLst>
+  </p:cSld>
+  <p:clrMapOvr>
+    <a:masterClrMapping/>
+  </p:clrMapOvr>
+</p:sld>
+</file>
+
+<file path=ppt/slides/slide16.xml><?xml version="1.0" encoding="utf-8"?>
+<p:sld xmlns:a="http://schemas.openxmlformats.org/drawingml/2006/main" xmlns:r="http://schemas.openxmlformats.org/officeDocument/2006/relationships" xmlns:p="http://schemas.openxmlformats.org/presentationml/2006/main">
+  <p:cSld>
+    <p:spTree>
+      <p:nvGrpSpPr>
+        <p:cNvPr id="1" name=""/>
+        <p:cNvGrpSpPr/>
+        <p:nvPr/>
+      </p:nvGrpSpPr>
+      <p:grpSpPr>
+        <a:xfrm>
+          <a:off x="0" y="0"/>
+          <a:ext cx="0" cy="0"/>
+          <a:chOff x="0" y="0"/>
+          <a:chExt cx="0" cy="0"/>
+        </a:xfrm>
+      </p:grpSpPr>
+      <p:sp>
+        <p:nvSpPr>
+          <p:cNvPr id="2" name="제목 1">
+            <a:extLst>
+              <a:ext uri="{FF2B5EF4-FFF2-40B4-BE49-F238E27FC236}">
+                <a16:creationId xmlns:a16="http://schemas.microsoft.com/office/drawing/2014/main" id="{1C087A79-FD72-DED2-EBD2-5ADA75BA81D0}"/>
+              </a:ext>
+            </a:extLst>
+          </p:cNvPr>
+          <p:cNvSpPr>
+            <a:spLocks noGrp="1"/>
+          </p:cNvSpPr>
+          <p:nvPr>
+            <p:ph type="title"/>
+          </p:nvPr>
+        </p:nvSpPr>
+        <p:spPr/>
+        <p:txBody>
+          <a:bodyPr/>
+          <a:lstStyle/>
+          <a:p>
+            <a:r>
+              <a:rPr lang="ko-KR" altLang="en-US"/>
+              <a:t>사용자 회원가입 </a:t>
+            </a:r>
+            <a:r>
+              <a:rPr lang="en-US" altLang="ko-KR"/>
+              <a:t>API </a:t>
+            </a:r>
+            <a:r>
+              <a:rPr lang="ko-KR" altLang="en-US"/>
+              <a:t>테스트 </a:t>
+            </a:r>
+          </a:p>
+        </p:txBody>
+      </p:sp>
+      <p:pic>
+        <p:nvPicPr>
+          <p:cNvPr id="4" name="그림 3">
+            <a:extLst>
+              <a:ext uri="{FF2B5EF4-FFF2-40B4-BE49-F238E27FC236}">
+                <a16:creationId xmlns:a16="http://schemas.microsoft.com/office/drawing/2014/main" id="{F1B0AB9C-6C6B-6049-60A0-E0DA2A2BDFFF}"/>
+              </a:ext>
+            </a:extLst>
+          </p:cNvPr>
+          <p:cNvPicPr>
+            <a:picLocks noChangeAspect="1"/>
+          </p:cNvPicPr>
+          <p:nvPr/>
+        </p:nvPicPr>
+        <p:blipFill>
+          <a:blip r:embed="rId2"/>
+          <a:stretch>
+            <a:fillRect/>
+          </a:stretch>
+        </p:blipFill>
+        <p:spPr>
+          <a:xfrm>
+            <a:off x="507492" y="1852998"/>
+            <a:ext cx="11177016" cy="2758379"/>
+          </a:xfrm>
+          <a:prstGeom prst="rect">
+            <a:avLst/>
+          </a:prstGeom>
+        </p:spPr>
+      </p:pic>
+      <p:pic>
+        <p:nvPicPr>
+          <p:cNvPr id="6" name="그림 5">
+            <a:extLst>
+              <a:ext uri="{FF2B5EF4-FFF2-40B4-BE49-F238E27FC236}">
+                <a16:creationId xmlns:a16="http://schemas.microsoft.com/office/drawing/2014/main" id="{FB54ED8A-7A97-3B2C-C3FA-3DB6F9B1751F}"/>
+              </a:ext>
+            </a:extLst>
+          </p:cNvPr>
+          <p:cNvPicPr>
+            <a:picLocks noChangeAspect="1"/>
+          </p:cNvPicPr>
+          <p:nvPr/>
+        </p:nvPicPr>
+        <p:blipFill>
+          <a:blip r:embed="rId3"/>
+          <a:stretch>
+            <a:fillRect/>
+          </a:stretch>
+        </p:blipFill>
+        <p:spPr>
+          <a:xfrm>
+            <a:off x="5388343" y="4750389"/>
+            <a:ext cx="2000529" cy="1295581"/>
+          </a:xfrm>
+          <a:prstGeom prst="rect">
+            <a:avLst/>
+          </a:prstGeom>
+          <a:ln>
+            <a:solidFill>
+              <a:schemeClr val="tx1"/>
+            </a:solidFill>
+          </a:ln>
+        </p:spPr>
+      </p:pic>
+      <p:pic>
+        <p:nvPicPr>
+          <p:cNvPr id="8" name="그림 7">
+            <a:extLst>
+              <a:ext uri="{FF2B5EF4-FFF2-40B4-BE49-F238E27FC236}">
+                <a16:creationId xmlns:a16="http://schemas.microsoft.com/office/drawing/2014/main" id="{A35B8377-6605-A540-5C89-60652ECCF5E8}"/>
+              </a:ext>
+            </a:extLst>
+          </p:cNvPr>
+          <p:cNvPicPr>
+            <a:picLocks noChangeAspect="1"/>
+          </p:cNvPicPr>
+          <p:nvPr/>
+        </p:nvPicPr>
+        <p:blipFill>
+          <a:blip r:embed="rId4"/>
+          <a:stretch>
+            <a:fillRect/>
+          </a:stretch>
+        </p:blipFill>
+        <p:spPr>
+          <a:xfrm>
+            <a:off x="507492" y="4820321"/>
+            <a:ext cx="3153215" cy="971686"/>
+          </a:xfrm>
+          <a:prstGeom prst="rect">
+            <a:avLst/>
+          </a:prstGeom>
+          <a:ln>
+            <a:solidFill>
+              <a:schemeClr val="tx1"/>
+            </a:solidFill>
+          </a:ln>
+        </p:spPr>
+      </p:pic>
+      <p:sp>
+        <p:nvSpPr>
+          <p:cNvPr id="9" name="TextBox 8">
+            <a:extLst>
+              <a:ext uri="{FF2B5EF4-FFF2-40B4-BE49-F238E27FC236}">
+                <a16:creationId xmlns:a16="http://schemas.microsoft.com/office/drawing/2014/main" id="{0A917E96-4C08-4F9F-45BA-660D6502102B}"/>
+              </a:ext>
+            </a:extLst>
+          </p:cNvPr>
+          <p:cNvSpPr txBox="1"/>
+          <p:nvPr/>
+        </p:nvSpPr>
+        <p:spPr>
+          <a:xfrm>
+            <a:off x="507492" y="5861304"/>
+            <a:ext cx="3153215" cy="369332"/>
+          </a:xfrm>
+          <a:prstGeom prst="rect">
+            <a:avLst/>
+          </a:prstGeom>
+          <a:noFill/>
+        </p:spPr>
+        <p:txBody>
+          <a:bodyPr wrap="square" rtlCol="0">
+            <a:spAutoFit/>
+          </a:bodyPr>
+          <a:lstStyle/>
+          <a:p>
+            <a:r>
+              <a:rPr lang="en-US" altLang="ko-KR"/>
+              <a:t>User</a:t>
+            </a:r>
+            <a:endParaRPr lang="ko-KR" altLang="en-US"/>
+          </a:p>
+        </p:txBody>
+      </p:sp>
+      <p:sp>
+        <p:nvSpPr>
+          <p:cNvPr id="10" name="TextBox 9">
+            <a:extLst>
+              <a:ext uri="{FF2B5EF4-FFF2-40B4-BE49-F238E27FC236}">
+                <a16:creationId xmlns:a16="http://schemas.microsoft.com/office/drawing/2014/main" id="{E05FE7A0-40B4-8FD5-E60D-CAD719D65E0A}"/>
+              </a:ext>
+            </a:extLst>
+          </p:cNvPr>
+          <p:cNvSpPr txBox="1"/>
+          <p:nvPr/>
+        </p:nvSpPr>
+        <p:spPr>
+          <a:xfrm>
+            <a:off x="5388343" y="6045970"/>
+            <a:ext cx="3153215" cy="369332"/>
+          </a:xfrm>
+          <a:prstGeom prst="rect">
+            <a:avLst/>
+          </a:prstGeom>
+          <a:noFill/>
+        </p:spPr>
+        <p:txBody>
+          <a:bodyPr wrap="square" rtlCol="0">
+            <a:spAutoFit/>
+          </a:bodyPr>
+          <a:lstStyle/>
+          <a:p>
+            <a:r>
+              <a:rPr lang="en-US" altLang="ko-KR"/>
+              <a:t>Point</a:t>
+            </a:r>
+            <a:endParaRPr lang="ko-KR" altLang="en-US"/>
+          </a:p>
+        </p:txBody>
+      </p:sp>
+    </p:spTree>
+    <p:extLst>
+      <p:ext uri="{BB962C8B-B14F-4D97-AF65-F5344CB8AC3E}">
+        <p14:creationId xmlns:p14="http://schemas.microsoft.com/office/powerpoint/2010/main" val="3712383872"/>
+      </p:ext>
+    </p:extLst>
+  </p:cSld>
+  <p:clrMapOvr>
+    <a:masterClrMapping/>
+  </p:clrMapOvr>
+</p:sld>
+</file>
+
 <file path=ppt/slides/slide2.xml><?xml version="1.0" encoding="utf-8"?>
 <p:sld xmlns:a="http://schemas.openxmlformats.org/drawingml/2006/main" xmlns:r="http://schemas.openxmlformats.org/officeDocument/2006/relationships" xmlns:p="http://schemas.openxmlformats.org/presentationml/2006/main">
   <p:cSld>

--- a/msa-ppt/3. 데이터 쓰기 API 구현.pptx
+++ b/msa-ppt/3. 데이터 쓰기 API 구현.pptx
@@ -21,9 +21,21 @@
     <p:sldId id="269" r:id="rId15"/>
     <p:sldId id="270" r:id="rId16"/>
     <p:sldId id="272" r:id="rId17"/>
+    <p:sldId id="273" r:id="rId18"/>
+    <p:sldId id="275" r:id="rId19"/>
+    <p:sldId id="274" r:id="rId20"/>
+    <p:sldId id="276" r:id="rId21"/>
+    <p:sldId id="277" r:id="rId22"/>
+    <p:sldId id="278" r:id="rId23"/>
+    <p:sldId id="279" r:id="rId24"/>
+    <p:sldId id="280" r:id="rId25"/>
+    <p:sldId id="281" r:id="rId26"/>
+    <p:sldId id="282" r:id="rId27"/>
+    <p:sldId id="283" r:id="rId28"/>
+    <p:sldId id="284" r:id="rId29"/>
   </p:sldIdLst>
   <p:sldSz cx="12192000" cy="6858000"/>
-  <p:notesSz cx="6858000" cy="9144000"/>
+  <p:notesSz cx="7105650" cy="10236200"/>
   <p:defaultTextStyle>
     <a:defPPr>
       <a:defRPr lang="en-US"/>
@@ -152,6 +164,26 @@
             <p14:sldId id="269"/>
             <p14:sldId id="270"/>
             <p14:sldId id="272"/>
+          </p14:sldIdLst>
+        </p14:section>
+        <p14:section name="사용자 활동점수 추가 기능 작성" id="{7F3BBA6E-6F1F-4EFB-B2D5-CB038C08954A}">
+          <p14:sldIdLst>
+            <p14:sldId id="273"/>
+            <p14:sldId id="275"/>
+            <p14:sldId id="274"/>
+            <p14:sldId id="276"/>
+          </p14:sldIdLst>
+        </p14:section>
+        <p14:section name="게시글 작성 - 포인트 차감 -활동점수 증가" id="{CB8F645C-D920-4834-BC88-DBF545006503}">
+          <p14:sldIdLst>
+            <p14:sldId id="277"/>
+            <p14:sldId id="278"/>
+            <p14:sldId id="279"/>
+            <p14:sldId id="280"/>
+            <p14:sldId id="281"/>
+            <p14:sldId id="282"/>
+            <p14:sldId id="283"/>
+            <p14:sldId id="284"/>
           </p14:sldIdLst>
         </p14:section>
       </p14:sectionLst>
@@ -12694,6 +12726,2436 @@
 </p:sld>
 </file>
 
+<file path=ppt/slides/slide17.xml><?xml version="1.0" encoding="utf-8"?>
+<p:sld xmlns:a="http://schemas.openxmlformats.org/drawingml/2006/main" xmlns:r="http://schemas.openxmlformats.org/officeDocument/2006/relationships" xmlns:p="http://schemas.openxmlformats.org/presentationml/2006/main">
+  <p:cSld>
+    <p:spTree>
+      <p:nvGrpSpPr>
+        <p:cNvPr id="1" name=""/>
+        <p:cNvGrpSpPr/>
+        <p:nvPr/>
+      </p:nvGrpSpPr>
+      <p:grpSpPr>
+        <a:xfrm>
+          <a:off x="0" y="0"/>
+          <a:ext cx="0" cy="0"/>
+          <a:chOff x="0" y="0"/>
+          <a:chExt cx="0" cy="0"/>
+        </a:xfrm>
+      </p:grpSpPr>
+      <p:sp>
+        <p:nvSpPr>
+          <p:cNvPr id="2" name="제목 1">
+            <a:extLst>
+              <a:ext uri="{FF2B5EF4-FFF2-40B4-BE49-F238E27FC236}">
+                <a16:creationId xmlns:a16="http://schemas.microsoft.com/office/drawing/2014/main" id="{DB07902C-9E57-0355-04CA-9F8754C3DF12}"/>
+              </a:ext>
+            </a:extLst>
+          </p:cNvPr>
+          <p:cNvSpPr>
+            <a:spLocks noGrp="1"/>
+          </p:cNvSpPr>
+          <p:nvPr>
+            <p:ph type="title"/>
+          </p:nvPr>
+        </p:nvSpPr>
+        <p:spPr/>
+        <p:txBody>
+          <a:bodyPr/>
+          <a:lstStyle/>
+          <a:p>
+            <a:r>
+              <a:rPr lang="en-US" altLang="ko-KR"/>
+              <a:t>AddActivityScoreRequestDto </a:t>
+            </a:r>
+            <a:r>
+              <a:rPr lang="ko-KR" altLang="en-US"/>
+              <a:t>작성</a:t>
+            </a:r>
+          </a:p>
+        </p:txBody>
+      </p:sp>
+      <p:sp>
+        <p:nvSpPr>
+          <p:cNvPr id="4" name="TextBox 3">
+            <a:extLst>
+              <a:ext uri="{FF2B5EF4-FFF2-40B4-BE49-F238E27FC236}">
+                <a16:creationId xmlns:a16="http://schemas.microsoft.com/office/drawing/2014/main" id="{852CBF8B-7883-8368-C449-B91E9DE92F51}"/>
+              </a:ext>
+            </a:extLst>
+          </p:cNvPr>
+          <p:cNvSpPr txBox="1"/>
+          <p:nvPr/>
+        </p:nvSpPr>
+        <p:spPr>
+          <a:xfrm>
+            <a:off x="3705606" y="1854272"/>
+            <a:ext cx="5721858" cy="2964914"/>
+          </a:xfrm>
+          <a:prstGeom prst="rect">
+            <a:avLst/>
+          </a:prstGeom>
+          <a:solidFill>
+            <a:schemeClr val="tx1"/>
+          </a:solidFill>
+        </p:spPr>
+        <p:txBody>
+          <a:bodyPr wrap="square">
+            <a:spAutoFit/>
+          </a:bodyPr>
+          <a:lstStyle/>
+          <a:p>
+            <a:pPr>
+              <a:lnSpc>
+                <a:spcPts val="1425"/>
+              </a:lnSpc>
+              <a:buNone/>
+            </a:pPr>
+            <a:r>
+              <a:rPr lang="en-US" altLang="ko-KR" sz="1200" b="0">
+                <a:solidFill>
+                  <a:srgbClr val="569CD6"/>
+                </a:solidFill>
+                <a:effectLst/>
+                <a:latin typeface="Consolas" panose="020B0609020204030204" pitchFamily="49" charset="0"/>
+              </a:rPr>
+              <a:t>public</a:t>
+            </a:r>
+            <a:r>
+              <a:rPr lang="en-US" altLang="ko-KR" sz="1200" b="0">
+                <a:solidFill>
+                  <a:srgbClr val="BBBEBF"/>
+                </a:solidFill>
+                <a:effectLst/>
+                <a:latin typeface="Consolas" panose="020B0609020204030204" pitchFamily="49" charset="0"/>
+              </a:rPr>
+              <a:t> </a:t>
+            </a:r>
+            <a:r>
+              <a:rPr lang="en-US" altLang="ko-KR" sz="1200" b="0">
+                <a:solidFill>
+                  <a:srgbClr val="569CD6"/>
+                </a:solidFill>
+                <a:effectLst/>
+                <a:latin typeface="Consolas" panose="020B0609020204030204" pitchFamily="49" charset="0"/>
+              </a:rPr>
+              <a:t>class</a:t>
+            </a:r>
+            <a:r>
+              <a:rPr lang="en-US" altLang="ko-KR" sz="1200" b="0">
+                <a:solidFill>
+                  <a:srgbClr val="BBBEBF"/>
+                </a:solidFill>
+                <a:effectLst/>
+                <a:latin typeface="Consolas" panose="020B0609020204030204" pitchFamily="49" charset="0"/>
+              </a:rPr>
+              <a:t> </a:t>
+            </a:r>
+            <a:r>
+              <a:rPr lang="en-US" altLang="ko-KR" sz="1200" b="0">
+                <a:solidFill>
+                  <a:srgbClr val="4EC9B0"/>
+                </a:solidFill>
+                <a:effectLst/>
+                <a:latin typeface="Consolas" panose="020B0609020204030204" pitchFamily="49" charset="0"/>
+              </a:rPr>
+              <a:t>AddActivityScoreRequestDto</a:t>
+            </a:r>
+            <a:r>
+              <a:rPr lang="en-US" altLang="ko-KR" sz="1200" b="0">
+                <a:solidFill>
+                  <a:srgbClr val="BBBEBF"/>
+                </a:solidFill>
+                <a:effectLst/>
+                <a:latin typeface="Consolas" panose="020B0609020204030204" pitchFamily="49" charset="0"/>
+              </a:rPr>
+              <a:t> {</a:t>
+            </a:r>
+          </a:p>
+          <a:p>
+            <a:pPr>
+              <a:lnSpc>
+                <a:spcPts val="1425"/>
+              </a:lnSpc>
+              <a:buNone/>
+            </a:pPr>
+            <a:r>
+              <a:rPr lang="en-US" altLang="ko-KR" sz="1200" b="0">
+                <a:solidFill>
+                  <a:srgbClr val="BBBEBF"/>
+                </a:solidFill>
+                <a:effectLst/>
+                <a:latin typeface="Consolas" panose="020B0609020204030204" pitchFamily="49" charset="0"/>
+              </a:rPr>
+              <a:t>    </a:t>
+            </a:r>
+            <a:r>
+              <a:rPr lang="en-US" altLang="ko-KR" sz="1200" b="0">
+                <a:solidFill>
+                  <a:srgbClr val="569CD6"/>
+                </a:solidFill>
+                <a:effectLst/>
+                <a:latin typeface="Consolas" panose="020B0609020204030204" pitchFamily="49" charset="0"/>
+              </a:rPr>
+              <a:t>private</a:t>
+            </a:r>
+            <a:r>
+              <a:rPr lang="en-US" altLang="ko-KR" sz="1200" b="0">
+                <a:solidFill>
+                  <a:srgbClr val="BBBEBF"/>
+                </a:solidFill>
+                <a:effectLst/>
+                <a:latin typeface="Consolas" panose="020B0609020204030204" pitchFamily="49" charset="0"/>
+              </a:rPr>
+              <a:t> </a:t>
+            </a:r>
+            <a:r>
+              <a:rPr lang="en-US" altLang="ko-KR" sz="1200" b="0">
+                <a:solidFill>
+                  <a:srgbClr val="4EC9B0"/>
+                </a:solidFill>
+                <a:effectLst/>
+                <a:latin typeface="Consolas" panose="020B0609020204030204" pitchFamily="49" charset="0"/>
+              </a:rPr>
+              <a:t>Long</a:t>
+            </a:r>
+            <a:r>
+              <a:rPr lang="en-US" altLang="ko-KR" sz="1200" b="0">
+                <a:solidFill>
+                  <a:srgbClr val="FFA657"/>
+                </a:solidFill>
+                <a:effectLst/>
+                <a:latin typeface="Consolas" panose="020B0609020204030204" pitchFamily="49" charset="0"/>
+              </a:rPr>
+              <a:t> </a:t>
+            </a:r>
+            <a:r>
+              <a:rPr lang="en-US" altLang="ko-KR" sz="1200" b="0">
+                <a:solidFill>
+                  <a:srgbClr val="C9D1D9"/>
+                </a:solidFill>
+                <a:effectLst/>
+                <a:latin typeface="Consolas" panose="020B0609020204030204" pitchFamily="49" charset="0"/>
+              </a:rPr>
+              <a:t>userId</a:t>
+            </a:r>
+            <a:r>
+              <a:rPr lang="en-US" altLang="ko-KR" sz="1200" b="0">
+                <a:solidFill>
+                  <a:srgbClr val="BBBEBF"/>
+                </a:solidFill>
+                <a:effectLst/>
+                <a:latin typeface="Consolas" panose="020B0609020204030204" pitchFamily="49" charset="0"/>
+              </a:rPr>
+              <a:t>;</a:t>
+            </a:r>
+          </a:p>
+          <a:p>
+            <a:pPr>
+              <a:lnSpc>
+                <a:spcPts val="1425"/>
+              </a:lnSpc>
+              <a:buNone/>
+            </a:pPr>
+            <a:r>
+              <a:rPr lang="en-US" altLang="ko-KR" sz="1200" b="0">
+                <a:solidFill>
+                  <a:srgbClr val="BBBEBF"/>
+                </a:solidFill>
+                <a:effectLst/>
+                <a:latin typeface="Consolas" panose="020B0609020204030204" pitchFamily="49" charset="0"/>
+              </a:rPr>
+              <a:t>    </a:t>
+            </a:r>
+            <a:r>
+              <a:rPr lang="en-US" altLang="ko-KR" sz="1200" b="0">
+                <a:solidFill>
+                  <a:srgbClr val="569CD6"/>
+                </a:solidFill>
+                <a:effectLst/>
+                <a:latin typeface="Consolas" panose="020B0609020204030204" pitchFamily="49" charset="0"/>
+              </a:rPr>
+              <a:t>private</a:t>
+            </a:r>
+            <a:r>
+              <a:rPr lang="en-US" altLang="ko-KR" sz="1200" b="0">
+                <a:solidFill>
+                  <a:srgbClr val="BBBEBF"/>
+                </a:solidFill>
+                <a:effectLst/>
+                <a:latin typeface="Consolas" panose="020B0609020204030204" pitchFamily="49" charset="0"/>
+              </a:rPr>
+              <a:t> </a:t>
+            </a:r>
+            <a:r>
+              <a:rPr lang="en-US" altLang="ko-KR" sz="1200" b="0">
+                <a:solidFill>
+                  <a:srgbClr val="4EC9B0"/>
+                </a:solidFill>
+                <a:effectLst/>
+                <a:latin typeface="Consolas" panose="020B0609020204030204" pitchFamily="49" charset="0"/>
+              </a:rPr>
+              <a:t>int</a:t>
+            </a:r>
+            <a:r>
+              <a:rPr lang="en-US" altLang="ko-KR" sz="1200" b="0">
+                <a:solidFill>
+                  <a:srgbClr val="FFA657"/>
+                </a:solidFill>
+                <a:effectLst/>
+                <a:latin typeface="Consolas" panose="020B0609020204030204" pitchFamily="49" charset="0"/>
+              </a:rPr>
+              <a:t> </a:t>
+            </a:r>
+            <a:r>
+              <a:rPr lang="en-US" altLang="ko-KR" sz="1200" b="0">
+                <a:solidFill>
+                  <a:srgbClr val="C9D1D9"/>
+                </a:solidFill>
+                <a:effectLst/>
+                <a:latin typeface="Consolas" panose="020B0609020204030204" pitchFamily="49" charset="0"/>
+              </a:rPr>
+              <a:t>score</a:t>
+            </a:r>
+            <a:r>
+              <a:rPr lang="en-US" altLang="ko-KR" sz="1200" b="0">
+                <a:solidFill>
+                  <a:srgbClr val="BBBEBF"/>
+                </a:solidFill>
+                <a:effectLst/>
+                <a:latin typeface="Consolas" panose="020B0609020204030204" pitchFamily="49" charset="0"/>
+              </a:rPr>
+              <a:t>;</a:t>
+            </a:r>
+          </a:p>
+          <a:p>
+            <a:pPr>
+              <a:lnSpc>
+                <a:spcPts val="1425"/>
+              </a:lnSpc>
+              <a:buNone/>
+            </a:pPr>
+            <a:r>
+              <a:rPr lang="en-US" altLang="ko-KR" sz="1200" b="0">
+                <a:solidFill>
+                  <a:srgbClr val="BBBEBF"/>
+                </a:solidFill>
+                <a:effectLst/>
+                <a:latin typeface="Consolas" panose="020B0609020204030204" pitchFamily="49" charset="0"/>
+              </a:rPr>
+              <a:t>    </a:t>
+            </a:r>
+            <a:r>
+              <a:rPr lang="en-US" altLang="ko-KR" sz="1200" b="0">
+                <a:solidFill>
+                  <a:srgbClr val="569CD6"/>
+                </a:solidFill>
+                <a:effectLst/>
+                <a:latin typeface="Consolas" panose="020B0609020204030204" pitchFamily="49" charset="0"/>
+              </a:rPr>
+              <a:t>public</a:t>
+            </a:r>
+            <a:r>
+              <a:rPr lang="en-US" altLang="ko-KR" sz="1200" b="0">
+                <a:solidFill>
+                  <a:srgbClr val="BBBEBF"/>
+                </a:solidFill>
+                <a:effectLst/>
+                <a:latin typeface="Consolas" panose="020B0609020204030204" pitchFamily="49" charset="0"/>
+              </a:rPr>
+              <a:t> </a:t>
+            </a:r>
+            <a:r>
+              <a:rPr lang="en-US" altLang="ko-KR" sz="1200" b="0">
+                <a:solidFill>
+                  <a:srgbClr val="D2A8FF"/>
+                </a:solidFill>
+                <a:effectLst/>
+                <a:latin typeface="Consolas" panose="020B0609020204030204" pitchFamily="49" charset="0"/>
+              </a:rPr>
+              <a:t>AddActivityScoreRequestDto</a:t>
+            </a:r>
+            <a:r>
+              <a:rPr lang="en-US" altLang="ko-KR" sz="1200" b="0">
+                <a:solidFill>
+                  <a:srgbClr val="BBBEBF"/>
+                </a:solidFill>
+                <a:effectLst/>
+                <a:latin typeface="Consolas" panose="020B0609020204030204" pitchFamily="49" charset="0"/>
+              </a:rPr>
+              <a:t>(){}</a:t>
+            </a:r>
+          </a:p>
+          <a:p>
+            <a:pPr>
+              <a:lnSpc>
+                <a:spcPts val="1425"/>
+              </a:lnSpc>
+              <a:buNone/>
+            </a:pPr>
+            <a:r>
+              <a:rPr lang="en-US" altLang="ko-KR" sz="1200" b="0">
+                <a:solidFill>
+                  <a:srgbClr val="BBBEBF"/>
+                </a:solidFill>
+                <a:effectLst/>
+                <a:latin typeface="Consolas" panose="020B0609020204030204" pitchFamily="49" charset="0"/>
+              </a:rPr>
+              <a:t>    </a:t>
+            </a:r>
+            <a:r>
+              <a:rPr lang="en-US" altLang="ko-KR" sz="1200" b="0">
+                <a:solidFill>
+                  <a:srgbClr val="569CD6"/>
+                </a:solidFill>
+                <a:effectLst/>
+                <a:latin typeface="Consolas" panose="020B0609020204030204" pitchFamily="49" charset="0"/>
+              </a:rPr>
+              <a:t>public</a:t>
+            </a:r>
+            <a:r>
+              <a:rPr lang="en-US" altLang="ko-KR" sz="1200" b="0">
+                <a:solidFill>
+                  <a:srgbClr val="BBBEBF"/>
+                </a:solidFill>
+                <a:effectLst/>
+                <a:latin typeface="Consolas" panose="020B0609020204030204" pitchFamily="49" charset="0"/>
+              </a:rPr>
+              <a:t> </a:t>
+            </a:r>
+            <a:r>
+              <a:rPr lang="en-US" altLang="ko-KR" sz="1200" b="0">
+                <a:solidFill>
+                  <a:srgbClr val="D2A8FF"/>
+                </a:solidFill>
+                <a:effectLst/>
+                <a:latin typeface="Consolas" panose="020B0609020204030204" pitchFamily="49" charset="0"/>
+              </a:rPr>
+              <a:t>AddActivityScoreRequestDto</a:t>
+            </a:r>
+            <a:r>
+              <a:rPr lang="en-US" altLang="ko-KR" sz="1200" b="0">
+                <a:solidFill>
+                  <a:srgbClr val="BBBEBF"/>
+                </a:solidFill>
+                <a:effectLst/>
+                <a:latin typeface="Consolas" panose="020B0609020204030204" pitchFamily="49" charset="0"/>
+              </a:rPr>
+              <a:t>(</a:t>
+            </a:r>
+            <a:r>
+              <a:rPr lang="en-US" altLang="ko-KR" sz="1200" b="0">
+                <a:solidFill>
+                  <a:srgbClr val="4EC9B0"/>
+                </a:solidFill>
+                <a:effectLst/>
+                <a:latin typeface="Consolas" panose="020B0609020204030204" pitchFamily="49" charset="0"/>
+              </a:rPr>
+              <a:t>Long</a:t>
+            </a:r>
+            <a:r>
+              <a:rPr lang="en-US" altLang="ko-KR" sz="1200" b="0">
+                <a:solidFill>
+                  <a:srgbClr val="BBBEBF"/>
+                </a:solidFill>
+                <a:effectLst/>
+                <a:latin typeface="Consolas" panose="020B0609020204030204" pitchFamily="49" charset="0"/>
+              </a:rPr>
+              <a:t> </a:t>
+            </a:r>
+            <a:r>
+              <a:rPr lang="en-US" altLang="ko-KR" sz="1200" b="0">
+                <a:solidFill>
+                  <a:srgbClr val="FFA657"/>
+                </a:solidFill>
+                <a:effectLst/>
+                <a:latin typeface="Consolas" panose="020B0609020204030204" pitchFamily="49" charset="0"/>
+              </a:rPr>
+              <a:t>userId</a:t>
+            </a:r>
+            <a:r>
+              <a:rPr lang="en-US" altLang="ko-KR" sz="1200" b="0">
+                <a:solidFill>
+                  <a:srgbClr val="BBBEBF"/>
+                </a:solidFill>
+                <a:effectLst/>
+                <a:latin typeface="Consolas" panose="020B0609020204030204" pitchFamily="49" charset="0"/>
+              </a:rPr>
+              <a:t>, </a:t>
+            </a:r>
+            <a:r>
+              <a:rPr lang="en-US" altLang="ko-KR" sz="1200" b="0">
+                <a:solidFill>
+                  <a:srgbClr val="4EC9B0"/>
+                </a:solidFill>
+                <a:effectLst/>
+                <a:latin typeface="Consolas" panose="020B0609020204030204" pitchFamily="49" charset="0"/>
+              </a:rPr>
+              <a:t>int</a:t>
+            </a:r>
+            <a:r>
+              <a:rPr lang="en-US" altLang="ko-KR" sz="1200" b="0">
+                <a:solidFill>
+                  <a:srgbClr val="BBBEBF"/>
+                </a:solidFill>
+                <a:effectLst/>
+                <a:latin typeface="Consolas" panose="020B0609020204030204" pitchFamily="49" charset="0"/>
+              </a:rPr>
+              <a:t> </a:t>
+            </a:r>
+            <a:r>
+              <a:rPr lang="en-US" altLang="ko-KR" sz="1200" b="0">
+                <a:solidFill>
+                  <a:srgbClr val="FFA657"/>
+                </a:solidFill>
+                <a:effectLst/>
+                <a:latin typeface="Consolas" panose="020B0609020204030204" pitchFamily="49" charset="0"/>
+              </a:rPr>
+              <a:t>score</a:t>
+            </a:r>
+            <a:r>
+              <a:rPr lang="en-US" altLang="ko-KR" sz="1200" b="0">
+                <a:solidFill>
+                  <a:srgbClr val="BBBEBF"/>
+                </a:solidFill>
+                <a:effectLst/>
+                <a:latin typeface="Consolas" panose="020B0609020204030204" pitchFamily="49" charset="0"/>
+              </a:rPr>
+              <a:t>) {</a:t>
+            </a:r>
+          </a:p>
+          <a:p>
+            <a:pPr>
+              <a:lnSpc>
+                <a:spcPts val="1425"/>
+              </a:lnSpc>
+              <a:buNone/>
+            </a:pPr>
+            <a:r>
+              <a:rPr lang="en-US" altLang="ko-KR" sz="1200" b="0">
+                <a:solidFill>
+                  <a:srgbClr val="BBBEBF"/>
+                </a:solidFill>
+                <a:effectLst/>
+                <a:latin typeface="Consolas" panose="020B0609020204030204" pitchFamily="49" charset="0"/>
+              </a:rPr>
+              <a:t>        </a:t>
+            </a:r>
+            <a:r>
+              <a:rPr lang="en-US" altLang="ko-KR" sz="1200" b="0">
+                <a:solidFill>
+                  <a:srgbClr val="79C0FF"/>
+                </a:solidFill>
+                <a:effectLst/>
+                <a:latin typeface="Consolas" panose="020B0609020204030204" pitchFamily="49" charset="0"/>
+              </a:rPr>
+              <a:t>this</a:t>
+            </a:r>
+            <a:r>
+              <a:rPr lang="en-US" altLang="ko-KR" sz="1200" b="0">
+                <a:solidFill>
+                  <a:srgbClr val="BBBEBF"/>
+                </a:solidFill>
+                <a:effectLst/>
+                <a:latin typeface="Consolas" panose="020B0609020204030204" pitchFamily="49" charset="0"/>
+              </a:rPr>
+              <a:t>.</a:t>
+            </a:r>
+            <a:r>
+              <a:rPr lang="en-US" altLang="ko-KR" sz="1200" b="0">
+                <a:solidFill>
+                  <a:srgbClr val="C9D1D9"/>
+                </a:solidFill>
+                <a:effectLst/>
+                <a:latin typeface="Consolas" panose="020B0609020204030204" pitchFamily="49" charset="0"/>
+              </a:rPr>
+              <a:t>userId</a:t>
+            </a:r>
+            <a:r>
+              <a:rPr lang="en-US" altLang="ko-KR" sz="1200" b="0">
+                <a:solidFill>
+                  <a:srgbClr val="BBBEBF"/>
+                </a:solidFill>
+                <a:effectLst/>
+                <a:latin typeface="Consolas" panose="020B0609020204030204" pitchFamily="49" charset="0"/>
+              </a:rPr>
+              <a:t> </a:t>
+            </a:r>
+            <a:r>
+              <a:rPr lang="en-US" altLang="ko-KR" sz="1200" b="0">
+                <a:solidFill>
+                  <a:srgbClr val="D4D4D4"/>
+                </a:solidFill>
+                <a:effectLst/>
+                <a:latin typeface="Consolas" panose="020B0609020204030204" pitchFamily="49" charset="0"/>
+              </a:rPr>
+              <a:t>=</a:t>
+            </a:r>
+            <a:r>
+              <a:rPr lang="en-US" altLang="ko-KR" sz="1200" b="0">
+                <a:solidFill>
+                  <a:srgbClr val="BBBEBF"/>
+                </a:solidFill>
+                <a:effectLst/>
+                <a:latin typeface="Consolas" panose="020B0609020204030204" pitchFamily="49" charset="0"/>
+              </a:rPr>
+              <a:t> </a:t>
+            </a:r>
+            <a:r>
+              <a:rPr lang="en-US" altLang="ko-KR" sz="1200" b="0">
+                <a:solidFill>
+                  <a:srgbClr val="FFA657"/>
+                </a:solidFill>
+                <a:effectLst/>
+                <a:latin typeface="Consolas" panose="020B0609020204030204" pitchFamily="49" charset="0"/>
+              </a:rPr>
+              <a:t>userId</a:t>
+            </a:r>
+            <a:r>
+              <a:rPr lang="en-US" altLang="ko-KR" sz="1200" b="0">
+                <a:solidFill>
+                  <a:srgbClr val="BBBEBF"/>
+                </a:solidFill>
+                <a:effectLst/>
+                <a:latin typeface="Consolas" panose="020B0609020204030204" pitchFamily="49" charset="0"/>
+              </a:rPr>
+              <a:t>;</a:t>
+            </a:r>
+          </a:p>
+          <a:p>
+            <a:pPr>
+              <a:lnSpc>
+                <a:spcPts val="1425"/>
+              </a:lnSpc>
+              <a:buNone/>
+            </a:pPr>
+            <a:r>
+              <a:rPr lang="en-US" altLang="ko-KR" sz="1200" b="0">
+                <a:solidFill>
+                  <a:srgbClr val="BBBEBF"/>
+                </a:solidFill>
+                <a:effectLst/>
+                <a:latin typeface="Consolas" panose="020B0609020204030204" pitchFamily="49" charset="0"/>
+              </a:rPr>
+              <a:t>        </a:t>
+            </a:r>
+            <a:r>
+              <a:rPr lang="en-US" altLang="ko-KR" sz="1200" b="0">
+                <a:solidFill>
+                  <a:srgbClr val="79C0FF"/>
+                </a:solidFill>
+                <a:effectLst/>
+                <a:latin typeface="Consolas" panose="020B0609020204030204" pitchFamily="49" charset="0"/>
+              </a:rPr>
+              <a:t>this</a:t>
+            </a:r>
+            <a:r>
+              <a:rPr lang="en-US" altLang="ko-KR" sz="1200" b="0">
+                <a:solidFill>
+                  <a:srgbClr val="BBBEBF"/>
+                </a:solidFill>
+                <a:effectLst/>
+                <a:latin typeface="Consolas" panose="020B0609020204030204" pitchFamily="49" charset="0"/>
+              </a:rPr>
+              <a:t>.</a:t>
+            </a:r>
+            <a:r>
+              <a:rPr lang="en-US" altLang="ko-KR" sz="1200" b="0">
+                <a:solidFill>
+                  <a:srgbClr val="C9D1D9"/>
+                </a:solidFill>
+                <a:effectLst/>
+                <a:latin typeface="Consolas" panose="020B0609020204030204" pitchFamily="49" charset="0"/>
+              </a:rPr>
+              <a:t>score</a:t>
+            </a:r>
+            <a:r>
+              <a:rPr lang="en-US" altLang="ko-KR" sz="1200" b="0">
+                <a:solidFill>
+                  <a:srgbClr val="BBBEBF"/>
+                </a:solidFill>
+                <a:effectLst/>
+                <a:latin typeface="Consolas" panose="020B0609020204030204" pitchFamily="49" charset="0"/>
+              </a:rPr>
+              <a:t> </a:t>
+            </a:r>
+            <a:r>
+              <a:rPr lang="en-US" altLang="ko-KR" sz="1200" b="0">
+                <a:solidFill>
+                  <a:srgbClr val="D4D4D4"/>
+                </a:solidFill>
+                <a:effectLst/>
+                <a:latin typeface="Consolas" panose="020B0609020204030204" pitchFamily="49" charset="0"/>
+              </a:rPr>
+              <a:t>=</a:t>
+            </a:r>
+            <a:r>
+              <a:rPr lang="en-US" altLang="ko-KR" sz="1200" b="0">
+                <a:solidFill>
+                  <a:srgbClr val="BBBEBF"/>
+                </a:solidFill>
+                <a:effectLst/>
+                <a:latin typeface="Consolas" panose="020B0609020204030204" pitchFamily="49" charset="0"/>
+              </a:rPr>
+              <a:t> </a:t>
+            </a:r>
+            <a:r>
+              <a:rPr lang="en-US" altLang="ko-KR" sz="1200" b="0">
+                <a:solidFill>
+                  <a:srgbClr val="FFA657"/>
+                </a:solidFill>
+                <a:effectLst/>
+                <a:latin typeface="Consolas" panose="020B0609020204030204" pitchFamily="49" charset="0"/>
+              </a:rPr>
+              <a:t>score</a:t>
+            </a:r>
+            <a:r>
+              <a:rPr lang="en-US" altLang="ko-KR" sz="1200" b="0">
+                <a:solidFill>
+                  <a:srgbClr val="BBBEBF"/>
+                </a:solidFill>
+                <a:effectLst/>
+                <a:latin typeface="Consolas" panose="020B0609020204030204" pitchFamily="49" charset="0"/>
+              </a:rPr>
+              <a:t>;</a:t>
+            </a:r>
+          </a:p>
+          <a:p>
+            <a:pPr>
+              <a:lnSpc>
+                <a:spcPts val="1425"/>
+              </a:lnSpc>
+              <a:buNone/>
+            </a:pPr>
+            <a:r>
+              <a:rPr lang="en-US" altLang="ko-KR" sz="1200" b="0">
+                <a:solidFill>
+                  <a:srgbClr val="BBBEBF"/>
+                </a:solidFill>
+                <a:effectLst/>
+                <a:latin typeface="Consolas" panose="020B0609020204030204" pitchFamily="49" charset="0"/>
+              </a:rPr>
+              <a:t>    }</a:t>
+            </a:r>
+          </a:p>
+          <a:p>
+            <a:pPr>
+              <a:lnSpc>
+                <a:spcPts val="1425"/>
+              </a:lnSpc>
+              <a:buNone/>
+            </a:pPr>
+            <a:r>
+              <a:rPr lang="en-US" altLang="ko-KR" sz="1200" b="0">
+                <a:solidFill>
+                  <a:srgbClr val="BBBEBF"/>
+                </a:solidFill>
+                <a:effectLst/>
+                <a:latin typeface="Consolas" panose="020B0609020204030204" pitchFamily="49" charset="0"/>
+              </a:rPr>
+              <a:t>    </a:t>
+            </a:r>
+            <a:r>
+              <a:rPr lang="en-US" altLang="ko-KR" sz="1200" b="0">
+                <a:solidFill>
+                  <a:srgbClr val="569CD6"/>
+                </a:solidFill>
+                <a:effectLst/>
+                <a:latin typeface="Consolas" panose="020B0609020204030204" pitchFamily="49" charset="0"/>
+              </a:rPr>
+              <a:t>public</a:t>
+            </a:r>
+            <a:r>
+              <a:rPr lang="en-US" altLang="ko-KR" sz="1200" b="0">
+                <a:solidFill>
+                  <a:srgbClr val="BBBEBF"/>
+                </a:solidFill>
+                <a:effectLst/>
+                <a:latin typeface="Consolas" panose="020B0609020204030204" pitchFamily="49" charset="0"/>
+              </a:rPr>
+              <a:t> </a:t>
+            </a:r>
+            <a:r>
+              <a:rPr lang="en-US" altLang="ko-KR" sz="1200" b="0">
+                <a:solidFill>
+                  <a:srgbClr val="4EC9B0"/>
+                </a:solidFill>
+                <a:effectLst/>
+                <a:latin typeface="Consolas" panose="020B0609020204030204" pitchFamily="49" charset="0"/>
+              </a:rPr>
+              <a:t>Long</a:t>
+            </a:r>
+            <a:r>
+              <a:rPr lang="en-US" altLang="ko-KR" sz="1200" b="0">
+                <a:solidFill>
+                  <a:srgbClr val="BBBEBF"/>
+                </a:solidFill>
+                <a:effectLst/>
+                <a:latin typeface="Consolas" panose="020B0609020204030204" pitchFamily="49" charset="0"/>
+              </a:rPr>
+              <a:t> </a:t>
+            </a:r>
+            <a:r>
+              <a:rPr lang="en-US" altLang="ko-KR" sz="1200" b="0">
+                <a:solidFill>
+                  <a:srgbClr val="D2A8FF"/>
+                </a:solidFill>
+                <a:effectLst/>
+                <a:latin typeface="Consolas" panose="020B0609020204030204" pitchFamily="49" charset="0"/>
+              </a:rPr>
+              <a:t>getUserId</a:t>
+            </a:r>
+            <a:r>
+              <a:rPr lang="en-US" altLang="ko-KR" sz="1200" b="0">
+                <a:solidFill>
+                  <a:srgbClr val="BBBEBF"/>
+                </a:solidFill>
+                <a:effectLst/>
+                <a:latin typeface="Consolas" panose="020B0609020204030204" pitchFamily="49" charset="0"/>
+              </a:rPr>
+              <a:t>() {</a:t>
+            </a:r>
+          </a:p>
+          <a:p>
+            <a:pPr>
+              <a:lnSpc>
+                <a:spcPts val="1425"/>
+              </a:lnSpc>
+              <a:buNone/>
+            </a:pPr>
+            <a:r>
+              <a:rPr lang="en-US" altLang="ko-KR" sz="1200" b="0">
+                <a:solidFill>
+                  <a:srgbClr val="BBBEBF"/>
+                </a:solidFill>
+                <a:effectLst/>
+                <a:latin typeface="Consolas" panose="020B0609020204030204" pitchFamily="49" charset="0"/>
+              </a:rPr>
+              <a:t>        </a:t>
+            </a:r>
+            <a:r>
+              <a:rPr lang="en-US" altLang="ko-KR" sz="1200" b="0">
+                <a:solidFill>
+                  <a:srgbClr val="C586C0"/>
+                </a:solidFill>
+                <a:effectLst/>
+                <a:latin typeface="Consolas" panose="020B0609020204030204" pitchFamily="49" charset="0"/>
+              </a:rPr>
+              <a:t>return</a:t>
+            </a:r>
+            <a:r>
+              <a:rPr lang="en-US" altLang="ko-KR" sz="1200" b="0">
+                <a:solidFill>
+                  <a:srgbClr val="BBBEBF"/>
+                </a:solidFill>
+                <a:effectLst/>
+                <a:latin typeface="Consolas" panose="020B0609020204030204" pitchFamily="49" charset="0"/>
+              </a:rPr>
+              <a:t> </a:t>
+            </a:r>
+            <a:r>
+              <a:rPr lang="en-US" altLang="ko-KR" sz="1200" b="0">
+                <a:solidFill>
+                  <a:srgbClr val="C9D1D9"/>
+                </a:solidFill>
+                <a:effectLst/>
+                <a:latin typeface="Consolas" panose="020B0609020204030204" pitchFamily="49" charset="0"/>
+              </a:rPr>
+              <a:t>userId</a:t>
+            </a:r>
+            <a:r>
+              <a:rPr lang="en-US" altLang="ko-KR" sz="1200" b="0">
+                <a:solidFill>
+                  <a:srgbClr val="BBBEBF"/>
+                </a:solidFill>
+                <a:effectLst/>
+                <a:latin typeface="Consolas" panose="020B0609020204030204" pitchFamily="49" charset="0"/>
+              </a:rPr>
+              <a:t>;</a:t>
+            </a:r>
+          </a:p>
+          <a:p>
+            <a:pPr>
+              <a:lnSpc>
+                <a:spcPts val="1425"/>
+              </a:lnSpc>
+              <a:buNone/>
+            </a:pPr>
+            <a:r>
+              <a:rPr lang="en-US" altLang="ko-KR" sz="1200" b="0">
+                <a:solidFill>
+                  <a:srgbClr val="BBBEBF"/>
+                </a:solidFill>
+                <a:effectLst/>
+                <a:latin typeface="Consolas" panose="020B0609020204030204" pitchFamily="49" charset="0"/>
+              </a:rPr>
+              <a:t>    }</a:t>
+            </a:r>
+          </a:p>
+          <a:p>
+            <a:pPr>
+              <a:lnSpc>
+                <a:spcPts val="1425"/>
+              </a:lnSpc>
+              <a:buNone/>
+            </a:pPr>
+            <a:r>
+              <a:rPr lang="en-US" altLang="ko-KR" sz="1200" b="0">
+                <a:solidFill>
+                  <a:srgbClr val="BBBEBF"/>
+                </a:solidFill>
+                <a:effectLst/>
+                <a:latin typeface="Consolas" panose="020B0609020204030204" pitchFamily="49" charset="0"/>
+              </a:rPr>
+              <a:t>    </a:t>
+            </a:r>
+            <a:r>
+              <a:rPr lang="en-US" altLang="ko-KR" sz="1200" b="0">
+                <a:solidFill>
+                  <a:srgbClr val="569CD6"/>
+                </a:solidFill>
+                <a:effectLst/>
+                <a:latin typeface="Consolas" panose="020B0609020204030204" pitchFamily="49" charset="0"/>
+              </a:rPr>
+              <a:t>public</a:t>
+            </a:r>
+            <a:r>
+              <a:rPr lang="en-US" altLang="ko-KR" sz="1200" b="0">
+                <a:solidFill>
+                  <a:srgbClr val="BBBEBF"/>
+                </a:solidFill>
+                <a:effectLst/>
+                <a:latin typeface="Consolas" panose="020B0609020204030204" pitchFamily="49" charset="0"/>
+              </a:rPr>
+              <a:t> </a:t>
+            </a:r>
+            <a:r>
+              <a:rPr lang="en-US" altLang="ko-KR" sz="1200" b="0">
+                <a:solidFill>
+                  <a:srgbClr val="4EC9B0"/>
+                </a:solidFill>
+                <a:effectLst/>
+                <a:latin typeface="Consolas" panose="020B0609020204030204" pitchFamily="49" charset="0"/>
+              </a:rPr>
+              <a:t>int</a:t>
+            </a:r>
+            <a:r>
+              <a:rPr lang="en-US" altLang="ko-KR" sz="1200" b="0">
+                <a:solidFill>
+                  <a:srgbClr val="BBBEBF"/>
+                </a:solidFill>
+                <a:effectLst/>
+                <a:latin typeface="Consolas" panose="020B0609020204030204" pitchFamily="49" charset="0"/>
+              </a:rPr>
+              <a:t> </a:t>
+            </a:r>
+            <a:r>
+              <a:rPr lang="en-US" altLang="ko-KR" sz="1200" b="0">
+                <a:solidFill>
+                  <a:srgbClr val="D2A8FF"/>
+                </a:solidFill>
+                <a:effectLst/>
+                <a:latin typeface="Consolas" panose="020B0609020204030204" pitchFamily="49" charset="0"/>
+              </a:rPr>
+              <a:t>getScore</a:t>
+            </a:r>
+            <a:r>
+              <a:rPr lang="en-US" altLang="ko-KR" sz="1200" b="0">
+                <a:solidFill>
+                  <a:srgbClr val="BBBEBF"/>
+                </a:solidFill>
+                <a:effectLst/>
+                <a:latin typeface="Consolas" panose="020B0609020204030204" pitchFamily="49" charset="0"/>
+              </a:rPr>
+              <a:t>() {</a:t>
+            </a:r>
+          </a:p>
+          <a:p>
+            <a:pPr>
+              <a:lnSpc>
+                <a:spcPts val="1425"/>
+              </a:lnSpc>
+              <a:buNone/>
+            </a:pPr>
+            <a:r>
+              <a:rPr lang="en-US" altLang="ko-KR" sz="1200" b="0">
+                <a:solidFill>
+                  <a:srgbClr val="BBBEBF"/>
+                </a:solidFill>
+                <a:effectLst/>
+                <a:latin typeface="Consolas" panose="020B0609020204030204" pitchFamily="49" charset="0"/>
+              </a:rPr>
+              <a:t>        </a:t>
+            </a:r>
+            <a:r>
+              <a:rPr lang="en-US" altLang="ko-KR" sz="1200" b="0">
+                <a:solidFill>
+                  <a:srgbClr val="C586C0"/>
+                </a:solidFill>
+                <a:effectLst/>
+                <a:latin typeface="Consolas" panose="020B0609020204030204" pitchFamily="49" charset="0"/>
+              </a:rPr>
+              <a:t>return</a:t>
+            </a:r>
+            <a:r>
+              <a:rPr lang="en-US" altLang="ko-KR" sz="1200" b="0">
+                <a:solidFill>
+                  <a:srgbClr val="BBBEBF"/>
+                </a:solidFill>
+                <a:effectLst/>
+                <a:latin typeface="Consolas" panose="020B0609020204030204" pitchFamily="49" charset="0"/>
+              </a:rPr>
+              <a:t> </a:t>
+            </a:r>
+            <a:r>
+              <a:rPr lang="en-US" altLang="ko-KR" sz="1200" b="0">
+                <a:solidFill>
+                  <a:srgbClr val="C9D1D9"/>
+                </a:solidFill>
+                <a:effectLst/>
+                <a:latin typeface="Consolas" panose="020B0609020204030204" pitchFamily="49" charset="0"/>
+              </a:rPr>
+              <a:t>score</a:t>
+            </a:r>
+            <a:r>
+              <a:rPr lang="en-US" altLang="ko-KR" sz="1200" b="0">
+                <a:solidFill>
+                  <a:srgbClr val="BBBEBF"/>
+                </a:solidFill>
+                <a:effectLst/>
+                <a:latin typeface="Consolas" panose="020B0609020204030204" pitchFamily="49" charset="0"/>
+              </a:rPr>
+              <a:t>;</a:t>
+            </a:r>
+          </a:p>
+          <a:p>
+            <a:pPr>
+              <a:lnSpc>
+                <a:spcPts val="1425"/>
+              </a:lnSpc>
+              <a:buNone/>
+            </a:pPr>
+            <a:r>
+              <a:rPr lang="en-US" altLang="ko-KR" sz="1200" b="0">
+                <a:solidFill>
+                  <a:srgbClr val="BBBEBF"/>
+                </a:solidFill>
+                <a:effectLst/>
+                <a:latin typeface="Consolas" panose="020B0609020204030204" pitchFamily="49" charset="0"/>
+              </a:rPr>
+              <a:t>    }</a:t>
+            </a:r>
+          </a:p>
+          <a:p>
+            <a:pPr>
+              <a:lnSpc>
+                <a:spcPts val="1425"/>
+              </a:lnSpc>
+              <a:buNone/>
+            </a:pPr>
+            <a:r>
+              <a:rPr lang="en-US" altLang="ko-KR" sz="1200" b="0">
+                <a:solidFill>
+                  <a:srgbClr val="BBBEBF"/>
+                </a:solidFill>
+                <a:effectLst/>
+                <a:latin typeface="Consolas" panose="020B0609020204030204" pitchFamily="49" charset="0"/>
+              </a:rPr>
+              <a:t>    </a:t>
+            </a:r>
+          </a:p>
+          <a:p>
+            <a:pPr>
+              <a:lnSpc>
+                <a:spcPts val="1425"/>
+              </a:lnSpc>
+              <a:buNone/>
+            </a:pPr>
+            <a:r>
+              <a:rPr lang="en-US" altLang="ko-KR" sz="1200" b="0">
+                <a:solidFill>
+                  <a:srgbClr val="BBBEBF"/>
+                </a:solidFill>
+                <a:effectLst/>
+                <a:latin typeface="Consolas" panose="020B0609020204030204" pitchFamily="49" charset="0"/>
+              </a:rPr>
+              <a:t>}</a:t>
+            </a:r>
+          </a:p>
+        </p:txBody>
+      </p:sp>
+      <p:pic>
+        <p:nvPicPr>
+          <p:cNvPr id="6" name="그림 5">
+            <a:extLst>
+              <a:ext uri="{FF2B5EF4-FFF2-40B4-BE49-F238E27FC236}">
+                <a16:creationId xmlns:a16="http://schemas.microsoft.com/office/drawing/2014/main" id="{F68097EB-263A-86F8-D0B8-5C345BF25F6A}"/>
+              </a:ext>
+            </a:extLst>
+          </p:cNvPr>
+          <p:cNvPicPr>
+            <a:picLocks noChangeAspect="1"/>
+          </p:cNvPicPr>
+          <p:nvPr/>
+        </p:nvPicPr>
+        <p:blipFill>
+          <a:blip r:embed="rId2"/>
+          <a:stretch>
+            <a:fillRect/>
+          </a:stretch>
+        </p:blipFill>
+        <p:spPr>
+          <a:xfrm>
+            <a:off x="1097280" y="1854272"/>
+            <a:ext cx="2505425" cy="3515216"/>
+          </a:xfrm>
+          <a:prstGeom prst="rect">
+            <a:avLst/>
+          </a:prstGeom>
+        </p:spPr>
+      </p:pic>
+      <p:sp>
+        <p:nvSpPr>
+          <p:cNvPr id="7" name="직사각형 6">
+            <a:extLst>
+              <a:ext uri="{FF2B5EF4-FFF2-40B4-BE49-F238E27FC236}">
+                <a16:creationId xmlns:a16="http://schemas.microsoft.com/office/drawing/2014/main" id="{D23A41C3-F211-B78E-4BF2-D494924DBB92}"/>
+              </a:ext>
+            </a:extLst>
+          </p:cNvPr>
+          <p:cNvSpPr/>
+          <p:nvPr/>
+        </p:nvSpPr>
+        <p:spPr>
+          <a:xfrm>
+            <a:off x="1481328" y="4169664"/>
+            <a:ext cx="2020824" cy="274320"/>
+          </a:xfrm>
+          <a:prstGeom prst="rect">
+            <a:avLst/>
+          </a:prstGeom>
+          <a:noFill/>
+          <a:ln>
+            <a:solidFill>
+              <a:srgbClr val="FF0000"/>
+            </a:solidFill>
+          </a:ln>
+        </p:spPr>
+        <p:style>
+          <a:lnRef idx="2">
+            <a:schemeClr val="accent1">
+              <a:shade val="15000"/>
+            </a:schemeClr>
+          </a:lnRef>
+          <a:fillRef idx="1">
+            <a:schemeClr val="accent1"/>
+          </a:fillRef>
+          <a:effectRef idx="0">
+            <a:schemeClr val="accent1"/>
+          </a:effectRef>
+          <a:fontRef idx="minor">
+            <a:schemeClr val="lt1"/>
+          </a:fontRef>
+        </p:style>
+        <p:txBody>
+          <a:bodyPr rtlCol="0" anchor="ctr"/>
+          <a:lstStyle/>
+          <a:p>
+            <a:pPr algn="ctr"/>
+            <a:endParaRPr lang="ko-KR" altLang="en-US"/>
+          </a:p>
+        </p:txBody>
+      </p:sp>
+    </p:spTree>
+    <p:extLst>
+      <p:ext uri="{BB962C8B-B14F-4D97-AF65-F5344CB8AC3E}">
+        <p14:creationId xmlns:p14="http://schemas.microsoft.com/office/powerpoint/2010/main" val="175633463"/>
+      </p:ext>
+    </p:extLst>
+  </p:cSld>
+  <p:clrMapOvr>
+    <a:masterClrMapping/>
+  </p:clrMapOvr>
+</p:sld>
+</file>
+
+<file path=ppt/slides/slide18.xml><?xml version="1.0" encoding="utf-8"?>
+<p:sld xmlns:a="http://schemas.openxmlformats.org/drawingml/2006/main" xmlns:r="http://schemas.openxmlformats.org/officeDocument/2006/relationships" xmlns:p="http://schemas.openxmlformats.org/presentationml/2006/main">
+  <p:cSld>
+    <p:spTree>
+      <p:nvGrpSpPr>
+        <p:cNvPr id="1" name=""/>
+        <p:cNvGrpSpPr/>
+        <p:nvPr/>
+      </p:nvGrpSpPr>
+      <p:grpSpPr>
+        <a:xfrm>
+          <a:off x="0" y="0"/>
+          <a:ext cx="0" cy="0"/>
+          <a:chOff x="0" y="0"/>
+          <a:chExt cx="0" cy="0"/>
+        </a:xfrm>
+      </p:grpSpPr>
+      <p:sp>
+        <p:nvSpPr>
+          <p:cNvPr id="2" name="제목 1">
+            <a:extLst>
+              <a:ext uri="{FF2B5EF4-FFF2-40B4-BE49-F238E27FC236}">
+                <a16:creationId xmlns:a16="http://schemas.microsoft.com/office/drawing/2014/main" id="{60C95A39-14A2-881C-2F4A-298BCF89634D}"/>
+              </a:ext>
+            </a:extLst>
+          </p:cNvPr>
+          <p:cNvSpPr>
+            <a:spLocks noGrp="1"/>
+          </p:cNvSpPr>
+          <p:nvPr>
+            <p:ph type="title"/>
+          </p:nvPr>
+        </p:nvSpPr>
+        <p:spPr/>
+        <p:txBody>
+          <a:bodyPr>
+            <a:normAutofit/>
+          </a:bodyPr>
+          <a:lstStyle/>
+          <a:p>
+            <a:r>
+              <a:rPr lang="en-US" altLang="ko-KR" sz="3600"/>
+              <a:t>User </a:t>
+            </a:r>
+            <a:r>
+              <a:rPr lang="ko-KR" altLang="en-US" sz="3600"/>
+              <a:t>에 </a:t>
+            </a:r>
+            <a:r>
+              <a:rPr lang="en-US" altLang="ko-KR" sz="3600"/>
+              <a:t>activeScore </a:t>
+            </a:r>
+            <a:r>
+              <a:rPr lang="ko-KR" altLang="en-US" sz="3600"/>
+              <a:t>추가 및 비지니스 로직 추가</a:t>
+            </a:r>
+          </a:p>
+        </p:txBody>
+      </p:sp>
+      <p:grpSp>
+        <p:nvGrpSpPr>
+          <p:cNvPr id="6" name="그룹 5">
+            <a:extLst>
+              <a:ext uri="{FF2B5EF4-FFF2-40B4-BE49-F238E27FC236}">
+                <a16:creationId xmlns:a16="http://schemas.microsoft.com/office/drawing/2014/main" id="{C34B4252-8E1D-DE90-7BCA-53DF1F96F7C3}"/>
+              </a:ext>
+            </a:extLst>
+          </p:cNvPr>
+          <p:cNvGrpSpPr/>
+          <p:nvPr/>
+        </p:nvGrpSpPr>
+        <p:grpSpPr>
+          <a:xfrm>
+            <a:off x="3878245" y="1972125"/>
+            <a:ext cx="4801270" cy="1743318"/>
+            <a:chOff x="467533" y="1898973"/>
+            <a:chExt cx="4801270" cy="1743318"/>
+          </a:xfrm>
+        </p:grpSpPr>
+        <p:pic>
+          <p:nvPicPr>
+            <p:cNvPr id="4" name="그림 3">
+              <a:extLst>
+                <a:ext uri="{FF2B5EF4-FFF2-40B4-BE49-F238E27FC236}">
+                  <a16:creationId xmlns:a16="http://schemas.microsoft.com/office/drawing/2014/main" id="{996C70C7-EC88-C3C5-DFD3-814EFBAEF66F}"/>
+                </a:ext>
+              </a:extLst>
+            </p:cNvPr>
+            <p:cNvPicPr>
+              <a:picLocks noChangeAspect="1"/>
+            </p:cNvPicPr>
+            <p:nvPr/>
+          </p:nvPicPr>
+          <p:blipFill>
+            <a:blip r:embed="rId2"/>
+            <a:stretch>
+              <a:fillRect/>
+            </a:stretch>
+          </p:blipFill>
+          <p:spPr>
+            <a:xfrm>
+              <a:off x="467533" y="1898973"/>
+              <a:ext cx="4801270" cy="1743318"/>
+            </a:xfrm>
+            <a:prstGeom prst="rect">
+              <a:avLst/>
+            </a:prstGeom>
+          </p:spPr>
+        </p:pic>
+        <p:sp>
+          <p:nvSpPr>
+            <p:cNvPr id="5" name="직사각형 4">
+              <a:extLst>
+                <a:ext uri="{FF2B5EF4-FFF2-40B4-BE49-F238E27FC236}">
+                  <a16:creationId xmlns:a16="http://schemas.microsoft.com/office/drawing/2014/main" id="{1FEF931F-CDC5-2C83-4478-681BF6EB8D3B}"/>
+                </a:ext>
+              </a:extLst>
+            </p:cNvPr>
+            <p:cNvSpPr/>
+            <p:nvPr/>
+          </p:nvSpPr>
+          <p:spPr>
+            <a:xfrm>
+              <a:off x="1097280" y="3364992"/>
+              <a:ext cx="2240280" cy="201168"/>
+            </a:xfrm>
+            <a:prstGeom prst="rect">
+              <a:avLst/>
+            </a:prstGeom>
+            <a:noFill/>
+            <a:ln>
+              <a:solidFill>
+                <a:srgbClr val="FF0000"/>
+              </a:solidFill>
+            </a:ln>
+          </p:spPr>
+          <p:style>
+            <a:lnRef idx="2">
+              <a:schemeClr val="accent1">
+                <a:shade val="15000"/>
+              </a:schemeClr>
+            </a:lnRef>
+            <a:fillRef idx="1">
+              <a:schemeClr val="accent1"/>
+            </a:fillRef>
+            <a:effectRef idx="0">
+              <a:schemeClr val="accent1"/>
+            </a:effectRef>
+            <a:fontRef idx="minor">
+              <a:schemeClr val="lt1"/>
+            </a:fontRef>
+          </p:style>
+          <p:txBody>
+            <a:bodyPr rtlCol="0" anchor="ctr"/>
+            <a:lstStyle/>
+            <a:p>
+              <a:pPr algn="ctr"/>
+              <a:endParaRPr lang="ko-KR" altLang="en-US"/>
+            </a:p>
+          </p:txBody>
+        </p:sp>
+      </p:grpSp>
+      <p:pic>
+        <p:nvPicPr>
+          <p:cNvPr id="8" name="그림 7">
+            <a:extLst>
+              <a:ext uri="{FF2B5EF4-FFF2-40B4-BE49-F238E27FC236}">
+                <a16:creationId xmlns:a16="http://schemas.microsoft.com/office/drawing/2014/main" id="{B0B6BFA4-AE46-8CE1-3773-E39E665C3BB8}"/>
+              </a:ext>
+            </a:extLst>
+          </p:cNvPr>
+          <p:cNvPicPr>
+            <a:picLocks noChangeAspect="1"/>
+          </p:cNvPicPr>
+          <p:nvPr/>
+        </p:nvPicPr>
+        <p:blipFill>
+          <a:blip r:embed="rId3"/>
+          <a:stretch>
+            <a:fillRect/>
+          </a:stretch>
+        </p:blipFill>
+        <p:spPr>
+          <a:xfrm>
+            <a:off x="3878245" y="3877056"/>
+            <a:ext cx="4296375" cy="819264"/>
+          </a:xfrm>
+          <a:prstGeom prst="rect">
+            <a:avLst/>
+          </a:prstGeom>
+        </p:spPr>
+      </p:pic>
+      <p:sp>
+        <p:nvSpPr>
+          <p:cNvPr id="9" name="TextBox 8">
+            <a:extLst>
+              <a:ext uri="{FF2B5EF4-FFF2-40B4-BE49-F238E27FC236}">
+                <a16:creationId xmlns:a16="http://schemas.microsoft.com/office/drawing/2014/main" id="{9E33B88F-E428-D187-9017-504835091C4A}"/>
+              </a:ext>
+            </a:extLst>
+          </p:cNvPr>
+          <p:cNvSpPr txBox="1"/>
+          <p:nvPr/>
+        </p:nvSpPr>
+        <p:spPr>
+          <a:xfrm>
+            <a:off x="3878245" y="4764024"/>
+            <a:ext cx="4296375" cy="276999"/>
+          </a:xfrm>
+          <a:prstGeom prst="rect">
+            <a:avLst/>
+          </a:prstGeom>
+          <a:noFill/>
+        </p:spPr>
+        <p:txBody>
+          <a:bodyPr wrap="square" rtlCol="0">
+            <a:spAutoFit/>
+          </a:bodyPr>
+          <a:lstStyle/>
+          <a:p>
+            <a:r>
+              <a:rPr lang="ko-KR" altLang="en-US" sz="1200"/>
+              <a:t>활동 점수에 대한 비지니스 로직</a:t>
+            </a:r>
+            <a:r>
+              <a:rPr lang="en-US" altLang="ko-KR" sz="1200"/>
+              <a:t>(</a:t>
+            </a:r>
+            <a:r>
+              <a:rPr lang="ko-KR" altLang="en-US" sz="1200"/>
+              <a:t>도메인 주도 개발</a:t>
+            </a:r>
+            <a:r>
+              <a:rPr lang="en-US" altLang="ko-KR" sz="1200"/>
+              <a:t>)</a:t>
+            </a:r>
+            <a:endParaRPr lang="ko-KR" altLang="en-US" sz="1200"/>
+          </a:p>
+        </p:txBody>
+      </p:sp>
+      <p:grpSp>
+        <p:nvGrpSpPr>
+          <p:cNvPr id="12" name="그룹 11">
+            <a:extLst>
+              <a:ext uri="{FF2B5EF4-FFF2-40B4-BE49-F238E27FC236}">
+                <a16:creationId xmlns:a16="http://schemas.microsoft.com/office/drawing/2014/main" id="{2CD6A1A1-1E5E-9123-426E-F9796074C0B7}"/>
+              </a:ext>
+            </a:extLst>
+          </p:cNvPr>
+          <p:cNvGrpSpPr/>
+          <p:nvPr/>
+        </p:nvGrpSpPr>
+        <p:grpSpPr>
+          <a:xfrm>
+            <a:off x="1097280" y="1854272"/>
+            <a:ext cx="2505425" cy="3515216"/>
+            <a:chOff x="1097280" y="1854272"/>
+            <a:chExt cx="2505425" cy="3515216"/>
+          </a:xfrm>
+        </p:grpSpPr>
+        <p:pic>
+          <p:nvPicPr>
+            <p:cNvPr id="10" name="그림 9">
+              <a:extLst>
+                <a:ext uri="{FF2B5EF4-FFF2-40B4-BE49-F238E27FC236}">
+                  <a16:creationId xmlns:a16="http://schemas.microsoft.com/office/drawing/2014/main" id="{ED3C31E9-C315-424A-E995-D7416C4E4722}"/>
+                </a:ext>
+              </a:extLst>
+            </p:cNvPr>
+            <p:cNvPicPr>
+              <a:picLocks noChangeAspect="1"/>
+            </p:cNvPicPr>
+            <p:nvPr/>
+          </p:nvPicPr>
+          <p:blipFill>
+            <a:blip r:embed="rId4"/>
+            <a:stretch>
+              <a:fillRect/>
+            </a:stretch>
+          </p:blipFill>
+          <p:spPr>
+            <a:xfrm>
+              <a:off x="1097280" y="1854272"/>
+              <a:ext cx="2505425" cy="3515216"/>
+            </a:xfrm>
+            <a:prstGeom prst="rect">
+              <a:avLst/>
+            </a:prstGeom>
+          </p:spPr>
+        </p:pic>
+        <p:sp>
+          <p:nvSpPr>
+            <p:cNvPr id="11" name="직사각형 10">
+              <a:extLst>
+                <a:ext uri="{FF2B5EF4-FFF2-40B4-BE49-F238E27FC236}">
+                  <a16:creationId xmlns:a16="http://schemas.microsoft.com/office/drawing/2014/main" id="{C8FFB8B6-B273-055E-04FE-A49BC0C0AEA7}"/>
+                </a:ext>
+              </a:extLst>
+            </p:cNvPr>
+            <p:cNvSpPr/>
+            <p:nvPr/>
+          </p:nvSpPr>
+          <p:spPr>
+            <a:xfrm>
+              <a:off x="1472184" y="3529584"/>
+              <a:ext cx="868680" cy="347472"/>
+            </a:xfrm>
+            <a:prstGeom prst="rect">
+              <a:avLst/>
+            </a:prstGeom>
+            <a:noFill/>
+            <a:ln>
+              <a:solidFill>
+                <a:srgbClr val="FF0000"/>
+              </a:solidFill>
+            </a:ln>
+          </p:spPr>
+          <p:style>
+            <a:lnRef idx="2">
+              <a:schemeClr val="accent1">
+                <a:shade val="15000"/>
+              </a:schemeClr>
+            </a:lnRef>
+            <a:fillRef idx="1">
+              <a:schemeClr val="accent1"/>
+            </a:fillRef>
+            <a:effectRef idx="0">
+              <a:schemeClr val="accent1"/>
+            </a:effectRef>
+            <a:fontRef idx="minor">
+              <a:schemeClr val="lt1"/>
+            </a:fontRef>
+          </p:style>
+          <p:txBody>
+            <a:bodyPr rtlCol="0" anchor="ctr"/>
+            <a:lstStyle/>
+            <a:p>
+              <a:pPr algn="ctr"/>
+              <a:endParaRPr lang="ko-KR" altLang="en-US"/>
+            </a:p>
+          </p:txBody>
+        </p:sp>
+      </p:grpSp>
+    </p:spTree>
+    <p:extLst>
+      <p:ext uri="{BB962C8B-B14F-4D97-AF65-F5344CB8AC3E}">
+        <p14:creationId xmlns:p14="http://schemas.microsoft.com/office/powerpoint/2010/main" val="361991466"/>
+      </p:ext>
+    </p:extLst>
+  </p:cSld>
+  <p:clrMapOvr>
+    <a:masterClrMapping/>
+  </p:clrMapOvr>
+</p:sld>
+</file>
+
+<file path=ppt/slides/slide19.xml><?xml version="1.0" encoding="utf-8"?>
+<p:sld xmlns:a="http://schemas.openxmlformats.org/drawingml/2006/main" xmlns:r="http://schemas.openxmlformats.org/officeDocument/2006/relationships" xmlns:p="http://schemas.openxmlformats.org/presentationml/2006/main">
+  <p:cSld>
+    <p:spTree>
+      <p:nvGrpSpPr>
+        <p:cNvPr id="1" name=""/>
+        <p:cNvGrpSpPr/>
+        <p:nvPr/>
+      </p:nvGrpSpPr>
+      <p:grpSpPr>
+        <a:xfrm>
+          <a:off x="0" y="0"/>
+          <a:ext cx="0" cy="0"/>
+          <a:chOff x="0" y="0"/>
+          <a:chExt cx="0" cy="0"/>
+        </a:xfrm>
+      </p:grpSpPr>
+      <p:sp>
+        <p:nvSpPr>
+          <p:cNvPr id="2" name="제목 1">
+            <a:extLst>
+              <a:ext uri="{FF2B5EF4-FFF2-40B4-BE49-F238E27FC236}">
+                <a16:creationId xmlns:a16="http://schemas.microsoft.com/office/drawing/2014/main" id="{9140CA73-7FAD-9DFF-0505-289A055B4655}"/>
+              </a:ext>
+            </a:extLst>
+          </p:cNvPr>
+          <p:cNvSpPr>
+            <a:spLocks noGrp="1"/>
+          </p:cNvSpPr>
+          <p:nvPr>
+            <p:ph type="title"/>
+          </p:nvPr>
+        </p:nvSpPr>
+        <p:spPr/>
+        <p:txBody>
+          <a:bodyPr>
+            <a:normAutofit/>
+          </a:bodyPr>
+          <a:lstStyle/>
+          <a:p>
+            <a:r>
+              <a:rPr lang="en-US" altLang="ko-KR" sz="4000"/>
+              <a:t>ActivityScore </a:t>
+            </a:r>
+            <a:r>
+              <a:rPr lang="ko-KR" altLang="en-US" sz="4000"/>
+              <a:t>추가 메소드 작성 </a:t>
+            </a:r>
+            <a:r>
+              <a:rPr lang="en-US" altLang="ko-KR" sz="4000"/>
+              <a:t>- UserService</a:t>
+            </a:r>
+            <a:endParaRPr lang="ko-KR" altLang="en-US" sz="4000"/>
+          </a:p>
+        </p:txBody>
+      </p:sp>
+      <p:sp>
+        <p:nvSpPr>
+          <p:cNvPr id="4" name="TextBox 3">
+            <a:extLst>
+              <a:ext uri="{FF2B5EF4-FFF2-40B4-BE49-F238E27FC236}">
+                <a16:creationId xmlns:a16="http://schemas.microsoft.com/office/drawing/2014/main" id="{A1A0727D-4B1D-5AAA-6C12-B17CD3AD4BCF}"/>
+              </a:ext>
+            </a:extLst>
+          </p:cNvPr>
+          <p:cNvSpPr txBox="1"/>
+          <p:nvPr/>
+        </p:nvSpPr>
+        <p:spPr>
+          <a:xfrm>
+            <a:off x="4002590" y="1931825"/>
+            <a:ext cx="7002018" cy="2236510"/>
+          </a:xfrm>
+          <a:prstGeom prst="rect">
+            <a:avLst/>
+          </a:prstGeom>
+          <a:solidFill>
+            <a:schemeClr val="tx1"/>
+          </a:solidFill>
+        </p:spPr>
+        <p:txBody>
+          <a:bodyPr wrap="square">
+            <a:spAutoFit/>
+          </a:bodyPr>
+          <a:lstStyle/>
+          <a:p>
+            <a:pPr>
+              <a:lnSpc>
+                <a:spcPts val="1425"/>
+              </a:lnSpc>
+              <a:buNone/>
+            </a:pPr>
+            <a:r>
+              <a:rPr lang="en-US" altLang="ko-KR" sz="1050" b="0">
+                <a:solidFill>
+                  <a:srgbClr val="BBBEBF"/>
+                </a:solidFill>
+                <a:effectLst/>
+                <a:latin typeface="Consolas" panose="020B0609020204030204" pitchFamily="49" charset="0"/>
+              </a:rPr>
+              <a:t>    @</a:t>
+            </a:r>
+            <a:r>
+              <a:rPr lang="en-US" altLang="ko-KR" sz="1050" b="0">
+                <a:solidFill>
+                  <a:srgbClr val="4EC9B0"/>
+                </a:solidFill>
+                <a:effectLst/>
+                <a:latin typeface="Consolas" panose="020B0609020204030204" pitchFamily="49" charset="0"/>
+              </a:rPr>
+              <a:t>Transactional</a:t>
+            </a:r>
+            <a:endParaRPr lang="en-US" altLang="ko-KR" sz="1050" b="0">
+              <a:solidFill>
+                <a:srgbClr val="BBBEBF"/>
+              </a:solidFill>
+              <a:effectLst/>
+              <a:latin typeface="Consolas" panose="020B0609020204030204" pitchFamily="49" charset="0"/>
+            </a:endParaRPr>
+          </a:p>
+          <a:p>
+            <a:pPr>
+              <a:lnSpc>
+                <a:spcPts val="1425"/>
+              </a:lnSpc>
+              <a:buNone/>
+            </a:pPr>
+            <a:r>
+              <a:rPr lang="en-US" altLang="ko-KR" sz="1050" b="0">
+                <a:solidFill>
+                  <a:srgbClr val="BBBEBF"/>
+                </a:solidFill>
+                <a:effectLst/>
+                <a:latin typeface="Consolas" panose="020B0609020204030204" pitchFamily="49" charset="0"/>
+              </a:rPr>
+              <a:t>    </a:t>
+            </a:r>
+            <a:r>
+              <a:rPr lang="en-US" altLang="ko-KR" sz="1050" b="0">
+                <a:solidFill>
+                  <a:srgbClr val="569CD6"/>
+                </a:solidFill>
+                <a:effectLst/>
+                <a:latin typeface="Consolas" panose="020B0609020204030204" pitchFamily="49" charset="0"/>
+              </a:rPr>
+              <a:t>public</a:t>
+            </a:r>
+            <a:r>
+              <a:rPr lang="en-US" altLang="ko-KR" sz="1050" b="0">
+                <a:solidFill>
+                  <a:srgbClr val="BBBEBF"/>
+                </a:solidFill>
+                <a:effectLst/>
+                <a:latin typeface="Consolas" panose="020B0609020204030204" pitchFamily="49" charset="0"/>
+              </a:rPr>
+              <a:t> </a:t>
+            </a:r>
+            <a:r>
+              <a:rPr lang="en-US" altLang="ko-KR" sz="1050" b="0">
+                <a:solidFill>
+                  <a:srgbClr val="4EC9B0"/>
+                </a:solidFill>
+                <a:effectLst/>
+                <a:latin typeface="Consolas" panose="020B0609020204030204" pitchFamily="49" charset="0"/>
+              </a:rPr>
+              <a:t>void</a:t>
+            </a:r>
+            <a:r>
+              <a:rPr lang="en-US" altLang="ko-KR" sz="1050" b="0">
+                <a:solidFill>
+                  <a:srgbClr val="BBBEBF"/>
+                </a:solidFill>
+                <a:effectLst/>
+                <a:latin typeface="Consolas" panose="020B0609020204030204" pitchFamily="49" charset="0"/>
+              </a:rPr>
+              <a:t> </a:t>
+            </a:r>
+            <a:r>
+              <a:rPr lang="en-US" altLang="ko-KR" sz="1050" b="0">
+                <a:solidFill>
+                  <a:srgbClr val="D2A8FF"/>
+                </a:solidFill>
+                <a:effectLst/>
+                <a:latin typeface="Consolas" panose="020B0609020204030204" pitchFamily="49" charset="0"/>
+              </a:rPr>
+              <a:t>addActivityScore</a:t>
+            </a:r>
+            <a:r>
+              <a:rPr lang="en-US" altLang="ko-KR" sz="1050" b="0">
+                <a:solidFill>
+                  <a:srgbClr val="BBBEBF"/>
+                </a:solidFill>
+                <a:effectLst/>
+                <a:latin typeface="Consolas" panose="020B0609020204030204" pitchFamily="49" charset="0"/>
+              </a:rPr>
+              <a:t>(</a:t>
+            </a:r>
+          </a:p>
+          <a:p>
+            <a:pPr>
+              <a:lnSpc>
+                <a:spcPts val="1425"/>
+              </a:lnSpc>
+              <a:buNone/>
+            </a:pPr>
+            <a:r>
+              <a:rPr lang="en-US" altLang="ko-KR" sz="1050" b="0">
+                <a:solidFill>
+                  <a:srgbClr val="BBBEBF"/>
+                </a:solidFill>
+                <a:effectLst/>
+                <a:latin typeface="Consolas" panose="020B0609020204030204" pitchFamily="49" charset="0"/>
+              </a:rPr>
+              <a:t>        </a:t>
+            </a:r>
+            <a:r>
+              <a:rPr lang="en-US" altLang="ko-KR" sz="1050" b="0">
+                <a:solidFill>
+                  <a:srgbClr val="4EC9B0"/>
+                </a:solidFill>
+                <a:effectLst/>
+                <a:latin typeface="Consolas" panose="020B0609020204030204" pitchFamily="49" charset="0"/>
+              </a:rPr>
+              <a:t>AddActivityScoreRequestDto</a:t>
+            </a:r>
+            <a:r>
+              <a:rPr lang="en-US" altLang="ko-KR" sz="1050" b="0">
+                <a:solidFill>
+                  <a:srgbClr val="BBBEBF"/>
+                </a:solidFill>
+                <a:effectLst/>
+                <a:latin typeface="Consolas" panose="020B0609020204030204" pitchFamily="49" charset="0"/>
+              </a:rPr>
+              <a:t> </a:t>
+            </a:r>
+            <a:r>
+              <a:rPr lang="en-US" altLang="ko-KR" sz="1050" b="0">
+                <a:solidFill>
+                  <a:srgbClr val="FFA657"/>
+                </a:solidFill>
+                <a:effectLst/>
+                <a:latin typeface="Consolas" panose="020B0609020204030204" pitchFamily="49" charset="0"/>
+              </a:rPr>
+              <a:t>addActivityScoreRequestDto</a:t>
+            </a:r>
+            <a:endParaRPr lang="en-US" altLang="ko-KR" sz="1050" b="0">
+              <a:solidFill>
+                <a:srgbClr val="BBBEBF"/>
+              </a:solidFill>
+              <a:effectLst/>
+              <a:latin typeface="Consolas" panose="020B0609020204030204" pitchFamily="49" charset="0"/>
+            </a:endParaRPr>
+          </a:p>
+          <a:p>
+            <a:pPr>
+              <a:lnSpc>
+                <a:spcPts val="1425"/>
+              </a:lnSpc>
+              <a:buNone/>
+            </a:pPr>
+            <a:r>
+              <a:rPr lang="en-US" altLang="ko-KR" sz="1050" b="0">
+                <a:solidFill>
+                  <a:srgbClr val="BBBEBF"/>
+                </a:solidFill>
+                <a:effectLst/>
+                <a:latin typeface="Consolas" panose="020B0609020204030204" pitchFamily="49" charset="0"/>
+              </a:rPr>
+              <a:t>    ){</a:t>
+            </a:r>
+          </a:p>
+          <a:p>
+            <a:pPr>
+              <a:lnSpc>
+                <a:spcPts val="1425"/>
+              </a:lnSpc>
+              <a:buNone/>
+            </a:pPr>
+            <a:r>
+              <a:rPr lang="en-US" altLang="ko-KR" sz="1050" b="0">
+                <a:solidFill>
+                  <a:srgbClr val="BBBEBF"/>
+                </a:solidFill>
+                <a:effectLst/>
+                <a:latin typeface="Consolas" panose="020B0609020204030204" pitchFamily="49" charset="0"/>
+              </a:rPr>
+              <a:t>        </a:t>
+            </a:r>
+            <a:r>
+              <a:rPr lang="en-US" altLang="ko-KR" sz="1050" b="0">
+                <a:solidFill>
+                  <a:srgbClr val="4EC9B0"/>
+                </a:solidFill>
+                <a:effectLst/>
+                <a:latin typeface="Consolas" panose="020B0609020204030204" pitchFamily="49" charset="0"/>
+              </a:rPr>
+              <a:t>User</a:t>
+            </a:r>
+            <a:r>
+              <a:rPr lang="en-US" altLang="ko-KR" sz="1050" b="0">
+                <a:solidFill>
+                  <a:srgbClr val="FFA657"/>
+                </a:solidFill>
+                <a:effectLst/>
+                <a:latin typeface="Consolas" panose="020B0609020204030204" pitchFamily="49" charset="0"/>
+              </a:rPr>
+              <a:t> </a:t>
+            </a:r>
+            <a:r>
+              <a:rPr lang="en-US" altLang="ko-KR" sz="1050" b="0">
+                <a:solidFill>
+                  <a:srgbClr val="C9D1D9"/>
+                </a:solidFill>
+                <a:effectLst/>
+                <a:latin typeface="Consolas" panose="020B0609020204030204" pitchFamily="49" charset="0"/>
+              </a:rPr>
+              <a:t>user</a:t>
+            </a:r>
+            <a:r>
+              <a:rPr lang="en-US" altLang="ko-KR" sz="1050" b="0">
+                <a:solidFill>
+                  <a:srgbClr val="FFA657"/>
+                </a:solidFill>
+                <a:effectLst/>
+                <a:latin typeface="Consolas" panose="020B0609020204030204" pitchFamily="49" charset="0"/>
+              </a:rPr>
+              <a:t> </a:t>
+            </a:r>
+            <a:r>
+              <a:rPr lang="en-US" altLang="ko-KR" sz="1050" b="0">
+                <a:solidFill>
+                  <a:srgbClr val="D4D4D4"/>
+                </a:solidFill>
+                <a:effectLst/>
+                <a:latin typeface="Consolas" panose="020B0609020204030204" pitchFamily="49" charset="0"/>
+              </a:rPr>
+              <a:t>=</a:t>
+            </a:r>
+            <a:r>
+              <a:rPr lang="en-US" altLang="ko-KR" sz="1050" b="0">
+                <a:solidFill>
+                  <a:srgbClr val="BBBEBF"/>
+                </a:solidFill>
+                <a:effectLst/>
+                <a:latin typeface="Consolas" panose="020B0609020204030204" pitchFamily="49" charset="0"/>
+              </a:rPr>
+              <a:t> </a:t>
+            </a:r>
+            <a:r>
+              <a:rPr lang="en-US" altLang="ko-KR" sz="1050" b="0">
+                <a:solidFill>
+                  <a:srgbClr val="79C0FF"/>
+                </a:solidFill>
+                <a:effectLst/>
+                <a:latin typeface="Consolas" panose="020B0609020204030204" pitchFamily="49" charset="0"/>
+              </a:rPr>
+              <a:t>userRepository</a:t>
+            </a:r>
+            <a:r>
+              <a:rPr lang="en-US" altLang="ko-KR" sz="1050" b="0">
+                <a:solidFill>
+                  <a:srgbClr val="BBBEBF"/>
+                </a:solidFill>
+                <a:effectLst/>
+                <a:latin typeface="Consolas" panose="020B0609020204030204" pitchFamily="49" charset="0"/>
+              </a:rPr>
+              <a:t>.</a:t>
+            </a:r>
+            <a:r>
+              <a:rPr lang="en-US" altLang="ko-KR" sz="1050" b="0">
+                <a:solidFill>
+                  <a:srgbClr val="D2A8FF"/>
+                </a:solidFill>
+                <a:effectLst/>
+                <a:latin typeface="Consolas" panose="020B0609020204030204" pitchFamily="49" charset="0"/>
+              </a:rPr>
+              <a:t>findById</a:t>
+            </a:r>
+            <a:r>
+              <a:rPr lang="en-US" altLang="ko-KR" sz="1050" b="0">
+                <a:solidFill>
+                  <a:srgbClr val="BBBEBF"/>
+                </a:solidFill>
+                <a:effectLst/>
+                <a:latin typeface="Consolas" panose="020B0609020204030204" pitchFamily="49" charset="0"/>
+              </a:rPr>
+              <a:t>(</a:t>
+            </a:r>
+          </a:p>
+          <a:p>
+            <a:pPr>
+              <a:lnSpc>
+                <a:spcPts val="1425"/>
+              </a:lnSpc>
+              <a:buNone/>
+            </a:pPr>
+            <a:r>
+              <a:rPr lang="en-US" altLang="ko-KR" sz="1050" b="0">
+                <a:solidFill>
+                  <a:srgbClr val="BBBEBF"/>
+                </a:solidFill>
+                <a:effectLst/>
+                <a:latin typeface="Consolas" panose="020B0609020204030204" pitchFamily="49" charset="0"/>
+              </a:rPr>
+              <a:t>            </a:t>
+            </a:r>
+            <a:r>
+              <a:rPr lang="en-US" altLang="ko-KR" sz="1050" b="0">
+                <a:solidFill>
+                  <a:srgbClr val="FFA657"/>
+                </a:solidFill>
+                <a:effectLst/>
+                <a:latin typeface="Consolas" panose="020B0609020204030204" pitchFamily="49" charset="0"/>
+              </a:rPr>
+              <a:t>addActivityScoreRequestDto</a:t>
+            </a:r>
+            <a:r>
+              <a:rPr lang="en-US" altLang="ko-KR" sz="1050" b="0">
+                <a:solidFill>
+                  <a:srgbClr val="BBBEBF"/>
+                </a:solidFill>
+                <a:effectLst/>
+                <a:latin typeface="Consolas" panose="020B0609020204030204" pitchFamily="49" charset="0"/>
+              </a:rPr>
+              <a:t>.</a:t>
+            </a:r>
+            <a:r>
+              <a:rPr lang="en-US" altLang="ko-KR" sz="1050" b="0">
+                <a:solidFill>
+                  <a:srgbClr val="D2A8FF"/>
+                </a:solidFill>
+                <a:effectLst/>
+                <a:latin typeface="Consolas" panose="020B0609020204030204" pitchFamily="49" charset="0"/>
+              </a:rPr>
+              <a:t>getUserId</a:t>
+            </a:r>
+            <a:r>
+              <a:rPr lang="en-US" altLang="ko-KR" sz="1050" b="0">
+                <a:solidFill>
+                  <a:srgbClr val="BBBEBF"/>
+                </a:solidFill>
+                <a:effectLst/>
+                <a:latin typeface="Consolas" panose="020B0609020204030204" pitchFamily="49" charset="0"/>
+              </a:rPr>
+              <a:t>()</a:t>
+            </a:r>
+          </a:p>
+          <a:p>
+            <a:pPr>
+              <a:lnSpc>
+                <a:spcPts val="1425"/>
+              </a:lnSpc>
+              <a:buNone/>
+            </a:pPr>
+            <a:r>
+              <a:rPr lang="en-US" altLang="ko-KR" sz="1050" b="0">
+                <a:solidFill>
+                  <a:srgbClr val="BBBEBF"/>
+                </a:solidFill>
+                <a:effectLst/>
+                <a:latin typeface="Consolas" panose="020B0609020204030204" pitchFamily="49" charset="0"/>
+              </a:rPr>
+              <a:t>        ).</a:t>
+            </a:r>
+            <a:r>
+              <a:rPr lang="en-US" altLang="ko-KR" sz="1050" b="0">
+                <a:solidFill>
+                  <a:srgbClr val="D2A8FF"/>
+                </a:solidFill>
+                <a:effectLst/>
+                <a:latin typeface="Consolas" panose="020B0609020204030204" pitchFamily="49" charset="0"/>
+              </a:rPr>
+              <a:t>orElseThrow</a:t>
+            </a:r>
+            <a:r>
+              <a:rPr lang="en-US" altLang="ko-KR" sz="1050" b="0">
+                <a:solidFill>
+                  <a:srgbClr val="BBBEBF"/>
+                </a:solidFill>
+                <a:effectLst/>
+                <a:latin typeface="Consolas" panose="020B0609020204030204" pitchFamily="49" charset="0"/>
+              </a:rPr>
+              <a:t>(() </a:t>
+            </a:r>
+            <a:r>
+              <a:rPr lang="en-US" altLang="ko-KR" sz="1050" b="0">
+                <a:solidFill>
+                  <a:srgbClr val="FF7B72"/>
+                </a:solidFill>
+                <a:effectLst/>
+                <a:latin typeface="Consolas" panose="020B0609020204030204" pitchFamily="49" charset="0"/>
+              </a:rPr>
+              <a:t>-&gt;</a:t>
+            </a:r>
+            <a:r>
+              <a:rPr lang="en-US" altLang="ko-KR" sz="1050" b="0">
+                <a:solidFill>
+                  <a:srgbClr val="BBBEBF"/>
+                </a:solidFill>
+                <a:effectLst/>
+                <a:latin typeface="Consolas" panose="020B0609020204030204" pitchFamily="49" charset="0"/>
+              </a:rPr>
+              <a:t> </a:t>
+            </a:r>
+            <a:r>
+              <a:rPr lang="en-US" altLang="ko-KR" sz="1050" b="0">
+                <a:solidFill>
+                  <a:srgbClr val="C586C0"/>
+                </a:solidFill>
+                <a:effectLst/>
+                <a:latin typeface="Consolas" panose="020B0609020204030204" pitchFamily="49" charset="0"/>
+              </a:rPr>
+              <a:t>new</a:t>
+            </a:r>
+            <a:r>
+              <a:rPr lang="en-US" altLang="ko-KR" sz="1050" b="0">
+                <a:solidFill>
+                  <a:srgbClr val="BBBEBF"/>
+                </a:solidFill>
+                <a:effectLst/>
+                <a:latin typeface="Consolas" panose="020B0609020204030204" pitchFamily="49" charset="0"/>
+              </a:rPr>
+              <a:t> </a:t>
+            </a:r>
+            <a:r>
+              <a:rPr lang="en-US" altLang="ko-KR" sz="1050" b="0">
+                <a:solidFill>
+                  <a:srgbClr val="D2A8FF"/>
+                </a:solidFill>
+                <a:effectLst/>
+                <a:latin typeface="Consolas" panose="020B0609020204030204" pitchFamily="49" charset="0"/>
+              </a:rPr>
+              <a:t>IllegalArgumentException</a:t>
+            </a:r>
+            <a:r>
+              <a:rPr lang="en-US" altLang="ko-KR" sz="1050" b="0">
+                <a:solidFill>
+                  <a:srgbClr val="BBBEBF"/>
+                </a:solidFill>
+                <a:effectLst/>
+                <a:latin typeface="Consolas" panose="020B0609020204030204" pitchFamily="49" charset="0"/>
+              </a:rPr>
+              <a:t>(</a:t>
+            </a:r>
+            <a:r>
+              <a:rPr lang="en-US" altLang="ko-KR" sz="1050" b="0">
+                <a:solidFill>
+                  <a:srgbClr val="A5D6FF"/>
+                </a:solidFill>
+                <a:effectLst/>
+                <a:latin typeface="Consolas" panose="020B0609020204030204" pitchFamily="49" charset="0"/>
+              </a:rPr>
+              <a:t>"</a:t>
+            </a:r>
+            <a:r>
+              <a:rPr lang="ko-KR" altLang="en-US" sz="1050" b="0">
+                <a:solidFill>
+                  <a:srgbClr val="A5D6FF"/>
+                </a:solidFill>
+                <a:effectLst/>
+                <a:latin typeface="Consolas" panose="020B0609020204030204" pitchFamily="49" charset="0"/>
+              </a:rPr>
+              <a:t>사용자를 찾을수 없습니다</a:t>
+            </a:r>
+            <a:r>
+              <a:rPr lang="en-US" altLang="ko-KR" sz="1050" b="0">
+                <a:solidFill>
+                  <a:srgbClr val="A5D6FF"/>
+                </a:solidFill>
+                <a:effectLst/>
+                <a:latin typeface="Consolas" panose="020B0609020204030204" pitchFamily="49" charset="0"/>
+              </a:rPr>
+              <a:t>."</a:t>
+            </a:r>
+            <a:r>
+              <a:rPr lang="en-US" altLang="ko-KR" sz="1050" b="0">
+                <a:solidFill>
+                  <a:srgbClr val="BBBEBF"/>
+                </a:solidFill>
+                <a:effectLst/>
+                <a:latin typeface="Consolas" panose="020B0609020204030204" pitchFamily="49" charset="0"/>
+              </a:rPr>
+              <a:t>));</a:t>
+            </a:r>
+          </a:p>
+          <a:p>
+            <a:pPr>
+              <a:lnSpc>
+                <a:spcPts val="1425"/>
+              </a:lnSpc>
+              <a:buNone/>
+            </a:pPr>
+            <a:br>
+              <a:rPr lang="en-US" altLang="ko-KR" sz="1050" b="0">
+                <a:solidFill>
+                  <a:srgbClr val="BBBEBF"/>
+                </a:solidFill>
+                <a:effectLst/>
+                <a:latin typeface="Consolas" panose="020B0609020204030204" pitchFamily="49" charset="0"/>
+              </a:rPr>
+            </a:br>
+            <a:endParaRPr lang="en-US" altLang="ko-KR" sz="1050" b="0">
+              <a:solidFill>
+                <a:srgbClr val="BBBEBF"/>
+              </a:solidFill>
+              <a:effectLst/>
+              <a:latin typeface="Consolas" panose="020B0609020204030204" pitchFamily="49" charset="0"/>
+            </a:endParaRPr>
+          </a:p>
+          <a:p>
+            <a:pPr>
+              <a:lnSpc>
+                <a:spcPts val="1425"/>
+              </a:lnSpc>
+              <a:buNone/>
+            </a:pPr>
+            <a:r>
+              <a:rPr lang="en-US" altLang="ko-KR" sz="1050" b="0">
+                <a:solidFill>
+                  <a:srgbClr val="BBBEBF"/>
+                </a:solidFill>
+                <a:effectLst/>
+                <a:latin typeface="Consolas" panose="020B0609020204030204" pitchFamily="49" charset="0"/>
+              </a:rPr>
+              <a:t>        </a:t>
+            </a:r>
+            <a:r>
+              <a:rPr lang="en-US" altLang="ko-KR" sz="1050" b="0">
+                <a:solidFill>
+                  <a:srgbClr val="C9D1D9"/>
+                </a:solidFill>
+                <a:effectLst/>
+                <a:latin typeface="Consolas" panose="020B0609020204030204" pitchFamily="49" charset="0"/>
+              </a:rPr>
+              <a:t>user</a:t>
+            </a:r>
+            <a:r>
+              <a:rPr lang="en-US" altLang="ko-KR" sz="1050" b="0">
+                <a:solidFill>
+                  <a:srgbClr val="BBBEBF"/>
+                </a:solidFill>
+                <a:effectLst/>
+                <a:latin typeface="Consolas" panose="020B0609020204030204" pitchFamily="49" charset="0"/>
+              </a:rPr>
+              <a:t>.</a:t>
+            </a:r>
+            <a:r>
+              <a:rPr lang="en-US" altLang="ko-KR" sz="1050" b="0">
+                <a:solidFill>
+                  <a:srgbClr val="D2A8FF"/>
+                </a:solidFill>
+                <a:effectLst/>
+                <a:latin typeface="Consolas" panose="020B0609020204030204" pitchFamily="49" charset="0"/>
+              </a:rPr>
+              <a:t>addActivityScore</a:t>
+            </a:r>
+            <a:r>
+              <a:rPr lang="en-US" altLang="ko-KR" sz="1050" b="0">
+                <a:solidFill>
+                  <a:srgbClr val="BBBEBF"/>
+                </a:solidFill>
+                <a:effectLst/>
+                <a:latin typeface="Consolas" panose="020B0609020204030204" pitchFamily="49" charset="0"/>
+              </a:rPr>
+              <a:t>(</a:t>
+            </a:r>
+            <a:r>
+              <a:rPr lang="en-US" altLang="ko-KR" sz="1050" b="0">
+                <a:solidFill>
+                  <a:srgbClr val="FFA657"/>
+                </a:solidFill>
+                <a:effectLst/>
+                <a:latin typeface="Consolas" panose="020B0609020204030204" pitchFamily="49" charset="0"/>
+              </a:rPr>
+              <a:t>addActivityScoreRequestDto</a:t>
+            </a:r>
+            <a:r>
+              <a:rPr lang="en-US" altLang="ko-KR" sz="1050" b="0">
+                <a:solidFill>
+                  <a:srgbClr val="BBBEBF"/>
+                </a:solidFill>
+                <a:effectLst/>
+                <a:latin typeface="Consolas" panose="020B0609020204030204" pitchFamily="49" charset="0"/>
+              </a:rPr>
+              <a:t>.</a:t>
+            </a:r>
+            <a:r>
+              <a:rPr lang="en-US" altLang="ko-KR" sz="1050" b="0">
+                <a:solidFill>
+                  <a:srgbClr val="D2A8FF"/>
+                </a:solidFill>
+                <a:effectLst/>
+                <a:latin typeface="Consolas" panose="020B0609020204030204" pitchFamily="49" charset="0"/>
+              </a:rPr>
+              <a:t>getScore</a:t>
+            </a:r>
+            <a:r>
+              <a:rPr lang="en-US" altLang="ko-KR" sz="1050" b="0">
+                <a:solidFill>
+                  <a:srgbClr val="BBBEBF"/>
+                </a:solidFill>
+                <a:effectLst/>
+                <a:latin typeface="Consolas" panose="020B0609020204030204" pitchFamily="49" charset="0"/>
+              </a:rPr>
+              <a:t>());</a:t>
+            </a:r>
+          </a:p>
+          <a:p>
+            <a:pPr>
+              <a:lnSpc>
+                <a:spcPts val="1425"/>
+              </a:lnSpc>
+              <a:buNone/>
+            </a:pPr>
+            <a:r>
+              <a:rPr lang="en-US" altLang="ko-KR" sz="1050" b="0">
+                <a:solidFill>
+                  <a:srgbClr val="BBBEBF"/>
+                </a:solidFill>
+                <a:effectLst/>
+                <a:latin typeface="Consolas" panose="020B0609020204030204" pitchFamily="49" charset="0"/>
+              </a:rPr>
+              <a:t>        </a:t>
+            </a:r>
+            <a:r>
+              <a:rPr lang="en-US" altLang="ko-KR" sz="1050" b="0">
+                <a:solidFill>
+                  <a:srgbClr val="79C0FF"/>
+                </a:solidFill>
+                <a:effectLst/>
+                <a:latin typeface="Consolas" panose="020B0609020204030204" pitchFamily="49" charset="0"/>
+              </a:rPr>
+              <a:t>userRepository</a:t>
+            </a:r>
+            <a:r>
+              <a:rPr lang="en-US" altLang="ko-KR" sz="1050" b="0">
+                <a:solidFill>
+                  <a:srgbClr val="BBBEBF"/>
+                </a:solidFill>
+                <a:effectLst/>
+                <a:latin typeface="Consolas" panose="020B0609020204030204" pitchFamily="49" charset="0"/>
+              </a:rPr>
+              <a:t>.</a:t>
+            </a:r>
+            <a:r>
+              <a:rPr lang="en-US" altLang="ko-KR" sz="1050" b="0">
+                <a:solidFill>
+                  <a:srgbClr val="D2A8FF"/>
+                </a:solidFill>
+                <a:effectLst/>
+                <a:latin typeface="Consolas" panose="020B0609020204030204" pitchFamily="49" charset="0"/>
+              </a:rPr>
+              <a:t>save</a:t>
+            </a:r>
+            <a:r>
+              <a:rPr lang="en-US" altLang="ko-KR" sz="1050" b="0">
+                <a:solidFill>
+                  <a:srgbClr val="BBBEBF"/>
+                </a:solidFill>
+                <a:effectLst/>
+                <a:latin typeface="Consolas" panose="020B0609020204030204" pitchFamily="49" charset="0"/>
+              </a:rPr>
+              <a:t>(</a:t>
+            </a:r>
+            <a:r>
+              <a:rPr lang="en-US" altLang="ko-KR" sz="1050" b="0">
+                <a:solidFill>
+                  <a:srgbClr val="C9D1D9"/>
+                </a:solidFill>
+                <a:effectLst/>
+                <a:latin typeface="Consolas" panose="020B0609020204030204" pitchFamily="49" charset="0"/>
+              </a:rPr>
+              <a:t>user</a:t>
+            </a:r>
+            <a:r>
+              <a:rPr lang="en-US" altLang="ko-KR" sz="1050" b="0">
+                <a:solidFill>
+                  <a:srgbClr val="BBBEBF"/>
+                </a:solidFill>
+                <a:effectLst/>
+                <a:latin typeface="Consolas" panose="020B0609020204030204" pitchFamily="49" charset="0"/>
+              </a:rPr>
+              <a:t>);</a:t>
+            </a:r>
+          </a:p>
+          <a:p>
+            <a:pPr>
+              <a:lnSpc>
+                <a:spcPts val="1425"/>
+              </a:lnSpc>
+              <a:buNone/>
+            </a:pPr>
+            <a:r>
+              <a:rPr lang="en-US" altLang="ko-KR" sz="1050" b="0">
+                <a:solidFill>
+                  <a:srgbClr val="BBBEBF"/>
+                </a:solidFill>
+                <a:effectLst/>
+                <a:latin typeface="Consolas" panose="020B0609020204030204" pitchFamily="49" charset="0"/>
+              </a:rPr>
+              <a:t>    }</a:t>
+            </a:r>
+          </a:p>
+        </p:txBody>
+      </p:sp>
+      <p:grpSp>
+        <p:nvGrpSpPr>
+          <p:cNvPr id="10" name="그룹 9">
+            <a:extLst>
+              <a:ext uri="{FF2B5EF4-FFF2-40B4-BE49-F238E27FC236}">
+                <a16:creationId xmlns:a16="http://schemas.microsoft.com/office/drawing/2014/main" id="{2ED51DBC-A123-006B-89D6-B80E910D8CF2}"/>
+              </a:ext>
+            </a:extLst>
+          </p:cNvPr>
+          <p:cNvGrpSpPr/>
+          <p:nvPr/>
+        </p:nvGrpSpPr>
+        <p:grpSpPr>
+          <a:xfrm>
+            <a:off x="1187392" y="1931825"/>
+            <a:ext cx="2648320" cy="3867690"/>
+            <a:chOff x="1544008" y="1931825"/>
+            <a:chExt cx="2648320" cy="3867690"/>
+          </a:xfrm>
+        </p:grpSpPr>
+        <p:pic>
+          <p:nvPicPr>
+            <p:cNvPr id="9" name="그림 8">
+              <a:extLst>
+                <a:ext uri="{FF2B5EF4-FFF2-40B4-BE49-F238E27FC236}">
+                  <a16:creationId xmlns:a16="http://schemas.microsoft.com/office/drawing/2014/main" id="{FC6B53AE-535B-1A86-963D-293E1D79519F}"/>
+                </a:ext>
+              </a:extLst>
+            </p:cNvPr>
+            <p:cNvPicPr>
+              <a:picLocks noChangeAspect="1"/>
+            </p:cNvPicPr>
+            <p:nvPr/>
+          </p:nvPicPr>
+          <p:blipFill>
+            <a:blip r:embed="rId2"/>
+            <a:stretch>
+              <a:fillRect/>
+            </a:stretch>
+          </p:blipFill>
+          <p:spPr>
+            <a:xfrm>
+              <a:off x="1544008" y="1931825"/>
+              <a:ext cx="2648320" cy="3867690"/>
+            </a:xfrm>
+            <a:prstGeom prst="rect">
+              <a:avLst/>
+            </a:prstGeom>
+          </p:spPr>
+        </p:pic>
+        <p:sp>
+          <p:nvSpPr>
+            <p:cNvPr id="7" name="직사각형 6">
+              <a:extLst>
+                <a:ext uri="{FF2B5EF4-FFF2-40B4-BE49-F238E27FC236}">
+                  <a16:creationId xmlns:a16="http://schemas.microsoft.com/office/drawing/2014/main" id="{3C487F80-823A-D77B-EAAB-C283F58FB87D}"/>
+                </a:ext>
+              </a:extLst>
+            </p:cNvPr>
+            <p:cNvSpPr/>
+            <p:nvPr/>
+          </p:nvSpPr>
+          <p:spPr>
+            <a:xfrm>
+              <a:off x="1883664" y="5534339"/>
+              <a:ext cx="1179576" cy="265176"/>
+            </a:xfrm>
+            <a:prstGeom prst="rect">
+              <a:avLst/>
+            </a:prstGeom>
+            <a:noFill/>
+            <a:ln>
+              <a:solidFill>
+                <a:srgbClr val="FF0000"/>
+              </a:solidFill>
+            </a:ln>
+          </p:spPr>
+          <p:style>
+            <a:lnRef idx="2">
+              <a:schemeClr val="accent1">
+                <a:shade val="15000"/>
+              </a:schemeClr>
+            </a:lnRef>
+            <a:fillRef idx="1">
+              <a:schemeClr val="accent1"/>
+            </a:fillRef>
+            <a:effectRef idx="0">
+              <a:schemeClr val="accent1"/>
+            </a:effectRef>
+            <a:fontRef idx="minor">
+              <a:schemeClr val="lt1"/>
+            </a:fontRef>
+          </p:style>
+          <p:txBody>
+            <a:bodyPr rtlCol="0" anchor="ctr"/>
+            <a:lstStyle/>
+            <a:p>
+              <a:pPr algn="ctr"/>
+              <a:endParaRPr lang="ko-KR" altLang="en-US"/>
+            </a:p>
+          </p:txBody>
+        </p:sp>
+      </p:grpSp>
+    </p:spTree>
+    <p:extLst>
+      <p:ext uri="{BB962C8B-B14F-4D97-AF65-F5344CB8AC3E}">
+        <p14:creationId xmlns:p14="http://schemas.microsoft.com/office/powerpoint/2010/main" val="2059093745"/>
+      </p:ext>
+    </p:extLst>
+  </p:cSld>
+  <p:clrMapOvr>
+    <a:masterClrMapping/>
+  </p:clrMapOvr>
+</p:sld>
+</file>
+
 <file path=ppt/slides/slide2.xml><?xml version="1.0" encoding="utf-8"?>
 <p:sld xmlns:a="http://schemas.openxmlformats.org/drawingml/2006/main" xmlns:r="http://schemas.openxmlformats.org/officeDocument/2006/relationships" xmlns:p="http://schemas.openxmlformats.org/presentationml/2006/main">
   <p:cSld>
@@ -12821,6 +15283,7276 @@
     <p:extLst>
       <p:ext uri="{BB962C8B-B14F-4D97-AF65-F5344CB8AC3E}">
         <p14:creationId xmlns:p14="http://schemas.microsoft.com/office/powerpoint/2010/main" val="1030895262"/>
+      </p:ext>
+    </p:extLst>
+  </p:cSld>
+  <p:clrMapOvr>
+    <a:masterClrMapping/>
+  </p:clrMapOvr>
+</p:sld>
+</file>
+
+<file path=ppt/slides/slide20.xml><?xml version="1.0" encoding="utf-8"?>
+<p:sld xmlns:a="http://schemas.openxmlformats.org/drawingml/2006/main" xmlns:r="http://schemas.openxmlformats.org/officeDocument/2006/relationships" xmlns:p="http://schemas.openxmlformats.org/presentationml/2006/main">
+  <p:cSld>
+    <p:spTree>
+      <p:nvGrpSpPr>
+        <p:cNvPr id="1" name=""/>
+        <p:cNvGrpSpPr/>
+        <p:nvPr/>
+      </p:nvGrpSpPr>
+      <p:grpSpPr>
+        <a:xfrm>
+          <a:off x="0" y="0"/>
+          <a:ext cx="0" cy="0"/>
+          <a:chOff x="0" y="0"/>
+          <a:chExt cx="0" cy="0"/>
+        </a:xfrm>
+      </p:grpSpPr>
+      <p:sp>
+        <p:nvSpPr>
+          <p:cNvPr id="2" name="제목 1">
+            <a:extLst>
+              <a:ext uri="{FF2B5EF4-FFF2-40B4-BE49-F238E27FC236}">
+                <a16:creationId xmlns:a16="http://schemas.microsoft.com/office/drawing/2014/main" id="{1964A882-C1BF-A107-ACEE-8287502D9E96}"/>
+              </a:ext>
+            </a:extLst>
+          </p:cNvPr>
+          <p:cNvSpPr>
+            <a:spLocks noGrp="1"/>
+          </p:cNvSpPr>
+          <p:nvPr>
+            <p:ph type="title"/>
+          </p:nvPr>
+        </p:nvSpPr>
+        <p:spPr/>
+        <p:txBody>
+          <a:bodyPr>
+            <a:normAutofit/>
+          </a:bodyPr>
+          <a:lstStyle/>
+          <a:p>
+            <a:r>
+              <a:rPr lang="en-US" altLang="ko-KR" sz="3600"/>
+              <a:t>AddActivityScore API </a:t>
+            </a:r>
+            <a:r>
+              <a:rPr lang="ko-KR" altLang="en-US" sz="3600"/>
+              <a:t>작성 </a:t>
+            </a:r>
+            <a:r>
+              <a:rPr lang="en-US" altLang="ko-KR" sz="3600"/>
+              <a:t>- UserController</a:t>
+            </a:r>
+            <a:endParaRPr lang="ko-KR" altLang="en-US" sz="3600"/>
+          </a:p>
+        </p:txBody>
+      </p:sp>
+      <p:pic>
+        <p:nvPicPr>
+          <p:cNvPr id="4" name="그림 3">
+            <a:extLst>
+              <a:ext uri="{FF2B5EF4-FFF2-40B4-BE49-F238E27FC236}">
+                <a16:creationId xmlns:a16="http://schemas.microsoft.com/office/drawing/2014/main" id="{6908215F-6E7B-3181-4797-615E6FB0DE63}"/>
+              </a:ext>
+            </a:extLst>
+          </p:cNvPr>
+          <p:cNvPicPr>
+            <a:picLocks noChangeAspect="1"/>
+          </p:cNvPicPr>
+          <p:nvPr/>
+        </p:nvPicPr>
+        <p:blipFill>
+          <a:blip r:embed="rId2"/>
+          <a:stretch>
+            <a:fillRect/>
+          </a:stretch>
+        </p:blipFill>
+        <p:spPr>
+          <a:xfrm>
+            <a:off x="1097280" y="1910618"/>
+            <a:ext cx="6020640" cy="1390844"/>
+          </a:xfrm>
+          <a:prstGeom prst="rect">
+            <a:avLst/>
+          </a:prstGeom>
+        </p:spPr>
+      </p:pic>
+      <p:pic>
+        <p:nvPicPr>
+          <p:cNvPr id="6" name="그림 5">
+            <a:extLst>
+              <a:ext uri="{FF2B5EF4-FFF2-40B4-BE49-F238E27FC236}">
+                <a16:creationId xmlns:a16="http://schemas.microsoft.com/office/drawing/2014/main" id="{0C95EDF1-2E9D-BC9B-7AE3-9BF25C4A7968}"/>
+              </a:ext>
+            </a:extLst>
+          </p:cNvPr>
+          <p:cNvPicPr>
+            <a:picLocks noChangeAspect="1"/>
+          </p:cNvPicPr>
+          <p:nvPr/>
+        </p:nvPicPr>
+        <p:blipFill>
+          <a:blip r:embed="rId3"/>
+          <a:stretch>
+            <a:fillRect/>
+          </a:stretch>
+        </p:blipFill>
+        <p:spPr>
+          <a:xfrm>
+            <a:off x="1097280" y="3464425"/>
+            <a:ext cx="5224369" cy="3106972"/>
+          </a:xfrm>
+          <a:prstGeom prst="rect">
+            <a:avLst/>
+          </a:prstGeom>
+        </p:spPr>
+      </p:pic>
+    </p:spTree>
+    <p:extLst>
+      <p:ext uri="{BB962C8B-B14F-4D97-AF65-F5344CB8AC3E}">
+        <p14:creationId xmlns:p14="http://schemas.microsoft.com/office/powerpoint/2010/main" val="3987663848"/>
+      </p:ext>
+    </p:extLst>
+  </p:cSld>
+  <p:clrMapOvr>
+    <a:masterClrMapping/>
+  </p:clrMapOvr>
+</p:sld>
+</file>
+
+<file path=ppt/slides/slide21.xml><?xml version="1.0" encoding="utf-8"?>
+<p:sld xmlns:a="http://schemas.openxmlformats.org/drawingml/2006/main" xmlns:r="http://schemas.openxmlformats.org/officeDocument/2006/relationships" xmlns:p="http://schemas.openxmlformats.org/presentationml/2006/main">
+  <p:cSld>
+    <p:spTree>
+      <p:nvGrpSpPr>
+        <p:cNvPr id="1" name=""/>
+        <p:cNvGrpSpPr/>
+        <p:nvPr/>
+      </p:nvGrpSpPr>
+      <p:grpSpPr>
+        <a:xfrm>
+          <a:off x="0" y="0"/>
+          <a:ext cx="0" cy="0"/>
+          <a:chOff x="0" y="0"/>
+          <a:chExt cx="0" cy="0"/>
+        </a:xfrm>
+      </p:grpSpPr>
+      <p:sp>
+        <p:nvSpPr>
+          <p:cNvPr id="2" name="제목 1">
+            <a:extLst>
+              <a:ext uri="{FF2B5EF4-FFF2-40B4-BE49-F238E27FC236}">
+                <a16:creationId xmlns:a16="http://schemas.microsoft.com/office/drawing/2014/main" id="{77C803A7-DD4F-2912-5FCC-4B58BA0ED1F2}"/>
+              </a:ext>
+            </a:extLst>
+          </p:cNvPr>
+          <p:cNvSpPr>
+            <a:spLocks noGrp="1"/>
+          </p:cNvSpPr>
+          <p:nvPr>
+            <p:ph type="title"/>
+          </p:nvPr>
+        </p:nvSpPr>
+        <p:spPr/>
+        <p:txBody>
+          <a:bodyPr/>
+          <a:lstStyle/>
+          <a:p>
+            <a:r>
+              <a:rPr lang="ko-KR" altLang="en-US"/>
+              <a:t>게시글 작성 시 동작 정의</a:t>
+            </a:r>
+          </a:p>
+        </p:txBody>
+      </p:sp>
+      <p:sp>
+        <p:nvSpPr>
+          <p:cNvPr id="3" name="TextBox 2">
+            <a:extLst>
+              <a:ext uri="{FF2B5EF4-FFF2-40B4-BE49-F238E27FC236}">
+                <a16:creationId xmlns:a16="http://schemas.microsoft.com/office/drawing/2014/main" id="{4F7FE5E7-2BCD-3185-6889-1BC7FC6696F3}"/>
+              </a:ext>
+            </a:extLst>
+          </p:cNvPr>
+          <p:cNvSpPr txBox="1"/>
+          <p:nvPr/>
+        </p:nvSpPr>
+        <p:spPr>
+          <a:xfrm>
+            <a:off x="1115568" y="1828800"/>
+            <a:ext cx="10076688" cy="2585323"/>
+          </a:xfrm>
+          <a:prstGeom prst="rect">
+            <a:avLst/>
+          </a:prstGeom>
+          <a:noFill/>
+        </p:spPr>
+        <p:txBody>
+          <a:bodyPr wrap="square" rtlCol="0">
+            <a:spAutoFit/>
+          </a:bodyPr>
+          <a:lstStyle/>
+          <a:p>
+            <a:r>
+              <a:rPr lang="en-US" altLang="ko-KR">
+                <a:sym typeface="Wingdings" panose="05000000000000000000" pitchFamily="2" charset="2"/>
+              </a:rPr>
+              <a:t>※ </a:t>
+            </a:r>
+            <a:r>
+              <a:rPr lang="ko-KR" altLang="en-US">
+                <a:sym typeface="Wingdings" panose="05000000000000000000" pitchFamily="2" charset="2"/>
+              </a:rPr>
+              <a:t>게시글 작성 </a:t>
+            </a:r>
+            <a:r>
+              <a:rPr lang="en-US" altLang="ko-KR">
+                <a:sym typeface="Wingdings" panose="05000000000000000000" pitchFamily="2" charset="2"/>
+              </a:rPr>
+              <a:t>API </a:t>
+            </a:r>
+            <a:r>
+              <a:rPr lang="ko-KR" altLang="en-US">
+                <a:sym typeface="Wingdings" panose="05000000000000000000" pitchFamily="2" charset="2"/>
+              </a:rPr>
+              <a:t>요청 </a:t>
+            </a:r>
+            <a:r>
+              <a:rPr lang="en-US" altLang="ko-KR">
+                <a:sym typeface="Wingdings" panose="05000000000000000000" pitchFamily="2" charset="2"/>
+              </a:rPr>
+              <a:t> </a:t>
+            </a:r>
+            <a:r>
+              <a:rPr lang="ko-KR" altLang="en-US">
+                <a:sym typeface="Wingdings" panose="05000000000000000000" pitchFamily="2" charset="2"/>
+              </a:rPr>
+              <a:t>포인트 차감</a:t>
+            </a:r>
+            <a:r>
+              <a:rPr lang="en-US" altLang="ko-KR">
+                <a:sym typeface="Wingdings" panose="05000000000000000000" pitchFamily="2" charset="2"/>
+              </a:rPr>
+              <a:t>  </a:t>
+            </a:r>
+            <a:r>
+              <a:rPr lang="ko-KR" altLang="en-US">
+                <a:sym typeface="Wingdings" panose="05000000000000000000" pitchFamily="2" charset="2"/>
+              </a:rPr>
+              <a:t>게시글 등록 </a:t>
+            </a:r>
+            <a:r>
+              <a:rPr lang="en-US" altLang="ko-KR">
+                <a:sym typeface="Wingdings" panose="05000000000000000000" pitchFamily="2" charset="2"/>
+              </a:rPr>
+              <a:t> </a:t>
+            </a:r>
+            <a:r>
+              <a:rPr lang="ko-KR" altLang="en-US">
+                <a:sym typeface="Wingdings" panose="05000000000000000000" pitchFamily="2" charset="2"/>
+              </a:rPr>
+              <a:t>사용자 활동 포인트 증가</a:t>
+            </a:r>
+            <a:endParaRPr lang="en-US" altLang="ko-KR">
+              <a:sym typeface="Wingdings" panose="05000000000000000000" pitchFamily="2" charset="2"/>
+            </a:endParaRPr>
+          </a:p>
+          <a:p>
+            <a:r>
+              <a:rPr lang="en-US" altLang="ko-KR">
+                <a:sym typeface="Wingdings" panose="05000000000000000000" pitchFamily="2" charset="2"/>
+              </a:rPr>
+              <a:t> </a:t>
+            </a:r>
+          </a:p>
+          <a:p>
+            <a:pPr marL="342900" indent="-342900">
+              <a:buAutoNum type="arabicPeriod"/>
+            </a:pPr>
+            <a:r>
+              <a:rPr lang="en-US" altLang="ko-KR">
+                <a:sym typeface="Wingdings" panose="05000000000000000000" pitchFamily="2" charset="2"/>
+              </a:rPr>
+              <a:t>board-service  application.yml</a:t>
+            </a:r>
+            <a:r>
+              <a:rPr lang="ko-KR" altLang="en-US">
+                <a:sym typeface="Wingdings" panose="05000000000000000000" pitchFamily="2" charset="2"/>
+              </a:rPr>
+              <a:t> 에 포인트 차감을 위한 </a:t>
+            </a:r>
+            <a:r>
+              <a:rPr lang="en-US" altLang="ko-KR">
+                <a:sym typeface="Wingdings" panose="05000000000000000000" pitchFamily="2" charset="2"/>
+              </a:rPr>
+              <a:t>PointClient </a:t>
+            </a:r>
+            <a:r>
+              <a:rPr lang="ko-KR" altLang="en-US">
+                <a:sym typeface="Wingdings" panose="05000000000000000000" pitchFamily="2" charset="2"/>
+              </a:rPr>
+              <a:t>등록</a:t>
+            </a:r>
+            <a:r>
+              <a:rPr lang="en-US" altLang="ko-KR">
+                <a:sym typeface="Wingdings" panose="05000000000000000000" pitchFamily="2" charset="2"/>
+              </a:rPr>
+              <a:t> </a:t>
+            </a:r>
+          </a:p>
+          <a:p>
+            <a:pPr marL="342900" indent="-342900">
+              <a:buAutoNum type="arabicPeriod"/>
+            </a:pPr>
+            <a:r>
+              <a:rPr lang="ko-KR" altLang="en-US">
+                <a:sym typeface="Wingdings" panose="05000000000000000000" pitchFamily="2" charset="2"/>
+              </a:rPr>
+              <a:t>포인트 차감을 위한 요청 </a:t>
+            </a:r>
+            <a:r>
+              <a:rPr lang="en-US" altLang="ko-KR">
+                <a:sym typeface="Wingdings" panose="05000000000000000000" pitchFamily="2" charset="2"/>
+              </a:rPr>
+              <a:t>DTO </a:t>
+            </a:r>
+            <a:r>
+              <a:rPr lang="ko-KR" altLang="en-US">
+                <a:sym typeface="Wingdings" panose="05000000000000000000" pitchFamily="2" charset="2"/>
+              </a:rPr>
+              <a:t>작성</a:t>
+            </a:r>
+            <a:endParaRPr lang="en-US" altLang="ko-KR">
+              <a:sym typeface="Wingdings" panose="05000000000000000000" pitchFamily="2" charset="2"/>
+            </a:endParaRPr>
+          </a:p>
+          <a:p>
+            <a:pPr marL="342900" indent="-342900">
+              <a:buAutoNum type="arabicPeriod"/>
+            </a:pPr>
+            <a:r>
+              <a:rPr lang="ko-KR" altLang="en-US">
+                <a:sym typeface="Wingdings" panose="05000000000000000000" pitchFamily="2" charset="2"/>
+              </a:rPr>
+              <a:t>활동포인트 증가 요청 </a:t>
+            </a:r>
+            <a:r>
+              <a:rPr lang="en-US" altLang="ko-KR">
+                <a:sym typeface="Wingdings" panose="05000000000000000000" pitchFamily="2" charset="2"/>
+              </a:rPr>
+              <a:t>DTO </a:t>
+            </a:r>
+            <a:r>
+              <a:rPr lang="ko-KR" altLang="en-US">
+                <a:sym typeface="Wingdings" panose="05000000000000000000" pitchFamily="2" charset="2"/>
+              </a:rPr>
+              <a:t>작성</a:t>
+            </a:r>
+            <a:endParaRPr lang="en-US" altLang="ko-KR">
+              <a:sym typeface="Wingdings" panose="05000000000000000000" pitchFamily="2" charset="2"/>
+            </a:endParaRPr>
+          </a:p>
+          <a:p>
+            <a:pPr marL="342900" indent="-342900">
+              <a:buAutoNum type="arabicPeriod"/>
+            </a:pPr>
+            <a:r>
+              <a:rPr lang="en-US" altLang="ko-KR">
+                <a:sym typeface="Wingdings" panose="05000000000000000000" pitchFamily="2" charset="2"/>
+              </a:rPr>
+              <a:t>PointCient</a:t>
+            </a:r>
+            <a:r>
+              <a:rPr lang="ko-KR" altLang="en-US">
+                <a:sym typeface="Wingdings" panose="05000000000000000000" pitchFamily="2" charset="2"/>
+              </a:rPr>
+              <a:t>에 포인트 차감 메소드</a:t>
+            </a:r>
+            <a:r>
+              <a:rPr lang="en-US" altLang="ko-KR">
+                <a:sym typeface="Wingdings" panose="05000000000000000000" pitchFamily="2" charset="2"/>
+              </a:rPr>
+              <a:t>[point-service</a:t>
+            </a:r>
+            <a:r>
+              <a:rPr lang="ko-KR" altLang="en-US">
+                <a:sym typeface="Wingdings" panose="05000000000000000000" pitchFamily="2" charset="2"/>
+              </a:rPr>
+              <a:t>에 포인트 차감 </a:t>
+            </a:r>
+            <a:r>
+              <a:rPr lang="en-US" altLang="ko-KR">
+                <a:sym typeface="Wingdings" panose="05000000000000000000" pitchFamily="2" charset="2"/>
+              </a:rPr>
+              <a:t>API</a:t>
+            </a:r>
+            <a:r>
+              <a:rPr lang="ko-KR" altLang="en-US">
+                <a:sym typeface="Wingdings" panose="05000000000000000000" pitchFamily="2" charset="2"/>
+              </a:rPr>
+              <a:t>요청</a:t>
+            </a:r>
+            <a:r>
+              <a:rPr lang="en-US" altLang="ko-KR">
+                <a:sym typeface="Wingdings" panose="05000000000000000000" pitchFamily="2" charset="2"/>
+              </a:rPr>
+              <a:t>] </a:t>
+            </a:r>
+            <a:r>
+              <a:rPr lang="ko-KR" altLang="en-US">
+                <a:sym typeface="Wingdings" panose="05000000000000000000" pitchFamily="2" charset="2"/>
+              </a:rPr>
+              <a:t>작성</a:t>
+            </a:r>
+            <a:endParaRPr lang="en-US" altLang="ko-KR">
+              <a:sym typeface="Wingdings" panose="05000000000000000000" pitchFamily="2" charset="2"/>
+            </a:endParaRPr>
+          </a:p>
+          <a:p>
+            <a:pPr marL="342900" indent="-342900">
+              <a:buAutoNum type="arabicPeriod"/>
+            </a:pPr>
+            <a:r>
+              <a:rPr lang="en-US" altLang="ko-KR">
+                <a:sym typeface="Wingdings" panose="05000000000000000000" pitchFamily="2" charset="2"/>
+              </a:rPr>
+              <a:t>UserClient</a:t>
+            </a:r>
+            <a:r>
+              <a:rPr lang="ko-KR" altLang="en-US">
+                <a:sym typeface="Wingdings" panose="05000000000000000000" pitchFamily="2" charset="2"/>
+              </a:rPr>
+              <a:t>에 활동포인트 증가 메소드</a:t>
+            </a:r>
+            <a:r>
+              <a:rPr lang="en-US" altLang="ko-KR">
+                <a:sym typeface="Wingdings" panose="05000000000000000000" pitchFamily="2" charset="2"/>
+              </a:rPr>
+              <a:t>[user-service</a:t>
+            </a:r>
+            <a:r>
+              <a:rPr lang="ko-KR" altLang="en-US">
+                <a:sym typeface="Wingdings" panose="05000000000000000000" pitchFamily="2" charset="2"/>
+              </a:rPr>
+              <a:t>에 활동포인트 증가 </a:t>
+            </a:r>
+            <a:r>
+              <a:rPr lang="en-US" altLang="ko-KR">
+                <a:sym typeface="Wingdings" panose="05000000000000000000" pitchFamily="2" charset="2"/>
+              </a:rPr>
+              <a:t>API </a:t>
+            </a:r>
+            <a:r>
+              <a:rPr lang="ko-KR" altLang="en-US">
+                <a:sym typeface="Wingdings" panose="05000000000000000000" pitchFamily="2" charset="2"/>
+              </a:rPr>
+              <a:t>요청</a:t>
+            </a:r>
+            <a:r>
+              <a:rPr lang="en-US" altLang="ko-KR">
+                <a:sym typeface="Wingdings" panose="05000000000000000000" pitchFamily="2" charset="2"/>
+              </a:rPr>
+              <a:t>]</a:t>
+            </a:r>
+            <a:r>
+              <a:rPr lang="ko-KR" altLang="en-US">
+                <a:sym typeface="Wingdings" panose="05000000000000000000" pitchFamily="2" charset="2"/>
+              </a:rPr>
+              <a:t> 작성</a:t>
+            </a:r>
+            <a:endParaRPr lang="en-US" altLang="ko-KR">
+              <a:sym typeface="Wingdings" panose="05000000000000000000" pitchFamily="2" charset="2"/>
+            </a:endParaRPr>
+          </a:p>
+          <a:p>
+            <a:pPr marL="342900" indent="-342900">
+              <a:buAutoNum type="arabicPeriod"/>
+            </a:pPr>
+            <a:r>
+              <a:rPr lang="en-US" altLang="ko-KR">
+                <a:sym typeface="Wingdings" panose="05000000000000000000" pitchFamily="2" charset="2"/>
+              </a:rPr>
+              <a:t>board-service Service</a:t>
+            </a:r>
+            <a:r>
+              <a:rPr lang="ko-KR" altLang="en-US">
+                <a:sym typeface="Wingdings" panose="05000000000000000000" pitchFamily="2" charset="2"/>
+              </a:rPr>
+              <a:t> 내 </a:t>
+            </a:r>
+            <a:r>
+              <a:rPr lang="en-US" altLang="ko-KR">
+                <a:sym typeface="Wingdings" panose="05000000000000000000" pitchFamily="2" charset="2"/>
+              </a:rPr>
+              <a:t>create </a:t>
+            </a:r>
+            <a:r>
+              <a:rPr lang="ko-KR" altLang="en-US">
+                <a:sym typeface="Wingdings" panose="05000000000000000000" pitchFamily="2" charset="2"/>
+              </a:rPr>
+              <a:t>메소드 수정</a:t>
+            </a:r>
+            <a:endParaRPr lang="en-US" altLang="ko-KR">
+              <a:sym typeface="Wingdings" panose="05000000000000000000" pitchFamily="2" charset="2"/>
+            </a:endParaRPr>
+          </a:p>
+          <a:p>
+            <a:pPr marL="342900" indent="-342900">
+              <a:buAutoNum type="arabicPeriod"/>
+            </a:pPr>
+            <a:r>
+              <a:rPr lang="ko-KR" altLang="en-US">
+                <a:sym typeface="Wingdings" panose="05000000000000000000" pitchFamily="2" charset="2"/>
+              </a:rPr>
+              <a:t>게시글 작성 </a:t>
+            </a:r>
+            <a:r>
+              <a:rPr lang="en-US" altLang="ko-KR">
+                <a:sym typeface="Wingdings" panose="05000000000000000000" pitchFamily="2" charset="2"/>
+              </a:rPr>
+              <a:t>API</a:t>
+            </a:r>
+            <a:r>
+              <a:rPr lang="ko-KR" altLang="en-US">
+                <a:sym typeface="Wingdings" panose="05000000000000000000" pitchFamily="2" charset="2"/>
+              </a:rPr>
+              <a:t> 테스트</a:t>
+            </a:r>
+            <a:endParaRPr lang="en-US" altLang="ko-KR">
+              <a:sym typeface="Wingdings" panose="05000000000000000000" pitchFamily="2" charset="2"/>
+            </a:endParaRPr>
+          </a:p>
+        </p:txBody>
+      </p:sp>
+    </p:spTree>
+    <p:extLst>
+      <p:ext uri="{BB962C8B-B14F-4D97-AF65-F5344CB8AC3E}">
+        <p14:creationId xmlns:p14="http://schemas.microsoft.com/office/powerpoint/2010/main" val="878778961"/>
+      </p:ext>
+    </p:extLst>
+  </p:cSld>
+  <p:clrMapOvr>
+    <a:masterClrMapping/>
+  </p:clrMapOvr>
+</p:sld>
+</file>
+
+<file path=ppt/slides/slide22.xml><?xml version="1.0" encoding="utf-8"?>
+<p:sld xmlns:a="http://schemas.openxmlformats.org/drawingml/2006/main" xmlns:r="http://schemas.openxmlformats.org/officeDocument/2006/relationships" xmlns:p="http://schemas.openxmlformats.org/presentationml/2006/main">
+  <p:cSld>
+    <p:spTree>
+      <p:nvGrpSpPr>
+        <p:cNvPr id="1" name=""/>
+        <p:cNvGrpSpPr/>
+        <p:nvPr/>
+      </p:nvGrpSpPr>
+      <p:grpSpPr>
+        <a:xfrm>
+          <a:off x="0" y="0"/>
+          <a:ext cx="0" cy="0"/>
+          <a:chOff x="0" y="0"/>
+          <a:chExt cx="0" cy="0"/>
+        </a:xfrm>
+      </p:grpSpPr>
+      <p:sp>
+        <p:nvSpPr>
+          <p:cNvPr id="2" name="제목 1">
+            <a:extLst>
+              <a:ext uri="{FF2B5EF4-FFF2-40B4-BE49-F238E27FC236}">
+                <a16:creationId xmlns:a16="http://schemas.microsoft.com/office/drawing/2014/main" id="{59884F4C-97BE-A56D-A2C8-B6B7248B161C}"/>
+              </a:ext>
+            </a:extLst>
+          </p:cNvPr>
+          <p:cNvSpPr>
+            <a:spLocks noGrp="1"/>
+          </p:cNvSpPr>
+          <p:nvPr>
+            <p:ph type="title"/>
+          </p:nvPr>
+        </p:nvSpPr>
+        <p:spPr/>
+        <p:txBody>
+          <a:bodyPr/>
+          <a:lstStyle/>
+          <a:p>
+            <a:r>
+              <a:rPr lang="en-US" altLang="ko-KR"/>
+              <a:t>board-service application.yml</a:t>
+            </a:r>
+            <a:endParaRPr lang="ko-KR" altLang="en-US"/>
+          </a:p>
+        </p:txBody>
+      </p:sp>
+      <p:pic>
+        <p:nvPicPr>
+          <p:cNvPr id="4" name="그림 3">
+            <a:extLst>
+              <a:ext uri="{FF2B5EF4-FFF2-40B4-BE49-F238E27FC236}">
+                <a16:creationId xmlns:a16="http://schemas.microsoft.com/office/drawing/2014/main" id="{3DA359B5-4E9D-2A3F-2708-005B49D0685B}"/>
+              </a:ext>
+            </a:extLst>
+          </p:cNvPr>
+          <p:cNvPicPr>
+            <a:picLocks noChangeAspect="1"/>
+          </p:cNvPicPr>
+          <p:nvPr/>
+        </p:nvPicPr>
+        <p:blipFill>
+          <a:blip r:embed="rId2"/>
+          <a:stretch>
+            <a:fillRect/>
+          </a:stretch>
+        </p:blipFill>
+        <p:spPr>
+          <a:xfrm>
+            <a:off x="1094232" y="1890498"/>
+            <a:ext cx="2924583" cy="3077004"/>
+          </a:xfrm>
+          <a:prstGeom prst="rect">
+            <a:avLst/>
+          </a:prstGeom>
+        </p:spPr>
+      </p:pic>
+      <p:grpSp>
+        <p:nvGrpSpPr>
+          <p:cNvPr id="8" name="그룹 7">
+            <a:extLst>
+              <a:ext uri="{FF2B5EF4-FFF2-40B4-BE49-F238E27FC236}">
+                <a16:creationId xmlns:a16="http://schemas.microsoft.com/office/drawing/2014/main" id="{C17F96BA-2F02-A34D-63F7-2EE906EEBF0E}"/>
+              </a:ext>
+            </a:extLst>
+          </p:cNvPr>
+          <p:cNvGrpSpPr/>
+          <p:nvPr/>
+        </p:nvGrpSpPr>
+        <p:grpSpPr>
+          <a:xfrm>
+            <a:off x="4162806" y="1890498"/>
+            <a:ext cx="4249674" cy="4774769"/>
+            <a:chOff x="4162806" y="1890498"/>
+            <a:chExt cx="4249674" cy="4774769"/>
+          </a:xfrm>
+        </p:grpSpPr>
+        <p:sp>
+          <p:nvSpPr>
+            <p:cNvPr id="6" name="TextBox 5">
+              <a:extLst>
+                <a:ext uri="{FF2B5EF4-FFF2-40B4-BE49-F238E27FC236}">
+                  <a16:creationId xmlns:a16="http://schemas.microsoft.com/office/drawing/2014/main" id="{E815FD8F-E8E7-3B09-2DA1-8A131B03A721}"/>
+                </a:ext>
+              </a:extLst>
+            </p:cNvPr>
+            <p:cNvSpPr txBox="1"/>
+            <p:nvPr/>
+          </p:nvSpPr>
+          <p:spPr>
+            <a:xfrm>
+              <a:off x="4162806" y="1890498"/>
+              <a:ext cx="4249674" cy="4774769"/>
+            </a:xfrm>
+            <a:prstGeom prst="rect">
+              <a:avLst/>
+            </a:prstGeom>
+            <a:solidFill>
+              <a:schemeClr val="tx1"/>
+            </a:solidFill>
+          </p:spPr>
+          <p:txBody>
+            <a:bodyPr wrap="square">
+              <a:spAutoFit/>
+            </a:bodyPr>
+            <a:lstStyle/>
+            <a:p>
+              <a:pPr>
+                <a:lnSpc>
+                  <a:spcPts val="1425"/>
+                </a:lnSpc>
+                <a:buNone/>
+              </a:pPr>
+              <a:r>
+                <a:rPr lang="en-US" altLang="ko-KR" sz="1100" b="0">
+                  <a:solidFill>
+                    <a:srgbClr val="7EE787"/>
+                  </a:solidFill>
+                  <a:effectLst/>
+                  <a:latin typeface="Consolas" panose="020B0609020204030204" pitchFamily="49" charset="0"/>
+                </a:rPr>
+                <a:t>server</a:t>
+              </a:r>
+              <a:r>
+                <a:rPr lang="en-US" altLang="ko-KR" sz="1100" b="0">
+                  <a:solidFill>
+                    <a:srgbClr val="BBBEBF"/>
+                  </a:solidFill>
+                  <a:effectLst/>
+                  <a:latin typeface="Consolas" panose="020B0609020204030204" pitchFamily="49" charset="0"/>
+                </a:rPr>
+                <a:t>:</a:t>
+              </a:r>
+            </a:p>
+            <a:p>
+              <a:pPr>
+                <a:lnSpc>
+                  <a:spcPts val="1425"/>
+                </a:lnSpc>
+                <a:buNone/>
+              </a:pPr>
+              <a:r>
+                <a:rPr lang="en-US" altLang="ko-KR" sz="1100" b="0">
+                  <a:solidFill>
+                    <a:srgbClr val="BBBEBF"/>
+                  </a:solidFill>
+                  <a:effectLst/>
+                  <a:latin typeface="Consolas" panose="020B0609020204030204" pitchFamily="49" charset="0"/>
+                </a:rPr>
+                <a:t>    </a:t>
+              </a:r>
+              <a:r>
+                <a:rPr lang="en-US" altLang="ko-KR" sz="1100" b="0">
+                  <a:solidFill>
+                    <a:srgbClr val="7EE787"/>
+                  </a:solidFill>
+                  <a:effectLst/>
+                  <a:latin typeface="Consolas" panose="020B0609020204030204" pitchFamily="49" charset="0"/>
+                </a:rPr>
+                <a:t>port</a:t>
+              </a:r>
+              <a:r>
+                <a:rPr lang="en-US" altLang="ko-KR" sz="1100" b="0">
+                  <a:solidFill>
+                    <a:srgbClr val="BBBEBF"/>
+                  </a:solidFill>
+                  <a:effectLst/>
+                  <a:latin typeface="Consolas" panose="020B0609020204030204" pitchFamily="49" charset="0"/>
+                </a:rPr>
+                <a:t>: </a:t>
+              </a:r>
+              <a:r>
+                <a:rPr lang="en-US" altLang="ko-KR" sz="1100" b="0">
+                  <a:solidFill>
+                    <a:srgbClr val="B5CEA8"/>
+                  </a:solidFill>
+                  <a:effectLst/>
+                  <a:latin typeface="Consolas" panose="020B0609020204030204" pitchFamily="49" charset="0"/>
+                </a:rPr>
+                <a:t>8081</a:t>
+              </a:r>
+              <a:endParaRPr lang="en-US" altLang="ko-KR" sz="1100" b="0">
+                <a:solidFill>
+                  <a:srgbClr val="BBBEBF"/>
+                </a:solidFill>
+                <a:effectLst/>
+                <a:latin typeface="Consolas" panose="020B0609020204030204" pitchFamily="49" charset="0"/>
+              </a:endParaRPr>
+            </a:p>
+            <a:p>
+              <a:pPr>
+                <a:lnSpc>
+                  <a:spcPts val="1425"/>
+                </a:lnSpc>
+                <a:buNone/>
+              </a:pPr>
+              <a:r>
+                <a:rPr lang="en-US" altLang="ko-KR" sz="1100" b="0">
+                  <a:solidFill>
+                    <a:srgbClr val="BBBEBF"/>
+                  </a:solidFill>
+                  <a:effectLst/>
+                  <a:latin typeface="Consolas" panose="020B0609020204030204" pitchFamily="49" charset="0"/>
+                </a:rPr>
+                <a:t>    </a:t>
+              </a:r>
+            </a:p>
+            <a:p>
+              <a:pPr>
+                <a:lnSpc>
+                  <a:spcPts val="1425"/>
+                </a:lnSpc>
+                <a:buNone/>
+              </a:pPr>
+              <a:r>
+                <a:rPr lang="en-US" altLang="ko-KR" sz="1100" b="0">
+                  <a:solidFill>
+                    <a:srgbClr val="7EE787"/>
+                  </a:solidFill>
+                  <a:effectLst/>
+                  <a:latin typeface="Consolas" panose="020B0609020204030204" pitchFamily="49" charset="0"/>
+                </a:rPr>
+                <a:t>spring</a:t>
+              </a:r>
+              <a:r>
+                <a:rPr lang="en-US" altLang="ko-KR" sz="1100" b="0">
+                  <a:solidFill>
+                    <a:srgbClr val="BBBEBF"/>
+                  </a:solidFill>
+                  <a:effectLst/>
+                  <a:latin typeface="Consolas" panose="020B0609020204030204" pitchFamily="49" charset="0"/>
+                </a:rPr>
+                <a:t>:</a:t>
+              </a:r>
+            </a:p>
+            <a:p>
+              <a:pPr>
+                <a:lnSpc>
+                  <a:spcPts val="1425"/>
+                </a:lnSpc>
+                <a:buNone/>
+              </a:pPr>
+              <a:r>
+                <a:rPr lang="en-US" altLang="ko-KR" sz="1100" b="0">
+                  <a:solidFill>
+                    <a:srgbClr val="BBBEBF"/>
+                  </a:solidFill>
+                  <a:effectLst/>
+                  <a:latin typeface="Consolas" panose="020B0609020204030204" pitchFamily="49" charset="0"/>
+                </a:rPr>
+                <a:t>    </a:t>
+              </a:r>
+              <a:r>
+                <a:rPr lang="en-US" altLang="ko-KR" sz="1100" b="0">
+                  <a:solidFill>
+                    <a:srgbClr val="7EE787"/>
+                  </a:solidFill>
+                  <a:effectLst/>
+                  <a:latin typeface="Consolas" panose="020B0609020204030204" pitchFamily="49" charset="0"/>
+                </a:rPr>
+                <a:t>datasource</a:t>
+              </a:r>
+              <a:r>
+                <a:rPr lang="en-US" altLang="ko-KR" sz="1100" b="0">
+                  <a:solidFill>
+                    <a:srgbClr val="BBBEBF"/>
+                  </a:solidFill>
+                  <a:effectLst/>
+                  <a:latin typeface="Consolas" panose="020B0609020204030204" pitchFamily="49" charset="0"/>
+                </a:rPr>
+                <a:t>:</a:t>
+              </a:r>
+            </a:p>
+            <a:p>
+              <a:pPr>
+                <a:lnSpc>
+                  <a:spcPts val="1425"/>
+                </a:lnSpc>
+                <a:buNone/>
+              </a:pPr>
+              <a:r>
+                <a:rPr lang="en-US" altLang="ko-KR" sz="1100" b="0">
+                  <a:solidFill>
+                    <a:srgbClr val="BBBEBF"/>
+                  </a:solidFill>
+                  <a:effectLst/>
+                  <a:latin typeface="Consolas" panose="020B0609020204030204" pitchFamily="49" charset="0"/>
+                </a:rPr>
+                <a:t>        </a:t>
+              </a:r>
+              <a:r>
+                <a:rPr lang="en-US" altLang="ko-KR" sz="1100" b="0">
+                  <a:solidFill>
+                    <a:srgbClr val="7EE787"/>
+                  </a:solidFill>
+                  <a:effectLst/>
+                  <a:latin typeface="Consolas" panose="020B0609020204030204" pitchFamily="49" charset="0"/>
+                </a:rPr>
+                <a:t>url</a:t>
+              </a:r>
+              <a:r>
+                <a:rPr lang="en-US" altLang="ko-KR" sz="1100" b="0">
+                  <a:solidFill>
+                    <a:srgbClr val="BBBEBF"/>
+                  </a:solidFill>
+                  <a:effectLst/>
+                  <a:latin typeface="Consolas" panose="020B0609020204030204" pitchFamily="49" charset="0"/>
+                </a:rPr>
+                <a:t>: </a:t>
+              </a:r>
+              <a:r>
+                <a:rPr lang="en-US" altLang="ko-KR" sz="1100" b="0">
+                  <a:solidFill>
+                    <a:srgbClr val="A5D6FF"/>
+                  </a:solidFill>
+                  <a:effectLst/>
+                  <a:latin typeface="Consolas" panose="020B0609020204030204" pitchFamily="49" charset="0"/>
+                </a:rPr>
+                <a:t>jdbc:mysql://localhost:3321/board-db</a:t>
+              </a:r>
+              <a:endParaRPr lang="en-US" altLang="ko-KR" sz="1100" b="0">
+                <a:solidFill>
+                  <a:srgbClr val="BBBEBF"/>
+                </a:solidFill>
+                <a:effectLst/>
+                <a:latin typeface="Consolas" panose="020B0609020204030204" pitchFamily="49" charset="0"/>
+              </a:endParaRPr>
+            </a:p>
+            <a:p>
+              <a:pPr>
+                <a:lnSpc>
+                  <a:spcPts val="1425"/>
+                </a:lnSpc>
+                <a:buNone/>
+              </a:pPr>
+              <a:r>
+                <a:rPr lang="en-US" altLang="ko-KR" sz="1100" b="0">
+                  <a:solidFill>
+                    <a:srgbClr val="BBBEBF"/>
+                  </a:solidFill>
+                  <a:effectLst/>
+                  <a:latin typeface="Consolas" panose="020B0609020204030204" pitchFamily="49" charset="0"/>
+                </a:rPr>
+                <a:t>        </a:t>
+              </a:r>
+              <a:r>
+                <a:rPr lang="en-US" altLang="ko-KR" sz="1100" b="0">
+                  <a:solidFill>
+                    <a:srgbClr val="7EE787"/>
+                  </a:solidFill>
+                  <a:effectLst/>
+                  <a:latin typeface="Consolas" panose="020B0609020204030204" pitchFamily="49" charset="0"/>
+                </a:rPr>
+                <a:t>username</a:t>
+              </a:r>
+              <a:r>
+                <a:rPr lang="en-US" altLang="ko-KR" sz="1100" b="0">
+                  <a:solidFill>
+                    <a:srgbClr val="BBBEBF"/>
+                  </a:solidFill>
+                  <a:effectLst/>
+                  <a:latin typeface="Consolas" panose="020B0609020204030204" pitchFamily="49" charset="0"/>
+                </a:rPr>
+                <a:t>: </a:t>
+              </a:r>
+              <a:r>
+                <a:rPr lang="en-US" altLang="ko-KR" sz="1100" b="0">
+                  <a:solidFill>
+                    <a:srgbClr val="A5D6FF"/>
+                  </a:solidFill>
+                  <a:effectLst/>
+                  <a:latin typeface="Consolas" panose="020B0609020204030204" pitchFamily="49" charset="0"/>
+                </a:rPr>
+                <a:t>root</a:t>
+              </a:r>
+              <a:endParaRPr lang="en-US" altLang="ko-KR" sz="1100" b="0">
+                <a:solidFill>
+                  <a:srgbClr val="BBBEBF"/>
+                </a:solidFill>
+                <a:effectLst/>
+                <a:latin typeface="Consolas" panose="020B0609020204030204" pitchFamily="49" charset="0"/>
+              </a:endParaRPr>
+            </a:p>
+            <a:p>
+              <a:pPr>
+                <a:lnSpc>
+                  <a:spcPts val="1425"/>
+                </a:lnSpc>
+                <a:buNone/>
+              </a:pPr>
+              <a:r>
+                <a:rPr lang="en-US" altLang="ko-KR" sz="1100" b="0">
+                  <a:solidFill>
+                    <a:srgbClr val="BBBEBF"/>
+                  </a:solidFill>
+                  <a:effectLst/>
+                  <a:latin typeface="Consolas" panose="020B0609020204030204" pitchFamily="49" charset="0"/>
+                </a:rPr>
+                <a:t>        </a:t>
+              </a:r>
+              <a:r>
+                <a:rPr lang="en-US" altLang="ko-KR" sz="1100" b="0">
+                  <a:solidFill>
+                    <a:srgbClr val="7EE787"/>
+                  </a:solidFill>
+                  <a:effectLst/>
+                  <a:latin typeface="Consolas" panose="020B0609020204030204" pitchFamily="49" charset="0"/>
+                </a:rPr>
+                <a:t>password</a:t>
+              </a:r>
+              <a:r>
+                <a:rPr lang="en-US" altLang="ko-KR" sz="1100" b="0">
+                  <a:solidFill>
+                    <a:srgbClr val="BBBEBF"/>
+                  </a:solidFill>
+                  <a:effectLst/>
+                  <a:latin typeface="Consolas" panose="020B0609020204030204" pitchFamily="49" charset="0"/>
+                </a:rPr>
+                <a:t>: </a:t>
+              </a:r>
+              <a:r>
+                <a:rPr lang="en-US" altLang="ko-KR" sz="1100" b="0">
+                  <a:solidFill>
+                    <a:srgbClr val="A5D6FF"/>
+                  </a:solidFill>
+                  <a:effectLst/>
+                  <a:latin typeface="Consolas" panose="020B0609020204030204" pitchFamily="49" charset="0"/>
+                </a:rPr>
+                <a:t>password</a:t>
+              </a:r>
+              <a:endParaRPr lang="en-US" altLang="ko-KR" sz="1100" b="0">
+                <a:solidFill>
+                  <a:srgbClr val="BBBEBF"/>
+                </a:solidFill>
+                <a:effectLst/>
+                <a:latin typeface="Consolas" panose="020B0609020204030204" pitchFamily="49" charset="0"/>
+              </a:endParaRPr>
+            </a:p>
+            <a:p>
+              <a:pPr>
+                <a:lnSpc>
+                  <a:spcPts val="1425"/>
+                </a:lnSpc>
+                <a:buNone/>
+              </a:pPr>
+              <a:r>
+                <a:rPr lang="en-US" altLang="ko-KR" sz="1100" b="0">
+                  <a:solidFill>
+                    <a:srgbClr val="BBBEBF"/>
+                  </a:solidFill>
+                  <a:effectLst/>
+                  <a:latin typeface="Consolas" panose="020B0609020204030204" pitchFamily="49" charset="0"/>
+                </a:rPr>
+                <a:t>        </a:t>
+              </a:r>
+              <a:r>
+                <a:rPr lang="en-US" altLang="ko-KR" sz="1100" b="0">
+                  <a:solidFill>
+                    <a:srgbClr val="7EE787"/>
+                  </a:solidFill>
+                  <a:effectLst/>
+                  <a:latin typeface="Consolas" panose="020B0609020204030204" pitchFamily="49" charset="0"/>
+                </a:rPr>
+                <a:t>driver-class-name</a:t>
+              </a:r>
+              <a:r>
+                <a:rPr lang="en-US" altLang="ko-KR" sz="1100" b="0">
+                  <a:solidFill>
+                    <a:srgbClr val="BBBEBF"/>
+                  </a:solidFill>
+                  <a:effectLst/>
+                  <a:latin typeface="Consolas" panose="020B0609020204030204" pitchFamily="49" charset="0"/>
+                </a:rPr>
+                <a:t>: </a:t>
+              </a:r>
+              <a:r>
+                <a:rPr lang="en-US" altLang="ko-KR" sz="1100" b="0">
+                  <a:solidFill>
+                    <a:srgbClr val="A5D6FF"/>
+                  </a:solidFill>
+                  <a:effectLst/>
+                  <a:latin typeface="Consolas" panose="020B0609020204030204" pitchFamily="49" charset="0"/>
+                </a:rPr>
+                <a:t>com.mysql.cj.jdbc.Driver</a:t>
+              </a:r>
+              <a:endParaRPr lang="en-US" altLang="ko-KR" sz="1100" b="0">
+                <a:solidFill>
+                  <a:srgbClr val="BBBEBF"/>
+                </a:solidFill>
+                <a:effectLst/>
+                <a:latin typeface="Consolas" panose="020B0609020204030204" pitchFamily="49" charset="0"/>
+              </a:endParaRPr>
+            </a:p>
+            <a:p>
+              <a:pPr>
+                <a:lnSpc>
+                  <a:spcPts val="1425"/>
+                </a:lnSpc>
+                <a:buNone/>
+              </a:pPr>
+              <a:br>
+                <a:rPr lang="en-US" altLang="ko-KR" sz="1100" b="0">
+                  <a:solidFill>
+                    <a:srgbClr val="BBBEBF"/>
+                  </a:solidFill>
+                  <a:effectLst/>
+                  <a:latin typeface="Consolas" panose="020B0609020204030204" pitchFamily="49" charset="0"/>
+                </a:rPr>
+              </a:br>
+              <a:endParaRPr lang="en-US" altLang="ko-KR" sz="1100" b="0">
+                <a:solidFill>
+                  <a:srgbClr val="BBBEBF"/>
+                </a:solidFill>
+                <a:effectLst/>
+                <a:latin typeface="Consolas" panose="020B0609020204030204" pitchFamily="49" charset="0"/>
+              </a:endParaRPr>
+            </a:p>
+            <a:p>
+              <a:pPr>
+                <a:lnSpc>
+                  <a:spcPts val="1425"/>
+                </a:lnSpc>
+                <a:buNone/>
+              </a:pPr>
+              <a:r>
+                <a:rPr lang="en-US" altLang="ko-KR" sz="1100" b="0">
+                  <a:solidFill>
+                    <a:srgbClr val="BBBEBF"/>
+                  </a:solidFill>
+                  <a:effectLst/>
+                  <a:latin typeface="Consolas" panose="020B0609020204030204" pitchFamily="49" charset="0"/>
+                </a:rPr>
+                <a:t>    </a:t>
+              </a:r>
+              <a:r>
+                <a:rPr lang="en-US" altLang="ko-KR" sz="1100" b="0">
+                  <a:solidFill>
+                    <a:srgbClr val="7EE787"/>
+                  </a:solidFill>
+                  <a:effectLst/>
+                  <a:latin typeface="Consolas" panose="020B0609020204030204" pitchFamily="49" charset="0"/>
+                </a:rPr>
+                <a:t>jpa</a:t>
+              </a:r>
+              <a:r>
+                <a:rPr lang="en-US" altLang="ko-KR" sz="1100" b="0">
+                  <a:solidFill>
+                    <a:srgbClr val="BBBEBF"/>
+                  </a:solidFill>
+                  <a:effectLst/>
+                  <a:latin typeface="Consolas" panose="020B0609020204030204" pitchFamily="49" charset="0"/>
+                </a:rPr>
+                <a:t>:</a:t>
+              </a:r>
+            </a:p>
+            <a:p>
+              <a:pPr>
+                <a:lnSpc>
+                  <a:spcPts val="1425"/>
+                </a:lnSpc>
+                <a:buNone/>
+              </a:pPr>
+              <a:r>
+                <a:rPr lang="en-US" altLang="ko-KR" sz="1100" b="0">
+                  <a:solidFill>
+                    <a:srgbClr val="BBBEBF"/>
+                  </a:solidFill>
+                  <a:effectLst/>
+                  <a:latin typeface="Consolas" panose="020B0609020204030204" pitchFamily="49" charset="0"/>
+                </a:rPr>
+                <a:t>        </a:t>
+              </a:r>
+              <a:r>
+                <a:rPr lang="en-US" altLang="ko-KR" sz="1100" b="0">
+                  <a:solidFill>
+                    <a:srgbClr val="7EE787"/>
+                  </a:solidFill>
+                  <a:effectLst/>
+                  <a:latin typeface="Consolas" panose="020B0609020204030204" pitchFamily="49" charset="0"/>
+                </a:rPr>
+                <a:t>hibernate</a:t>
+              </a:r>
+              <a:r>
+                <a:rPr lang="en-US" altLang="ko-KR" sz="1100" b="0">
+                  <a:solidFill>
+                    <a:srgbClr val="BBBEBF"/>
+                  </a:solidFill>
+                  <a:effectLst/>
+                  <a:latin typeface="Consolas" panose="020B0609020204030204" pitchFamily="49" charset="0"/>
+                </a:rPr>
+                <a:t>:</a:t>
+              </a:r>
+            </a:p>
+            <a:p>
+              <a:pPr>
+                <a:lnSpc>
+                  <a:spcPts val="1425"/>
+                </a:lnSpc>
+                <a:buNone/>
+              </a:pPr>
+              <a:r>
+                <a:rPr lang="en-US" altLang="ko-KR" sz="1100" b="0">
+                  <a:solidFill>
+                    <a:srgbClr val="BBBEBF"/>
+                  </a:solidFill>
+                  <a:effectLst/>
+                  <a:latin typeface="Consolas" panose="020B0609020204030204" pitchFamily="49" charset="0"/>
+                </a:rPr>
+                <a:t>            </a:t>
+              </a:r>
+              <a:r>
+                <a:rPr lang="en-US" altLang="ko-KR" sz="1100" b="0">
+                  <a:solidFill>
+                    <a:srgbClr val="7EE787"/>
+                  </a:solidFill>
+                  <a:effectLst/>
+                  <a:latin typeface="Consolas" panose="020B0609020204030204" pitchFamily="49" charset="0"/>
+                </a:rPr>
+                <a:t>ddl-auto</a:t>
+              </a:r>
+              <a:r>
+                <a:rPr lang="en-US" altLang="ko-KR" sz="1100" b="0">
+                  <a:solidFill>
+                    <a:srgbClr val="BBBEBF"/>
+                  </a:solidFill>
+                  <a:effectLst/>
+                  <a:latin typeface="Consolas" panose="020B0609020204030204" pitchFamily="49" charset="0"/>
+                </a:rPr>
+                <a:t>: </a:t>
+              </a:r>
+              <a:r>
+                <a:rPr lang="en-US" altLang="ko-KR" sz="1100" b="0">
+                  <a:solidFill>
+                    <a:srgbClr val="A5D6FF"/>
+                  </a:solidFill>
+                  <a:effectLst/>
+                  <a:latin typeface="Consolas" panose="020B0609020204030204" pitchFamily="49" charset="0"/>
+                </a:rPr>
+                <a:t>update</a:t>
+              </a:r>
+              <a:endParaRPr lang="en-US" altLang="ko-KR" sz="1100" b="0">
+                <a:solidFill>
+                  <a:srgbClr val="BBBEBF"/>
+                </a:solidFill>
+                <a:effectLst/>
+                <a:latin typeface="Consolas" panose="020B0609020204030204" pitchFamily="49" charset="0"/>
+              </a:endParaRPr>
+            </a:p>
+            <a:p>
+              <a:pPr>
+                <a:lnSpc>
+                  <a:spcPts val="1425"/>
+                </a:lnSpc>
+                <a:buNone/>
+              </a:pPr>
+              <a:r>
+                <a:rPr lang="en-US" altLang="ko-KR" sz="1100" b="0">
+                  <a:solidFill>
+                    <a:srgbClr val="BBBEBF"/>
+                  </a:solidFill>
+                  <a:effectLst/>
+                  <a:latin typeface="Consolas" panose="020B0609020204030204" pitchFamily="49" charset="0"/>
+                </a:rPr>
+                <a:t>        </a:t>
+              </a:r>
+              <a:r>
+                <a:rPr lang="en-US" altLang="ko-KR" sz="1100" b="0">
+                  <a:solidFill>
+                    <a:srgbClr val="7EE787"/>
+                  </a:solidFill>
+                  <a:effectLst/>
+                  <a:latin typeface="Consolas" panose="020B0609020204030204" pitchFamily="49" charset="0"/>
+                </a:rPr>
+                <a:t>show-sql</a:t>
+              </a:r>
+              <a:r>
+                <a:rPr lang="en-US" altLang="ko-KR" sz="1100" b="0">
+                  <a:solidFill>
+                    <a:srgbClr val="BBBEBF"/>
+                  </a:solidFill>
+                  <a:effectLst/>
+                  <a:latin typeface="Consolas" panose="020B0609020204030204" pitchFamily="49" charset="0"/>
+                </a:rPr>
+                <a:t>: </a:t>
+              </a:r>
+              <a:r>
+                <a:rPr lang="en-US" altLang="ko-KR" sz="1100" b="0">
+                  <a:solidFill>
+                    <a:srgbClr val="569CD6"/>
+                  </a:solidFill>
+                  <a:effectLst/>
+                  <a:latin typeface="Consolas" panose="020B0609020204030204" pitchFamily="49" charset="0"/>
+                </a:rPr>
+                <a:t>true</a:t>
+              </a:r>
+              <a:endParaRPr lang="en-US" altLang="ko-KR" sz="1100" b="0">
+                <a:solidFill>
+                  <a:srgbClr val="BBBEBF"/>
+                </a:solidFill>
+                <a:effectLst/>
+                <a:latin typeface="Consolas" panose="020B0609020204030204" pitchFamily="49" charset="0"/>
+              </a:endParaRPr>
+            </a:p>
+            <a:p>
+              <a:pPr>
+                <a:lnSpc>
+                  <a:spcPts val="1425"/>
+                </a:lnSpc>
+                <a:buNone/>
+              </a:pPr>
+              <a:br>
+                <a:rPr lang="en-US" altLang="ko-KR" sz="1100" b="0">
+                  <a:solidFill>
+                    <a:srgbClr val="BBBEBF"/>
+                  </a:solidFill>
+                  <a:effectLst/>
+                  <a:latin typeface="Consolas" panose="020B0609020204030204" pitchFamily="49" charset="0"/>
+                </a:rPr>
+              </a:br>
+              <a:endParaRPr lang="en-US" altLang="ko-KR" sz="1100" b="0">
+                <a:solidFill>
+                  <a:srgbClr val="BBBEBF"/>
+                </a:solidFill>
+                <a:effectLst/>
+                <a:latin typeface="Consolas" panose="020B0609020204030204" pitchFamily="49" charset="0"/>
+              </a:endParaRPr>
+            </a:p>
+            <a:p>
+              <a:pPr>
+                <a:lnSpc>
+                  <a:spcPts val="1425"/>
+                </a:lnSpc>
+                <a:buNone/>
+              </a:pPr>
+              <a:r>
+                <a:rPr lang="en-US" altLang="ko-KR" sz="1100" b="0">
+                  <a:solidFill>
+                    <a:srgbClr val="BBBEBF"/>
+                  </a:solidFill>
+                  <a:effectLst/>
+                  <a:latin typeface="Consolas" panose="020B0609020204030204" pitchFamily="49" charset="0"/>
+                </a:rPr>
+                <a:t>    </a:t>
+              </a:r>
+              <a:r>
+                <a:rPr lang="en-US" altLang="ko-KR" sz="1100" b="0">
+                  <a:solidFill>
+                    <a:srgbClr val="7EE787"/>
+                  </a:solidFill>
+                  <a:effectLst/>
+                  <a:latin typeface="Consolas" panose="020B0609020204030204" pitchFamily="49" charset="0"/>
+                </a:rPr>
+                <a:t>application</a:t>
+              </a:r>
+              <a:r>
+                <a:rPr lang="en-US" altLang="ko-KR" sz="1100" b="0">
+                  <a:solidFill>
+                    <a:srgbClr val="BBBEBF"/>
+                  </a:solidFill>
+                  <a:effectLst/>
+                  <a:latin typeface="Consolas" panose="020B0609020204030204" pitchFamily="49" charset="0"/>
+                </a:rPr>
+                <a:t>:</a:t>
+              </a:r>
+            </a:p>
+            <a:p>
+              <a:pPr>
+                <a:lnSpc>
+                  <a:spcPts val="1425"/>
+                </a:lnSpc>
+                <a:buNone/>
+              </a:pPr>
+              <a:r>
+                <a:rPr lang="en-US" altLang="ko-KR" sz="1100" b="0">
+                  <a:solidFill>
+                    <a:srgbClr val="BBBEBF"/>
+                  </a:solidFill>
+                  <a:effectLst/>
+                  <a:latin typeface="Consolas" panose="020B0609020204030204" pitchFamily="49" charset="0"/>
+                </a:rPr>
+                <a:t>        </a:t>
+              </a:r>
+              <a:r>
+                <a:rPr lang="en-US" altLang="ko-KR" sz="1100" b="0">
+                  <a:solidFill>
+                    <a:srgbClr val="7EE787"/>
+                  </a:solidFill>
+                  <a:effectLst/>
+                  <a:latin typeface="Consolas" panose="020B0609020204030204" pitchFamily="49" charset="0"/>
+                </a:rPr>
+                <a:t>name</a:t>
+              </a:r>
+              <a:r>
+                <a:rPr lang="en-US" altLang="ko-KR" sz="1100" b="0">
+                  <a:solidFill>
+                    <a:srgbClr val="BBBEBF"/>
+                  </a:solidFill>
+                  <a:effectLst/>
+                  <a:latin typeface="Consolas" panose="020B0609020204030204" pitchFamily="49" charset="0"/>
+                </a:rPr>
+                <a:t>: </a:t>
+              </a:r>
+              <a:r>
+                <a:rPr lang="en-US" altLang="ko-KR" sz="1100" b="0">
+                  <a:solidFill>
+                    <a:srgbClr val="A5D6FF"/>
+                  </a:solidFill>
+                  <a:effectLst/>
+                  <a:latin typeface="Consolas" panose="020B0609020204030204" pitchFamily="49" charset="0"/>
+                </a:rPr>
+                <a:t>board-service</a:t>
+              </a:r>
+              <a:endParaRPr lang="en-US" altLang="ko-KR" sz="1100" b="0">
+                <a:solidFill>
+                  <a:srgbClr val="BBBEBF"/>
+                </a:solidFill>
+                <a:effectLst/>
+                <a:latin typeface="Consolas" panose="020B0609020204030204" pitchFamily="49" charset="0"/>
+              </a:endParaRPr>
+            </a:p>
+            <a:p>
+              <a:pPr>
+                <a:lnSpc>
+                  <a:spcPts val="1425"/>
+                </a:lnSpc>
+                <a:buNone/>
+              </a:pPr>
+              <a:br>
+                <a:rPr lang="en-US" altLang="ko-KR" sz="1100" b="0">
+                  <a:solidFill>
+                    <a:srgbClr val="BBBEBF"/>
+                  </a:solidFill>
+                  <a:effectLst/>
+                  <a:latin typeface="Consolas" panose="020B0609020204030204" pitchFamily="49" charset="0"/>
+                </a:rPr>
+              </a:br>
+              <a:endParaRPr lang="en-US" altLang="ko-KR" sz="1100" b="0">
+                <a:solidFill>
+                  <a:srgbClr val="BBBEBF"/>
+                </a:solidFill>
+                <a:effectLst/>
+                <a:latin typeface="Consolas" panose="020B0609020204030204" pitchFamily="49" charset="0"/>
+              </a:endParaRPr>
+            </a:p>
+            <a:p>
+              <a:pPr>
+                <a:lnSpc>
+                  <a:spcPts val="1425"/>
+                </a:lnSpc>
+                <a:buNone/>
+              </a:pPr>
+              <a:r>
+                <a:rPr lang="en-US" altLang="ko-KR" sz="1100" b="0">
+                  <a:solidFill>
+                    <a:srgbClr val="7EE787"/>
+                  </a:solidFill>
+                  <a:effectLst/>
+                  <a:latin typeface="Consolas" panose="020B0609020204030204" pitchFamily="49" charset="0"/>
+                </a:rPr>
+                <a:t>client</a:t>
+              </a:r>
+              <a:r>
+                <a:rPr lang="en-US" altLang="ko-KR" sz="1100" b="0">
+                  <a:solidFill>
+                    <a:srgbClr val="BBBEBF"/>
+                  </a:solidFill>
+                  <a:effectLst/>
+                  <a:latin typeface="Consolas" panose="020B0609020204030204" pitchFamily="49" charset="0"/>
+                </a:rPr>
+                <a:t>:</a:t>
+              </a:r>
+            </a:p>
+            <a:p>
+              <a:pPr>
+                <a:lnSpc>
+                  <a:spcPts val="1425"/>
+                </a:lnSpc>
+                <a:buNone/>
+              </a:pPr>
+              <a:r>
+                <a:rPr lang="en-US" altLang="ko-KR" sz="1100" b="0">
+                  <a:solidFill>
+                    <a:srgbClr val="BBBEBF"/>
+                  </a:solidFill>
+                  <a:effectLst/>
+                  <a:latin typeface="Consolas" panose="020B0609020204030204" pitchFamily="49" charset="0"/>
+                </a:rPr>
+                <a:t>    </a:t>
+              </a:r>
+              <a:r>
+                <a:rPr lang="en-US" altLang="ko-KR" sz="1100" b="0">
+                  <a:solidFill>
+                    <a:srgbClr val="7EE787"/>
+                  </a:solidFill>
+                  <a:effectLst/>
+                  <a:latin typeface="Consolas" panose="020B0609020204030204" pitchFamily="49" charset="0"/>
+                </a:rPr>
+                <a:t>user-service</a:t>
+              </a:r>
+              <a:r>
+                <a:rPr lang="en-US" altLang="ko-KR" sz="1100" b="0">
+                  <a:solidFill>
+                    <a:srgbClr val="BBBEBF"/>
+                  </a:solidFill>
+                  <a:effectLst/>
+                  <a:latin typeface="Consolas" panose="020B0609020204030204" pitchFamily="49" charset="0"/>
+                </a:rPr>
+                <a:t>:</a:t>
+              </a:r>
+            </a:p>
+            <a:p>
+              <a:pPr>
+                <a:lnSpc>
+                  <a:spcPts val="1425"/>
+                </a:lnSpc>
+                <a:buNone/>
+              </a:pPr>
+              <a:r>
+                <a:rPr lang="en-US" altLang="ko-KR" sz="1100" b="0">
+                  <a:solidFill>
+                    <a:srgbClr val="BBBEBF"/>
+                  </a:solidFill>
+                  <a:effectLst/>
+                  <a:latin typeface="Consolas" panose="020B0609020204030204" pitchFamily="49" charset="0"/>
+                </a:rPr>
+                <a:t>        </a:t>
+              </a:r>
+              <a:r>
+                <a:rPr lang="en-US" altLang="ko-KR" sz="1100" b="0">
+                  <a:solidFill>
+                    <a:srgbClr val="7EE787"/>
+                  </a:solidFill>
+                  <a:effectLst/>
+                  <a:latin typeface="Consolas" panose="020B0609020204030204" pitchFamily="49" charset="0"/>
+                </a:rPr>
+                <a:t>url</a:t>
+              </a:r>
+              <a:r>
+                <a:rPr lang="en-US" altLang="ko-KR" sz="1100" b="0">
+                  <a:solidFill>
+                    <a:srgbClr val="BBBEBF"/>
+                  </a:solidFill>
+                  <a:effectLst/>
+                  <a:latin typeface="Consolas" panose="020B0609020204030204" pitchFamily="49" charset="0"/>
+                </a:rPr>
+                <a:t>: </a:t>
+              </a:r>
+              <a:r>
+                <a:rPr lang="en-US" altLang="ko-KR" sz="1100" b="0">
+                  <a:solidFill>
+                    <a:srgbClr val="A5D6FF"/>
+                  </a:solidFill>
+                  <a:effectLst/>
+                  <a:latin typeface="Consolas" panose="020B0609020204030204" pitchFamily="49" charset="0"/>
+                </a:rPr>
+                <a:t>http://localhost:8080</a:t>
+              </a:r>
+              <a:endParaRPr lang="en-US" altLang="ko-KR" sz="1100" b="0">
+                <a:solidFill>
+                  <a:srgbClr val="BBBEBF"/>
+                </a:solidFill>
+                <a:effectLst/>
+                <a:latin typeface="Consolas" panose="020B0609020204030204" pitchFamily="49" charset="0"/>
+              </a:endParaRPr>
+            </a:p>
+            <a:p>
+              <a:pPr>
+                <a:lnSpc>
+                  <a:spcPts val="1425"/>
+                </a:lnSpc>
+                <a:buNone/>
+              </a:pPr>
+              <a:r>
+                <a:rPr lang="en-US" altLang="ko-KR" sz="1100" b="0">
+                  <a:solidFill>
+                    <a:srgbClr val="BBBEBF"/>
+                  </a:solidFill>
+                  <a:effectLst/>
+                  <a:latin typeface="Consolas" panose="020B0609020204030204" pitchFamily="49" charset="0"/>
+                </a:rPr>
+                <a:t>    </a:t>
+              </a:r>
+              <a:r>
+                <a:rPr lang="en-US" altLang="ko-KR" sz="1100" b="0">
+                  <a:solidFill>
+                    <a:srgbClr val="7EE787"/>
+                  </a:solidFill>
+                  <a:effectLst/>
+                  <a:latin typeface="Consolas" panose="020B0609020204030204" pitchFamily="49" charset="0"/>
+                </a:rPr>
+                <a:t>point-service</a:t>
+              </a:r>
+              <a:r>
+                <a:rPr lang="en-US" altLang="ko-KR" sz="1100" b="0">
+                  <a:solidFill>
+                    <a:srgbClr val="BBBEBF"/>
+                  </a:solidFill>
+                  <a:effectLst/>
+                  <a:latin typeface="Consolas" panose="020B0609020204030204" pitchFamily="49" charset="0"/>
+                </a:rPr>
+                <a:t>:</a:t>
+              </a:r>
+            </a:p>
+            <a:p>
+              <a:pPr>
+                <a:lnSpc>
+                  <a:spcPts val="1425"/>
+                </a:lnSpc>
+                <a:buNone/>
+              </a:pPr>
+              <a:r>
+                <a:rPr lang="en-US" altLang="ko-KR" sz="1100" b="0">
+                  <a:solidFill>
+                    <a:srgbClr val="BBBEBF"/>
+                  </a:solidFill>
+                  <a:effectLst/>
+                  <a:latin typeface="Consolas" panose="020B0609020204030204" pitchFamily="49" charset="0"/>
+                </a:rPr>
+                <a:t>        </a:t>
+              </a:r>
+              <a:r>
+                <a:rPr lang="en-US" altLang="ko-KR" sz="1100" b="0">
+                  <a:solidFill>
+                    <a:srgbClr val="7EE787"/>
+                  </a:solidFill>
+                  <a:effectLst/>
+                  <a:latin typeface="Consolas" panose="020B0609020204030204" pitchFamily="49" charset="0"/>
+                </a:rPr>
+                <a:t>url</a:t>
+              </a:r>
+              <a:r>
+                <a:rPr lang="en-US" altLang="ko-KR" sz="1100" b="0">
+                  <a:solidFill>
+                    <a:srgbClr val="BBBEBF"/>
+                  </a:solidFill>
+                  <a:effectLst/>
+                  <a:latin typeface="Consolas" panose="020B0609020204030204" pitchFamily="49" charset="0"/>
+                </a:rPr>
+                <a:t>: </a:t>
+              </a:r>
+              <a:r>
+                <a:rPr lang="en-US" altLang="ko-KR" sz="1100" b="0">
+                  <a:solidFill>
+                    <a:srgbClr val="A5D6FF"/>
+                  </a:solidFill>
+                  <a:effectLst/>
+                  <a:latin typeface="Consolas" panose="020B0609020204030204" pitchFamily="49" charset="0"/>
+                </a:rPr>
+                <a:t>http://localhost:8082</a:t>
+              </a:r>
+              <a:endParaRPr lang="en-US" altLang="ko-KR" sz="1100" b="0">
+                <a:solidFill>
+                  <a:srgbClr val="BBBEBF"/>
+                </a:solidFill>
+                <a:effectLst/>
+                <a:latin typeface="Consolas" panose="020B0609020204030204" pitchFamily="49" charset="0"/>
+              </a:endParaRPr>
+            </a:p>
+          </p:txBody>
+        </p:sp>
+        <p:sp>
+          <p:nvSpPr>
+            <p:cNvPr id="7" name="직사각형 6">
+              <a:extLst>
+                <a:ext uri="{FF2B5EF4-FFF2-40B4-BE49-F238E27FC236}">
+                  <a16:creationId xmlns:a16="http://schemas.microsoft.com/office/drawing/2014/main" id="{3F0E1D37-617A-9D92-A52C-57D40D020011}"/>
+                </a:ext>
+              </a:extLst>
+            </p:cNvPr>
+            <p:cNvSpPr/>
+            <p:nvPr/>
+          </p:nvSpPr>
+          <p:spPr>
+            <a:xfrm>
+              <a:off x="4517136" y="6163056"/>
+              <a:ext cx="2633472" cy="408341"/>
+            </a:xfrm>
+            <a:prstGeom prst="rect">
+              <a:avLst/>
+            </a:prstGeom>
+            <a:noFill/>
+            <a:ln>
+              <a:solidFill>
+                <a:srgbClr val="FF0000"/>
+              </a:solidFill>
+            </a:ln>
+          </p:spPr>
+          <p:style>
+            <a:lnRef idx="2">
+              <a:schemeClr val="accent1">
+                <a:shade val="15000"/>
+              </a:schemeClr>
+            </a:lnRef>
+            <a:fillRef idx="1">
+              <a:schemeClr val="accent1"/>
+            </a:fillRef>
+            <a:effectRef idx="0">
+              <a:schemeClr val="accent1"/>
+            </a:effectRef>
+            <a:fontRef idx="minor">
+              <a:schemeClr val="lt1"/>
+            </a:fontRef>
+          </p:style>
+          <p:txBody>
+            <a:bodyPr rtlCol="0" anchor="ctr"/>
+            <a:lstStyle/>
+            <a:p>
+              <a:pPr algn="ctr"/>
+              <a:endParaRPr lang="ko-KR" altLang="en-US"/>
+            </a:p>
+          </p:txBody>
+        </p:sp>
+      </p:grpSp>
+      <p:sp>
+        <p:nvSpPr>
+          <p:cNvPr id="9" name="TextBox 8">
+            <a:extLst>
+              <a:ext uri="{FF2B5EF4-FFF2-40B4-BE49-F238E27FC236}">
+                <a16:creationId xmlns:a16="http://schemas.microsoft.com/office/drawing/2014/main" id="{E519AAC2-6D19-8A35-9DFB-61110236CE48}"/>
+              </a:ext>
+            </a:extLst>
+          </p:cNvPr>
+          <p:cNvSpPr txBox="1"/>
+          <p:nvPr/>
+        </p:nvSpPr>
+        <p:spPr>
+          <a:xfrm>
+            <a:off x="8577072" y="1890498"/>
+            <a:ext cx="2916936" cy="461665"/>
+          </a:xfrm>
+          <a:prstGeom prst="rect">
+            <a:avLst/>
+          </a:prstGeom>
+          <a:noFill/>
+        </p:spPr>
+        <p:txBody>
+          <a:bodyPr wrap="square" rtlCol="0">
+            <a:spAutoFit/>
+          </a:bodyPr>
+          <a:lstStyle/>
+          <a:p>
+            <a:r>
+              <a:rPr lang="ko-KR" altLang="en-US" sz="1200"/>
+              <a:t>포인트 차감을 위한 </a:t>
+            </a:r>
+            <a:br>
+              <a:rPr lang="en-US" altLang="ko-KR" sz="1200"/>
+            </a:br>
+            <a:r>
+              <a:rPr lang="ko-KR" altLang="en-US" sz="1200"/>
+              <a:t>포인트 서비스 </a:t>
+            </a:r>
+            <a:r>
+              <a:rPr lang="en-US" altLang="ko-KR" sz="1200"/>
+              <a:t>URL </a:t>
+            </a:r>
+            <a:r>
+              <a:rPr lang="ko-KR" altLang="en-US" sz="1200"/>
+              <a:t>추가</a:t>
+            </a:r>
+          </a:p>
+        </p:txBody>
+      </p:sp>
+    </p:spTree>
+    <p:extLst>
+      <p:ext uri="{BB962C8B-B14F-4D97-AF65-F5344CB8AC3E}">
+        <p14:creationId xmlns:p14="http://schemas.microsoft.com/office/powerpoint/2010/main" val="916928101"/>
+      </p:ext>
+    </p:extLst>
+  </p:cSld>
+  <p:clrMapOvr>
+    <a:masterClrMapping/>
+  </p:clrMapOvr>
+</p:sld>
+</file>
+
+<file path=ppt/slides/slide23.xml><?xml version="1.0" encoding="utf-8"?>
+<p:sld xmlns:a="http://schemas.openxmlformats.org/drawingml/2006/main" xmlns:r="http://schemas.openxmlformats.org/officeDocument/2006/relationships" xmlns:p="http://schemas.openxmlformats.org/presentationml/2006/main">
+  <p:cSld>
+    <p:spTree>
+      <p:nvGrpSpPr>
+        <p:cNvPr id="1" name="">
+          <a:extLst>
+            <a:ext uri="{FF2B5EF4-FFF2-40B4-BE49-F238E27FC236}">
+              <a16:creationId xmlns:a16="http://schemas.microsoft.com/office/drawing/2014/main" id="{14C29481-04FA-60A1-A2EA-F82288218CC9}"/>
+            </a:ext>
+          </a:extLst>
+        </p:cNvPr>
+        <p:cNvGrpSpPr/>
+        <p:nvPr/>
+      </p:nvGrpSpPr>
+      <p:grpSpPr>
+        <a:xfrm>
+          <a:off x="0" y="0"/>
+          <a:ext cx="0" cy="0"/>
+          <a:chOff x="0" y="0"/>
+          <a:chExt cx="0" cy="0"/>
+        </a:xfrm>
+      </p:grpSpPr>
+      <p:sp>
+        <p:nvSpPr>
+          <p:cNvPr id="2" name="제목 1">
+            <a:extLst>
+              <a:ext uri="{FF2B5EF4-FFF2-40B4-BE49-F238E27FC236}">
+                <a16:creationId xmlns:a16="http://schemas.microsoft.com/office/drawing/2014/main" id="{0613BD0A-290D-CF47-4EDD-273C5531CD7F}"/>
+              </a:ext>
+            </a:extLst>
+          </p:cNvPr>
+          <p:cNvSpPr>
+            <a:spLocks noGrp="1"/>
+          </p:cNvSpPr>
+          <p:nvPr>
+            <p:ph type="title"/>
+          </p:nvPr>
+        </p:nvSpPr>
+        <p:spPr/>
+        <p:txBody>
+          <a:bodyPr/>
+          <a:lstStyle/>
+          <a:p>
+            <a:r>
+              <a:rPr lang="ko-KR" altLang="en-US"/>
+              <a:t>포인트 차감 요청 </a:t>
+            </a:r>
+            <a:r>
+              <a:rPr lang="en-US" altLang="ko-KR"/>
+              <a:t>DTO </a:t>
+            </a:r>
+            <a:r>
+              <a:rPr lang="ko-KR" altLang="en-US"/>
+              <a:t>작성</a:t>
+            </a:r>
+          </a:p>
+        </p:txBody>
+      </p:sp>
+      <p:grpSp>
+        <p:nvGrpSpPr>
+          <p:cNvPr id="14" name="그룹 13">
+            <a:extLst>
+              <a:ext uri="{FF2B5EF4-FFF2-40B4-BE49-F238E27FC236}">
+                <a16:creationId xmlns:a16="http://schemas.microsoft.com/office/drawing/2014/main" id="{23F3AC84-1F2C-C4F4-4A91-995ACE2FDF3A}"/>
+              </a:ext>
+            </a:extLst>
+          </p:cNvPr>
+          <p:cNvGrpSpPr/>
+          <p:nvPr/>
+        </p:nvGrpSpPr>
+        <p:grpSpPr>
+          <a:xfrm>
+            <a:off x="1094232" y="1890498"/>
+            <a:ext cx="2819794" cy="4696480"/>
+            <a:chOff x="1094232" y="1890498"/>
+            <a:chExt cx="2819794" cy="4696480"/>
+          </a:xfrm>
+        </p:grpSpPr>
+        <p:pic>
+          <p:nvPicPr>
+            <p:cNvPr id="13" name="그림 12">
+              <a:extLst>
+                <a:ext uri="{FF2B5EF4-FFF2-40B4-BE49-F238E27FC236}">
+                  <a16:creationId xmlns:a16="http://schemas.microsoft.com/office/drawing/2014/main" id="{7D69CB70-7A16-76E8-6E19-F6B0FA8B16F6}"/>
+                </a:ext>
+              </a:extLst>
+            </p:cNvPr>
+            <p:cNvPicPr>
+              <a:picLocks noChangeAspect="1"/>
+            </p:cNvPicPr>
+            <p:nvPr/>
+          </p:nvPicPr>
+          <p:blipFill>
+            <a:blip r:embed="rId2"/>
+            <a:stretch>
+              <a:fillRect/>
+            </a:stretch>
+          </p:blipFill>
+          <p:spPr>
+            <a:xfrm>
+              <a:off x="1094232" y="1890498"/>
+              <a:ext cx="2819794" cy="4696480"/>
+            </a:xfrm>
+            <a:prstGeom prst="rect">
+              <a:avLst/>
+            </a:prstGeom>
+          </p:spPr>
+        </p:pic>
+        <p:sp>
+          <p:nvSpPr>
+            <p:cNvPr id="7" name="직사각형 6">
+              <a:extLst>
+                <a:ext uri="{FF2B5EF4-FFF2-40B4-BE49-F238E27FC236}">
+                  <a16:creationId xmlns:a16="http://schemas.microsoft.com/office/drawing/2014/main" id="{8F858FF5-2DB9-B70A-B305-D76958D6FF73}"/>
+                </a:ext>
+              </a:extLst>
+            </p:cNvPr>
+            <p:cNvSpPr/>
+            <p:nvPr/>
+          </p:nvSpPr>
+          <p:spPr>
+            <a:xfrm>
+              <a:off x="1377696" y="5916168"/>
+              <a:ext cx="1941576" cy="276630"/>
+            </a:xfrm>
+            <a:prstGeom prst="rect">
+              <a:avLst/>
+            </a:prstGeom>
+            <a:noFill/>
+            <a:ln>
+              <a:solidFill>
+                <a:srgbClr val="FF0000"/>
+              </a:solidFill>
+            </a:ln>
+          </p:spPr>
+          <p:style>
+            <a:lnRef idx="2">
+              <a:schemeClr val="accent1">
+                <a:shade val="15000"/>
+              </a:schemeClr>
+            </a:lnRef>
+            <a:fillRef idx="1">
+              <a:schemeClr val="accent1"/>
+            </a:fillRef>
+            <a:effectRef idx="0">
+              <a:schemeClr val="accent1"/>
+            </a:effectRef>
+            <a:fontRef idx="minor">
+              <a:schemeClr val="lt1"/>
+            </a:fontRef>
+          </p:style>
+          <p:txBody>
+            <a:bodyPr rtlCol="0" anchor="ctr"/>
+            <a:lstStyle/>
+            <a:p>
+              <a:pPr algn="ctr"/>
+              <a:endParaRPr lang="ko-KR" altLang="en-US"/>
+            </a:p>
+          </p:txBody>
+        </p:sp>
+      </p:grpSp>
+      <p:sp>
+        <p:nvSpPr>
+          <p:cNvPr id="11" name="TextBox 10">
+            <a:extLst>
+              <a:ext uri="{FF2B5EF4-FFF2-40B4-BE49-F238E27FC236}">
+                <a16:creationId xmlns:a16="http://schemas.microsoft.com/office/drawing/2014/main" id="{150F2FB1-3FE3-CDE9-9977-1B148A8FFE0B}"/>
+              </a:ext>
+            </a:extLst>
+          </p:cNvPr>
+          <p:cNvSpPr txBox="1"/>
+          <p:nvPr/>
+        </p:nvSpPr>
+        <p:spPr>
+          <a:xfrm>
+            <a:off x="4112514" y="1890498"/>
+            <a:ext cx="4798314" cy="2607124"/>
+          </a:xfrm>
+          <a:prstGeom prst="rect">
+            <a:avLst/>
+          </a:prstGeom>
+          <a:solidFill>
+            <a:schemeClr val="tx1"/>
+          </a:solidFill>
+        </p:spPr>
+        <p:txBody>
+          <a:bodyPr wrap="square">
+            <a:spAutoFit/>
+          </a:bodyPr>
+          <a:lstStyle/>
+          <a:p>
+            <a:pPr>
+              <a:lnSpc>
+                <a:spcPts val="1425"/>
+              </a:lnSpc>
+              <a:buNone/>
+            </a:pPr>
+            <a:r>
+              <a:rPr lang="en-US" altLang="ko-KR" sz="1100" b="0">
+                <a:solidFill>
+                  <a:srgbClr val="569CD6"/>
+                </a:solidFill>
+                <a:effectLst/>
+                <a:latin typeface="Consolas" panose="020B0609020204030204" pitchFamily="49" charset="0"/>
+              </a:rPr>
+              <a:t>public</a:t>
+            </a:r>
+            <a:r>
+              <a:rPr lang="en-US" altLang="ko-KR" sz="1100" b="0">
+                <a:solidFill>
+                  <a:srgbClr val="BBBEBF"/>
+                </a:solidFill>
+                <a:effectLst/>
+                <a:latin typeface="Consolas" panose="020B0609020204030204" pitchFamily="49" charset="0"/>
+              </a:rPr>
+              <a:t> </a:t>
+            </a:r>
+            <a:r>
+              <a:rPr lang="en-US" altLang="ko-KR" sz="1100" b="0">
+                <a:solidFill>
+                  <a:srgbClr val="569CD6"/>
+                </a:solidFill>
+                <a:effectLst/>
+                <a:latin typeface="Consolas" panose="020B0609020204030204" pitchFamily="49" charset="0"/>
+              </a:rPr>
+              <a:t>class</a:t>
+            </a:r>
+            <a:r>
+              <a:rPr lang="en-US" altLang="ko-KR" sz="1100" b="0">
+                <a:solidFill>
+                  <a:srgbClr val="BBBEBF"/>
+                </a:solidFill>
+                <a:effectLst/>
+                <a:latin typeface="Consolas" panose="020B0609020204030204" pitchFamily="49" charset="0"/>
+              </a:rPr>
+              <a:t> </a:t>
+            </a:r>
+            <a:r>
+              <a:rPr lang="en-US" altLang="ko-KR" sz="1100" b="0">
+                <a:solidFill>
+                  <a:srgbClr val="4EC9B0"/>
+                </a:solidFill>
+                <a:effectLst/>
+                <a:latin typeface="Consolas" panose="020B0609020204030204" pitchFamily="49" charset="0"/>
+              </a:rPr>
+              <a:t>DeductPointRequestDto</a:t>
+            </a:r>
+            <a:r>
+              <a:rPr lang="en-US" altLang="ko-KR" sz="1100" b="0">
+                <a:solidFill>
+                  <a:srgbClr val="BBBEBF"/>
+                </a:solidFill>
+                <a:effectLst/>
+                <a:latin typeface="Consolas" panose="020B0609020204030204" pitchFamily="49" charset="0"/>
+              </a:rPr>
+              <a:t> {</a:t>
+            </a:r>
+          </a:p>
+          <a:p>
+            <a:pPr>
+              <a:lnSpc>
+                <a:spcPts val="1425"/>
+              </a:lnSpc>
+              <a:buNone/>
+            </a:pPr>
+            <a:r>
+              <a:rPr lang="en-US" altLang="ko-KR" sz="1100" b="0">
+                <a:solidFill>
+                  <a:srgbClr val="BBBEBF"/>
+                </a:solidFill>
+                <a:effectLst/>
+                <a:latin typeface="Consolas" panose="020B0609020204030204" pitchFamily="49" charset="0"/>
+              </a:rPr>
+              <a:t>    </a:t>
+            </a:r>
+            <a:r>
+              <a:rPr lang="en-US" altLang="ko-KR" sz="1100" b="0">
+                <a:solidFill>
+                  <a:srgbClr val="569CD6"/>
+                </a:solidFill>
+                <a:effectLst/>
+                <a:latin typeface="Consolas" panose="020B0609020204030204" pitchFamily="49" charset="0"/>
+              </a:rPr>
+              <a:t>private</a:t>
+            </a:r>
+            <a:r>
+              <a:rPr lang="en-US" altLang="ko-KR" sz="1100" b="0">
+                <a:solidFill>
+                  <a:srgbClr val="BBBEBF"/>
+                </a:solidFill>
+                <a:effectLst/>
+                <a:latin typeface="Consolas" panose="020B0609020204030204" pitchFamily="49" charset="0"/>
+              </a:rPr>
+              <a:t> </a:t>
+            </a:r>
+            <a:r>
+              <a:rPr lang="en-US" altLang="ko-KR" sz="1100" b="0">
+                <a:solidFill>
+                  <a:srgbClr val="4EC9B0"/>
+                </a:solidFill>
+                <a:effectLst/>
+                <a:latin typeface="Consolas" panose="020B0609020204030204" pitchFamily="49" charset="0"/>
+              </a:rPr>
+              <a:t>Long</a:t>
+            </a:r>
+            <a:r>
+              <a:rPr lang="en-US" altLang="ko-KR" sz="1100" b="0">
+                <a:solidFill>
+                  <a:srgbClr val="FFA657"/>
+                </a:solidFill>
+                <a:effectLst/>
+                <a:latin typeface="Consolas" panose="020B0609020204030204" pitchFamily="49" charset="0"/>
+              </a:rPr>
+              <a:t> </a:t>
+            </a:r>
+            <a:r>
+              <a:rPr lang="en-US" altLang="ko-KR" sz="1100" b="0">
+                <a:solidFill>
+                  <a:srgbClr val="C9D1D9"/>
+                </a:solidFill>
+                <a:effectLst/>
+                <a:latin typeface="Consolas" panose="020B0609020204030204" pitchFamily="49" charset="0"/>
+              </a:rPr>
+              <a:t>userId</a:t>
+            </a:r>
+            <a:r>
+              <a:rPr lang="en-US" altLang="ko-KR" sz="1100" b="0">
+                <a:solidFill>
+                  <a:srgbClr val="BBBEBF"/>
+                </a:solidFill>
+                <a:effectLst/>
+                <a:latin typeface="Consolas" panose="020B0609020204030204" pitchFamily="49" charset="0"/>
+              </a:rPr>
+              <a:t>;</a:t>
+            </a:r>
+          </a:p>
+          <a:p>
+            <a:pPr>
+              <a:lnSpc>
+                <a:spcPts val="1425"/>
+              </a:lnSpc>
+              <a:buNone/>
+            </a:pPr>
+            <a:r>
+              <a:rPr lang="en-US" altLang="ko-KR" sz="1100" b="0">
+                <a:solidFill>
+                  <a:srgbClr val="BBBEBF"/>
+                </a:solidFill>
+                <a:effectLst/>
+                <a:latin typeface="Consolas" panose="020B0609020204030204" pitchFamily="49" charset="0"/>
+              </a:rPr>
+              <a:t>    </a:t>
+            </a:r>
+            <a:r>
+              <a:rPr lang="en-US" altLang="ko-KR" sz="1100" b="0">
+                <a:solidFill>
+                  <a:srgbClr val="569CD6"/>
+                </a:solidFill>
+                <a:effectLst/>
+                <a:latin typeface="Consolas" panose="020B0609020204030204" pitchFamily="49" charset="0"/>
+              </a:rPr>
+              <a:t>private</a:t>
+            </a:r>
+            <a:r>
+              <a:rPr lang="en-US" altLang="ko-KR" sz="1100" b="0">
+                <a:solidFill>
+                  <a:srgbClr val="BBBEBF"/>
+                </a:solidFill>
+                <a:effectLst/>
+                <a:latin typeface="Consolas" panose="020B0609020204030204" pitchFamily="49" charset="0"/>
+              </a:rPr>
+              <a:t> </a:t>
+            </a:r>
+            <a:r>
+              <a:rPr lang="en-US" altLang="ko-KR" sz="1100" b="0">
+                <a:solidFill>
+                  <a:srgbClr val="4EC9B0"/>
+                </a:solidFill>
+                <a:effectLst/>
+                <a:latin typeface="Consolas" panose="020B0609020204030204" pitchFamily="49" charset="0"/>
+              </a:rPr>
+              <a:t>int</a:t>
+            </a:r>
+            <a:r>
+              <a:rPr lang="en-US" altLang="ko-KR" sz="1100" b="0">
+                <a:solidFill>
+                  <a:srgbClr val="FFA657"/>
+                </a:solidFill>
+                <a:effectLst/>
+                <a:latin typeface="Consolas" panose="020B0609020204030204" pitchFamily="49" charset="0"/>
+              </a:rPr>
+              <a:t> </a:t>
+            </a:r>
+            <a:r>
+              <a:rPr lang="en-US" altLang="ko-KR" sz="1100" b="0">
+                <a:solidFill>
+                  <a:srgbClr val="C9D1D9"/>
+                </a:solidFill>
+                <a:effectLst/>
+                <a:latin typeface="Consolas" panose="020B0609020204030204" pitchFamily="49" charset="0"/>
+              </a:rPr>
+              <a:t>amount</a:t>
+            </a:r>
+            <a:r>
+              <a:rPr lang="en-US" altLang="ko-KR" sz="1100" b="0">
+                <a:solidFill>
+                  <a:srgbClr val="BBBEBF"/>
+                </a:solidFill>
+                <a:effectLst/>
+                <a:latin typeface="Consolas" panose="020B0609020204030204" pitchFamily="49" charset="0"/>
+              </a:rPr>
+              <a:t>;</a:t>
+            </a:r>
+          </a:p>
+          <a:p>
+            <a:pPr>
+              <a:lnSpc>
+                <a:spcPts val="1425"/>
+              </a:lnSpc>
+              <a:buNone/>
+            </a:pPr>
+            <a:r>
+              <a:rPr lang="en-US" altLang="ko-KR" sz="1100" b="0">
+                <a:solidFill>
+                  <a:srgbClr val="BBBEBF"/>
+                </a:solidFill>
+                <a:effectLst/>
+                <a:latin typeface="Consolas" panose="020B0609020204030204" pitchFamily="49" charset="0"/>
+              </a:rPr>
+              <a:t>    </a:t>
+            </a:r>
+            <a:r>
+              <a:rPr lang="en-US" altLang="ko-KR" sz="1100" b="0">
+                <a:solidFill>
+                  <a:srgbClr val="569CD6"/>
+                </a:solidFill>
+                <a:effectLst/>
+                <a:latin typeface="Consolas" panose="020B0609020204030204" pitchFamily="49" charset="0"/>
+              </a:rPr>
+              <a:t>public</a:t>
+            </a:r>
+            <a:r>
+              <a:rPr lang="en-US" altLang="ko-KR" sz="1100" b="0">
+                <a:solidFill>
+                  <a:srgbClr val="BBBEBF"/>
+                </a:solidFill>
+                <a:effectLst/>
+                <a:latin typeface="Consolas" panose="020B0609020204030204" pitchFamily="49" charset="0"/>
+              </a:rPr>
+              <a:t> </a:t>
+            </a:r>
+            <a:r>
+              <a:rPr lang="en-US" altLang="ko-KR" sz="1100" b="0">
+                <a:solidFill>
+                  <a:srgbClr val="D2A8FF"/>
+                </a:solidFill>
+                <a:effectLst/>
+                <a:latin typeface="Consolas" panose="020B0609020204030204" pitchFamily="49" charset="0"/>
+              </a:rPr>
+              <a:t>DeductPointRequestDto</a:t>
+            </a:r>
+            <a:r>
+              <a:rPr lang="en-US" altLang="ko-KR" sz="1100" b="0">
+                <a:solidFill>
+                  <a:srgbClr val="BBBEBF"/>
+                </a:solidFill>
+                <a:effectLst/>
+                <a:latin typeface="Consolas" panose="020B0609020204030204" pitchFamily="49" charset="0"/>
+              </a:rPr>
+              <a:t>(</a:t>
+            </a:r>
+            <a:r>
+              <a:rPr lang="en-US" altLang="ko-KR" sz="1100" b="0">
+                <a:solidFill>
+                  <a:srgbClr val="4EC9B0"/>
+                </a:solidFill>
+                <a:effectLst/>
+                <a:latin typeface="Consolas" panose="020B0609020204030204" pitchFamily="49" charset="0"/>
+              </a:rPr>
+              <a:t>Long</a:t>
+            </a:r>
+            <a:r>
+              <a:rPr lang="en-US" altLang="ko-KR" sz="1100" b="0">
+                <a:solidFill>
+                  <a:srgbClr val="BBBEBF"/>
+                </a:solidFill>
+                <a:effectLst/>
+                <a:latin typeface="Consolas" panose="020B0609020204030204" pitchFamily="49" charset="0"/>
+              </a:rPr>
+              <a:t> </a:t>
+            </a:r>
+            <a:r>
+              <a:rPr lang="en-US" altLang="ko-KR" sz="1100" b="0">
+                <a:solidFill>
+                  <a:srgbClr val="FFA657"/>
+                </a:solidFill>
+                <a:effectLst/>
+                <a:latin typeface="Consolas" panose="020B0609020204030204" pitchFamily="49" charset="0"/>
+              </a:rPr>
+              <a:t>userId</a:t>
+            </a:r>
+            <a:r>
+              <a:rPr lang="en-US" altLang="ko-KR" sz="1100" b="0">
+                <a:solidFill>
+                  <a:srgbClr val="BBBEBF"/>
+                </a:solidFill>
+                <a:effectLst/>
+                <a:latin typeface="Consolas" panose="020B0609020204030204" pitchFamily="49" charset="0"/>
+              </a:rPr>
+              <a:t>, </a:t>
+            </a:r>
+            <a:r>
+              <a:rPr lang="en-US" altLang="ko-KR" sz="1100" b="0">
+                <a:solidFill>
+                  <a:srgbClr val="4EC9B0"/>
+                </a:solidFill>
+                <a:effectLst/>
+                <a:latin typeface="Consolas" panose="020B0609020204030204" pitchFamily="49" charset="0"/>
+              </a:rPr>
+              <a:t>int</a:t>
+            </a:r>
+            <a:r>
+              <a:rPr lang="en-US" altLang="ko-KR" sz="1100" b="0">
+                <a:solidFill>
+                  <a:srgbClr val="BBBEBF"/>
+                </a:solidFill>
+                <a:effectLst/>
+                <a:latin typeface="Consolas" panose="020B0609020204030204" pitchFamily="49" charset="0"/>
+              </a:rPr>
+              <a:t> </a:t>
+            </a:r>
+            <a:r>
+              <a:rPr lang="en-US" altLang="ko-KR" sz="1100" b="0">
+                <a:solidFill>
+                  <a:srgbClr val="FFA657"/>
+                </a:solidFill>
+                <a:effectLst/>
+                <a:latin typeface="Consolas" panose="020B0609020204030204" pitchFamily="49" charset="0"/>
+              </a:rPr>
+              <a:t>amount</a:t>
+            </a:r>
+            <a:r>
+              <a:rPr lang="en-US" altLang="ko-KR" sz="1100" b="0">
+                <a:solidFill>
+                  <a:srgbClr val="BBBEBF"/>
+                </a:solidFill>
+                <a:effectLst/>
+                <a:latin typeface="Consolas" panose="020B0609020204030204" pitchFamily="49" charset="0"/>
+              </a:rPr>
+              <a:t>) {</a:t>
+            </a:r>
+          </a:p>
+          <a:p>
+            <a:pPr>
+              <a:lnSpc>
+                <a:spcPts val="1425"/>
+              </a:lnSpc>
+              <a:buNone/>
+            </a:pPr>
+            <a:r>
+              <a:rPr lang="en-US" altLang="ko-KR" sz="1100" b="0">
+                <a:solidFill>
+                  <a:srgbClr val="BBBEBF"/>
+                </a:solidFill>
+                <a:effectLst/>
+                <a:latin typeface="Consolas" panose="020B0609020204030204" pitchFamily="49" charset="0"/>
+              </a:rPr>
+              <a:t>        </a:t>
+            </a:r>
+            <a:r>
+              <a:rPr lang="en-US" altLang="ko-KR" sz="1100" b="0">
+                <a:solidFill>
+                  <a:srgbClr val="79C0FF"/>
+                </a:solidFill>
+                <a:effectLst/>
+                <a:latin typeface="Consolas" panose="020B0609020204030204" pitchFamily="49" charset="0"/>
+              </a:rPr>
+              <a:t>this</a:t>
+            </a:r>
+            <a:r>
+              <a:rPr lang="en-US" altLang="ko-KR" sz="1100" b="0">
+                <a:solidFill>
+                  <a:srgbClr val="BBBEBF"/>
+                </a:solidFill>
+                <a:effectLst/>
+                <a:latin typeface="Consolas" panose="020B0609020204030204" pitchFamily="49" charset="0"/>
+              </a:rPr>
+              <a:t>.</a:t>
+            </a:r>
+            <a:r>
+              <a:rPr lang="en-US" altLang="ko-KR" sz="1100" b="0">
+                <a:solidFill>
+                  <a:srgbClr val="C9D1D9"/>
+                </a:solidFill>
+                <a:effectLst/>
+                <a:latin typeface="Consolas" panose="020B0609020204030204" pitchFamily="49" charset="0"/>
+              </a:rPr>
+              <a:t>userId</a:t>
+            </a:r>
+            <a:r>
+              <a:rPr lang="en-US" altLang="ko-KR" sz="1100" b="0">
+                <a:solidFill>
+                  <a:srgbClr val="BBBEBF"/>
+                </a:solidFill>
+                <a:effectLst/>
+                <a:latin typeface="Consolas" panose="020B0609020204030204" pitchFamily="49" charset="0"/>
+              </a:rPr>
+              <a:t> </a:t>
+            </a:r>
+            <a:r>
+              <a:rPr lang="en-US" altLang="ko-KR" sz="1100" b="0">
+                <a:solidFill>
+                  <a:srgbClr val="D4D4D4"/>
+                </a:solidFill>
+                <a:effectLst/>
+                <a:latin typeface="Consolas" panose="020B0609020204030204" pitchFamily="49" charset="0"/>
+              </a:rPr>
+              <a:t>=</a:t>
+            </a:r>
+            <a:r>
+              <a:rPr lang="en-US" altLang="ko-KR" sz="1100" b="0">
+                <a:solidFill>
+                  <a:srgbClr val="BBBEBF"/>
+                </a:solidFill>
+                <a:effectLst/>
+                <a:latin typeface="Consolas" panose="020B0609020204030204" pitchFamily="49" charset="0"/>
+              </a:rPr>
+              <a:t> </a:t>
+            </a:r>
+            <a:r>
+              <a:rPr lang="en-US" altLang="ko-KR" sz="1100" b="0">
+                <a:solidFill>
+                  <a:srgbClr val="FFA657"/>
+                </a:solidFill>
+                <a:effectLst/>
+                <a:latin typeface="Consolas" panose="020B0609020204030204" pitchFamily="49" charset="0"/>
+              </a:rPr>
+              <a:t>userId</a:t>
+            </a:r>
+            <a:r>
+              <a:rPr lang="en-US" altLang="ko-KR" sz="1100" b="0">
+                <a:solidFill>
+                  <a:srgbClr val="BBBEBF"/>
+                </a:solidFill>
+                <a:effectLst/>
+                <a:latin typeface="Consolas" panose="020B0609020204030204" pitchFamily="49" charset="0"/>
+              </a:rPr>
+              <a:t>;</a:t>
+            </a:r>
+          </a:p>
+          <a:p>
+            <a:pPr>
+              <a:lnSpc>
+                <a:spcPts val="1425"/>
+              </a:lnSpc>
+              <a:buNone/>
+            </a:pPr>
+            <a:r>
+              <a:rPr lang="en-US" altLang="ko-KR" sz="1100" b="0">
+                <a:solidFill>
+                  <a:srgbClr val="BBBEBF"/>
+                </a:solidFill>
+                <a:effectLst/>
+                <a:latin typeface="Consolas" panose="020B0609020204030204" pitchFamily="49" charset="0"/>
+              </a:rPr>
+              <a:t>        </a:t>
+            </a:r>
+            <a:r>
+              <a:rPr lang="en-US" altLang="ko-KR" sz="1100" b="0">
+                <a:solidFill>
+                  <a:srgbClr val="79C0FF"/>
+                </a:solidFill>
+                <a:effectLst/>
+                <a:latin typeface="Consolas" panose="020B0609020204030204" pitchFamily="49" charset="0"/>
+              </a:rPr>
+              <a:t>this</a:t>
+            </a:r>
+            <a:r>
+              <a:rPr lang="en-US" altLang="ko-KR" sz="1100" b="0">
+                <a:solidFill>
+                  <a:srgbClr val="BBBEBF"/>
+                </a:solidFill>
+                <a:effectLst/>
+                <a:latin typeface="Consolas" panose="020B0609020204030204" pitchFamily="49" charset="0"/>
+              </a:rPr>
+              <a:t>.</a:t>
+            </a:r>
+            <a:r>
+              <a:rPr lang="en-US" altLang="ko-KR" sz="1100" b="0">
+                <a:solidFill>
+                  <a:srgbClr val="C9D1D9"/>
+                </a:solidFill>
+                <a:effectLst/>
+                <a:latin typeface="Consolas" panose="020B0609020204030204" pitchFamily="49" charset="0"/>
+              </a:rPr>
+              <a:t>amount</a:t>
+            </a:r>
+            <a:r>
+              <a:rPr lang="en-US" altLang="ko-KR" sz="1100" b="0">
+                <a:solidFill>
+                  <a:srgbClr val="BBBEBF"/>
+                </a:solidFill>
+                <a:effectLst/>
+                <a:latin typeface="Consolas" panose="020B0609020204030204" pitchFamily="49" charset="0"/>
+              </a:rPr>
+              <a:t> </a:t>
+            </a:r>
+            <a:r>
+              <a:rPr lang="en-US" altLang="ko-KR" sz="1100" b="0">
+                <a:solidFill>
+                  <a:srgbClr val="D4D4D4"/>
+                </a:solidFill>
+                <a:effectLst/>
+                <a:latin typeface="Consolas" panose="020B0609020204030204" pitchFamily="49" charset="0"/>
+              </a:rPr>
+              <a:t>=</a:t>
+            </a:r>
+            <a:r>
+              <a:rPr lang="en-US" altLang="ko-KR" sz="1100" b="0">
+                <a:solidFill>
+                  <a:srgbClr val="BBBEBF"/>
+                </a:solidFill>
+                <a:effectLst/>
+                <a:latin typeface="Consolas" panose="020B0609020204030204" pitchFamily="49" charset="0"/>
+              </a:rPr>
+              <a:t> </a:t>
+            </a:r>
+            <a:r>
+              <a:rPr lang="en-US" altLang="ko-KR" sz="1100" b="0">
+                <a:solidFill>
+                  <a:srgbClr val="FFA657"/>
+                </a:solidFill>
+                <a:effectLst/>
+                <a:latin typeface="Consolas" panose="020B0609020204030204" pitchFamily="49" charset="0"/>
+              </a:rPr>
+              <a:t>amount</a:t>
+            </a:r>
+            <a:r>
+              <a:rPr lang="en-US" altLang="ko-KR" sz="1100" b="0">
+                <a:solidFill>
+                  <a:srgbClr val="BBBEBF"/>
+                </a:solidFill>
+                <a:effectLst/>
+                <a:latin typeface="Consolas" panose="020B0609020204030204" pitchFamily="49" charset="0"/>
+              </a:rPr>
+              <a:t>;</a:t>
+            </a:r>
+          </a:p>
+          <a:p>
+            <a:pPr>
+              <a:lnSpc>
+                <a:spcPts val="1425"/>
+              </a:lnSpc>
+              <a:buNone/>
+            </a:pPr>
+            <a:r>
+              <a:rPr lang="en-US" altLang="ko-KR" sz="1100" b="0">
+                <a:solidFill>
+                  <a:srgbClr val="BBBEBF"/>
+                </a:solidFill>
+                <a:effectLst/>
+                <a:latin typeface="Consolas" panose="020B0609020204030204" pitchFamily="49" charset="0"/>
+              </a:rPr>
+              <a:t>    }</a:t>
+            </a:r>
+          </a:p>
+          <a:p>
+            <a:pPr>
+              <a:lnSpc>
+                <a:spcPts val="1425"/>
+              </a:lnSpc>
+              <a:buNone/>
+            </a:pPr>
+            <a:r>
+              <a:rPr lang="en-US" altLang="ko-KR" sz="1100" b="0">
+                <a:solidFill>
+                  <a:srgbClr val="BBBEBF"/>
+                </a:solidFill>
+                <a:effectLst/>
+                <a:latin typeface="Consolas" panose="020B0609020204030204" pitchFamily="49" charset="0"/>
+              </a:rPr>
+              <a:t>    </a:t>
+            </a:r>
+            <a:r>
+              <a:rPr lang="en-US" altLang="ko-KR" sz="1100" b="0">
+                <a:solidFill>
+                  <a:srgbClr val="569CD6"/>
+                </a:solidFill>
+                <a:effectLst/>
+                <a:latin typeface="Consolas" panose="020B0609020204030204" pitchFamily="49" charset="0"/>
+              </a:rPr>
+              <a:t>public</a:t>
+            </a:r>
+            <a:r>
+              <a:rPr lang="en-US" altLang="ko-KR" sz="1100" b="0">
+                <a:solidFill>
+                  <a:srgbClr val="BBBEBF"/>
+                </a:solidFill>
+                <a:effectLst/>
+                <a:latin typeface="Consolas" panose="020B0609020204030204" pitchFamily="49" charset="0"/>
+              </a:rPr>
+              <a:t> </a:t>
+            </a:r>
+            <a:r>
+              <a:rPr lang="en-US" altLang="ko-KR" sz="1100" b="0">
+                <a:solidFill>
+                  <a:srgbClr val="4EC9B0"/>
+                </a:solidFill>
+                <a:effectLst/>
+                <a:latin typeface="Consolas" panose="020B0609020204030204" pitchFamily="49" charset="0"/>
+              </a:rPr>
+              <a:t>Long</a:t>
+            </a:r>
+            <a:r>
+              <a:rPr lang="en-US" altLang="ko-KR" sz="1100" b="0">
+                <a:solidFill>
+                  <a:srgbClr val="BBBEBF"/>
+                </a:solidFill>
+                <a:effectLst/>
+                <a:latin typeface="Consolas" panose="020B0609020204030204" pitchFamily="49" charset="0"/>
+              </a:rPr>
+              <a:t> </a:t>
+            </a:r>
+            <a:r>
+              <a:rPr lang="en-US" altLang="ko-KR" sz="1100" b="0">
+                <a:solidFill>
+                  <a:srgbClr val="D2A8FF"/>
+                </a:solidFill>
+                <a:effectLst/>
+                <a:latin typeface="Consolas" panose="020B0609020204030204" pitchFamily="49" charset="0"/>
+              </a:rPr>
+              <a:t>getUserId</a:t>
+            </a:r>
+            <a:r>
+              <a:rPr lang="en-US" altLang="ko-KR" sz="1100" b="0">
+                <a:solidFill>
+                  <a:srgbClr val="BBBEBF"/>
+                </a:solidFill>
+                <a:effectLst/>
+                <a:latin typeface="Consolas" panose="020B0609020204030204" pitchFamily="49" charset="0"/>
+              </a:rPr>
+              <a:t>() {</a:t>
+            </a:r>
+          </a:p>
+          <a:p>
+            <a:pPr>
+              <a:lnSpc>
+                <a:spcPts val="1425"/>
+              </a:lnSpc>
+              <a:buNone/>
+            </a:pPr>
+            <a:r>
+              <a:rPr lang="en-US" altLang="ko-KR" sz="1100" b="0">
+                <a:solidFill>
+                  <a:srgbClr val="BBBEBF"/>
+                </a:solidFill>
+                <a:effectLst/>
+                <a:latin typeface="Consolas" panose="020B0609020204030204" pitchFamily="49" charset="0"/>
+              </a:rPr>
+              <a:t>        </a:t>
+            </a:r>
+            <a:r>
+              <a:rPr lang="en-US" altLang="ko-KR" sz="1100" b="0">
+                <a:solidFill>
+                  <a:srgbClr val="C586C0"/>
+                </a:solidFill>
+                <a:effectLst/>
+                <a:latin typeface="Consolas" panose="020B0609020204030204" pitchFamily="49" charset="0"/>
+              </a:rPr>
+              <a:t>return</a:t>
+            </a:r>
+            <a:r>
+              <a:rPr lang="en-US" altLang="ko-KR" sz="1100" b="0">
+                <a:solidFill>
+                  <a:srgbClr val="BBBEBF"/>
+                </a:solidFill>
+                <a:effectLst/>
+                <a:latin typeface="Consolas" panose="020B0609020204030204" pitchFamily="49" charset="0"/>
+              </a:rPr>
+              <a:t> </a:t>
+            </a:r>
+            <a:r>
+              <a:rPr lang="en-US" altLang="ko-KR" sz="1100" b="0">
+                <a:solidFill>
+                  <a:srgbClr val="C9D1D9"/>
+                </a:solidFill>
+                <a:effectLst/>
+                <a:latin typeface="Consolas" panose="020B0609020204030204" pitchFamily="49" charset="0"/>
+              </a:rPr>
+              <a:t>userId</a:t>
+            </a:r>
+            <a:r>
+              <a:rPr lang="en-US" altLang="ko-KR" sz="1100" b="0">
+                <a:solidFill>
+                  <a:srgbClr val="BBBEBF"/>
+                </a:solidFill>
+                <a:effectLst/>
+                <a:latin typeface="Consolas" panose="020B0609020204030204" pitchFamily="49" charset="0"/>
+              </a:rPr>
+              <a:t>;</a:t>
+            </a:r>
+          </a:p>
+          <a:p>
+            <a:pPr>
+              <a:lnSpc>
+                <a:spcPts val="1425"/>
+              </a:lnSpc>
+              <a:buNone/>
+            </a:pPr>
+            <a:r>
+              <a:rPr lang="en-US" altLang="ko-KR" sz="1100" b="0">
+                <a:solidFill>
+                  <a:srgbClr val="BBBEBF"/>
+                </a:solidFill>
+                <a:effectLst/>
+                <a:latin typeface="Consolas" panose="020B0609020204030204" pitchFamily="49" charset="0"/>
+              </a:rPr>
+              <a:t>    }</a:t>
+            </a:r>
+          </a:p>
+          <a:p>
+            <a:pPr>
+              <a:lnSpc>
+                <a:spcPts val="1425"/>
+              </a:lnSpc>
+              <a:buNone/>
+            </a:pPr>
+            <a:r>
+              <a:rPr lang="en-US" altLang="ko-KR" sz="1100" b="0">
+                <a:solidFill>
+                  <a:srgbClr val="BBBEBF"/>
+                </a:solidFill>
+                <a:effectLst/>
+                <a:latin typeface="Consolas" panose="020B0609020204030204" pitchFamily="49" charset="0"/>
+              </a:rPr>
+              <a:t>    </a:t>
+            </a:r>
+            <a:r>
+              <a:rPr lang="en-US" altLang="ko-KR" sz="1100" b="0">
+                <a:solidFill>
+                  <a:srgbClr val="569CD6"/>
+                </a:solidFill>
+                <a:effectLst/>
+                <a:latin typeface="Consolas" panose="020B0609020204030204" pitchFamily="49" charset="0"/>
+              </a:rPr>
+              <a:t>public</a:t>
+            </a:r>
+            <a:r>
+              <a:rPr lang="en-US" altLang="ko-KR" sz="1100" b="0">
+                <a:solidFill>
+                  <a:srgbClr val="BBBEBF"/>
+                </a:solidFill>
+                <a:effectLst/>
+                <a:latin typeface="Consolas" panose="020B0609020204030204" pitchFamily="49" charset="0"/>
+              </a:rPr>
+              <a:t> </a:t>
+            </a:r>
+            <a:r>
+              <a:rPr lang="en-US" altLang="ko-KR" sz="1100" b="0">
+                <a:solidFill>
+                  <a:srgbClr val="4EC9B0"/>
+                </a:solidFill>
+                <a:effectLst/>
+                <a:latin typeface="Consolas" panose="020B0609020204030204" pitchFamily="49" charset="0"/>
+              </a:rPr>
+              <a:t>int</a:t>
+            </a:r>
+            <a:r>
+              <a:rPr lang="en-US" altLang="ko-KR" sz="1100" b="0">
+                <a:solidFill>
+                  <a:srgbClr val="BBBEBF"/>
+                </a:solidFill>
+                <a:effectLst/>
+                <a:latin typeface="Consolas" panose="020B0609020204030204" pitchFamily="49" charset="0"/>
+              </a:rPr>
+              <a:t> </a:t>
+            </a:r>
+            <a:r>
+              <a:rPr lang="en-US" altLang="ko-KR" sz="1100" b="0">
+                <a:solidFill>
+                  <a:srgbClr val="D2A8FF"/>
+                </a:solidFill>
+                <a:effectLst/>
+                <a:latin typeface="Consolas" panose="020B0609020204030204" pitchFamily="49" charset="0"/>
+              </a:rPr>
+              <a:t>getAmount</a:t>
+            </a:r>
+            <a:r>
+              <a:rPr lang="en-US" altLang="ko-KR" sz="1100" b="0">
+                <a:solidFill>
+                  <a:srgbClr val="BBBEBF"/>
+                </a:solidFill>
+                <a:effectLst/>
+                <a:latin typeface="Consolas" panose="020B0609020204030204" pitchFamily="49" charset="0"/>
+              </a:rPr>
+              <a:t>() {</a:t>
+            </a:r>
+          </a:p>
+          <a:p>
+            <a:pPr>
+              <a:lnSpc>
+                <a:spcPts val="1425"/>
+              </a:lnSpc>
+              <a:buNone/>
+            </a:pPr>
+            <a:r>
+              <a:rPr lang="en-US" altLang="ko-KR" sz="1100" b="0">
+                <a:solidFill>
+                  <a:srgbClr val="BBBEBF"/>
+                </a:solidFill>
+                <a:effectLst/>
+                <a:latin typeface="Consolas" panose="020B0609020204030204" pitchFamily="49" charset="0"/>
+              </a:rPr>
+              <a:t>        </a:t>
+            </a:r>
+            <a:r>
+              <a:rPr lang="en-US" altLang="ko-KR" sz="1100" b="0">
+                <a:solidFill>
+                  <a:srgbClr val="C586C0"/>
+                </a:solidFill>
+                <a:effectLst/>
+                <a:latin typeface="Consolas" panose="020B0609020204030204" pitchFamily="49" charset="0"/>
+              </a:rPr>
+              <a:t>return</a:t>
+            </a:r>
+            <a:r>
+              <a:rPr lang="en-US" altLang="ko-KR" sz="1100" b="0">
+                <a:solidFill>
+                  <a:srgbClr val="BBBEBF"/>
+                </a:solidFill>
+                <a:effectLst/>
+                <a:latin typeface="Consolas" panose="020B0609020204030204" pitchFamily="49" charset="0"/>
+              </a:rPr>
+              <a:t> </a:t>
+            </a:r>
+            <a:r>
+              <a:rPr lang="en-US" altLang="ko-KR" sz="1100" b="0">
+                <a:solidFill>
+                  <a:srgbClr val="C9D1D9"/>
+                </a:solidFill>
+                <a:effectLst/>
+                <a:latin typeface="Consolas" panose="020B0609020204030204" pitchFamily="49" charset="0"/>
+              </a:rPr>
+              <a:t>amount</a:t>
+            </a:r>
+            <a:r>
+              <a:rPr lang="en-US" altLang="ko-KR" sz="1100" b="0">
+                <a:solidFill>
+                  <a:srgbClr val="BBBEBF"/>
+                </a:solidFill>
+                <a:effectLst/>
+                <a:latin typeface="Consolas" panose="020B0609020204030204" pitchFamily="49" charset="0"/>
+              </a:rPr>
+              <a:t>;</a:t>
+            </a:r>
+          </a:p>
+          <a:p>
+            <a:pPr>
+              <a:lnSpc>
+                <a:spcPts val="1425"/>
+              </a:lnSpc>
+              <a:buNone/>
+            </a:pPr>
+            <a:r>
+              <a:rPr lang="en-US" altLang="ko-KR" sz="1100" b="0">
+                <a:solidFill>
+                  <a:srgbClr val="BBBEBF"/>
+                </a:solidFill>
+                <a:effectLst/>
+                <a:latin typeface="Consolas" panose="020B0609020204030204" pitchFamily="49" charset="0"/>
+              </a:rPr>
+              <a:t>    }</a:t>
+            </a:r>
+          </a:p>
+          <a:p>
+            <a:pPr>
+              <a:lnSpc>
+                <a:spcPts val="1425"/>
+              </a:lnSpc>
+              <a:buNone/>
+            </a:pPr>
+            <a:r>
+              <a:rPr lang="en-US" altLang="ko-KR" sz="1100" b="0">
+                <a:solidFill>
+                  <a:srgbClr val="BBBEBF"/>
+                </a:solidFill>
+                <a:effectLst/>
+                <a:latin typeface="Consolas" panose="020B0609020204030204" pitchFamily="49" charset="0"/>
+              </a:rPr>
+              <a:t>}</a:t>
+            </a:r>
+          </a:p>
+        </p:txBody>
+      </p:sp>
+    </p:spTree>
+    <p:extLst>
+      <p:ext uri="{BB962C8B-B14F-4D97-AF65-F5344CB8AC3E}">
+        <p14:creationId xmlns:p14="http://schemas.microsoft.com/office/powerpoint/2010/main" val="1493210905"/>
+      </p:ext>
+    </p:extLst>
+  </p:cSld>
+  <p:clrMapOvr>
+    <a:masterClrMapping/>
+  </p:clrMapOvr>
+</p:sld>
+</file>
+
+<file path=ppt/slides/slide24.xml><?xml version="1.0" encoding="utf-8"?>
+<p:sld xmlns:a="http://schemas.openxmlformats.org/drawingml/2006/main" xmlns:r="http://schemas.openxmlformats.org/officeDocument/2006/relationships" xmlns:p="http://schemas.openxmlformats.org/presentationml/2006/main">
+  <p:cSld>
+    <p:spTree>
+      <p:nvGrpSpPr>
+        <p:cNvPr id="1" name="">
+          <a:extLst>
+            <a:ext uri="{FF2B5EF4-FFF2-40B4-BE49-F238E27FC236}">
+              <a16:creationId xmlns:a16="http://schemas.microsoft.com/office/drawing/2014/main" id="{A0D57F4C-A790-0657-9055-5876C8665A3C}"/>
+            </a:ext>
+          </a:extLst>
+        </p:cNvPr>
+        <p:cNvGrpSpPr/>
+        <p:nvPr/>
+      </p:nvGrpSpPr>
+      <p:grpSpPr>
+        <a:xfrm>
+          <a:off x="0" y="0"/>
+          <a:ext cx="0" cy="0"/>
+          <a:chOff x="0" y="0"/>
+          <a:chExt cx="0" cy="0"/>
+        </a:xfrm>
+      </p:grpSpPr>
+      <p:sp>
+        <p:nvSpPr>
+          <p:cNvPr id="2" name="제목 1">
+            <a:extLst>
+              <a:ext uri="{FF2B5EF4-FFF2-40B4-BE49-F238E27FC236}">
+                <a16:creationId xmlns:a16="http://schemas.microsoft.com/office/drawing/2014/main" id="{878DC4F1-7A73-5FE3-F7F9-84D3717AB30E}"/>
+              </a:ext>
+            </a:extLst>
+          </p:cNvPr>
+          <p:cNvSpPr>
+            <a:spLocks noGrp="1"/>
+          </p:cNvSpPr>
+          <p:nvPr>
+            <p:ph type="title"/>
+          </p:nvPr>
+        </p:nvSpPr>
+        <p:spPr/>
+        <p:txBody>
+          <a:bodyPr/>
+          <a:lstStyle/>
+          <a:p>
+            <a:r>
+              <a:rPr lang="ko-KR" altLang="en-US"/>
+              <a:t>활동 포인트 증가 요청 </a:t>
+            </a:r>
+            <a:r>
+              <a:rPr lang="en-US" altLang="ko-KR"/>
+              <a:t>DTO</a:t>
+            </a:r>
+            <a:r>
+              <a:rPr lang="ko-KR" altLang="en-US"/>
+              <a:t>작성</a:t>
+            </a:r>
+          </a:p>
+        </p:txBody>
+      </p:sp>
+      <p:grpSp>
+        <p:nvGrpSpPr>
+          <p:cNvPr id="14" name="그룹 13">
+            <a:extLst>
+              <a:ext uri="{FF2B5EF4-FFF2-40B4-BE49-F238E27FC236}">
+                <a16:creationId xmlns:a16="http://schemas.microsoft.com/office/drawing/2014/main" id="{DAF06F45-3D83-76F8-7AA0-BF968088C406}"/>
+              </a:ext>
+            </a:extLst>
+          </p:cNvPr>
+          <p:cNvGrpSpPr/>
+          <p:nvPr/>
+        </p:nvGrpSpPr>
+        <p:grpSpPr>
+          <a:xfrm>
+            <a:off x="1094232" y="1890498"/>
+            <a:ext cx="2819794" cy="4696480"/>
+            <a:chOff x="1094232" y="1890498"/>
+            <a:chExt cx="2819794" cy="4696480"/>
+          </a:xfrm>
+        </p:grpSpPr>
+        <p:pic>
+          <p:nvPicPr>
+            <p:cNvPr id="13" name="그림 12">
+              <a:extLst>
+                <a:ext uri="{FF2B5EF4-FFF2-40B4-BE49-F238E27FC236}">
+                  <a16:creationId xmlns:a16="http://schemas.microsoft.com/office/drawing/2014/main" id="{F90375DE-7E23-AD6A-8442-B0042670D193}"/>
+                </a:ext>
+              </a:extLst>
+            </p:cNvPr>
+            <p:cNvPicPr>
+              <a:picLocks noChangeAspect="1"/>
+            </p:cNvPicPr>
+            <p:nvPr/>
+          </p:nvPicPr>
+          <p:blipFill>
+            <a:blip r:embed="rId2"/>
+            <a:stretch>
+              <a:fillRect/>
+            </a:stretch>
+          </p:blipFill>
+          <p:spPr>
+            <a:xfrm>
+              <a:off x="1094232" y="1890498"/>
+              <a:ext cx="2819794" cy="4696480"/>
+            </a:xfrm>
+            <a:prstGeom prst="rect">
+              <a:avLst/>
+            </a:prstGeom>
+          </p:spPr>
+        </p:pic>
+        <p:sp>
+          <p:nvSpPr>
+            <p:cNvPr id="7" name="직사각형 6">
+              <a:extLst>
+                <a:ext uri="{FF2B5EF4-FFF2-40B4-BE49-F238E27FC236}">
+                  <a16:creationId xmlns:a16="http://schemas.microsoft.com/office/drawing/2014/main" id="{4841F3B3-687A-CD32-DB2A-EE46A9731CC3}"/>
+                </a:ext>
+              </a:extLst>
+            </p:cNvPr>
+            <p:cNvSpPr/>
+            <p:nvPr/>
+          </p:nvSpPr>
+          <p:spPr>
+            <a:xfrm>
+              <a:off x="1469136" y="5276088"/>
+              <a:ext cx="2033016" cy="283464"/>
+            </a:xfrm>
+            <a:prstGeom prst="rect">
+              <a:avLst/>
+            </a:prstGeom>
+            <a:noFill/>
+            <a:ln>
+              <a:solidFill>
+                <a:srgbClr val="FF0000"/>
+              </a:solidFill>
+            </a:ln>
+          </p:spPr>
+          <p:style>
+            <a:lnRef idx="2">
+              <a:schemeClr val="accent1">
+                <a:shade val="15000"/>
+              </a:schemeClr>
+            </a:lnRef>
+            <a:fillRef idx="1">
+              <a:schemeClr val="accent1"/>
+            </a:fillRef>
+            <a:effectRef idx="0">
+              <a:schemeClr val="accent1"/>
+            </a:effectRef>
+            <a:fontRef idx="minor">
+              <a:schemeClr val="lt1"/>
+            </a:fontRef>
+          </p:style>
+          <p:txBody>
+            <a:bodyPr rtlCol="0" anchor="ctr"/>
+            <a:lstStyle/>
+            <a:p>
+              <a:pPr algn="ctr"/>
+              <a:endParaRPr lang="ko-KR" altLang="en-US"/>
+            </a:p>
+          </p:txBody>
+        </p:sp>
+      </p:grpSp>
+      <p:sp>
+        <p:nvSpPr>
+          <p:cNvPr id="4" name="TextBox 3">
+            <a:extLst>
+              <a:ext uri="{FF2B5EF4-FFF2-40B4-BE49-F238E27FC236}">
+                <a16:creationId xmlns:a16="http://schemas.microsoft.com/office/drawing/2014/main" id="{CB2BF9CD-2BC5-AC03-B72D-AF7FF12241CA}"/>
+              </a:ext>
+            </a:extLst>
+          </p:cNvPr>
+          <p:cNvSpPr txBox="1"/>
+          <p:nvPr/>
+        </p:nvSpPr>
+        <p:spPr>
+          <a:xfrm>
+            <a:off x="4089654" y="1890498"/>
+            <a:ext cx="6094476" cy="4031873"/>
+          </a:xfrm>
+          <a:prstGeom prst="rect">
+            <a:avLst/>
+          </a:prstGeom>
+          <a:solidFill>
+            <a:schemeClr val="tx1"/>
+          </a:solidFill>
+        </p:spPr>
+        <p:txBody>
+          <a:bodyPr wrap="square">
+            <a:spAutoFit/>
+          </a:bodyPr>
+          <a:lstStyle/>
+          <a:p>
+            <a:pPr>
+              <a:lnSpc>
+                <a:spcPts val="1425"/>
+              </a:lnSpc>
+              <a:buNone/>
+            </a:pPr>
+            <a:r>
+              <a:rPr lang="en-US" altLang="ko-KR" sz="1050" b="0">
+                <a:solidFill>
+                  <a:srgbClr val="FF7B72"/>
+                </a:solidFill>
+                <a:effectLst/>
+                <a:latin typeface="Consolas" panose="020B0609020204030204" pitchFamily="49" charset="0"/>
+              </a:rPr>
+              <a:t>package</a:t>
+            </a:r>
+            <a:r>
+              <a:rPr lang="en-US" altLang="ko-KR" sz="1050" b="0">
+                <a:solidFill>
+                  <a:srgbClr val="BBBEBF"/>
+                </a:solidFill>
+                <a:effectLst/>
+                <a:latin typeface="Consolas" panose="020B0609020204030204" pitchFamily="49" charset="0"/>
+              </a:rPr>
+              <a:t> </a:t>
+            </a:r>
+            <a:r>
+              <a:rPr lang="en-US" altLang="ko-KR" sz="1050" b="0">
+                <a:solidFill>
+                  <a:srgbClr val="4EC9B0"/>
+                </a:solidFill>
+                <a:effectLst/>
+                <a:latin typeface="Consolas" panose="020B0609020204030204" pitchFamily="49" charset="0"/>
+              </a:rPr>
+              <a:t>com</a:t>
+            </a:r>
+            <a:r>
+              <a:rPr lang="en-US" altLang="ko-KR" sz="1050" b="0">
+                <a:solidFill>
+                  <a:srgbClr val="D4D4D4"/>
+                </a:solidFill>
+                <a:effectLst/>
+                <a:latin typeface="Consolas" panose="020B0609020204030204" pitchFamily="49" charset="0"/>
+              </a:rPr>
+              <a:t>.</a:t>
+            </a:r>
+            <a:r>
+              <a:rPr lang="en-US" altLang="ko-KR" sz="1050" b="0">
+                <a:solidFill>
+                  <a:srgbClr val="4EC9B0"/>
+                </a:solidFill>
+                <a:effectLst/>
+                <a:latin typeface="Consolas" panose="020B0609020204030204" pitchFamily="49" charset="0"/>
+              </a:rPr>
+              <a:t>example</a:t>
+            </a:r>
+            <a:r>
+              <a:rPr lang="en-US" altLang="ko-KR" sz="1050" b="0">
+                <a:solidFill>
+                  <a:srgbClr val="D4D4D4"/>
+                </a:solidFill>
+                <a:effectLst/>
+                <a:latin typeface="Consolas" panose="020B0609020204030204" pitchFamily="49" charset="0"/>
+              </a:rPr>
+              <a:t>.</a:t>
+            </a:r>
+            <a:r>
+              <a:rPr lang="en-US" altLang="ko-KR" sz="1050" b="0">
+                <a:solidFill>
+                  <a:srgbClr val="4EC9B0"/>
+                </a:solidFill>
+                <a:effectLst/>
+                <a:latin typeface="Consolas" panose="020B0609020204030204" pitchFamily="49" charset="0"/>
+              </a:rPr>
+              <a:t>boardservice</a:t>
+            </a:r>
+            <a:r>
+              <a:rPr lang="en-US" altLang="ko-KR" sz="1050" b="0">
+                <a:solidFill>
+                  <a:srgbClr val="D4D4D4"/>
+                </a:solidFill>
+                <a:effectLst/>
+                <a:latin typeface="Consolas" panose="020B0609020204030204" pitchFamily="49" charset="0"/>
+              </a:rPr>
+              <a:t>.</a:t>
+            </a:r>
+            <a:r>
+              <a:rPr lang="en-US" altLang="ko-KR" sz="1050" b="0">
+                <a:solidFill>
+                  <a:srgbClr val="4EC9B0"/>
+                </a:solidFill>
+                <a:effectLst/>
+                <a:latin typeface="Consolas" panose="020B0609020204030204" pitchFamily="49" charset="0"/>
+              </a:rPr>
+              <a:t>dto</a:t>
+            </a:r>
+            <a:r>
+              <a:rPr lang="en-US" altLang="ko-KR" sz="1050" b="0">
+                <a:solidFill>
+                  <a:srgbClr val="BBBEBF"/>
+                </a:solidFill>
+                <a:effectLst/>
+                <a:latin typeface="Consolas" panose="020B0609020204030204" pitchFamily="49" charset="0"/>
+              </a:rPr>
+              <a:t>;</a:t>
+            </a:r>
+          </a:p>
+          <a:p>
+            <a:pPr>
+              <a:lnSpc>
+                <a:spcPts val="1425"/>
+              </a:lnSpc>
+              <a:buNone/>
+            </a:pPr>
+            <a:br>
+              <a:rPr lang="en-US" altLang="ko-KR" sz="1050" b="0">
+                <a:solidFill>
+                  <a:srgbClr val="BBBEBF"/>
+                </a:solidFill>
+                <a:effectLst/>
+                <a:latin typeface="Consolas" panose="020B0609020204030204" pitchFamily="49" charset="0"/>
+              </a:rPr>
+            </a:br>
+            <a:endParaRPr lang="en-US" altLang="ko-KR" sz="1050" b="0">
+              <a:solidFill>
+                <a:srgbClr val="BBBEBF"/>
+              </a:solidFill>
+              <a:effectLst/>
+              <a:latin typeface="Consolas" panose="020B0609020204030204" pitchFamily="49" charset="0"/>
+            </a:endParaRPr>
+          </a:p>
+          <a:p>
+            <a:pPr>
+              <a:lnSpc>
+                <a:spcPts val="1425"/>
+              </a:lnSpc>
+              <a:buNone/>
+            </a:pPr>
+            <a:r>
+              <a:rPr lang="en-US" altLang="ko-KR" sz="1050" b="0">
+                <a:solidFill>
+                  <a:srgbClr val="569CD6"/>
+                </a:solidFill>
+                <a:effectLst/>
+                <a:latin typeface="Consolas" panose="020B0609020204030204" pitchFamily="49" charset="0"/>
+              </a:rPr>
+              <a:t>public</a:t>
+            </a:r>
+            <a:r>
+              <a:rPr lang="en-US" altLang="ko-KR" sz="1050" b="0">
+                <a:solidFill>
+                  <a:srgbClr val="BBBEBF"/>
+                </a:solidFill>
+                <a:effectLst/>
+                <a:latin typeface="Consolas" panose="020B0609020204030204" pitchFamily="49" charset="0"/>
+              </a:rPr>
+              <a:t> </a:t>
+            </a:r>
+            <a:r>
+              <a:rPr lang="en-US" altLang="ko-KR" sz="1050" b="0">
+                <a:solidFill>
+                  <a:srgbClr val="569CD6"/>
+                </a:solidFill>
+                <a:effectLst/>
+                <a:latin typeface="Consolas" panose="020B0609020204030204" pitchFamily="49" charset="0"/>
+              </a:rPr>
+              <a:t>class</a:t>
+            </a:r>
+            <a:r>
+              <a:rPr lang="en-US" altLang="ko-KR" sz="1050" b="0">
+                <a:solidFill>
+                  <a:srgbClr val="BBBEBF"/>
+                </a:solidFill>
+                <a:effectLst/>
+                <a:latin typeface="Consolas" panose="020B0609020204030204" pitchFamily="49" charset="0"/>
+              </a:rPr>
+              <a:t> </a:t>
+            </a:r>
+            <a:r>
+              <a:rPr lang="en-US" altLang="ko-KR" sz="1050" b="0">
+                <a:solidFill>
+                  <a:srgbClr val="4EC9B0"/>
+                </a:solidFill>
+                <a:effectLst/>
+                <a:latin typeface="Consolas" panose="020B0609020204030204" pitchFamily="49" charset="0"/>
+              </a:rPr>
+              <a:t>AddActivityScoreRequestDto</a:t>
+            </a:r>
+            <a:r>
+              <a:rPr lang="en-US" altLang="ko-KR" sz="1050" b="0">
+                <a:solidFill>
+                  <a:srgbClr val="BBBEBF"/>
+                </a:solidFill>
+                <a:effectLst/>
+                <a:latin typeface="Consolas" panose="020B0609020204030204" pitchFamily="49" charset="0"/>
+              </a:rPr>
+              <a:t> {</a:t>
+            </a:r>
+          </a:p>
+          <a:p>
+            <a:pPr>
+              <a:lnSpc>
+                <a:spcPts val="1425"/>
+              </a:lnSpc>
+              <a:buNone/>
+            </a:pPr>
+            <a:r>
+              <a:rPr lang="en-US" altLang="ko-KR" sz="1050" b="0">
+                <a:solidFill>
+                  <a:srgbClr val="BBBEBF"/>
+                </a:solidFill>
+                <a:effectLst/>
+                <a:latin typeface="Consolas" panose="020B0609020204030204" pitchFamily="49" charset="0"/>
+              </a:rPr>
+              <a:t>    </a:t>
+            </a:r>
+            <a:r>
+              <a:rPr lang="en-US" altLang="ko-KR" sz="1050" b="0">
+                <a:solidFill>
+                  <a:srgbClr val="569CD6"/>
+                </a:solidFill>
+                <a:effectLst/>
+                <a:latin typeface="Consolas" panose="020B0609020204030204" pitchFamily="49" charset="0"/>
+              </a:rPr>
+              <a:t>private</a:t>
+            </a:r>
+            <a:r>
+              <a:rPr lang="en-US" altLang="ko-KR" sz="1050" b="0">
+                <a:solidFill>
+                  <a:srgbClr val="BBBEBF"/>
+                </a:solidFill>
+                <a:effectLst/>
+                <a:latin typeface="Consolas" panose="020B0609020204030204" pitchFamily="49" charset="0"/>
+              </a:rPr>
+              <a:t> </a:t>
+            </a:r>
+            <a:r>
+              <a:rPr lang="en-US" altLang="ko-KR" sz="1050" b="0">
+                <a:solidFill>
+                  <a:srgbClr val="4EC9B0"/>
+                </a:solidFill>
+                <a:effectLst/>
+                <a:latin typeface="Consolas" panose="020B0609020204030204" pitchFamily="49" charset="0"/>
+              </a:rPr>
+              <a:t>Long</a:t>
+            </a:r>
+            <a:r>
+              <a:rPr lang="en-US" altLang="ko-KR" sz="1050" b="0">
+                <a:solidFill>
+                  <a:srgbClr val="FFA657"/>
+                </a:solidFill>
+                <a:effectLst/>
+                <a:latin typeface="Consolas" panose="020B0609020204030204" pitchFamily="49" charset="0"/>
+              </a:rPr>
+              <a:t> </a:t>
+            </a:r>
+            <a:r>
+              <a:rPr lang="en-US" altLang="ko-KR" sz="1050" b="0">
+                <a:solidFill>
+                  <a:srgbClr val="C9D1D9"/>
+                </a:solidFill>
+                <a:effectLst/>
+                <a:latin typeface="Consolas" panose="020B0609020204030204" pitchFamily="49" charset="0"/>
+              </a:rPr>
+              <a:t>userId</a:t>
+            </a:r>
+            <a:r>
+              <a:rPr lang="en-US" altLang="ko-KR" sz="1050" b="0">
+                <a:solidFill>
+                  <a:srgbClr val="BBBEBF"/>
+                </a:solidFill>
+                <a:effectLst/>
+                <a:latin typeface="Consolas" panose="020B0609020204030204" pitchFamily="49" charset="0"/>
+              </a:rPr>
+              <a:t>;</a:t>
+            </a:r>
+          </a:p>
+          <a:p>
+            <a:pPr>
+              <a:lnSpc>
+                <a:spcPts val="1425"/>
+              </a:lnSpc>
+              <a:buNone/>
+            </a:pPr>
+            <a:r>
+              <a:rPr lang="en-US" altLang="ko-KR" sz="1050" b="0">
+                <a:solidFill>
+                  <a:srgbClr val="BBBEBF"/>
+                </a:solidFill>
+                <a:effectLst/>
+                <a:latin typeface="Consolas" panose="020B0609020204030204" pitchFamily="49" charset="0"/>
+              </a:rPr>
+              <a:t>    </a:t>
+            </a:r>
+            <a:r>
+              <a:rPr lang="en-US" altLang="ko-KR" sz="1050" b="0">
+                <a:solidFill>
+                  <a:srgbClr val="569CD6"/>
+                </a:solidFill>
+                <a:effectLst/>
+                <a:latin typeface="Consolas" panose="020B0609020204030204" pitchFamily="49" charset="0"/>
+              </a:rPr>
+              <a:t>private</a:t>
+            </a:r>
+            <a:r>
+              <a:rPr lang="en-US" altLang="ko-KR" sz="1050" b="0">
+                <a:solidFill>
+                  <a:srgbClr val="BBBEBF"/>
+                </a:solidFill>
+                <a:effectLst/>
+                <a:latin typeface="Consolas" panose="020B0609020204030204" pitchFamily="49" charset="0"/>
+              </a:rPr>
+              <a:t> </a:t>
+            </a:r>
+            <a:r>
+              <a:rPr lang="en-US" altLang="ko-KR" sz="1050" b="0">
+                <a:solidFill>
+                  <a:srgbClr val="4EC9B0"/>
+                </a:solidFill>
+                <a:effectLst/>
+                <a:latin typeface="Consolas" panose="020B0609020204030204" pitchFamily="49" charset="0"/>
+              </a:rPr>
+              <a:t>int</a:t>
+            </a:r>
+            <a:r>
+              <a:rPr lang="en-US" altLang="ko-KR" sz="1050" b="0">
+                <a:solidFill>
+                  <a:srgbClr val="FFA657"/>
+                </a:solidFill>
+                <a:effectLst/>
+                <a:latin typeface="Consolas" panose="020B0609020204030204" pitchFamily="49" charset="0"/>
+              </a:rPr>
+              <a:t> </a:t>
+            </a:r>
+            <a:r>
+              <a:rPr lang="en-US" altLang="ko-KR" sz="1050" b="0">
+                <a:solidFill>
+                  <a:srgbClr val="C9D1D9"/>
+                </a:solidFill>
+                <a:effectLst/>
+                <a:latin typeface="Consolas" panose="020B0609020204030204" pitchFamily="49" charset="0"/>
+              </a:rPr>
+              <a:t>score</a:t>
+            </a:r>
+            <a:r>
+              <a:rPr lang="en-US" altLang="ko-KR" sz="1050" b="0">
+                <a:solidFill>
+                  <a:srgbClr val="BBBEBF"/>
+                </a:solidFill>
+                <a:effectLst/>
+                <a:latin typeface="Consolas" panose="020B0609020204030204" pitchFamily="49" charset="0"/>
+              </a:rPr>
+              <a:t>;</a:t>
+            </a:r>
+          </a:p>
+          <a:p>
+            <a:pPr>
+              <a:lnSpc>
+                <a:spcPts val="1425"/>
+              </a:lnSpc>
+              <a:buNone/>
+            </a:pPr>
+            <a:endParaRPr lang="en-US" altLang="ko-KR" sz="1050" b="0">
+              <a:solidFill>
+                <a:srgbClr val="BBBEBF"/>
+              </a:solidFill>
+              <a:effectLst/>
+              <a:latin typeface="Consolas" panose="020B0609020204030204" pitchFamily="49" charset="0"/>
+            </a:endParaRPr>
+          </a:p>
+          <a:p>
+            <a:pPr>
+              <a:lnSpc>
+                <a:spcPts val="1425"/>
+              </a:lnSpc>
+              <a:buNone/>
+            </a:pPr>
+            <a:r>
+              <a:rPr lang="en-US" altLang="ko-KR" sz="1050" b="0">
+                <a:solidFill>
+                  <a:srgbClr val="BBBEBF"/>
+                </a:solidFill>
+                <a:effectLst/>
+                <a:latin typeface="Consolas" panose="020B0609020204030204" pitchFamily="49" charset="0"/>
+              </a:rPr>
+              <a:t>    </a:t>
+            </a:r>
+            <a:r>
+              <a:rPr lang="en-US" altLang="ko-KR" sz="1050" b="0">
+                <a:solidFill>
+                  <a:srgbClr val="569CD6"/>
+                </a:solidFill>
+                <a:effectLst/>
+                <a:latin typeface="Consolas" panose="020B0609020204030204" pitchFamily="49" charset="0"/>
+              </a:rPr>
+              <a:t>public</a:t>
+            </a:r>
+            <a:r>
+              <a:rPr lang="en-US" altLang="ko-KR" sz="1050" b="0">
+                <a:solidFill>
+                  <a:srgbClr val="BBBEBF"/>
+                </a:solidFill>
+                <a:effectLst/>
+                <a:latin typeface="Consolas" panose="020B0609020204030204" pitchFamily="49" charset="0"/>
+              </a:rPr>
+              <a:t> </a:t>
+            </a:r>
+            <a:r>
+              <a:rPr lang="en-US" altLang="ko-KR" sz="1050" b="0">
+                <a:solidFill>
+                  <a:srgbClr val="D2A8FF"/>
+                </a:solidFill>
+                <a:effectLst/>
+                <a:latin typeface="Consolas" panose="020B0609020204030204" pitchFamily="49" charset="0"/>
+              </a:rPr>
+              <a:t>AddActivityScoreRequestDto</a:t>
+            </a:r>
+            <a:r>
+              <a:rPr lang="en-US" altLang="ko-KR" sz="1050" b="0">
+                <a:solidFill>
+                  <a:srgbClr val="BBBEBF"/>
+                </a:solidFill>
+                <a:effectLst/>
+                <a:latin typeface="Consolas" panose="020B0609020204030204" pitchFamily="49" charset="0"/>
+              </a:rPr>
+              <a:t>(</a:t>
+            </a:r>
+            <a:r>
+              <a:rPr lang="en-US" altLang="ko-KR" sz="1050" b="0">
+                <a:solidFill>
+                  <a:srgbClr val="4EC9B0"/>
+                </a:solidFill>
+                <a:effectLst/>
+                <a:latin typeface="Consolas" panose="020B0609020204030204" pitchFamily="49" charset="0"/>
+              </a:rPr>
+              <a:t>Long</a:t>
+            </a:r>
+            <a:r>
+              <a:rPr lang="en-US" altLang="ko-KR" sz="1050" b="0">
+                <a:solidFill>
+                  <a:srgbClr val="BBBEBF"/>
+                </a:solidFill>
+                <a:effectLst/>
+                <a:latin typeface="Consolas" panose="020B0609020204030204" pitchFamily="49" charset="0"/>
+              </a:rPr>
+              <a:t> </a:t>
+            </a:r>
+            <a:r>
+              <a:rPr lang="en-US" altLang="ko-KR" sz="1050" b="0">
+                <a:solidFill>
+                  <a:srgbClr val="FFA657"/>
+                </a:solidFill>
+                <a:effectLst/>
+                <a:latin typeface="Consolas" panose="020B0609020204030204" pitchFamily="49" charset="0"/>
+              </a:rPr>
+              <a:t>userId</a:t>
+            </a:r>
+            <a:r>
+              <a:rPr lang="en-US" altLang="ko-KR" sz="1050" b="0">
+                <a:solidFill>
+                  <a:srgbClr val="BBBEBF"/>
+                </a:solidFill>
+                <a:effectLst/>
+                <a:latin typeface="Consolas" panose="020B0609020204030204" pitchFamily="49" charset="0"/>
+              </a:rPr>
+              <a:t>, </a:t>
+            </a:r>
+            <a:r>
+              <a:rPr lang="en-US" altLang="ko-KR" sz="1050" b="0">
+                <a:solidFill>
+                  <a:srgbClr val="4EC9B0"/>
+                </a:solidFill>
+                <a:effectLst/>
+                <a:latin typeface="Consolas" panose="020B0609020204030204" pitchFamily="49" charset="0"/>
+              </a:rPr>
+              <a:t>int</a:t>
+            </a:r>
+            <a:r>
+              <a:rPr lang="en-US" altLang="ko-KR" sz="1050" b="0">
+                <a:solidFill>
+                  <a:srgbClr val="BBBEBF"/>
+                </a:solidFill>
+                <a:effectLst/>
+                <a:latin typeface="Consolas" panose="020B0609020204030204" pitchFamily="49" charset="0"/>
+              </a:rPr>
+              <a:t> </a:t>
+            </a:r>
+            <a:r>
+              <a:rPr lang="en-US" altLang="ko-KR" sz="1050" b="0">
+                <a:solidFill>
+                  <a:srgbClr val="FFA657"/>
+                </a:solidFill>
+                <a:effectLst/>
+                <a:latin typeface="Consolas" panose="020B0609020204030204" pitchFamily="49" charset="0"/>
+              </a:rPr>
+              <a:t>score</a:t>
+            </a:r>
+            <a:r>
+              <a:rPr lang="en-US" altLang="ko-KR" sz="1050" b="0">
+                <a:solidFill>
+                  <a:srgbClr val="BBBEBF"/>
+                </a:solidFill>
+                <a:effectLst/>
+                <a:latin typeface="Consolas" panose="020B0609020204030204" pitchFamily="49" charset="0"/>
+              </a:rPr>
+              <a:t>){</a:t>
+            </a:r>
+          </a:p>
+          <a:p>
+            <a:pPr>
+              <a:lnSpc>
+                <a:spcPts val="1425"/>
+              </a:lnSpc>
+              <a:buNone/>
+            </a:pPr>
+            <a:r>
+              <a:rPr lang="en-US" altLang="ko-KR" sz="1050" b="0">
+                <a:solidFill>
+                  <a:srgbClr val="BBBEBF"/>
+                </a:solidFill>
+                <a:effectLst/>
+                <a:latin typeface="Consolas" panose="020B0609020204030204" pitchFamily="49" charset="0"/>
+              </a:rPr>
+              <a:t>        </a:t>
+            </a:r>
+            <a:r>
+              <a:rPr lang="en-US" altLang="ko-KR" sz="1050" b="0">
+                <a:solidFill>
+                  <a:srgbClr val="79C0FF"/>
+                </a:solidFill>
+                <a:effectLst/>
+                <a:latin typeface="Consolas" panose="020B0609020204030204" pitchFamily="49" charset="0"/>
+              </a:rPr>
+              <a:t>this</a:t>
+            </a:r>
+            <a:r>
+              <a:rPr lang="en-US" altLang="ko-KR" sz="1050" b="0">
+                <a:solidFill>
+                  <a:srgbClr val="BBBEBF"/>
+                </a:solidFill>
+                <a:effectLst/>
+                <a:latin typeface="Consolas" panose="020B0609020204030204" pitchFamily="49" charset="0"/>
+              </a:rPr>
+              <a:t>.</a:t>
+            </a:r>
+            <a:r>
+              <a:rPr lang="en-US" altLang="ko-KR" sz="1050" b="0">
+                <a:solidFill>
+                  <a:srgbClr val="C9D1D9"/>
+                </a:solidFill>
+                <a:effectLst/>
+                <a:latin typeface="Consolas" panose="020B0609020204030204" pitchFamily="49" charset="0"/>
+              </a:rPr>
+              <a:t>userId</a:t>
+            </a:r>
+            <a:r>
+              <a:rPr lang="en-US" altLang="ko-KR" sz="1050" b="0">
+                <a:solidFill>
+                  <a:srgbClr val="BBBEBF"/>
+                </a:solidFill>
+                <a:effectLst/>
+                <a:latin typeface="Consolas" panose="020B0609020204030204" pitchFamily="49" charset="0"/>
+              </a:rPr>
+              <a:t> </a:t>
+            </a:r>
+            <a:r>
+              <a:rPr lang="en-US" altLang="ko-KR" sz="1050" b="0">
+                <a:solidFill>
+                  <a:srgbClr val="D4D4D4"/>
+                </a:solidFill>
+                <a:effectLst/>
+                <a:latin typeface="Consolas" panose="020B0609020204030204" pitchFamily="49" charset="0"/>
+              </a:rPr>
+              <a:t>=</a:t>
+            </a:r>
+            <a:r>
+              <a:rPr lang="en-US" altLang="ko-KR" sz="1050" b="0">
+                <a:solidFill>
+                  <a:srgbClr val="BBBEBF"/>
+                </a:solidFill>
+                <a:effectLst/>
+                <a:latin typeface="Consolas" panose="020B0609020204030204" pitchFamily="49" charset="0"/>
+              </a:rPr>
+              <a:t> </a:t>
+            </a:r>
+            <a:r>
+              <a:rPr lang="en-US" altLang="ko-KR" sz="1050" b="0">
+                <a:solidFill>
+                  <a:srgbClr val="FFA657"/>
+                </a:solidFill>
+                <a:effectLst/>
+                <a:latin typeface="Consolas" panose="020B0609020204030204" pitchFamily="49" charset="0"/>
+              </a:rPr>
+              <a:t>userId</a:t>
+            </a:r>
+            <a:r>
+              <a:rPr lang="en-US" altLang="ko-KR" sz="1050" b="0">
+                <a:solidFill>
+                  <a:srgbClr val="BBBEBF"/>
+                </a:solidFill>
+                <a:effectLst/>
+                <a:latin typeface="Consolas" panose="020B0609020204030204" pitchFamily="49" charset="0"/>
+              </a:rPr>
+              <a:t>;</a:t>
+            </a:r>
+          </a:p>
+          <a:p>
+            <a:pPr>
+              <a:lnSpc>
+                <a:spcPts val="1425"/>
+              </a:lnSpc>
+              <a:buNone/>
+            </a:pPr>
+            <a:r>
+              <a:rPr lang="en-US" altLang="ko-KR" sz="1050" b="0">
+                <a:solidFill>
+                  <a:srgbClr val="BBBEBF"/>
+                </a:solidFill>
+                <a:effectLst/>
+                <a:latin typeface="Consolas" panose="020B0609020204030204" pitchFamily="49" charset="0"/>
+              </a:rPr>
+              <a:t>        </a:t>
+            </a:r>
+            <a:r>
+              <a:rPr lang="en-US" altLang="ko-KR" sz="1050" b="0">
+                <a:solidFill>
+                  <a:srgbClr val="79C0FF"/>
+                </a:solidFill>
+                <a:effectLst/>
+                <a:latin typeface="Consolas" panose="020B0609020204030204" pitchFamily="49" charset="0"/>
+              </a:rPr>
+              <a:t>this</a:t>
+            </a:r>
+            <a:r>
+              <a:rPr lang="en-US" altLang="ko-KR" sz="1050" b="0">
+                <a:solidFill>
+                  <a:srgbClr val="BBBEBF"/>
+                </a:solidFill>
+                <a:effectLst/>
+                <a:latin typeface="Consolas" panose="020B0609020204030204" pitchFamily="49" charset="0"/>
+              </a:rPr>
+              <a:t>.</a:t>
+            </a:r>
+            <a:r>
+              <a:rPr lang="en-US" altLang="ko-KR" sz="1050" b="0">
+                <a:solidFill>
+                  <a:srgbClr val="C9D1D9"/>
+                </a:solidFill>
+                <a:effectLst/>
+                <a:latin typeface="Consolas" panose="020B0609020204030204" pitchFamily="49" charset="0"/>
+              </a:rPr>
+              <a:t>score</a:t>
+            </a:r>
+            <a:r>
+              <a:rPr lang="en-US" altLang="ko-KR" sz="1050" b="0">
+                <a:solidFill>
+                  <a:srgbClr val="BBBEBF"/>
+                </a:solidFill>
+                <a:effectLst/>
+                <a:latin typeface="Consolas" panose="020B0609020204030204" pitchFamily="49" charset="0"/>
+              </a:rPr>
+              <a:t> </a:t>
+            </a:r>
+            <a:r>
+              <a:rPr lang="en-US" altLang="ko-KR" sz="1050" b="0">
+                <a:solidFill>
+                  <a:srgbClr val="D4D4D4"/>
+                </a:solidFill>
+                <a:effectLst/>
+                <a:latin typeface="Consolas" panose="020B0609020204030204" pitchFamily="49" charset="0"/>
+              </a:rPr>
+              <a:t>=</a:t>
+            </a:r>
+            <a:r>
+              <a:rPr lang="en-US" altLang="ko-KR" sz="1050" b="0">
+                <a:solidFill>
+                  <a:srgbClr val="BBBEBF"/>
+                </a:solidFill>
+                <a:effectLst/>
+                <a:latin typeface="Consolas" panose="020B0609020204030204" pitchFamily="49" charset="0"/>
+              </a:rPr>
+              <a:t> </a:t>
+            </a:r>
+            <a:r>
+              <a:rPr lang="en-US" altLang="ko-KR" sz="1050" b="0">
+                <a:solidFill>
+                  <a:srgbClr val="FFA657"/>
+                </a:solidFill>
+                <a:effectLst/>
+                <a:latin typeface="Consolas" panose="020B0609020204030204" pitchFamily="49" charset="0"/>
+              </a:rPr>
+              <a:t>score</a:t>
+            </a:r>
+            <a:r>
+              <a:rPr lang="en-US" altLang="ko-KR" sz="1050" b="0">
+                <a:solidFill>
+                  <a:srgbClr val="BBBEBF"/>
+                </a:solidFill>
+                <a:effectLst/>
+                <a:latin typeface="Consolas" panose="020B0609020204030204" pitchFamily="49" charset="0"/>
+              </a:rPr>
+              <a:t>;</a:t>
+            </a:r>
+          </a:p>
+          <a:p>
+            <a:pPr>
+              <a:lnSpc>
+                <a:spcPts val="1425"/>
+              </a:lnSpc>
+              <a:buNone/>
+            </a:pPr>
+            <a:r>
+              <a:rPr lang="en-US" altLang="ko-KR" sz="1050" b="0">
+                <a:solidFill>
+                  <a:srgbClr val="BBBEBF"/>
+                </a:solidFill>
+                <a:effectLst/>
+                <a:latin typeface="Consolas" panose="020B0609020204030204" pitchFamily="49" charset="0"/>
+              </a:rPr>
+              <a:t>    }</a:t>
+            </a:r>
+          </a:p>
+          <a:p>
+            <a:pPr>
+              <a:lnSpc>
+                <a:spcPts val="1425"/>
+              </a:lnSpc>
+              <a:buNone/>
+            </a:pPr>
+            <a:endParaRPr lang="en-US" altLang="ko-KR" sz="1050" b="0">
+              <a:solidFill>
+                <a:srgbClr val="BBBEBF"/>
+              </a:solidFill>
+              <a:effectLst/>
+              <a:latin typeface="Consolas" panose="020B0609020204030204" pitchFamily="49" charset="0"/>
+            </a:endParaRPr>
+          </a:p>
+          <a:p>
+            <a:pPr>
+              <a:lnSpc>
+                <a:spcPts val="1425"/>
+              </a:lnSpc>
+              <a:buNone/>
+            </a:pPr>
+            <a:r>
+              <a:rPr lang="en-US" altLang="ko-KR" sz="1050" b="0">
+                <a:solidFill>
+                  <a:srgbClr val="BBBEBF"/>
+                </a:solidFill>
+                <a:effectLst/>
+                <a:latin typeface="Consolas" panose="020B0609020204030204" pitchFamily="49" charset="0"/>
+              </a:rPr>
+              <a:t>    </a:t>
+            </a:r>
+            <a:r>
+              <a:rPr lang="en-US" altLang="ko-KR" sz="1050" b="0">
+                <a:solidFill>
+                  <a:srgbClr val="569CD6"/>
+                </a:solidFill>
+                <a:effectLst/>
+                <a:latin typeface="Consolas" panose="020B0609020204030204" pitchFamily="49" charset="0"/>
+              </a:rPr>
+              <a:t>public</a:t>
+            </a:r>
+            <a:r>
+              <a:rPr lang="en-US" altLang="ko-KR" sz="1050" b="0">
+                <a:solidFill>
+                  <a:srgbClr val="BBBEBF"/>
+                </a:solidFill>
+                <a:effectLst/>
+                <a:latin typeface="Consolas" panose="020B0609020204030204" pitchFamily="49" charset="0"/>
+              </a:rPr>
+              <a:t> </a:t>
+            </a:r>
+            <a:r>
+              <a:rPr lang="en-US" altLang="ko-KR" sz="1050" b="0">
+                <a:solidFill>
+                  <a:srgbClr val="4EC9B0"/>
+                </a:solidFill>
+                <a:effectLst/>
+                <a:latin typeface="Consolas" panose="020B0609020204030204" pitchFamily="49" charset="0"/>
+              </a:rPr>
+              <a:t>Long</a:t>
+            </a:r>
+            <a:r>
+              <a:rPr lang="en-US" altLang="ko-KR" sz="1050" b="0">
+                <a:solidFill>
+                  <a:srgbClr val="BBBEBF"/>
+                </a:solidFill>
+                <a:effectLst/>
+                <a:latin typeface="Consolas" panose="020B0609020204030204" pitchFamily="49" charset="0"/>
+              </a:rPr>
+              <a:t> </a:t>
+            </a:r>
+            <a:r>
+              <a:rPr lang="en-US" altLang="ko-KR" sz="1050" b="0">
+                <a:solidFill>
+                  <a:srgbClr val="D2A8FF"/>
+                </a:solidFill>
+                <a:effectLst/>
+                <a:latin typeface="Consolas" panose="020B0609020204030204" pitchFamily="49" charset="0"/>
+              </a:rPr>
+              <a:t>getUserId</a:t>
+            </a:r>
+            <a:r>
+              <a:rPr lang="en-US" altLang="ko-KR" sz="1050" b="0">
+                <a:solidFill>
+                  <a:srgbClr val="BBBEBF"/>
+                </a:solidFill>
+                <a:effectLst/>
+                <a:latin typeface="Consolas" panose="020B0609020204030204" pitchFamily="49" charset="0"/>
+              </a:rPr>
+              <a:t>() {</a:t>
+            </a:r>
+          </a:p>
+          <a:p>
+            <a:pPr>
+              <a:lnSpc>
+                <a:spcPts val="1425"/>
+              </a:lnSpc>
+              <a:buNone/>
+            </a:pPr>
+            <a:r>
+              <a:rPr lang="en-US" altLang="ko-KR" sz="1050" b="0">
+                <a:solidFill>
+                  <a:srgbClr val="BBBEBF"/>
+                </a:solidFill>
+                <a:effectLst/>
+                <a:latin typeface="Consolas" panose="020B0609020204030204" pitchFamily="49" charset="0"/>
+              </a:rPr>
+              <a:t>        </a:t>
+            </a:r>
+            <a:r>
+              <a:rPr lang="en-US" altLang="ko-KR" sz="1050" b="0">
+                <a:solidFill>
+                  <a:srgbClr val="C586C0"/>
+                </a:solidFill>
+                <a:effectLst/>
+                <a:latin typeface="Consolas" panose="020B0609020204030204" pitchFamily="49" charset="0"/>
+              </a:rPr>
+              <a:t>return</a:t>
+            </a:r>
+            <a:r>
+              <a:rPr lang="en-US" altLang="ko-KR" sz="1050" b="0">
+                <a:solidFill>
+                  <a:srgbClr val="BBBEBF"/>
+                </a:solidFill>
+                <a:effectLst/>
+                <a:latin typeface="Consolas" panose="020B0609020204030204" pitchFamily="49" charset="0"/>
+              </a:rPr>
+              <a:t> </a:t>
+            </a:r>
+            <a:r>
+              <a:rPr lang="en-US" altLang="ko-KR" sz="1050" b="0">
+                <a:solidFill>
+                  <a:srgbClr val="C9D1D9"/>
+                </a:solidFill>
+                <a:effectLst/>
+                <a:latin typeface="Consolas" panose="020B0609020204030204" pitchFamily="49" charset="0"/>
+              </a:rPr>
+              <a:t>userId</a:t>
+            </a:r>
+            <a:r>
+              <a:rPr lang="en-US" altLang="ko-KR" sz="1050" b="0">
+                <a:solidFill>
+                  <a:srgbClr val="BBBEBF"/>
+                </a:solidFill>
+                <a:effectLst/>
+                <a:latin typeface="Consolas" panose="020B0609020204030204" pitchFamily="49" charset="0"/>
+              </a:rPr>
+              <a:t>;</a:t>
+            </a:r>
+          </a:p>
+          <a:p>
+            <a:pPr>
+              <a:lnSpc>
+                <a:spcPts val="1425"/>
+              </a:lnSpc>
+              <a:buNone/>
+            </a:pPr>
+            <a:r>
+              <a:rPr lang="en-US" altLang="ko-KR" sz="1050" b="0">
+                <a:solidFill>
+                  <a:srgbClr val="BBBEBF"/>
+                </a:solidFill>
+                <a:effectLst/>
+                <a:latin typeface="Consolas" panose="020B0609020204030204" pitchFamily="49" charset="0"/>
+              </a:rPr>
+              <a:t>    }</a:t>
+            </a:r>
+          </a:p>
+          <a:p>
+            <a:pPr>
+              <a:lnSpc>
+                <a:spcPts val="1425"/>
+              </a:lnSpc>
+              <a:buNone/>
+            </a:pPr>
+            <a:endParaRPr lang="en-US" altLang="ko-KR" sz="1050" b="0">
+              <a:solidFill>
+                <a:srgbClr val="BBBEBF"/>
+              </a:solidFill>
+              <a:effectLst/>
+              <a:latin typeface="Consolas" panose="020B0609020204030204" pitchFamily="49" charset="0"/>
+            </a:endParaRPr>
+          </a:p>
+          <a:p>
+            <a:pPr>
+              <a:lnSpc>
+                <a:spcPts val="1425"/>
+              </a:lnSpc>
+              <a:buNone/>
+            </a:pPr>
+            <a:r>
+              <a:rPr lang="en-US" altLang="ko-KR" sz="1050" b="0">
+                <a:solidFill>
+                  <a:srgbClr val="BBBEBF"/>
+                </a:solidFill>
+                <a:effectLst/>
+                <a:latin typeface="Consolas" panose="020B0609020204030204" pitchFamily="49" charset="0"/>
+              </a:rPr>
+              <a:t>    </a:t>
+            </a:r>
+            <a:r>
+              <a:rPr lang="en-US" altLang="ko-KR" sz="1050" b="0">
+                <a:solidFill>
+                  <a:srgbClr val="569CD6"/>
+                </a:solidFill>
+                <a:effectLst/>
+                <a:latin typeface="Consolas" panose="020B0609020204030204" pitchFamily="49" charset="0"/>
+              </a:rPr>
+              <a:t>public</a:t>
+            </a:r>
+            <a:r>
+              <a:rPr lang="en-US" altLang="ko-KR" sz="1050" b="0">
+                <a:solidFill>
+                  <a:srgbClr val="BBBEBF"/>
+                </a:solidFill>
+                <a:effectLst/>
+                <a:latin typeface="Consolas" panose="020B0609020204030204" pitchFamily="49" charset="0"/>
+              </a:rPr>
+              <a:t> </a:t>
+            </a:r>
+            <a:r>
+              <a:rPr lang="en-US" altLang="ko-KR" sz="1050" b="0">
+                <a:solidFill>
+                  <a:srgbClr val="4EC9B0"/>
+                </a:solidFill>
+                <a:effectLst/>
+                <a:latin typeface="Consolas" panose="020B0609020204030204" pitchFamily="49" charset="0"/>
+              </a:rPr>
+              <a:t>int</a:t>
+            </a:r>
+            <a:r>
+              <a:rPr lang="en-US" altLang="ko-KR" sz="1050" b="0">
+                <a:solidFill>
+                  <a:srgbClr val="BBBEBF"/>
+                </a:solidFill>
+                <a:effectLst/>
+                <a:latin typeface="Consolas" panose="020B0609020204030204" pitchFamily="49" charset="0"/>
+              </a:rPr>
+              <a:t> </a:t>
+            </a:r>
+            <a:r>
+              <a:rPr lang="en-US" altLang="ko-KR" sz="1050" b="0">
+                <a:solidFill>
+                  <a:srgbClr val="D2A8FF"/>
+                </a:solidFill>
+                <a:effectLst/>
+                <a:latin typeface="Consolas" panose="020B0609020204030204" pitchFamily="49" charset="0"/>
+              </a:rPr>
+              <a:t>getScore</a:t>
+            </a:r>
+            <a:r>
+              <a:rPr lang="en-US" altLang="ko-KR" sz="1050" b="0">
+                <a:solidFill>
+                  <a:srgbClr val="BBBEBF"/>
+                </a:solidFill>
+                <a:effectLst/>
+                <a:latin typeface="Consolas" panose="020B0609020204030204" pitchFamily="49" charset="0"/>
+              </a:rPr>
+              <a:t>() {</a:t>
+            </a:r>
+          </a:p>
+          <a:p>
+            <a:pPr>
+              <a:lnSpc>
+                <a:spcPts val="1425"/>
+              </a:lnSpc>
+              <a:buNone/>
+            </a:pPr>
+            <a:r>
+              <a:rPr lang="en-US" altLang="ko-KR" sz="1050" b="0">
+                <a:solidFill>
+                  <a:srgbClr val="BBBEBF"/>
+                </a:solidFill>
+                <a:effectLst/>
+                <a:latin typeface="Consolas" panose="020B0609020204030204" pitchFamily="49" charset="0"/>
+              </a:rPr>
+              <a:t>        </a:t>
+            </a:r>
+            <a:r>
+              <a:rPr lang="en-US" altLang="ko-KR" sz="1050" b="0">
+                <a:solidFill>
+                  <a:srgbClr val="C586C0"/>
+                </a:solidFill>
+                <a:effectLst/>
+                <a:latin typeface="Consolas" panose="020B0609020204030204" pitchFamily="49" charset="0"/>
+              </a:rPr>
+              <a:t>return</a:t>
+            </a:r>
+            <a:r>
+              <a:rPr lang="en-US" altLang="ko-KR" sz="1050" b="0">
+                <a:solidFill>
+                  <a:srgbClr val="BBBEBF"/>
+                </a:solidFill>
+                <a:effectLst/>
+                <a:latin typeface="Consolas" panose="020B0609020204030204" pitchFamily="49" charset="0"/>
+              </a:rPr>
+              <a:t> </a:t>
+            </a:r>
+            <a:r>
+              <a:rPr lang="en-US" altLang="ko-KR" sz="1050" b="0">
+                <a:solidFill>
+                  <a:srgbClr val="C9D1D9"/>
+                </a:solidFill>
+                <a:effectLst/>
+                <a:latin typeface="Consolas" panose="020B0609020204030204" pitchFamily="49" charset="0"/>
+              </a:rPr>
+              <a:t>score</a:t>
+            </a:r>
+            <a:r>
+              <a:rPr lang="en-US" altLang="ko-KR" sz="1050" b="0">
+                <a:solidFill>
+                  <a:srgbClr val="BBBEBF"/>
+                </a:solidFill>
+                <a:effectLst/>
+                <a:latin typeface="Consolas" panose="020B0609020204030204" pitchFamily="49" charset="0"/>
+              </a:rPr>
+              <a:t>;</a:t>
+            </a:r>
+          </a:p>
+          <a:p>
+            <a:pPr>
+              <a:lnSpc>
+                <a:spcPts val="1425"/>
+              </a:lnSpc>
+              <a:buNone/>
+            </a:pPr>
+            <a:r>
+              <a:rPr lang="en-US" altLang="ko-KR" sz="1050" b="0">
+                <a:solidFill>
+                  <a:srgbClr val="BBBEBF"/>
+                </a:solidFill>
+                <a:effectLst/>
+                <a:latin typeface="Consolas" panose="020B0609020204030204" pitchFamily="49" charset="0"/>
+              </a:rPr>
+              <a:t>    }</a:t>
+            </a:r>
+          </a:p>
+          <a:p>
+            <a:pPr>
+              <a:lnSpc>
+                <a:spcPts val="1425"/>
+              </a:lnSpc>
+              <a:buNone/>
+            </a:pPr>
+            <a:r>
+              <a:rPr lang="en-US" altLang="ko-KR" sz="1050" b="0">
+                <a:solidFill>
+                  <a:srgbClr val="BBBEBF"/>
+                </a:solidFill>
+                <a:effectLst/>
+                <a:latin typeface="Consolas" panose="020B0609020204030204" pitchFamily="49" charset="0"/>
+              </a:rPr>
+              <a:t>}</a:t>
+            </a:r>
+          </a:p>
+          <a:p>
+            <a:pPr>
+              <a:lnSpc>
+                <a:spcPts val="1425"/>
+              </a:lnSpc>
+              <a:buNone/>
+            </a:pPr>
+            <a:br>
+              <a:rPr lang="en-US" altLang="ko-KR" sz="1050" b="0">
+                <a:solidFill>
+                  <a:srgbClr val="BBBEBF"/>
+                </a:solidFill>
+                <a:effectLst/>
+                <a:latin typeface="Consolas" panose="020B0609020204030204" pitchFamily="49" charset="0"/>
+              </a:rPr>
+            </a:br>
+            <a:endParaRPr lang="en-US" altLang="ko-KR" sz="1050" b="0">
+              <a:solidFill>
+                <a:srgbClr val="BBBEBF"/>
+              </a:solidFill>
+              <a:effectLst/>
+              <a:latin typeface="Consolas" panose="020B0609020204030204" pitchFamily="49" charset="0"/>
+            </a:endParaRPr>
+          </a:p>
+        </p:txBody>
+      </p:sp>
+    </p:spTree>
+    <p:extLst>
+      <p:ext uri="{BB962C8B-B14F-4D97-AF65-F5344CB8AC3E}">
+        <p14:creationId xmlns:p14="http://schemas.microsoft.com/office/powerpoint/2010/main" val="912011925"/>
+      </p:ext>
+    </p:extLst>
+  </p:cSld>
+  <p:clrMapOvr>
+    <a:masterClrMapping/>
+  </p:clrMapOvr>
+</p:sld>
+</file>
+
+<file path=ppt/slides/slide25.xml><?xml version="1.0" encoding="utf-8"?>
+<p:sld xmlns:a="http://schemas.openxmlformats.org/drawingml/2006/main" xmlns:r="http://schemas.openxmlformats.org/officeDocument/2006/relationships" xmlns:p="http://schemas.openxmlformats.org/presentationml/2006/main">
+  <p:cSld>
+    <p:spTree>
+      <p:nvGrpSpPr>
+        <p:cNvPr id="1" name=""/>
+        <p:cNvGrpSpPr/>
+        <p:nvPr/>
+      </p:nvGrpSpPr>
+      <p:grpSpPr>
+        <a:xfrm>
+          <a:off x="0" y="0"/>
+          <a:ext cx="0" cy="0"/>
+          <a:chOff x="0" y="0"/>
+          <a:chExt cx="0" cy="0"/>
+        </a:xfrm>
+      </p:grpSpPr>
+      <p:sp>
+        <p:nvSpPr>
+          <p:cNvPr id="2" name="제목 1">
+            <a:extLst>
+              <a:ext uri="{FF2B5EF4-FFF2-40B4-BE49-F238E27FC236}">
+                <a16:creationId xmlns:a16="http://schemas.microsoft.com/office/drawing/2014/main" id="{809F1C39-1E9E-C6FD-F10F-B54164DD4BA1}"/>
+              </a:ext>
+            </a:extLst>
+          </p:cNvPr>
+          <p:cNvSpPr>
+            <a:spLocks noGrp="1"/>
+          </p:cNvSpPr>
+          <p:nvPr>
+            <p:ph type="title"/>
+          </p:nvPr>
+        </p:nvSpPr>
+        <p:spPr/>
+        <p:txBody>
+          <a:bodyPr>
+            <a:normAutofit/>
+          </a:bodyPr>
+          <a:lstStyle/>
+          <a:p>
+            <a:r>
+              <a:rPr lang="ko-KR" altLang="en-US" sz="4000"/>
+              <a:t>포인트 차감을 위한 컴포넌트 작성</a:t>
+            </a:r>
+          </a:p>
+        </p:txBody>
+      </p:sp>
+      <p:pic>
+        <p:nvPicPr>
+          <p:cNvPr id="3" name="그림 2">
+            <a:extLst>
+              <a:ext uri="{FF2B5EF4-FFF2-40B4-BE49-F238E27FC236}">
+                <a16:creationId xmlns:a16="http://schemas.microsoft.com/office/drawing/2014/main" id="{4DD1DE68-CB9A-12AF-6E6A-DF42E448BD24}"/>
+              </a:ext>
+            </a:extLst>
+          </p:cNvPr>
+          <p:cNvPicPr>
+            <a:picLocks noChangeAspect="1"/>
+          </p:cNvPicPr>
+          <p:nvPr/>
+        </p:nvPicPr>
+        <p:blipFill>
+          <a:blip r:embed="rId2"/>
+          <a:stretch>
+            <a:fillRect/>
+          </a:stretch>
+        </p:blipFill>
+        <p:spPr>
+          <a:xfrm>
+            <a:off x="1094232" y="1890498"/>
+            <a:ext cx="2819794" cy="4696480"/>
+          </a:xfrm>
+          <a:prstGeom prst="rect">
+            <a:avLst/>
+          </a:prstGeom>
+        </p:spPr>
+      </p:pic>
+      <p:sp>
+        <p:nvSpPr>
+          <p:cNvPr id="4" name="직사각형 3">
+            <a:extLst>
+              <a:ext uri="{FF2B5EF4-FFF2-40B4-BE49-F238E27FC236}">
+                <a16:creationId xmlns:a16="http://schemas.microsoft.com/office/drawing/2014/main" id="{4AD8750E-1073-36FC-89CC-54FEDD4D4B46}"/>
+              </a:ext>
+            </a:extLst>
+          </p:cNvPr>
+          <p:cNvSpPr/>
+          <p:nvPr/>
+        </p:nvSpPr>
+        <p:spPr>
+          <a:xfrm>
+            <a:off x="1249680" y="4238738"/>
+            <a:ext cx="1356360" cy="241822"/>
+          </a:xfrm>
+          <a:prstGeom prst="rect">
+            <a:avLst/>
+          </a:prstGeom>
+          <a:noFill/>
+          <a:ln>
+            <a:solidFill>
+              <a:srgbClr val="FF0000"/>
+            </a:solidFill>
+          </a:ln>
+        </p:spPr>
+        <p:style>
+          <a:lnRef idx="2">
+            <a:schemeClr val="accent1">
+              <a:shade val="15000"/>
+            </a:schemeClr>
+          </a:lnRef>
+          <a:fillRef idx="1">
+            <a:schemeClr val="accent1"/>
+          </a:fillRef>
+          <a:effectRef idx="0">
+            <a:schemeClr val="accent1"/>
+          </a:effectRef>
+          <a:fontRef idx="minor">
+            <a:schemeClr val="lt1"/>
+          </a:fontRef>
+        </p:style>
+        <p:txBody>
+          <a:bodyPr rtlCol="0" anchor="ctr"/>
+          <a:lstStyle/>
+          <a:p>
+            <a:pPr algn="ctr"/>
+            <a:endParaRPr lang="ko-KR" altLang="en-US"/>
+          </a:p>
+        </p:txBody>
+      </p:sp>
+      <p:sp>
+        <p:nvSpPr>
+          <p:cNvPr id="6" name="TextBox 5">
+            <a:extLst>
+              <a:ext uri="{FF2B5EF4-FFF2-40B4-BE49-F238E27FC236}">
+                <a16:creationId xmlns:a16="http://schemas.microsoft.com/office/drawing/2014/main" id="{35DF6649-2BF6-99A0-5292-43B46EC933BA}"/>
+              </a:ext>
+            </a:extLst>
+          </p:cNvPr>
+          <p:cNvSpPr txBox="1"/>
+          <p:nvPr/>
+        </p:nvSpPr>
+        <p:spPr>
+          <a:xfrm>
+            <a:off x="4058044" y="1890498"/>
+            <a:ext cx="6094476" cy="4392613"/>
+          </a:xfrm>
+          <a:prstGeom prst="rect">
+            <a:avLst/>
+          </a:prstGeom>
+          <a:solidFill>
+            <a:schemeClr val="tx1"/>
+          </a:solidFill>
+        </p:spPr>
+        <p:txBody>
+          <a:bodyPr wrap="square">
+            <a:spAutoFit/>
+          </a:bodyPr>
+          <a:lstStyle/>
+          <a:p>
+            <a:pPr>
+              <a:lnSpc>
+                <a:spcPts val="1425"/>
+              </a:lnSpc>
+              <a:buNone/>
+            </a:pPr>
+            <a:r>
+              <a:rPr lang="en-US" altLang="ko-KR" sz="1100" b="0">
+                <a:solidFill>
+                  <a:srgbClr val="BBBEBF"/>
+                </a:solidFill>
+                <a:effectLst/>
+                <a:latin typeface="Consolas" panose="020B0609020204030204" pitchFamily="49" charset="0"/>
+              </a:rPr>
+              <a:t>@</a:t>
+            </a:r>
+            <a:r>
+              <a:rPr lang="en-US" altLang="ko-KR" sz="1100" b="0">
+                <a:solidFill>
+                  <a:srgbClr val="4EC9B0"/>
+                </a:solidFill>
+                <a:effectLst/>
+                <a:latin typeface="Consolas" panose="020B0609020204030204" pitchFamily="49" charset="0"/>
+              </a:rPr>
+              <a:t>Component</a:t>
+            </a:r>
+            <a:endParaRPr lang="en-US" altLang="ko-KR" sz="1100" b="0">
+              <a:solidFill>
+                <a:srgbClr val="BBBEBF"/>
+              </a:solidFill>
+              <a:effectLst/>
+              <a:latin typeface="Consolas" panose="020B0609020204030204" pitchFamily="49" charset="0"/>
+            </a:endParaRPr>
+          </a:p>
+          <a:p>
+            <a:pPr>
+              <a:lnSpc>
+                <a:spcPts val="1425"/>
+              </a:lnSpc>
+              <a:buNone/>
+            </a:pPr>
+            <a:r>
+              <a:rPr lang="en-US" altLang="ko-KR" sz="1100" b="0">
+                <a:solidFill>
+                  <a:srgbClr val="569CD6"/>
+                </a:solidFill>
+                <a:effectLst/>
+                <a:latin typeface="Consolas" panose="020B0609020204030204" pitchFamily="49" charset="0"/>
+              </a:rPr>
+              <a:t>public</a:t>
+            </a:r>
+            <a:r>
+              <a:rPr lang="en-US" altLang="ko-KR" sz="1100" b="0">
+                <a:solidFill>
+                  <a:srgbClr val="BBBEBF"/>
+                </a:solidFill>
+                <a:effectLst/>
+                <a:latin typeface="Consolas" panose="020B0609020204030204" pitchFamily="49" charset="0"/>
+              </a:rPr>
+              <a:t> </a:t>
+            </a:r>
+            <a:r>
+              <a:rPr lang="en-US" altLang="ko-KR" sz="1100" b="0">
+                <a:solidFill>
+                  <a:srgbClr val="569CD6"/>
+                </a:solidFill>
+                <a:effectLst/>
+                <a:latin typeface="Consolas" panose="020B0609020204030204" pitchFamily="49" charset="0"/>
+              </a:rPr>
+              <a:t>class</a:t>
+            </a:r>
+            <a:r>
+              <a:rPr lang="en-US" altLang="ko-KR" sz="1100" b="0">
+                <a:solidFill>
+                  <a:srgbClr val="BBBEBF"/>
+                </a:solidFill>
+                <a:effectLst/>
+                <a:latin typeface="Consolas" panose="020B0609020204030204" pitchFamily="49" charset="0"/>
+              </a:rPr>
+              <a:t> </a:t>
+            </a:r>
+            <a:r>
+              <a:rPr lang="en-US" altLang="ko-KR" sz="1100" b="0">
+                <a:solidFill>
+                  <a:srgbClr val="4EC9B0"/>
+                </a:solidFill>
+                <a:effectLst/>
+                <a:latin typeface="Consolas" panose="020B0609020204030204" pitchFamily="49" charset="0"/>
+              </a:rPr>
+              <a:t>PointClient</a:t>
+            </a:r>
+            <a:r>
+              <a:rPr lang="en-US" altLang="ko-KR" sz="1100" b="0">
+                <a:solidFill>
+                  <a:srgbClr val="BBBEBF"/>
+                </a:solidFill>
+                <a:effectLst/>
+                <a:latin typeface="Consolas" panose="020B0609020204030204" pitchFamily="49" charset="0"/>
+              </a:rPr>
+              <a:t> {</a:t>
+            </a:r>
+          </a:p>
+          <a:p>
+            <a:pPr>
+              <a:lnSpc>
+                <a:spcPts val="1425"/>
+              </a:lnSpc>
+              <a:buNone/>
+            </a:pPr>
+            <a:r>
+              <a:rPr lang="en-US" altLang="ko-KR" sz="1100" b="0">
+                <a:solidFill>
+                  <a:srgbClr val="BBBEBF"/>
+                </a:solidFill>
+                <a:effectLst/>
+                <a:latin typeface="Consolas" panose="020B0609020204030204" pitchFamily="49" charset="0"/>
+              </a:rPr>
+              <a:t>    </a:t>
+            </a:r>
+            <a:r>
+              <a:rPr lang="en-US" altLang="ko-KR" sz="1100" b="0">
+                <a:solidFill>
+                  <a:srgbClr val="569CD6"/>
+                </a:solidFill>
+                <a:effectLst/>
+                <a:latin typeface="Consolas" panose="020B0609020204030204" pitchFamily="49" charset="0"/>
+              </a:rPr>
+              <a:t>private</a:t>
+            </a:r>
+            <a:r>
+              <a:rPr lang="en-US" altLang="ko-KR" sz="1100" b="0">
+                <a:solidFill>
+                  <a:srgbClr val="BBBEBF"/>
+                </a:solidFill>
+                <a:effectLst/>
+                <a:latin typeface="Consolas" panose="020B0609020204030204" pitchFamily="49" charset="0"/>
+              </a:rPr>
+              <a:t> </a:t>
+            </a:r>
+            <a:r>
+              <a:rPr lang="en-US" altLang="ko-KR" sz="1100" b="0">
+                <a:solidFill>
+                  <a:srgbClr val="4EC9B0"/>
+                </a:solidFill>
+                <a:effectLst/>
+                <a:latin typeface="Consolas" panose="020B0609020204030204" pitchFamily="49" charset="0"/>
+              </a:rPr>
+              <a:t>RestClient</a:t>
+            </a:r>
+            <a:r>
+              <a:rPr lang="en-US" altLang="ko-KR" sz="1100" b="0">
+                <a:solidFill>
+                  <a:srgbClr val="FFA657"/>
+                </a:solidFill>
+                <a:effectLst/>
+                <a:latin typeface="Consolas" panose="020B0609020204030204" pitchFamily="49" charset="0"/>
+              </a:rPr>
+              <a:t> </a:t>
+            </a:r>
+            <a:r>
+              <a:rPr lang="en-US" altLang="ko-KR" sz="1100" b="0">
+                <a:solidFill>
+                  <a:srgbClr val="C9D1D9"/>
+                </a:solidFill>
+                <a:effectLst/>
+                <a:latin typeface="Consolas" panose="020B0609020204030204" pitchFamily="49" charset="0"/>
+              </a:rPr>
+              <a:t>restClient</a:t>
+            </a:r>
+            <a:r>
+              <a:rPr lang="en-US" altLang="ko-KR" sz="1100" b="0">
+                <a:solidFill>
+                  <a:srgbClr val="BBBEBF"/>
+                </a:solidFill>
+                <a:effectLst/>
+                <a:latin typeface="Consolas" panose="020B0609020204030204" pitchFamily="49" charset="0"/>
+              </a:rPr>
+              <a:t>;</a:t>
+            </a:r>
+          </a:p>
+          <a:p>
+            <a:pPr>
+              <a:lnSpc>
+                <a:spcPts val="1425"/>
+              </a:lnSpc>
+              <a:buNone/>
+            </a:pPr>
+            <a:r>
+              <a:rPr lang="en-US" altLang="ko-KR" sz="1100" b="0">
+                <a:solidFill>
+                  <a:srgbClr val="BBBEBF"/>
+                </a:solidFill>
+                <a:effectLst/>
+                <a:latin typeface="Consolas" panose="020B0609020204030204" pitchFamily="49" charset="0"/>
+              </a:rPr>
+              <a:t>    </a:t>
+            </a:r>
+            <a:r>
+              <a:rPr lang="en-US" altLang="ko-KR" sz="1100" b="0">
+                <a:solidFill>
+                  <a:srgbClr val="569CD6"/>
+                </a:solidFill>
+                <a:effectLst/>
+                <a:latin typeface="Consolas" panose="020B0609020204030204" pitchFamily="49" charset="0"/>
+              </a:rPr>
+              <a:t>public</a:t>
+            </a:r>
+            <a:r>
+              <a:rPr lang="en-US" altLang="ko-KR" sz="1100" b="0">
+                <a:solidFill>
+                  <a:srgbClr val="BBBEBF"/>
+                </a:solidFill>
+                <a:effectLst/>
+                <a:latin typeface="Consolas" panose="020B0609020204030204" pitchFamily="49" charset="0"/>
+              </a:rPr>
+              <a:t> </a:t>
+            </a:r>
+            <a:r>
+              <a:rPr lang="en-US" altLang="ko-KR" sz="1100" b="0">
+                <a:solidFill>
+                  <a:srgbClr val="D2A8FF"/>
+                </a:solidFill>
+                <a:effectLst/>
+                <a:latin typeface="Consolas" panose="020B0609020204030204" pitchFamily="49" charset="0"/>
+              </a:rPr>
+              <a:t>PointClient</a:t>
+            </a:r>
+            <a:r>
+              <a:rPr lang="en-US" altLang="ko-KR" sz="1100" b="0">
+                <a:solidFill>
+                  <a:srgbClr val="BBBEBF"/>
+                </a:solidFill>
+                <a:effectLst/>
+                <a:latin typeface="Consolas" panose="020B0609020204030204" pitchFamily="49" charset="0"/>
+              </a:rPr>
+              <a:t>(</a:t>
+            </a:r>
+          </a:p>
+          <a:p>
+            <a:pPr>
+              <a:lnSpc>
+                <a:spcPts val="1425"/>
+              </a:lnSpc>
+              <a:buNone/>
+            </a:pPr>
+            <a:r>
+              <a:rPr lang="en-US" altLang="ko-KR" sz="1100">
+                <a:solidFill>
+                  <a:srgbClr val="BBBEBF"/>
+                </a:solidFill>
+                <a:latin typeface="Consolas" panose="020B0609020204030204" pitchFamily="49" charset="0"/>
+              </a:rPr>
+              <a:t>	</a:t>
+            </a:r>
+            <a:r>
+              <a:rPr lang="en-US" altLang="ko-KR" sz="1100" b="0">
+                <a:solidFill>
+                  <a:srgbClr val="BBBEBF"/>
+                </a:solidFill>
+                <a:effectLst/>
+                <a:latin typeface="Consolas" panose="020B0609020204030204" pitchFamily="49" charset="0"/>
+              </a:rPr>
+              <a:t>@</a:t>
+            </a:r>
+            <a:r>
+              <a:rPr lang="en-US" altLang="ko-KR" sz="1100" b="0">
+                <a:solidFill>
+                  <a:srgbClr val="4EC9B0"/>
+                </a:solidFill>
+                <a:effectLst/>
+                <a:latin typeface="Consolas" panose="020B0609020204030204" pitchFamily="49" charset="0"/>
+              </a:rPr>
+              <a:t>Value</a:t>
+            </a:r>
+            <a:r>
+              <a:rPr lang="en-US" altLang="ko-KR" sz="1100" b="0">
+                <a:solidFill>
+                  <a:srgbClr val="BBBEBF"/>
+                </a:solidFill>
+                <a:effectLst/>
+                <a:latin typeface="Consolas" panose="020B0609020204030204" pitchFamily="49" charset="0"/>
+              </a:rPr>
+              <a:t>(</a:t>
+            </a:r>
+            <a:r>
+              <a:rPr lang="en-US" altLang="ko-KR" sz="1100" b="0">
+                <a:solidFill>
+                  <a:srgbClr val="A5D6FF"/>
+                </a:solidFill>
+                <a:effectLst/>
+                <a:latin typeface="Consolas" panose="020B0609020204030204" pitchFamily="49" charset="0"/>
+              </a:rPr>
+              <a:t>"${client.point-service.url}"</a:t>
+            </a:r>
+            <a:r>
+              <a:rPr lang="en-US" altLang="ko-KR" sz="1100" b="0">
+                <a:solidFill>
+                  <a:srgbClr val="BBBEBF"/>
+                </a:solidFill>
+                <a:effectLst/>
+                <a:latin typeface="Consolas" panose="020B0609020204030204" pitchFamily="49" charset="0"/>
+              </a:rPr>
+              <a:t>) </a:t>
+            </a:r>
+            <a:r>
+              <a:rPr lang="en-US" altLang="ko-KR" sz="1100" b="0">
+                <a:solidFill>
+                  <a:srgbClr val="4EC9B0"/>
+                </a:solidFill>
+                <a:effectLst/>
+                <a:latin typeface="Consolas" panose="020B0609020204030204" pitchFamily="49" charset="0"/>
+              </a:rPr>
+              <a:t>String</a:t>
+            </a:r>
+            <a:r>
+              <a:rPr lang="en-US" altLang="ko-KR" sz="1100" b="0">
+                <a:solidFill>
+                  <a:srgbClr val="BBBEBF"/>
+                </a:solidFill>
+                <a:effectLst/>
+                <a:latin typeface="Consolas" panose="020B0609020204030204" pitchFamily="49" charset="0"/>
+              </a:rPr>
+              <a:t> </a:t>
+            </a:r>
+            <a:r>
+              <a:rPr lang="en-US" altLang="ko-KR" sz="1100" b="0">
+                <a:solidFill>
+                  <a:srgbClr val="FFA657"/>
+                </a:solidFill>
+                <a:effectLst/>
+                <a:latin typeface="Consolas" panose="020B0609020204030204" pitchFamily="49" charset="0"/>
+              </a:rPr>
+              <a:t>pointClientUrl</a:t>
+            </a:r>
+          </a:p>
+          <a:p>
+            <a:pPr>
+              <a:lnSpc>
+                <a:spcPts val="1425"/>
+              </a:lnSpc>
+              <a:buNone/>
+            </a:pPr>
+            <a:r>
+              <a:rPr lang="en-US" altLang="ko-KR" sz="1100">
+                <a:solidFill>
+                  <a:srgbClr val="FFA657"/>
+                </a:solidFill>
+                <a:latin typeface="Consolas" panose="020B0609020204030204" pitchFamily="49" charset="0"/>
+              </a:rPr>
+              <a:t>    </a:t>
+            </a:r>
+            <a:r>
+              <a:rPr lang="en-US" altLang="ko-KR" sz="1100" b="0">
+                <a:solidFill>
+                  <a:srgbClr val="BBBEBF"/>
+                </a:solidFill>
+                <a:effectLst/>
+                <a:latin typeface="Consolas" panose="020B0609020204030204" pitchFamily="49" charset="0"/>
+              </a:rPr>
+              <a:t>){</a:t>
+            </a:r>
+          </a:p>
+          <a:p>
+            <a:pPr>
+              <a:lnSpc>
+                <a:spcPts val="1425"/>
+              </a:lnSpc>
+              <a:buNone/>
+            </a:pPr>
+            <a:r>
+              <a:rPr lang="en-US" altLang="ko-KR" sz="1100" b="0">
+                <a:solidFill>
+                  <a:srgbClr val="BBBEBF"/>
+                </a:solidFill>
+                <a:effectLst/>
+                <a:latin typeface="Consolas" panose="020B0609020204030204" pitchFamily="49" charset="0"/>
+              </a:rPr>
+              <a:t>        </a:t>
+            </a:r>
+            <a:r>
+              <a:rPr lang="en-US" altLang="ko-KR" sz="1100" b="0">
+                <a:solidFill>
+                  <a:srgbClr val="79C0FF"/>
+                </a:solidFill>
+                <a:effectLst/>
+                <a:latin typeface="Consolas" panose="020B0609020204030204" pitchFamily="49" charset="0"/>
+              </a:rPr>
+              <a:t>this</a:t>
+            </a:r>
+            <a:r>
+              <a:rPr lang="en-US" altLang="ko-KR" sz="1100" b="0">
+                <a:solidFill>
+                  <a:srgbClr val="BBBEBF"/>
+                </a:solidFill>
+                <a:effectLst/>
+                <a:latin typeface="Consolas" panose="020B0609020204030204" pitchFamily="49" charset="0"/>
+              </a:rPr>
+              <a:t>.</a:t>
+            </a:r>
+            <a:r>
+              <a:rPr lang="en-US" altLang="ko-KR" sz="1100" b="0">
+                <a:solidFill>
+                  <a:srgbClr val="C9D1D9"/>
+                </a:solidFill>
+                <a:effectLst/>
+                <a:latin typeface="Consolas" panose="020B0609020204030204" pitchFamily="49" charset="0"/>
+              </a:rPr>
+              <a:t>restClient</a:t>
+            </a:r>
+            <a:r>
+              <a:rPr lang="en-US" altLang="ko-KR" sz="1100" b="0">
+                <a:solidFill>
+                  <a:srgbClr val="BBBEBF"/>
+                </a:solidFill>
+                <a:effectLst/>
+                <a:latin typeface="Consolas" panose="020B0609020204030204" pitchFamily="49" charset="0"/>
+              </a:rPr>
+              <a:t> </a:t>
+            </a:r>
+            <a:r>
+              <a:rPr lang="en-US" altLang="ko-KR" sz="1100" b="0">
+                <a:solidFill>
+                  <a:srgbClr val="D4D4D4"/>
+                </a:solidFill>
+                <a:effectLst/>
+                <a:latin typeface="Consolas" panose="020B0609020204030204" pitchFamily="49" charset="0"/>
+              </a:rPr>
+              <a:t>=</a:t>
+            </a:r>
+            <a:r>
+              <a:rPr lang="en-US" altLang="ko-KR" sz="1100" b="0">
+                <a:solidFill>
+                  <a:srgbClr val="BBBEBF"/>
+                </a:solidFill>
+                <a:effectLst/>
+                <a:latin typeface="Consolas" panose="020B0609020204030204" pitchFamily="49" charset="0"/>
+              </a:rPr>
+              <a:t> </a:t>
+            </a:r>
+            <a:r>
+              <a:rPr lang="en-US" altLang="ko-KR" sz="1100" b="0">
+                <a:solidFill>
+                  <a:srgbClr val="4EC9B0"/>
+                </a:solidFill>
+                <a:effectLst/>
+                <a:latin typeface="Consolas" panose="020B0609020204030204" pitchFamily="49" charset="0"/>
+              </a:rPr>
+              <a:t>RestClient</a:t>
+            </a:r>
+            <a:r>
+              <a:rPr lang="en-US" altLang="ko-KR" sz="1100" b="0">
+                <a:solidFill>
+                  <a:srgbClr val="BBBEBF"/>
+                </a:solidFill>
+                <a:effectLst/>
+                <a:latin typeface="Consolas" panose="020B0609020204030204" pitchFamily="49" charset="0"/>
+              </a:rPr>
+              <a:t>.</a:t>
+            </a:r>
+            <a:r>
+              <a:rPr lang="en-US" altLang="ko-KR" sz="1100" b="0">
+                <a:solidFill>
+                  <a:srgbClr val="D2A8FF"/>
+                </a:solidFill>
+                <a:effectLst/>
+                <a:latin typeface="Consolas" panose="020B0609020204030204" pitchFamily="49" charset="0"/>
+              </a:rPr>
+              <a:t>builder</a:t>
+            </a:r>
+            <a:r>
+              <a:rPr lang="en-US" altLang="ko-KR" sz="1100" b="0">
+                <a:solidFill>
+                  <a:srgbClr val="BBBEBF"/>
+                </a:solidFill>
+                <a:effectLst/>
+                <a:latin typeface="Consolas" panose="020B0609020204030204" pitchFamily="49" charset="0"/>
+              </a:rPr>
+              <a:t>()</a:t>
+            </a:r>
+          </a:p>
+          <a:p>
+            <a:pPr>
+              <a:lnSpc>
+                <a:spcPts val="1425"/>
+              </a:lnSpc>
+              <a:buNone/>
+            </a:pPr>
+            <a:r>
+              <a:rPr lang="en-US" altLang="ko-KR" sz="1100" b="0">
+                <a:solidFill>
+                  <a:srgbClr val="BBBEBF"/>
+                </a:solidFill>
+                <a:effectLst/>
+                <a:latin typeface="Consolas" panose="020B0609020204030204" pitchFamily="49" charset="0"/>
+              </a:rPr>
+              <a:t>            .</a:t>
+            </a:r>
+            <a:r>
+              <a:rPr lang="en-US" altLang="ko-KR" sz="1100" b="0">
+                <a:solidFill>
+                  <a:srgbClr val="D2A8FF"/>
+                </a:solidFill>
+                <a:effectLst/>
+                <a:latin typeface="Consolas" panose="020B0609020204030204" pitchFamily="49" charset="0"/>
+              </a:rPr>
+              <a:t>baseUrl</a:t>
+            </a:r>
+            <a:r>
+              <a:rPr lang="en-US" altLang="ko-KR" sz="1100" b="0">
+                <a:solidFill>
+                  <a:srgbClr val="BBBEBF"/>
+                </a:solidFill>
+                <a:effectLst/>
+                <a:latin typeface="Consolas" panose="020B0609020204030204" pitchFamily="49" charset="0"/>
+              </a:rPr>
+              <a:t>(</a:t>
+            </a:r>
+            <a:r>
+              <a:rPr lang="en-US" altLang="ko-KR" sz="1100" b="0">
+                <a:solidFill>
+                  <a:srgbClr val="FFA657"/>
+                </a:solidFill>
+                <a:effectLst/>
+                <a:latin typeface="Consolas" panose="020B0609020204030204" pitchFamily="49" charset="0"/>
+              </a:rPr>
+              <a:t>pointClientUrl</a:t>
+            </a:r>
+            <a:r>
+              <a:rPr lang="en-US" altLang="ko-KR" sz="1100" b="0">
+                <a:solidFill>
+                  <a:srgbClr val="BBBEBF"/>
+                </a:solidFill>
+                <a:effectLst/>
+                <a:latin typeface="Consolas" panose="020B0609020204030204" pitchFamily="49" charset="0"/>
+              </a:rPr>
+              <a:t>)</a:t>
+            </a:r>
+          </a:p>
+          <a:p>
+            <a:pPr>
+              <a:lnSpc>
+                <a:spcPts val="1425"/>
+              </a:lnSpc>
+              <a:buNone/>
+            </a:pPr>
+            <a:r>
+              <a:rPr lang="en-US" altLang="ko-KR" sz="1100" b="0">
+                <a:solidFill>
+                  <a:srgbClr val="BBBEBF"/>
+                </a:solidFill>
+                <a:effectLst/>
+                <a:latin typeface="Consolas" panose="020B0609020204030204" pitchFamily="49" charset="0"/>
+              </a:rPr>
+              <a:t>            .</a:t>
+            </a:r>
+            <a:r>
+              <a:rPr lang="en-US" altLang="ko-KR" sz="1100" b="0">
+                <a:solidFill>
+                  <a:srgbClr val="D2A8FF"/>
+                </a:solidFill>
+                <a:effectLst/>
+                <a:latin typeface="Consolas" panose="020B0609020204030204" pitchFamily="49" charset="0"/>
+              </a:rPr>
+              <a:t>build</a:t>
+            </a:r>
+            <a:r>
+              <a:rPr lang="en-US" altLang="ko-KR" sz="1100" b="0">
+                <a:solidFill>
+                  <a:srgbClr val="BBBEBF"/>
+                </a:solidFill>
+                <a:effectLst/>
+                <a:latin typeface="Consolas" panose="020B0609020204030204" pitchFamily="49" charset="0"/>
+              </a:rPr>
+              <a:t>();</a:t>
+            </a:r>
+          </a:p>
+          <a:p>
+            <a:pPr>
+              <a:lnSpc>
+                <a:spcPts val="1425"/>
+              </a:lnSpc>
+              <a:buNone/>
+            </a:pPr>
+            <a:r>
+              <a:rPr lang="en-US" altLang="ko-KR" sz="1100" b="0">
+                <a:solidFill>
+                  <a:srgbClr val="BBBEBF"/>
+                </a:solidFill>
+                <a:effectLst/>
+                <a:latin typeface="Consolas" panose="020B0609020204030204" pitchFamily="49" charset="0"/>
+              </a:rPr>
+              <a:t>    }</a:t>
+            </a:r>
+          </a:p>
+          <a:p>
+            <a:pPr>
+              <a:lnSpc>
+                <a:spcPts val="1425"/>
+              </a:lnSpc>
+              <a:buNone/>
+            </a:pPr>
+            <a:br>
+              <a:rPr lang="en-US" altLang="ko-KR" sz="1100" b="0">
+                <a:solidFill>
+                  <a:srgbClr val="BBBEBF"/>
+                </a:solidFill>
+                <a:effectLst/>
+                <a:latin typeface="Consolas" panose="020B0609020204030204" pitchFamily="49" charset="0"/>
+              </a:rPr>
+            </a:br>
+            <a:endParaRPr lang="en-US" altLang="ko-KR" sz="1100" b="0">
+              <a:solidFill>
+                <a:srgbClr val="BBBEBF"/>
+              </a:solidFill>
+              <a:effectLst/>
+              <a:latin typeface="Consolas" panose="020B0609020204030204" pitchFamily="49" charset="0"/>
+            </a:endParaRPr>
+          </a:p>
+          <a:p>
+            <a:pPr>
+              <a:lnSpc>
+                <a:spcPts val="1425"/>
+              </a:lnSpc>
+              <a:buNone/>
+            </a:pPr>
+            <a:r>
+              <a:rPr lang="en-US" altLang="ko-KR" sz="1100" b="0">
+                <a:solidFill>
+                  <a:srgbClr val="BBBEBF"/>
+                </a:solidFill>
+                <a:effectLst/>
+                <a:latin typeface="Consolas" panose="020B0609020204030204" pitchFamily="49" charset="0"/>
+              </a:rPr>
+              <a:t>    </a:t>
+            </a:r>
+            <a:r>
+              <a:rPr lang="en-US" altLang="ko-KR" sz="1100" b="0">
+                <a:solidFill>
+                  <a:srgbClr val="569CD6"/>
+                </a:solidFill>
+                <a:effectLst/>
+                <a:latin typeface="Consolas" panose="020B0609020204030204" pitchFamily="49" charset="0"/>
+              </a:rPr>
+              <a:t>public</a:t>
+            </a:r>
+            <a:r>
+              <a:rPr lang="en-US" altLang="ko-KR" sz="1100" b="0">
+                <a:solidFill>
+                  <a:srgbClr val="BBBEBF"/>
+                </a:solidFill>
+                <a:effectLst/>
+                <a:latin typeface="Consolas" panose="020B0609020204030204" pitchFamily="49" charset="0"/>
+              </a:rPr>
+              <a:t> </a:t>
+            </a:r>
+            <a:r>
+              <a:rPr lang="en-US" altLang="ko-KR" sz="1100" b="0">
+                <a:solidFill>
+                  <a:srgbClr val="4EC9B0"/>
+                </a:solidFill>
+                <a:effectLst/>
+                <a:latin typeface="Consolas" panose="020B0609020204030204" pitchFamily="49" charset="0"/>
+              </a:rPr>
+              <a:t>void</a:t>
+            </a:r>
+            <a:r>
+              <a:rPr lang="en-US" altLang="ko-KR" sz="1100" b="0">
+                <a:solidFill>
+                  <a:srgbClr val="BBBEBF"/>
+                </a:solidFill>
+                <a:effectLst/>
+                <a:latin typeface="Consolas" panose="020B0609020204030204" pitchFamily="49" charset="0"/>
+              </a:rPr>
+              <a:t> </a:t>
+            </a:r>
+            <a:r>
+              <a:rPr lang="en-US" altLang="ko-KR" sz="1100" b="0">
+                <a:solidFill>
+                  <a:srgbClr val="D2A8FF"/>
+                </a:solidFill>
+                <a:effectLst/>
+                <a:latin typeface="Consolas" panose="020B0609020204030204" pitchFamily="49" charset="0"/>
+              </a:rPr>
+              <a:t>deductPoints</a:t>
+            </a:r>
+            <a:r>
+              <a:rPr lang="en-US" altLang="ko-KR" sz="1100" b="0">
+                <a:solidFill>
+                  <a:srgbClr val="BBBEBF"/>
+                </a:solidFill>
+                <a:effectLst/>
+                <a:latin typeface="Consolas" panose="020B0609020204030204" pitchFamily="49" charset="0"/>
+              </a:rPr>
+              <a:t>(</a:t>
+            </a:r>
+            <a:r>
+              <a:rPr lang="en-US" altLang="ko-KR" sz="1100" b="0">
+                <a:solidFill>
+                  <a:srgbClr val="4EC9B0"/>
+                </a:solidFill>
+                <a:effectLst/>
+                <a:latin typeface="Consolas" panose="020B0609020204030204" pitchFamily="49" charset="0"/>
+              </a:rPr>
+              <a:t>Long</a:t>
+            </a:r>
+            <a:r>
+              <a:rPr lang="en-US" altLang="ko-KR" sz="1100" b="0">
+                <a:solidFill>
+                  <a:srgbClr val="BBBEBF"/>
+                </a:solidFill>
+                <a:effectLst/>
+                <a:latin typeface="Consolas" panose="020B0609020204030204" pitchFamily="49" charset="0"/>
+              </a:rPr>
+              <a:t> </a:t>
+            </a:r>
+            <a:r>
+              <a:rPr lang="en-US" altLang="ko-KR" sz="1100" b="0">
+                <a:solidFill>
+                  <a:srgbClr val="FFA657"/>
+                </a:solidFill>
+                <a:effectLst/>
+                <a:latin typeface="Consolas" panose="020B0609020204030204" pitchFamily="49" charset="0"/>
+              </a:rPr>
+              <a:t>userId</a:t>
+            </a:r>
+            <a:r>
+              <a:rPr lang="en-US" altLang="ko-KR" sz="1100" b="0">
+                <a:solidFill>
+                  <a:srgbClr val="BBBEBF"/>
+                </a:solidFill>
+                <a:effectLst/>
+                <a:latin typeface="Consolas" panose="020B0609020204030204" pitchFamily="49" charset="0"/>
+              </a:rPr>
+              <a:t>, </a:t>
+            </a:r>
+            <a:r>
+              <a:rPr lang="en-US" altLang="ko-KR" sz="1100" b="0">
+                <a:solidFill>
+                  <a:srgbClr val="4EC9B0"/>
+                </a:solidFill>
+                <a:effectLst/>
+                <a:latin typeface="Consolas" panose="020B0609020204030204" pitchFamily="49" charset="0"/>
+              </a:rPr>
+              <a:t>int</a:t>
+            </a:r>
+            <a:r>
+              <a:rPr lang="en-US" altLang="ko-KR" sz="1100" b="0">
+                <a:solidFill>
+                  <a:srgbClr val="BBBEBF"/>
+                </a:solidFill>
+                <a:effectLst/>
+                <a:latin typeface="Consolas" panose="020B0609020204030204" pitchFamily="49" charset="0"/>
+              </a:rPr>
+              <a:t> </a:t>
+            </a:r>
+            <a:r>
+              <a:rPr lang="en-US" altLang="ko-KR" sz="1100" b="0">
+                <a:solidFill>
+                  <a:srgbClr val="FFA657"/>
+                </a:solidFill>
+                <a:effectLst/>
+                <a:latin typeface="Consolas" panose="020B0609020204030204" pitchFamily="49" charset="0"/>
+              </a:rPr>
+              <a:t>amount</a:t>
+            </a:r>
+            <a:r>
+              <a:rPr lang="en-US" altLang="ko-KR" sz="1100" b="0">
+                <a:solidFill>
+                  <a:srgbClr val="BBBEBF"/>
+                </a:solidFill>
+                <a:effectLst/>
+                <a:latin typeface="Consolas" panose="020B0609020204030204" pitchFamily="49" charset="0"/>
+              </a:rPr>
+              <a:t>){</a:t>
+            </a:r>
+          </a:p>
+          <a:p>
+            <a:pPr>
+              <a:lnSpc>
+                <a:spcPts val="1425"/>
+              </a:lnSpc>
+              <a:buNone/>
+            </a:pPr>
+            <a:r>
+              <a:rPr lang="en-US" altLang="ko-KR" sz="1100" b="0">
+                <a:solidFill>
+                  <a:srgbClr val="BBBEBF"/>
+                </a:solidFill>
+                <a:effectLst/>
+                <a:latin typeface="Consolas" panose="020B0609020204030204" pitchFamily="49" charset="0"/>
+              </a:rPr>
+              <a:t>        </a:t>
+            </a:r>
+            <a:r>
+              <a:rPr lang="en-US" altLang="ko-KR" sz="1100" b="0">
+                <a:solidFill>
+                  <a:srgbClr val="4EC9B0"/>
+                </a:solidFill>
+                <a:effectLst/>
+                <a:latin typeface="Consolas" panose="020B0609020204030204" pitchFamily="49" charset="0"/>
+              </a:rPr>
+              <a:t>DeductPointRequestDto</a:t>
+            </a:r>
+            <a:r>
+              <a:rPr lang="en-US" altLang="ko-KR" sz="1100" b="0">
+                <a:solidFill>
+                  <a:srgbClr val="FFA657"/>
+                </a:solidFill>
+                <a:effectLst/>
+                <a:latin typeface="Consolas" panose="020B0609020204030204" pitchFamily="49" charset="0"/>
+              </a:rPr>
+              <a:t> </a:t>
+            </a:r>
+            <a:r>
+              <a:rPr lang="en-US" altLang="ko-KR" sz="1100" b="0">
+                <a:solidFill>
+                  <a:srgbClr val="C9D1D9"/>
+                </a:solidFill>
+                <a:effectLst/>
+                <a:latin typeface="Consolas" panose="020B0609020204030204" pitchFamily="49" charset="0"/>
+              </a:rPr>
+              <a:t>deductPointRequestDto</a:t>
+            </a:r>
+            <a:r>
+              <a:rPr lang="en-US" altLang="ko-KR" sz="1100" b="0">
+                <a:solidFill>
+                  <a:srgbClr val="FFA657"/>
+                </a:solidFill>
+                <a:effectLst/>
+                <a:latin typeface="Consolas" panose="020B0609020204030204" pitchFamily="49" charset="0"/>
+              </a:rPr>
+              <a:t> </a:t>
+            </a:r>
+            <a:r>
+              <a:rPr lang="en-US" altLang="ko-KR" sz="1100" b="0">
+                <a:solidFill>
+                  <a:srgbClr val="D4D4D4"/>
+                </a:solidFill>
+                <a:effectLst/>
+                <a:latin typeface="Consolas" panose="020B0609020204030204" pitchFamily="49" charset="0"/>
+              </a:rPr>
+              <a:t>=</a:t>
+            </a:r>
+            <a:r>
+              <a:rPr lang="en-US" altLang="ko-KR" sz="1100" b="0">
+                <a:solidFill>
+                  <a:srgbClr val="BBBEBF"/>
+                </a:solidFill>
+                <a:effectLst/>
+                <a:latin typeface="Consolas" panose="020B0609020204030204" pitchFamily="49" charset="0"/>
+              </a:rPr>
+              <a:t> </a:t>
+            </a:r>
+          </a:p>
+          <a:p>
+            <a:pPr>
+              <a:lnSpc>
+                <a:spcPts val="1425"/>
+              </a:lnSpc>
+              <a:buNone/>
+            </a:pPr>
+            <a:r>
+              <a:rPr lang="en-US" altLang="ko-KR" sz="1100" b="0">
+                <a:solidFill>
+                  <a:srgbClr val="BBBEBF"/>
+                </a:solidFill>
+                <a:effectLst/>
+                <a:latin typeface="Consolas" panose="020B0609020204030204" pitchFamily="49" charset="0"/>
+              </a:rPr>
+              <a:t>            </a:t>
+            </a:r>
+            <a:r>
+              <a:rPr lang="en-US" altLang="ko-KR" sz="1100" b="0">
+                <a:solidFill>
+                  <a:srgbClr val="C586C0"/>
+                </a:solidFill>
+                <a:effectLst/>
+                <a:latin typeface="Consolas" panose="020B0609020204030204" pitchFamily="49" charset="0"/>
+              </a:rPr>
+              <a:t>new</a:t>
+            </a:r>
+            <a:r>
+              <a:rPr lang="en-US" altLang="ko-KR" sz="1100" b="0">
+                <a:solidFill>
+                  <a:srgbClr val="BBBEBF"/>
+                </a:solidFill>
+                <a:effectLst/>
+                <a:latin typeface="Consolas" panose="020B0609020204030204" pitchFamily="49" charset="0"/>
+              </a:rPr>
+              <a:t> </a:t>
+            </a:r>
+            <a:r>
+              <a:rPr lang="en-US" altLang="ko-KR" sz="1100" b="0">
+                <a:solidFill>
+                  <a:srgbClr val="D2A8FF"/>
+                </a:solidFill>
+                <a:effectLst/>
+                <a:latin typeface="Consolas" panose="020B0609020204030204" pitchFamily="49" charset="0"/>
+              </a:rPr>
+              <a:t>DeductPointRequestDto</a:t>
+            </a:r>
+            <a:r>
+              <a:rPr lang="en-US" altLang="ko-KR" sz="1100" b="0">
+                <a:solidFill>
+                  <a:srgbClr val="BBBEBF"/>
+                </a:solidFill>
+                <a:effectLst/>
+                <a:latin typeface="Consolas" panose="020B0609020204030204" pitchFamily="49" charset="0"/>
+              </a:rPr>
+              <a:t>(</a:t>
+            </a:r>
+            <a:r>
+              <a:rPr lang="en-US" altLang="ko-KR" sz="1100" b="0">
+                <a:solidFill>
+                  <a:srgbClr val="FFA657"/>
+                </a:solidFill>
+                <a:effectLst/>
+                <a:latin typeface="Consolas" panose="020B0609020204030204" pitchFamily="49" charset="0"/>
+              </a:rPr>
+              <a:t>userId</a:t>
+            </a:r>
+            <a:r>
+              <a:rPr lang="en-US" altLang="ko-KR" sz="1100" b="0">
+                <a:solidFill>
+                  <a:srgbClr val="BBBEBF"/>
+                </a:solidFill>
+                <a:effectLst/>
+                <a:latin typeface="Consolas" panose="020B0609020204030204" pitchFamily="49" charset="0"/>
+              </a:rPr>
+              <a:t>, </a:t>
+            </a:r>
+            <a:r>
+              <a:rPr lang="en-US" altLang="ko-KR" sz="1100" b="0">
+                <a:solidFill>
+                  <a:srgbClr val="FFA657"/>
+                </a:solidFill>
+                <a:effectLst/>
+                <a:latin typeface="Consolas" panose="020B0609020204030204" pitchFamily="49" charset="0"/>
+              </a:rPr>
+              <a:t>amount</a:t>
+            </a:r>
+            <a:r>
+              <a:rPr lang="en-US" altLang="ko-KR" sz="1100" b="0">
+                <a:solidFill>
+                  <a:srgbClr val="BBBEBF"/>
+                </a:solidFill>
+                <a:effectLst/>
+                <a:latin typeface="Consolas" panose="020B0609020204030204" pitchFamily="49" charset="0"/>
+              </a:rPr>
+              <a:t>);</a:t>
+            </a:r>
+          </a:p>
+          <a:p>
+            <a:pPr>
+              <a:lnSpc>
+                <a:spcPts val="1425"/>
+              </a:lnSpc>
+              <a:buNone/>
+            </a:pPr>
+            <a:r>
+              <a:rPr lang="en-US" altLang="ko-KR" sz="1100" b="0">
+                <a:solidFill>
+                  <a:srgbClr val="BBBEBF"/>
+                </a:solidFill>
+                <a:effectLst/>
+                <a:latin typeface="Consolas" panose="020B0609020204030204" pitchFamily="49" charset="0"/>
+              </a:rPr>
+              <a:t>        </a:t>
+            </a:r>
+          </a:p>
+          <a:p>
+            <a:pPr>
+              <a:lnSpc>
+                <a:spcPts val="1425"/>
+              </a:lnSpc>
+              <a:buNone/>
+            </a:pPr>
+            <a:r>
+              <a:rPr lang="en-US" altLang="ko-KR" sz="1100" b="0">
+                <a:solidFill>
+                  <a:srgbClr val="BBBEBF"/>
+                </a:solidFill>
+                <a:effectLst/>
+                <a:latin typeface="Consolas" panose="020B0609020204030204" pitchFamily="49" charset="0"/>
+              </a:rPr>
+              <a:t>        </a:t>
+            </a:r>
+            <a:r>
+              <a:rPr lang="en-US" altLang="ko-KR" sz="1100" b="0">
+                <a:solidFill>
+                  <a:srgbClr val="C9D1D9"/>
+                </a:solidFill>
+                <a:effectLst/>
+                <a:latin typeface="Consolas" panose="020B0609020204030204" pitchFamily="49" charset="0"/>
+              </a:rPr>
+              <a:t>restClient</a:t>
+            </a:r>
+            <a:r>
+              <a:rPr lang="en-US" altLang="ko-KR" sz="1100" b="0">
+                <a:solidFill>
+                  <a:srgbClr val="BBBEBF"/>
+                </a:solidFill>
+                <a:effectLst/>
+                <a:latin typeface="Consolas" panose="020B0609020204030204" pitchFamily="49" charset="0"/>
+              </a:rPr>
+              <a:t>.</a:t>
+            </a:r>
+            <a:r>
+              <a:rPr lang="en-US" altLang="ko-KR" sz="1100" b="0">
+                <a:solidFill>
+                  <a:srgbClr val="D2A8FF"/>
+                </a:solidFill>
+                <a:effectLst/>
+                <a:latin typeface="Consolas" panose="020B0609020204030204" pitchFamily="49" charset="0"/>
+              </a:rPr>
+              <a:t>post</a:t>
+            </a:r>
+            <a:r>
+              <a:rPr lang="en-US" altLang="ko-KR" sz="1100" b="0">
+                <a:solidFill>
+                  <a:srgbClr val="BBBEBF"/>
+                </a:solidFill>
+                <a:effectLst/>
+                <a:latin typeface="Consolas" panose="020B0609020204030204" pitchFamily="49" charset="0"/>
+              </a:rPr>
+              <a:t>()</a:t>
+            </a:r>
+          </a:p>
+          <a:p>
+            <a:pPr>
+              <a:lnSpc>
+                <a:spcPts val="1425"/>
+              </a:lnSpc>
+              <a:buNone/>
+            </a:pPr>
+            <a:r>
+              <a:rPr lang="en-US" altLang="ko-KR" sz="1100" b="0">
+                <a:solidFill>
+                  <a:srgbClr val="BBBEBF"/>
+                </a:solidFill>
+                <a:effectLst/>
+                <a:latin typeface="Consolas" panose="020B0609020204030204" pitchFamily="49" charset="0"/>
+              </a:rPr>
+              <a:t>            .</a:t>
+            </a:r>
+            <a:r>
+              <a:rPr lang="en-US" altLang="ko-KR" sz="1100" b="0">
+                <a:solidFill>
+                  <a:srgbClr val="D2A8FF"/>
+                </a:solidFill>
+                <a:effectLst/>
+                <a:latin typeface="Consolas" panose="020B0609020204030204" pitchFamily="49" charset="0"/>
+              </a:rPr>
+              <a:t>uri</a:t>
+            </a:r>
+            <a:r>
+              <a:rPr lang="en-US" altLang="ko-KR" sz="1100" b="0">
+                <a:solidFill>
+                  <a:srgbClr val="BBBEBF"/>
+                </a:solidFill>
+                <a:effectLst/>
+                <a:latin typeface="Consolas" panose="020B0609020204030204" pitchFamily="49" charset="0"/>
+              </a:rPr>
+              <a:t>(</a:t>
+            </a:r>
+            <a:r>
+              <a:rPr lang="en-US" altLang="ko-KR" sz="1100" b="0">
+                <a:solidFill>
+                  <a:srgbClr val="A5D6FF"/>
+                </a:solidFill>
+                <a:effectLst/>
+                <a:latin typeface="Consolas" panose="020B0609020204030204" pitchFamily="49" charset="0"/>
+              </a:rPr>
+              <a:t>"/points/deduct"</a:t>
+            </a:r>
+            <a:r>
+              <a:rPr lang="en-US" altLang="ko-KR" sz="1100" b="0">
+                <a:solidFill>
+                  <a:srgbClr val="BBBEBF"/>
+                </a:solidFill>
+                <a:effectLst/>
+                <a:latin typeface="Consolas" panose="020B0609020204030204" pitchFamily="49" charset="0"/>
+              </a:rPr>
+              <a:t>)</a:t>
+            </a:r>
+          </a:p>
+          <a:p>
+            <a:pPr>
+              <a:lnSpc>
+                <a:spcPts val="1425"/>
+              </a:lnSpc>
+              <a:buNone/>
+            </a:pPr>
+            <a:r>
+              <a:rPr lang="en-US" altLang="ko-KR" sz="1100" b="0">
+                <a:solidFill>
+                  <a:srgbClr val="BBBEBF"/>
+                </a:solidFill>
+                <a:effectLst/>
+                <a:latin typeface="Consolas" panose="020B0609020204030204" pitchFamily="49" charset="0"/>
+              </a:rPr>
+              <a:t>            .</a:t>
+            </a:r>
+            <a:r>
+              <a:rPr lang="en-US" altLang="ko-KR" sz="1100" b="0">
+                <a:solidFill>
+                  <a:srgbClr val="D2A8FF"/>
+                </a:solidFill>
+                <a:effectLst/>
+                <a:latin typeface="Consolas" panose="020B0609020204030204" pitchFamily="49" charset="0"/>
+              </a:rPr>
+              <a:t>contentType</a:t>
+            </a:r>
+            <a:r>
+              <a:rPr lang="en-US" altLang="ko-KR" sz="1100" b="0">
+                <a:solidFill>
+                  <a:srgbClr val="BBBEBF"/>
+                </a:solidFill>
+                <a:effectLst/>
+                <a:latin typeface="Consolas" panose="020B0609020204030204" pitchFamily="49" charset="0"/>
+              </a:rPr>
+              <a:t>(</a:t>
+            </a:r>
+            <a:r>
+              <a:rPr lang="en-US" altLang="ko-KR" sz="1100" b="0">
+                <a:solidFill>
+                  <a:srgbClr val="4EC9B0"/>
+                </a:solidFill>
+                <a:effectLst/>
+                <a:latin typeface="Consolas" panose="020B0609020204030204" pitchFamily="49" charset="0"/>
+              </a:rPr>
+              <a:t>MediaType</a:t>
+            </a:r>
+            <a:r>
+              <a:rPr lang="en-US" altLang="ko-KR" sz="1100" b="0">
+                <a:solidFill>
+                  <a:srgbClr val="BBBEBF"/>
+                </a:solidFill>
+                <a:effectLst/>
+                <a:latin typeface="Consolas" panose="020B0609020204030204" pitchFamily="49" charset="0"/>
+              </a:rPr>
+              <a:t>.</a:t>
+            </a:r>
+            <a:r>
+              <a:rPr lang="en-US" altLang="ko-KR" sz="1100" b="0">
+                <a:solidFill>
+                  <a:srgbClr val="79C0FF"/>
+                </a:solidFill>
+                <a:effectLst/>
+                <a:latin typeface="Consolas" panose="020B0609020204030204" pitchFamily="49" charset="0"/>
+              </a:rPr>
+              <a:t>APPLICATION_JSON</a:t>
+            </a:r>
+            <a:r>
+              <a:rPr lang="en-US" altLang="ko-KR" sz="1100" b="0">
+                <a:solidFill>
+                  <a:srgbClr val="BBBEBF"/>
+                </a:solidFill>
+                <a:effectLst/>
+                <a:latin typeface="Consolas" panose="020B0609020204030204" pitchFamily="49" charset="0"/>
+              </a:rPr>
+              <a:t>)</a:t>
+            </a:r>
+          </a:p>
+          <a:p>
+            <a:pPr>
+              <a:lnSpc>
+                <a:spcPts val="1425"/>
+              </a:lnSpc>
+              <a:buNone/>
+            </a:pPr>
+            <a:r>
+              <a:rPr lang="en-US" altLang="ko-KR" sz="1100" b="0">
+                <a:solidFill>
+                  <a:srgbClr val="BBBEBF"/>
+                </a:solidFill>
+                <a:effectLst/>
+                <a:latin typeface="Consolas" panose="020B0609020204030204" pitchFamily="49" charset="0"/>
+              </a:rPr>
+              <a:t>            .</a:t>
+            </a:r>
+            <a:r>
+              <a:rPr lang="en-US" altLang="ko-KR" sz="1100" b="0">
+                <a:solidFill>
+                  <a:srgbClr val="D2A8FF"/>
+                </a:solidFill>
+                <a:effectLst/>
+                <a:latin typeface="Consolas" panose="020B0609020204030204" pitchFamily="49" charset="0"/>
+              </a:rPr>
+              <a:t>body</a:t>
+            </a:r>
+            <a:r>
+              <a:rPr lang="en-US" altLang="ko-KR" sz="1100" b="0">
+                <a:solidFill>
+                  <a:srgbClr val="BBBEBF"/>
+                </a:solidFill>
+                <a:effectLst/>
+                <a:latin typeface="Consolas" panose="020B0609020204030204" pitchFamily="49" charset="0"/>
+              </a:rPr>
+              <a:t>(</a:t>
+            </a:r>
+            <a:r>
+              <a:rPr lang="en-US" altLang="ko-KR" sz="1100" b="0">
+                <a:solidFill>
+                  <a:srgbClr val="C9D1D9"/>
+                </a:solidFill>
+                <a:effectLst/>
+                <a:latin typeface="Consolas" panose="020B0609020204030204" pitchFamily="49" charset="0"/>
+              </a:rPr>
+              <a:t>deductPointRequestDto</a:t>
+            </a:r>
+            <a:r>
+              <a:rPr lang="en-US" altLang="ko-KR" sz="1100" b="0">
+                <a:solidFill>
+                  <a:srgbClr val="BBBEBF"/>
+                </a:solidFill>
+                <a:effectLst/>
+                <a:latin typeface="Consolas" panose="020B0609020204030204" pitchFamily="49" charset="0"/>
+              </a:rPr>
+              <a:t>)</a:t>
+            </a:r>
+          </a:p>
+          <a:p>
+            <a:pPr>
+              <a:lnSpc>
+                <a:spcPts val="1425"/>
+              </a:lnSpc>
+              <a:buNone/>
+            </a:pPr>
+            <a:r>
+              <a:rPr lang="en-US" altLang="ko-KR" sz="1100" b="0">
+                <a:solidFill>
+                  <a:srgbClr val="BBBEBF"/>
+                </a:solidFill>
+                <a:effectLst/>
+                <a:latin typeface="Consolas" panose="020B0609020204030204" pitchFamily="49" charset="0"/>
+              </a:rPr>
+              <a:t>            .</a:t>
+            </a:r>
+            <a:r>
+              <a:rPr lang="en-US" altLang="ko-KR" sz="1100" b="0">
+                <a:solidFill>
+                  <a:srgbClr val="D2A8FF"/>
+                </a:solidFill>
+                <a:effectLst/>
+                <a:latin typeface="Consolas" panose="020B0609020204030204" pitchFamily="49" charset="0"/>
+              </a:rPr>
+              <a:t>retrieve</a:t>
+            </a:r>
+            <a:r>
+              <a:rPr lang="en-US" altLang="ko-KR" sz="1100" b="0">
+                <a:solidFill>
+                  <a:srgbClr val="BBBEBF"/>
+                </a:solidFill>
+                <a:effectLst/>
+                <a:latin typeface="Consolas" panose="020B0609020204030204" pitchFamily="49" charset="0"/>
+              </a:rPr>
+              <a:t>()</a:t>
+            </a:r>
+          </a:p>
+          <a:p>
+            <a:pPr>
+              <a:lnSpc>
+                <a:spcPts val="1425"/>
+              </a:lnSpc>
+              <a:buNone/>
+            </a:pPr>
+            <a:r>
+              <a:rPr lang="en-US" altLang="ko-KR" sz="1100" b="0">
+                <a:solidFill>
+                  <a:srgbClr val="BBBEBF"/>
+                </a:solidFill>
+                <a:effectLst/>
+                <a:latin typeface="Consolas" panose="020B0609020204030204" pitchFamily="49" charset="0"/>
+              </a:rPr>
+              <a:t>            .</a:t>
+            </a:r>
+            <a:r>
+              <a:rPr lang="en-US" altLang="ko-KR" sz="1100" b="0">
+                <a:solidFill>
+                  <a:srgbClr val="D2A8FF"/>
+                </a:solidFill>
+                <a:effectLst/>
+                <a:latin typeface="Consolas" panose="020B0609020204030204" pitchFamily="49" charset="0"/>
+              </a:rPr>
+              <a:t>toBodilessEntity</a:t>
+            </a:r>
+            <a:r>
+              <a:rPr lang="en-US" altLang="ko-KR" sz="1100" b="0">
+                <a:solidFill>
+                  <a:srgbClr val="BBBEBF"/>
+                </a:solidFill>
+                <a:effectLst/>
+                <a:latin typeface="Consolas" panose="020B0609020204030204" pitchFamily="49" charset="0"/>
+              </a:rPr>
+              <a:t>();</a:t>
+            </a:r>
+          </a:p>
+          <a:p>
+            <a:pPr>
+              <a:lnSpc>
+                <a:spcPts val="1425"/>
+              </a:lnSpc>
+              <a:buNone/>
+            </a:pPr>
+            <a:r>
+              <a:rPr lang="en-US" altLang="ko-KR" sz="1100" b="0">
+                <a:solidFill>
+                  <a:srgbClr val="BBBEBF"/>
+                </a:solidFill>
+                <a:effectLst/>
+                <a:latin typeface="Consolas" panose="020B0609020204030204" pitchFamily="49" charset="0"/>
+              </a:rPr>
+              <a:t>    }</a:t>
+            </a:r>
+          </a:p>
+          <a:p>
+            <a:pPr>
+              <a:lnSpc>
+                <a:spcPts val="1425"/>
+              </a:lnSpc>
+              <a:buNone/>
+            </a:pPr>
+            <a:r>
+              <a:rPr lang="en-US" altLang="ko-KR" sz="1100" b="0">
+                <a:solidFill>
+                  <a:srgbClr val="BBBEBF"/>
+                </a:solidFill>
+                <a:effectLst/>
+                <a:latin typeface="Consolas" panose="020B0609020204030204" pitchFamily="49" charset="0"/>
+              </a:rPr>
+              <a:t>}</a:t>
+            </a:r>
+          </a:p>
+        </p:txBody>
+      </p:sp>
+    </p:spTree>
+    <p:extLst>
+      <p:ext uri="{BB962C8B-B14F-4D97-AF65-F5344CB8AC3E}">
+        <p14:creationId xmlns:p14="http://schemas.microsoft.com/office/powerpoint/2010/main" val="1527513680"/>
+      </p:ext>
+    </p:extLst>
+  </p:cSld>
+  <p:clrMapOvr>
+    <a:masterClrMapping/>
+  </p:clrMapOvr>
+</p:sld>
+</file>
+
+<file path=ppt/slides/slide26.xml><?xml version="1.0" encoding="utf-8"?>
+<p:sld xmlns:a="http://schemas.openxmlformats.org/drawingml/2006/main" xmlns:r="http://schemas.openxmlformats.org/officeDocument/2006/relationships" xmlns:p="http://schemas.openxmlformats.org/presentationml/2006/main">
+  <p:cSld>
+    <p:spTree>
+      <p:nvGrpSpPr>
+        <p:cNvPr id="1" name="">
+          <a:extLst>
+            <a:ext uri="{FF2B5EF4-FFF2-40B4-BE49-F238E27FC236}">
+              <a16:creationId xmlns:a16="http://schemas.microsoft.com/office/drawing/2014/main" id="{25D9514B-0C7B-71D7-7133-155928E511D9}"/>
+            </a:ext>
+          </a:extLst>
+        </p:cNvPr>
+        <p:cNvGrpSpPr/>
+        <p:nvPr/>
+      </p:nvGrpSpPr>
+      <p:grpSpPr>
+        <a:xfrm>
+          <a:off x="0" y="0"/>
+          <a:ext cx="0" cy="0"/>
+          <a:chOff x="0" y="0"/>
+          <a:chExt cx="0" cy="0"/>
+        </a:xfrm>
+      </p:grpSpPr>
+      <p:sp>
+        <p:nvSpPr>
+          <p:cNvPr id="2" name="제목 1">
+            <a:extLst>
+              <a:ext uri="{FF2B5EF4-FFF2-40B4-BE49-F238E27FC236}">
+                <a16:creationId xmlns:a16="http://schemas.microsoft.com/office/drawing/2014/main" id="{3748B4AB-C840-A7AD-4683-676B8F400B28}"/>
+              </a:ext>
+            </a:extLst>
+          </p:cNvPr>
+          <p:cNvSpPr>
+            <a:spLocks noGrp="1"/>
+          </p:cNvSpPr>
+          <p:nvPr>
+            <p:ph type="title"/>
+          </p:nvPr>
+        </p:nvSpPr>
+        <p:spPr/>
+        <p:txBody>
+          <a:bodyPr>
+            <a:normAutofit/>
+          </a:bodyPr>
+          <a:lstStyle/>
+          <a:p>
+            <a:r>
+              <a:rPr lang="ko-KR" altLang="en-US" sz="3200"/>
+              <a:t>활동포인트 증가를 위한 메소드 작성 </a:t>
+            </a:r>
+            <a:r>
+              <a:rPr lang="en-US" altLang="ko-KR" sz="3200"/>
+              <a:t>- UserClient</a:t>
+            </a:r>
+            <a:endParaRPr lang="ko-KR" altLang="en-US" sz="3200"/>
+          </a:p>
+        </p:txBody>
+      </p:sp>
+      <p:pic>
+        <p:nvPicPr>
+          <p:cNvPr id="3" name="그림 2">
+            <a:extLst>
+              <a:ext uri="{FF2B5EF4-FFF2-40B4-BE49-F238E27FC236}">
+                <a16:creationId xmlns:a16="http://schemas.microsoft.com/office/drawing/2014/main" id="{B4F303BA-E81C-3D96-AB63-C16FA649B56F}"/>
+              </a:ext>
+            </a:extLst>
+          </p:cNvPr>
+          <p:cNvPicPr>
+            <a:picLocks noChangeAspect="1"/>
+          </p:cNvPicPr>
+          <p:nvPr/>
+        </p:nvPicPr>
+        <p:blipFill>
+          <a:blip r:embed="rId2"/>
+          <a:stretch>
+            <a:fillRect/>
+          </a:stretch>
+        </p:blipFill>
+        <p:spPr>
+          <a:xfrm>
+            <a:off x="1094232" y="1890498"/>
+            <a:ext cx="2819794" cy="4696480"/>
+          </a:xfrm>
+          <a:prstGeom prst="rect">
+            <a:avLst/>
+          </a:prstGeom>
+        </p:spPr>
+      </p:pic>
+      <p:sp>
+        <p:nvSpPr>
+          <p:cNvPr id="4" name="직사각형 3">
+            <a:extLst>
+              <a:ext uri="{FF2B5EF4-FFF2-40B4-BE49-F238E27FC236}">
+                <a16:creationId xmlns:a16="http://schemas.microsoft.com/office/drawing/2014/main" id="{37597F6A-AEC7-6894-B451-85E4F4B34B0A}"/>
+              </a:ext>
+            </a:extLst>
+          </p:cNvPr>
+          <p:cNvSpPr/>
+          <p:nvPr/>
+        </p:nvSpPr>
+        <p:spPr>
+          <a:xfrm>
+            <a:off x="1361300" y="4439906"/>
+            <a:ext cx="1356360" cy="241822"/>
+          </a:xfrm>
+          <a:prstGeom prst="rect">
+            <a:avLst/>
+          </a:prstGeom>
+          <a:noFill/>
+          <a:ln>
+            <a:solidFill>
+              <a:srgbClr val="FF0000"/>
+            </a:solidFill>
+          </a:ln>
+        </p:spPr>
+        <p:style>
+          <a:lnRef idx="2">
+            <a:schemeClr val="accent1">
+              <a:shade val="15000"/>
+            </a:schemeClr>
+          </a:lnRef>
+          <a:fillRef idx="1">
+            <a:schemeClr val="accent1"/>
+          </a:fillRef>
+          <a:effectRef idx="0">
+            <a:schemeClr val="accent1"/>
+          </a:effectRef>
+          <a:fontRef idx="minor">
+            <a:schemeClr val="lt1"/>
+          </a:fontRef>
+        </p:style>
+        <p:txBody>
+          <a:bodyPr rtlCol="0" anchor="ctr"/>
+          <a:lstStyle/>
+          <a:p>
+            <a:pPr algn="ctr"/>
+            <a:endParaRPr lang="ko-KR" altLang="en-US"/>
+          </a:p>
+        </p:txBody>
+      </p:sp>
+      <p:sp>
+        <p:nvSpPr>
+          <p:cNvPr id="7" name="TextBox 6">
+            <a:extLst>
+              <a:ext uri="{FF2B5EF4-FFF2-40B4-BE49-F238E27FC236}">
+                <a16:creationId xmlns:a16="http://schemas.microsoft.com/office/drawing/2014/main" id="{1BC39551-4E2C-6082-51D2-826C25F8D165}"/>
+              </a:ext>
+            </a:extLst>
+          </p:cNvPr>
+          <p:cNvSpPr txBox="1"/>
+          <p:nvPr/>
+        </p:nvSpPr>
+        <p:spPr>
+          <a:xfrm>
+            <a:off x="4106050" y="1890498"/>
+            <a:ext cx="6094476" cy="2067233"/>
+          </a:xfrm>
+          <a:prstGeom prst="rect">
+            <a:avLst/>
+          </a:prstGeom>
+          <a:solidFill>
+            <a:schemeClr val="tx1"/>
+          </a:solidFill>
+        </p:spPr>
+        <p:txBody>
+          <a:bodyPr wrap="square">
+            <a:spAutoFit/>
+          </a:bodyPr>
+          <a:lstStyle/>
+          <a:p>
+            <a:pPr>
+              <a:lnSpc>
+                <a:spcPts val="1425"/>
+              </a:lnSpc>
+              <a:buNone/>
+            </a:pPr>
+            <a:r>
+              <a:rPr lang="en-US" altLang="ko-KR" sz="1100" b="0">
+                <a:solidFill>
+                  <a:srgbClr val="BBBEBF"/>
+                </a:solidFill>
+                <a:effectLst/>
+                <a:latin typeface="Consolas" panose="020B0609020204030204" pitchFamily="49" charset="0"/>
+              </a:rPr>
+              <a:t>    </a:t>
+            </a:r>
+            <a:r>
+              <a:rPr lang="en-US" altLang="ko-KR" sz="1100" b="0">
+                <a:solidFill>
+                  <a:srgbClr val="569CD6"/>
+                </a:solidFill>
+                <a:effectLst/>
+                <a:latin typeface="Consolas" panose="020B0609020204030204" pitchFamily="49" charset="0"/>
+              </a:rPr>
+              <a:t>public</a:t>
+            </a:r>
+            <a:r>
+              <a:rPr lang="en-US" altLang="ko-KR" sz="1100" b="0">
+                <a:solidFill>
+                  <a:srgbClr val="BBBEBF"/>
+                </a:solidFill>
+                <a:effectLst/>
+                <a:latin typeface="Consolas" panose="020B0609020204030204" pitchFamily="49" charset="0"/>
+              </a:rPr>
+              <a:t> </a:t>
+            </a:r>
+            <a:r>
+              <a:rPr lang="en-US" altLang="ko-KR" sz="1100" b="0">
+                <a:solidFill>
+                  <a:srgbClr val="4EC9B0"/>
+                </a:solidFill>
+                <a:effectLst/>
+                <a:latin typeface="Consolas" panose="020B0609020204030204" pitchFamily="49" charset="0"/>
+              </a:rPr>
+              <a:t>void</a:t>
+            </a:r>
+            <a:r>
+              <a:rPr lang="en-US" altLang="ko-KR" sz="1100" b="0">
+                <a:solidFill>
+                  <a:srgbClr val="BBBEBF"/>
+                </a:solidFill>
+                <a:effectLst/>
+                <a:latin typeface="Consolas" panose="020B0609020204030204" pitchFamily="49" charset="0"/>
+              </a:rPr>
+              <a:t> </a:t>
+            </a:r>
+            <a:r>
+              <a:rPr lang="en-US" altLang="ko-KR" sz="1100" b="0">
+                <a:solidFill>
+                  <a:srgbClr val="D2A8FF"/>
+                </a:solidFill>
+                <a:effectLst/>
+                <a:latin typeface="Consolas" panose="020B0609020204030204" pitchFamily="49" charset="0"/>
+              </a:rPr>
+              <a:t>addActivityScore</a:t>
+            </a:r>
+            <a:r>
+              <a:rPr lang="en-US" altLang="ko-KR" sz="1100" b="0">
+                <a:solidFill>
+                  <a:srgbClr val="BBBEBF"/>
+                </a:solidFill>
+                <a:effectLst/>
+                <a:latin typeface="Consolas" panose="020B0609020204030204" pitchFamily="49" charset="0"/>
+              </a:rPr>
+              <a:t>(</a:t>
+            </a:r>
+            <a:r>
+              <a:rPr lang="en-US" altLang="ko-KR" sz="1100" b="0">
+                <a:solidFill>
+                  <a:srgbClr val="4EC9B0"/>
+                </a:solidFill>
+                <a:effectLst/>
+                <a:latin typeface="Consolas" panose="020B0609020204030204" pitchFamily="49" charset="0"/>
+              </a:rPr>
+              <a:t>Long</a:t>
+            </a:r>
+            <a:r>
+              <a:rPr lang="en-US" altLang="ko-KR" sz="1100" b="0">
+                <a:solidFill>
+                  <a:srgbClr val="BBBEBF"/>
+                </a:solidFill>
+                <a:effectLst/>
+                <a:latin typeface="Consolas" panose="020B0609020204030204" pitchFamily="49" charset="0"/>
+              </a:rPr>
+              <a:t> </a:t>
+            </a:r>
+            <a:r>
+              <a:rPr lang="en-US" altLang="ko-KR" sz="1100" b="0">
+                <a:solidFill>
+                  <a:srgbClr val="FFA657"/>
+                </a:solidFill>
+                <a:effectLst/>
+                <a:latin typeface="Consolas" panose="020B0609020204030204" pitchFamily="49" charset="0"/>
+              </a:rPr>
+              <a:t>userId</a:t>
+            </a:r>
+            <a:r>
+              <a:rPr lang="en-US" altLang="ko-KR" sz="1100" b="0">
+                <a:solidFill>
+                  <a:srgbClr val="BBBEBF"/>
+                </a:solidFill>
+                <a:effectLst/>
+                <a:latin typeface="Consolas" panose="020B0609020204030204" pitchFamily="49" charset="0"/>
+              </a:rPr>
+              <a:t>, </a:t>
+            </a:r>
+            <a:r>
+              <a:rPr lang="en-US" altLang="ko-KR" sz="1100" b="0">
+                <a:solidFill>
+                  <a:srgbClr val="4EC9B0"/>
+                </a:solidFill>
+                <a:effectLst/>
+                <a:latin typeface="Consolas" panose="020B0609020204030204" pitchFamily="49" charset="0"/>
+              </a:rPr>
+              <a:t>int</a:t>
+            </a:r>
+            <a:r>
+              <a:rPr lang="en-US" altLang="ko-KR" sz="1100" b="0">
+                <a:solidFill>
+                  <a:srgbClr val="BBBEBF"/>
+                </a:solidFill>
+                <a:effectLst/>
+                <a:latin typeface="Consolas" panose="020B0609020204030204" pitchFamily="49" charset="0"/>
+              </a:rPr>
+              <a:t> </a:t>
+            </a:r>
+            <a:r>
+              <a:rPr lang="en-US" altLang="ko-KR" sz="1100" b="0">
+                <a:solidFill>
+                  <a:srgbClr val="FFA657"/>
+                </a:solidFill>
+                <a:effectLst/>
+                <a:latin typeface="Consolas" panose="020B0609020204030204" pitchFamily="49" charset="0"/>
+              </a:rPr>
+              <a:t>score</a:t>
+            </a:r>
+            <a:r>
+              <a:rPr lang="en-US" altLang="ko-KR" sz="1100" b="0">
+                <a:solidFill>
+                  <a:srgbClr val="BBBEBF"/>
+                </a:solidFill>
+                <a:effectLst/>
+                <a:latin typeface="Consolas" panose="020B0609020204030204" pitchFamily="49" charset="0"/>
+              </a:rPr>
+              <a:t>){</a:t>
+            </a:r>
+          </a:p>
+          <a:p>
+            <a:pPr>
+              <a:lnSpc>
+                <a:spcPts val="1425"/>
+              </a:lnSpc>
+              <a:buNone/>
+            </a:pPr>
+            <a:r>
+              <a:rPr lang="en-US" altLang="ko-KR" sz="1100" b="0">
+                <a:solidFill>
+                  <a:srgbClr val="BBBEBF"/>
+                </a:solidFill>
+                <a:effectLst/>
+                <a:latin typeface="Consolas" panose="020B0609020204030204" pitchFamily="49" charset="0"/>
+              </a:rPr>
+              <a:t>        </a:t>
+            </a:r>
+            <a:r>
+              <a:rPr lang="en-US" altLang="ko-KR" sz="1100" b="0">
+                <a:solidFill>
+                  <a:srgbClr val="4EC9B0"/>
+                </a:solidFill>
+                <a:effectLst/>
+                <a:latin typeface="Consolas" panose="020B0609020204030204" pitchFamily="49" charset="0"/>
+              </a:rPr>
+              <a:t>AddActivityScoreRequestDto</a:t>
+            </a:r>
+            <a:r>
+              <a:rPr lang="en-US" altLang="ko-KR" sz="1100" b="0">
+                <a:solidFill>
+                  <a:srgbClr val="FFA657"/>
+                </a:solidFill>
+                <a:effectLst/>
+                <a:latin typeface="Consolas" panose="020B0609020204030204" pitchFamily="49" charset="0"/>
+              </a:rPr>
+              <a:t> </a:t>
+            </a:r>
+            <a:r>
+              <a:rPr lang="en-US" altLang="ko-KR" sz="1100" b="0">
+                <a:solidFill>
+                  <a:srgbClr val="C9D1D9"/>
+                </a:solidFill>
+                <a:effectLst/>
+                <a:latin typeface="Consolas" panose="020B0609020204030204" pitchFamily="49" charset="0"/>
+              </a:rPr>
+              <a:t>addActivityScoreRequestDto</a:t>
+            </a:r>
+            <a:r>
+              <a:rPr lang="en-US" altLang="ko-KR" sz="1100" b="0">
+                <a:solidFill>
+                  <a:srgbClr val="FFA657"/>
+                </a:solidFill>
+                <a:effectLst/>
+                <a:latin typeface="Consolas" panose="020B0609020204030204" pitchFamily="49" charset="0"/>
+              </a:rPr>
+              <a:t> </a:t>
+            </a:r>
+            <a:r>
+              <a:rPr lang="en-US" altLang="ko-KR" sz="1100" b="0">
+                <a:solidFill>
+                  <a:srgbClr val="D4D4D4"/>
+                </a:solidFill>
+                <a:effectLst/>
+                <a:latin typeface="Consolas" panose="020B0609020204030204" pitchFamily="49" charset="0"/>
+              </a:rPr>
+              <a:t>=</a:t>
+            </a:r>
+            <a:endParaRPr lang="en-US" altLang="ko-KR" sz="1100" b="0">
+              <a:solidFill>
+                <a:srgbClr val="BBBEBF"/>
+              </a:solidFill>
+              <a:effectLst/>
+              <a:latin typeface="Consolas" panose="020B0609020204030204" pitchFamily="49" charset="0"/>
+            </a:endParaRPr>
+          </a:p>
+          <a:p>
+            <a:pPr>
+              <a:lnSpc>
+                <a:spcPts val="1425"/>
+              </a:lnSpc>
+              <a:buNone/>
+            </a:pPr>
+            <a:r>
+              <a:rPr lang="en-US" altLang="ko-KR" sz="1100" b="0">
+                <a:solidFill>
+                  <a:srgbClr val="BBBEBF"/>
+                </a:solidFill>
+                <a:effectLst/>
+                <a:latin typeface="Consolas" panose="020B0609020204030204" pitchFamily="49" charset="0"/>
+              </a:rPr>
+              <a:t>            </a:t>
+            </a:r>
+            <a:r>
+              <a:rPr lang="en-US" altLang="ko-KR" sz="1100" b="0">
+                <a:solidFill>
+                  <a:srgbClr val="C586C0"/>
+                </a:solidFill>
+                <a:effectLst/>
+                <a:latin typeface="Consolas" panose="020B0609020204030204" pitchFamily="49" charset="0"/>
+              </a:rPr>
+              <a:t>new</a:t>
+            </a:r>
+            <a:r>
+              <a:rPr lang="en-US" altLang="ko-KR" sz="1100" b="0">
+                <a:solidFill>
+                  <a:srgbClr val="BBBEBF"/>
+                </a:solidFill>
+                <a:effectLst/>
+                <a:latin typeface="Consolas" panose="020B0609020204030204" pitchFamily="49" charset="0"/>
+              </a:rPr>
+              <a:t> </a:t>
+            </a:r>
+            <a:r>
+              <a:rPr lang="en-US" altLang="ko-KR" sz="1100" b="0">
+                <a:solidFill>
+                  <a:srgbClr val="D2A8FF"/>
+                </a:solidFill>
+                <a:effectLst/>
+                <a:latin typeface="Consolas" panose="020B0609020204030204" pitchFamily="49" charset="0"/>
+              </a:rPr>
+              <a:t>AddActivityScoreRequestDto</a:t>
+            </a:r>
+            <a:r>
+              <a:rPr lang="en-US" altLang="ko-KR" sz="1100" b="0">
+                <a:solidFill>
+                  <a:srgbClr val="BBBEBF"/>
+                </a:solidFill>
+                <a:effectLst/>
+                <a:latin typeface="Consolas" panose="020B0609020204030204" pitchFamily="49" charset="0"/>
+              </a:rPr>
+              <a:t>(</a:t>
+            </a:r>
+            <a:r>
+              <a:rPr lang="en-US" altLang="ko-KR" sz="1100" b="0">
+                <a:solidFill>
+                  <a:srgbClr val="FFA657"/>
+                </a:solidFill>
+                <a:effectLst/>
+                <a:latin typeface="Consolas" panose="020B0609020204030204" pitchFamily="49" charset="0"/>
+              </a:rPr>
+              <a:t>userId</a:t>
+            </a:r>
+            <a:r>
+              <a:rPr lang="en-US" altLang="ko-KR" sz="1100" b="0">
+                <a:solidFill>
+                  <a:srgbClr val="BBBEBF"/>
+                </a:solidFill>
+                <a:effectLst/>
+                <a:latin typeface="Consolas" panose="020B0609020204030204" pitchFamily="49" charset="0"/>
+              </a:rPr>
+              <a:t>, </a:t>
+            </a:r>
+            <a:r>
+              <a:rPr lang="en-US" altLang="ko-KR" sz="1100" b="0">
+                <a:solidFill>
+                  <a:srgbClr val="FFA657"/>
+                </a:solidFill>
+                <a:effectLst/>
+                <a:latin typeface="Consolas" panose="020B0609020204030204" pitchFamily="49" charset="0"/>
+              </a:rPr>
+              <a:t>score</a:t>
+            </a:r>
+            <a:r>
+              <a:rPr lang="en-US" altLang="ko-KR" sz="1100" b="0">
+                <a:solidFill>
+                  <a:srgbClr val="BBBEBF"/>
+                </a:solidFill>
+                <a:effectLst/>
+                <a:latin typeface="Consolas" panose="020B0609020204030204" pitchFamily="49" charset="0"/>
+              </a:rPr>
+              <a:t>);</a:t>
+            </a:r>
+          </a:p>
+          <a:p>
+            <a:pPr>
+              <a:lnSpc>
+                <a:spcPts val="1425"/>
+              </a:lnSpc>
+              <a:buNone/>
+            </a:pPr>
+            <a:r>
+              <a:rPr lang="en-US" altLang="ko-KR" sz="1100" b="0">
+                <a:solidFill>
+                  <a:srgbClr val="BBBEBF"/>
+                </a:solidFill>
+                <a:effectLst/>
+                <a:latin typeface="Consolas" panose="020B0609020204030204" pitchFamily="49" charset="0"/>
+              </a:rPr>
+              <a:t>        </a:t>
+            </a:r>
+          </a:p>
+          <a:p>
+            <a:pPr>
+              <a:lnSpc>
+                <a:spcPts val="1425"/>
+              </a:lnSpc>
+              <a:buNone/>
+            </a:pPr>
+            <a:r>
+              <a:rPr lang="en-US" altLang="ko-KR" sz="1100" b="0">
+                <a:solidFill>
+                  <a:srgbClr val="BBBEBF"/>
+                </a:solidFill>
+                <a:effectLst/>
+                <a:latin typeface="Consolas" panose="020B0609020204030204" pitchFamily="49" charset="0"/>
+              </a:rPr>
+              <a:t>        </a:t>
+            </a:r>
+            <a:r>
+              <a:rPr lang="en-US" altLang="ko-KR" sz="1100" b="0">
+                <a:solidFill>
+                  <a:srgbClr val="79C0FF"/>
+                </a:solidFill>
+                <a:effectLst/>
+                <a:latin typeface="Consolas" panose="020B0609020204030204" pitchFamily="49" charset="0"/>
+              </a:rPr>
+              <a:t>restClient</a:t>
+            </a:r>
+            <a:r>
+              <a:rPr lang="en-US" altLang="ko-KR" sz="1100" b="0">
+                <a:solidFill>
+                  <a:srgbClr val="BBBEBF"/>
+                </a:solidFill>
+                <a:effectLst/>
+                <a:latin typeface="Consolas" panose="020B0609020204030204" pitchFamily="49" charset="0"/>
+              </a:rPr>
+              <a:t>.</a:t>
+            </a:r>
+            <a:r>
+              <a:rPr lang="en-US" altLang="ko-KR" sz="1100" b="0">
+                <a:solidFill>
+                  <a:srgbClr val="D2A8FF"/>
+                </a:solidFill>
+                <a:effectLst/>
+                <a:latin typeface="Consolas" panose="020B0609020204030204" pitchFamily="49" charset="0"/>
+              </a:rPr>
+              <a:t>post</a:t>
+            </a:r>
+            <a:r>
+              <a:rPr lang="en-US" altLang="ko-KR" sz="1100" b="0">
+                <a:solidFill>
+                  <a:srgbClr val="BBBEBF"/>
+                </a:solidFill>
+                <a:effectLst/>
+                <a:latin typeface="Consolas" panose="020B0609020204030204" pitchFamily="49" charset="0"/>
+              </a:rPr>
+              <a:t>()</a:t>
+            </a:r>
+          </a:p>
+          <a:p>
+            <a:pPr>
+              <a:lnSpc>
+                <a:spcPts val="1425"/>
+              </a:lnSpc>
+              <a:buNone/>
+            </a:pPr>
+            <a:r>
+              <a:rPr lang="en-US" altLang="ko-KR" sz="1100" b="0">
+                <a:solidFill>
+                  <a:srgbClr val="BBBEBF"/>
+                </a:solidFill>
+                <a:effectLst/>
+                <a:latin typeface="Consolas" panose="020B0609020204030204" pitchFamily="49" charset="0"/>
+              </a:rPr>
+              <a:t>            .</a:t>
+            </a:r>
+            <a:r>
+              <a:rPr lang="en-US" altLang="ko-KR" sz="1100" b="0">
+                <a:solidFill>
+                  <a:srgbClr val="D2A8FF"/>
+                </a:solidFill>
+                <a:effectLst/>
+                <a:latin typeface="Consolas" panose="020B0609020204030204" pitchFamily="49" charset="0"/>
+              </a:rPr>
+              <a:t>uri</a:t>
+            </a:r>
+            <a:r>
+              <a:rPr lang="en-US" altLang="ko-KR" sz="1100" b="0">
+                <a:solidFill>
+                  <a:srgbClr val="BBBEBF"/>
+                </a:solidFill>
+                <a:effectLst/>
+                <a:latin typeface="Consolas" panose="020B0609020204030204" pitchFamily="49" charset="0"/>
+              </a:rPr>
+              <a:t>(</a:t>
+            </a:r>
+            <a:r>
+              <a:rPr lang="en-US" altLang="ko-KR" sz="1100" b="0">
+                <a:solidFill>
+                  <a:srgbClr val="A5D6FF"/>
+                </a:solidFill>
+                <a:effectLst/>
+                <a:latin typeface="Consolas" panose="020B0609020204030204" pitchFamily="49" charset="0"/>
+              </a:rPr>
+              <a:t>"/users/activity-score/add"</a:t>
+            </a:r>
+            <a:r>
+              <a:rPr lang="en-US" altLang="ko-KR" sz="1100" b="0">
+                <a:solidFill>
+                  <a:srgbClr val="BBBEBF"/>
+                </a:solidFill>
+                <a:effectLst/>
+                <a:latin typeface="Consolas" panose="020B0609020204030204" pitchFamily="49" charset="0"/>
+              </a:rPr>
+              <a:t>)</a:t>
+            </a:r>
+          </a:p>
+          <a:p>
+            <a:pPr>
+              <a:lnSpc>
+                <a:spcPts val="1425"/>
+              </a:lnSpc>
+              <a:buNone/>
+            </a:pPr>
+            <a:r>
+              <a:rPr lang="en-US" altLang="ko-KR" sz="1100" b="0">
+                <a:solidFill>
+                  <a:srgbClr val="BBBEBF"/>
+                </a:solidFill>
+                <a:effectLst/>
+                <a:latin typeface="Consolas" panose="020B0609020204030204" pitchFamily="49" charset="0"/>
+              </a:rPr>
+              <a:t>            .</a:t>
+            </a:r>
+            <a:r>
+              <a:rPr lang="en-US" altLang="ko-KR" sz="1100" b="0">
+                <a:solidFill>
+                  <a:srgbClr val="D2A8FF"/>
+                </a:solidFill>
+                <a:effectLst/>
+                <a:latin typeface="Consolas" panose="020B0609020204030204" pitchFamily="49" charset="0"/>
+              </a:rPr>
+              <a:t>contentType</a:t>
+            </a:r>
+            <a:r>
+              <a:rPr lang="en-US" altLang="ko-KR" sz="1100" b="0">
+                <a:solidFill>
+                  <a:srgbClr val="BBBEBF"/>
+                </a:solidFill>
+                <a:effectLst/>
+                <a:latin typeface="Consolas" panose="020B0609020204030204" pitchFamily="49" charset="0"/>
+              </a:rPr>
+              <a:t>(</a:t>
+            </a:r>
+            <a:r>
+              <a:rPr lang="en-US" altLang="ko-KR" sz="1100" b="0">
+                <a:solidFill>
+                  <a:srgbClr val="4EC9B0"/>
+                </a:solidFill>
+                <a:effectLst/>
+                <a:latin typeface="Consolas" panose="020B0609020204030204" pitchFamily="49" charset="0"/>
+              </a:rPr>
+              <a:t>MediaType</a:t>
+            </a:r>
+            <a:r>
+              <a:rPr lang="en-US" altLang="ko-KR" sz="1100" b="0">
+                <a:solidFill>
+                  <a:srgbClr val="BBBEBF"/>
+                </a:solidFill>
+                <a:effectLst/>
+                <a:latin typeface="Consolas" panose="020B0609020204030204" pitchFamily="49" charset="0"/>
+              </a:rPr>
+              <a:t>.</a:t>
+            </a:r>
+            <a:r>
+              <a:rPr lang="en-US" altLang="ko-KR" sz="1100" b="0">
+                <a:solidFill>
+                  <a:srgbClr val="79C0FF"/>
+                </a:solidFill>
+                <a:effectLst/>
+                <a:latin typeface="Consolas" panose="020B0609020204030204" pitchFamily="49" charset="0"/>
+              </a:rPr>
+              <a:t>APPLICATION_JSON</a:t>
+            </a:r>
+            <a:r>
+              <a:rPr lang="en-US" altLang="ko-KR" sz="1100" b="0">
+                <a:solidFill>
+                  <a:srgbClr val="BBBEBF"/>
+                </a:solidFill>
+                <a:effectLst/>
+                <a:latin typeface="Consolas" panose="020B0609020204030204" pitchFamily="49" charset="0"/>
+              </a:rPr>
+              <a:t>)</a:t>
+            </a:r>
+          </a:p>
+          <a:p>
+            <a:pPr>
+              <a:lnSpc>
+                <a:spcPts val="1425"/>
+              </a:lnSpc>
+              <a:buNone/>
+            </a:pPr>
+            <a:r>
+              <a:rPr lang="en-US" altLang="ko-KR" sz="1100" b="0">
+                <a:solidFill>
+                  <a:srgbClr val="BBBEBF"/>
+                </a:solidFill>
+                <a:effectLst/>
+                <a:latin typeface="Consolas" panose="020B0609020204030204" pitchFamily="49" charset="0"/>
+              </a:rPr>
+              <a:t>            .</a:t>
+            </a:r>
+            <a:r>
+              <a:rPr lang="en-US" altLang="ko-KR" sz="1100" b="0">
+                <a:solidFill>
+                  <a:srgbClr val="D2A8FF"/>
+                </a:solidFill>
+                <a:effectLst/>
+                <a:latin typeface="Consolas" panose="020B0609020204030204" pitchFamily="49" charset="0"/>
+              </a:rPr>
+              <a:t>body</a:t>
+            </a:r>
+            <a:r>
+              <a:rPr lang="en-US" altLang="ko-KR" sz="1100" b="0">
+                <a:solidFill>
+                  <a:srgbClr val="BBBEBF"/>
+                </a:solidFill>
+                <a:effectLst/>
+                <a:latin typeface="Consolas" panose="020B0609020204030204" pitchFamily="49" charset="0"/>
+              </a:rPr>
+              <a:t>(</a:t>
+            </a:r>
+            <a:r>
+              <a:rPr lang="en-US" altLang="ko-KR" sz="1100" b="0">
+                <a:solidFill>
+                  <a:srgbClr val="C9D1D9"/>
+                </a:solidFill>
+                <a:effectLst/>
+                <a:latin typeface="Consolas" panose="020B0609020204030204" pitchFamily="49" charset="0"/>
+              </a:rPr>
+              <a:t>addActivityScoreRequestDto</a:t>
+            </a:r>
+            <a:r>
+              <a:rPr lang="en-US" altLang="ko-KR" sz="1100" b="0">
+                <a:solidFill>
+                  <a:srgbClr val="BBBEBF"/>
+                </a:solidFill>
+                <a:effectLst/>
+                <a:latin typeface="Consolas" panose="020B0609020204030204" pitchFamily="49" charset="0"/>
+              </a:rPr>
+              <a:t>)</a:t>
+            </a:r>
+          </a:p>
+          <a:p>
+            <a:pPr>
+              <a:lnSpc>
+                <a:spcPts val="1425"/>
+              </a:lnSpc>
+              <a:buNone/>
+            </a:pPr>
+            <a:r>
+              <a:rPr lang="en-US" altLang="ko-KR" sz="1100" b="0">
+                <a:solidFill>
+                  <a:srgbClr val="BBBEBF"/>
+                </a:solidFill>
+                <a:effectLst/>
+                <a:latin typeface="Consolas" panose="020B0609020204030204" pitchFamily="49" charset="0"/>
+              </a:rPr>
+              <a:t>            .</a:t>
+            </a:r>
+            <a:r>
+              <a:rPr lang="en-US" altLang="ko-KR" sz="1100" b="0">
+                <a:solidFill>
+                  <a:srgbClr val="D2A8FF"/>
+                </a:solidFill>
+                <a:effectLst/>
+                <a:latin typeface="Consolas" panose="020B0609020204030204" pitchFamily="49" charset="0"/>
+              </a:rPr>
+              <a:t>retrieve</a:t>
+            </a:r>
+            <a:r>
+              <a:rPr lang="en-US" altLang="ko-KR" sz="1100" b="0">
+                <a:solidFill>
+                  <a:srgbClr val="BBBEBF"/>
+                </a:solidFill>
+                <a:effectLst/>
+                <a:latin typeface="Consolas" panose="020B0609020204030204" pitchFamily="49" charset="0"/>
+              </a:rPr>
+              <a:t>()</a:t>
+            </a:r>
+          </a:p>
+          <a:p>
+            <a:pPr>
+              <a:lnSpc>
+                <a:spcPts val="1425"/>
+              </a:lnSpc>
+              <a:buNone/>
+            </a:pPr>
+            <a:r>
+              <a:rPr lang="en-US" altLang="ko-KR" sz="1100" b="0">
+                <a:solidFill>
+                  <a:srgbClr val="BBBEBF"/>
+                </a:solidFill>
+                <a:effectLst/>
+                <a:latin typeface="Consolas" panose="020B0609020204030204" pitchFamily="49" charset="0"/>
+              </a:rPr>
+              <a:t>            .</a:t>
+            </a:r>
+            <a:r>
+              <a:rPr lang="en-US" altLang="ko-KR" sz="1100" b="0">
+                <a:solidFill>
+                  <a:srgbClr val="D2A8FF"/>
+                </a:solidFill>
+                <a:effectLst/>
+                <a:latin typeface="Consolas" panose="020B0609020204030204" pitchFamily="49" charset="0"/>
+              </a:rPr>
+              <a:t>toBodilessEntity</a:t>
+            </a:r>
+            <a:r>
+              <a:rPr lang="en-US" altLang="ko-KR" sz="1100" b="0">
+                <a:solidFill>
+                  <a:srgbClr val="BBBEBF"/>
+                </a:solidFill>
+                <a:effectLst/>
+                <a:latin typeface="Consolas" panose="020B0609020204030204" pitchFamily="49" charset="0"/>
+              </a:rPr>
+              <a:t>();</a:t>
+            </a:r>
+          </a:p>
+          <a:p>
+            <a:pPr>
+              <a:lnSpc>
+                <a:spcPts val="1425"/>
+              </a:lnSpc>
+              <a:buNone/>
+            </a:pPr>
+            <a:r>
+              <a:rPr lang="en-US" altLang="ko-KR" sz="1100" b="0">
+                <a:solidFill>
+                  <a:srgbClr val="BBBEBF"/>
+                </a:solidFill>
+                <a:effectLst/>
+                <a:latin typeface="Consolas" panose="020B0609020204030204" pitchFamily="49" charset="0"/>
+              </a:rPr>
+              <a:t>    }</a:t>
+            </a:r>
+          </a:p>
+        </p:txBody>
+      </p:sp>
+    </p:spTree>
+    <p:extLst>
+      <p:ext uri="{BB962C8B-B14F-4D97-AF65-F5344CB8AC3E}">
+        <p14:creationId xmlns:p14="http://schemas.microsoft.com/office/powerpoint/2010/main" val="1311957489"/>
+      </p:ext>
+    </p:extLst>
+  </p:cSld>
+  <p:clrMapOvr>
+    <a:masterClrMapping/>
+  </p:clrMapOvr>
+</p:sld>
+</file>
+
+<file path=ppt/slides/slide27.xml><?xml version="1.0" encoding="utf-8"?>
+<p:sld xmlns:a="http://schemas.openxmlformats.org/drawingml/2006/main" xmlns:r="http://schemas.openxmlformats.org/officeDocument/2006/relationships" xmlns:p="http://schemas.openxmlformats.org/presentationml/2006/main">
+  <p:cSld>
+    <p:spTree>
+      <p:nvGrpSpPr>
+        <p:cNvPr id="1" name=""/>
+        <p:cNvGrpSpPr/>
+        <p:nvPr/>
+      </p:nvGrpSpPr>
+      <p:grpSpPr>
+        <a:xfrm>
+          <a:off x="0" y="0"/>
+          <a:ext cx="0" cy="0"/>
+          <a:chOff x="0" y="0"/>
+          <a:chExt cx="0" cy="0"/>
+        </a:xfrm>
+      </p:grpSpPr>
+      <p:sp>
+        <p:nvSpPr>
+          <p:cNvPr id="2" name="제목 1">
+            <a:extLst>
+              <a:ext uri="{FF2B5EF4-FFF2-40B4-BE49-F238E27FC236}">
+                <a16:creationId xmlns:a16="http://schemas.microsoft.com/office/drawing/2014/main" id="{BD427E8E-D7A2-7E36-0052-8D17210D98B1}"/>
+              </a:ext>
+            </a:extLst>
+          </p:cNvPr>
+          <p:cNvSpPr>
+            <a:spLocks noGrp="1"/>
+          </p:cNvSpPr>
+          <p:nvPr>
+            <p:ph type="title"/>
+          </p:nvPr>
+        </p:nvSpPr>
+        <p:spPr/>
+        <p:txBody>
+          <a:bodyPr/>
+          <a:lstStyle/>
+          <a:p>
+            <a:r>
+              <a:rPr lang="ko-KR" altLang="en-US"/>
+              <a:t>게시글 생성 로직 수정 </a:t>
+            </a:r>
+            <a:r>
+              <a:rPr lang="en-US" altLang="ko-KR"/>
+              <a:t>- BoardService</a:t>
+            </a:r>
+            <a:endParaRPr lang="ko-KR" altLang="en-US"/>
+          </a:p>
+        </p:txBody>
+      </p:sp>
+      <p:pic>
+        <p:nvPicPr>
+          <p:cNvPr id="4" name="그림 3">
+            <a:extLst>
+              <a:ext uri="{FF2B5EF4-FFF2-40B4-BE49-F238E27FC236}">
+                <a16:creationId xmlns:a16="http://schemas.microsoft.com/office/drawing/2014/main" id="{5C7A8AFC-37AF-4E28-91B5-F653E4DF1A96}"/>
+              </a:ext>
+            </a:extLst>
+          </p:cNvPr>
+          <p:cNvPicPr>
+            <a:picLocks noChangeAspect="1"/>
+          </p:cNvPicPr>
+          <p:nvPr/>
+        </p:nvPicPr>
+        <p:blipFill>
+          <a:blip r:embed="rId2"/>
+          <a:stretch>
+            <a:fillRect/>
+          </a:stretch>
+        </p:blipFill>
+        <p:spPr>
+          <a:xfrm>
+            <a:off x="558336" y="1830360"/>
+            <a:ext cx="3010320" cy="4934639"/>
+          </a:xfrm>
+          <a:prstGeom prst="rect">
+            <a:avLst/>
+          </a:prstGeom>
+        </p:spPr>
+      </p:pic>
+      <p:sp>
+        <p:nvSpPr>
+          <p:cNvPr id="5" name="직사각형 4">
+            <a:extLst>
+              <a:ext uri="{FF2B5EF4-FFF2-40B4-BE49-F238E27FC236}">
+                <a16:creationId xmlns:a16="http://schemas.microsoft.com/office/drawing/2014/main" id="{F4B8C32D-BEE3-4C0E-0684-3DDF35C07096}"/>
+              </a:ext>
+            </a:extLst>
+          </p:cNvPr>
+          <p:cNvSpPr/>
+          <p:nvPr/>
+        </p:nvSpPr>
+        <p:spPr>
+          <a:xfrm>
+            <a:off x="904100" y="5454890"/>
+            <a:ext cx="1356360" cy="241822"/>
+          </a:xfrm>
+          <a:prstGeom prst="rect">
+            <a:avLst/>
+          </a:prstGeom>
+          <a:noFill/>
+          <a:ln>
+            <a:solidFill>
+              <a:srgbClr val="FF0000"/>
+            </a:solidFill>
+          </a:ln>
+        </p:spPr>
+        <p:style>
+          <a:lnRef idx="2">
+            <a:schemeClr val="accent1">
+              <a:shade val="15000"/>
+            </a:schemeClr>
+          </a:lnRef>
+          <a:fillRef idx="1">
+            <a:schemeClr val="accent1"/>
+          </a:fillRef>
+          <a:effectRef idx="0">
+            <a:schemeClr val="accent1"/>
+          </a:effectRef>
+          <a:fontRef idx="minor">
+            <a:schemeClr val="lt1"/>
+          </a:fontRef>
+        </p:style>
+        <p:txBody>
+          <a:bodyPr rtlCol="0" anchor="ctr"/>
+          <a:lstStyle/>
+          <a:p>
+            <a:pPr algn="ctr"/>
+            <a:endParaRPr lang="ko-KR" altLang="en-US"/>
+          </a:p>
+        </p:txBody>
+      </p:sp>
+      <p:pic>
+        <p:nvPicPr>
+          <p:cNvPr id="7" name="그림 6">
+            <a:extLst>
+              <a:ext uri="{FF2B5EF4-FFF2-40B4-BE49-F238E27FC236}">
+                <a16:creationId xmlns:a16="http://schemas.microsoft.com/office/drawing/2014/main" id="{A07309AF-3C6D-8029-ADC3-05C895764D92}"/>
+              </a:ext>
+            </a:extLst>
+          </p:cNvPr>
+          <p:cNvPicPr>
+            <a:picLocks noChangeAspect="1"/>
+          </p:cNvPicPr>
+          <p:nvPr/>
+        </p:nvPicPr>
+        <p:blipFill>
+          <a:blip r:embed="rId3"/>
+          <a:stretch>
+            <a:fillRect/>
+          </a:stretch>
+        </p:blipFill>
+        <p:spPr>
+          <a:xfrm>
+            <a:off x="3788589" y="1830360"/>
+            <a:ext cx="6535062" cy="3229426"/>
+          </a:xfrm>
+          <a:prstGeom prst="rect">
+            <a:avLst/>
+          </a:prstGeom>
+        </p:spPr>
+      </p:pic>
+      <p:sp>
+        <p:nvSpPr>
+          <p:cNvPr id="8" name="직사각형 7">
+            <a:extLst>
+              <a:ext uri="{FF2B5EF4-FFF2-40B4-BE49-F238E27FC236}">
+                <a16:creationId xmlns:a16="http://schemas.microsoft.com/office/drawing/2014/main" id="{333647E8-9DBE-0BA0-907F-BF870FD7B521}"/>
+              </a:ext>
+            </a:extLst>
+          </p:cNvPr>
+          <p:cNvSpPr/>
+          <p:nvPr/>
+        </p:nvSpPr>
+        <p:spPr>
+          <a:xfrm>
+            <a:off x="4782312" y="2414016"/>
+            <a:ext cx="5468112" cy="448056"/>
+          </a:xfrm>
+          <a:prstGeom prst="rect">
+            <a:avLst/>
+          </a:prstGeom>
+          <a:noFill/>
+          <a:ln>
+            <a:solidFill>
+              <a:srgbClr val="FF0000"/>
+            </a:solidFill>
+          </a:ln>
+        </p:spPr>
+        <p:style>
+          <a:lnRef idx="2">
+            <a:schemeClr val="accent1">
+              <a:shade val="15000"/>
+            </a:schemeClr>
+          </a:lnRef>
+          <a:fillRef idx="1">
+            <a:schemeClr val="accent1"/>
+          </a:fillRef>
+          <a:effectRef idx="0">
+            <a:schemeClr val="accent1"/>
+          </a:effectRef>
+          <a:fontRef idx="minor">
+            <a:schemeClr val="lt1"/>
+          </a:fontRef>
+        </p:style>
+        <p:txBody>
+          <a:bodyPr rtlCol="0" anchor="ctr"/>
+          <a:lstStyle/>
+          <a:p>
+            <a:pPr algn="ctr"/>
+            <a:endParaRPr lang="ko-KR" altLang="en-US"/>
+          </a:p>
+        </p:txBody>
+      </p:sp>
+      <p:sp>
+        <p:nvSpPr>
+          <p:cNvPr id="9" name="직사각형 8">
+            <a:extLst>
+              <a:ext uri="{FF2B5EF4-FFF2-40B4-BE49-F238E27FC236}">
+                <a16:creationId xmlns:a16="http://schemas.microsoft.com/office/drawing/2014/main" id="{C11761A8-D325-3F26-6153-6A5916283D4A}"/>
+              </a:ext>
+            </a:extLst>
+          </p:cNvPr>
+          <p:cNvSpPr/>
+          <p:nvPr/>
+        </p:nvSpPr>
+        <p:spPr>
+          <a:xfrm>
+            <a:off x="4782311" y="4463902"/>
+            <a:ext cx="5541339" cy="448056"/>
+          </a:xfrm>
+          <a:prstGeom prst="rect">
+            <a:avLst/>
+          </a:prstGeom>
+          <a:noFill/>
+          <a:ln>
+            <a:solidFill>
+              <a:srgbClr val="FF0000"/>
+            </a:solidFill>
+          </a:ln>
+        </p:spPr>
+        <p:style>
+          <a:lnRef idx="2">
+            <a:schemeClr val="accent1">
+              <a:shade val="15000"/>
+            </a:schemeClr>
+          </a:lnRef>
+          <a:fillRef idx="1">
+            <a:schemeClr val="accent1"/>
+          </a:fillRef>
+          <a:effectRef idx="0">
+            <a:schemeClr val="accent1"/>
+          </a:effectRef>
+          <a:fontRef idx="minor">
+            <a:schemeClr val="lt1"/>
+          </a:fontRef>
+        </p:style>
+        <p:txBody>
+          <a:bodyPr rtlCol="0" anchor="ctr"/>
+          <a:lstStyle/>
+          <a:p>
+            <a:pPr algn="ctr"/>
+            <a:endParaRPr lang="ko-KR" altLang="en-US"/>
+          </a:p>
+        </p:txBody>
+      </p:sp>
+      <p:sp>
+        <p:nvSpPr>
+          <p:cNvPr id="10" name="TextBox 9">
+            <a:extLst>
+              <a:ext uri="{FF2B5EF4-FFF2-40B4-BE49-F238E27FC236}">
+                <a16:creationId xmlns:a16="http://schemas.microsoft.com/office/drawing/2014/main" id="{190777A4-8CEF-C908-9ECB-99BC14BC6EBB}"/>
+              </a:ext>
+            </a:extLst>
+          </p:cNvPr>
+          <p:cNvSpPr txBox="1"/>
+          <p:nvPr/>
+        </p:nvSpPr>
+        <p:spPr>
+          <a:xfrm>
+            <a:off x="3788589" y="5202936"/>
+            <a:ext cx="8089467" cy="369332"/>
+          </a:xfrm>
+          <a:prstGeom prst="rect">
+            <a:avLst/>
+          </a:prstGeom>
+          <a:noFill/>
+        </p:spPr>
+        <p:txBody>
+          <a:bodyPr wrap="square" rtlCol="0">
+            <a:spAutoFit/>
+          </a:bodyPr>
+          <a:lstStyle/>
+          <a:p>
+            <a:r>
+              <a:rPr lang="ko-KR" altLang="en-US"/>
+              <a:t>게시글 등록 앞</a:t>
+            </a:r>
+            <a:r>
+              <a:rPr lang="en-US" altLang="ko-KR"/>
+              <a:t>,</a:t>
+            </a:r>
+            <a:r>
+              <a:rPr lang="ko-KR" altLang="en-US"/>
+              <a:t>뒤로 포인트 차감 및 활동포인트 증가 메소드를 추가한다</a:t>
+            </a:r>
+            <a:r>
+              <a:rPr lang="en-US" altLang="ko-KR"/>
+              <a:t>.</a:t>
+            </a:r>
+            <a:endParaRPr lang="ko-KR" altLang="en-US"/>
+          </a:p>
+        </p:txBody>
+      </p:sp>
+    </p:spTree>
+    <p:extLst>
+      <p:ext uri="{BB962C8B-B14F-4D97-AF65-F5344CB8AC3E}">
+        <p14:creationId xmlns:p14="http://schemas.microsoft.com/office/powerpoint/2010/main" val="706807871"/>
+      </p:ext>
+    </p:extLst>
+  </p:cSld>
+  <p:clrMapOvr>
+    <a:masterClrMapping/>
+  </p:clrMapOvr>
+</p:sld>
+</file>
+
+<file path=ppt/slides/slide28.xml><?xml version="1.0" encoding="utf-8"?>
+<p:sld xmlns:a="http://schemas.openxmlformats.org/drawingml/2006/main" xmlns:r="http://schemas.openxmlformats.org/officeDocument/2006/relationships" xmlns:p="http://schemas.openxmlformats.org/presentationml/2006/main">
+  <p:cSld>
+    <p:spTree>
+      <p:nvGrpSpPr>
+        <p:cNvPr id="1" name=""/>
+        <p:cNvGrpSpPr/>
+        <p:nvPr/>
+      </p:nvGrpSpPr>
+      <p:grpSpPr>
+        <a:xfrm>
+          <a:off x="0" y="0"/>
+          <a:ext cx="0" cy="0"/>
+          <a:chOff x="0" y="0"/>
+          <a:chExt cx="0" cy="0"/>
+        </a:xfrm>
+      </p:grpSpPr>
+      <p:sp>
+        <p:nvSpPr>
+          <p:cNvPr id="2" name="제목 1">
+            <a:extLst>
+              <a:ext uri="{FF2B5EF4-FFF2-40B4-BE49-F238E27FC236}">
+                <a16:creationId xmlns:a16="http://schemas.microsoft.com/office/drawing/2014/main" id="{0F6EADA3-E649-FFE4-E646-4B695A1CA192}"/>
+              </a:ext>
+            </a:extLst>
+          </p:cNvPr>
+          <p:cNvSpPr>
+            <a:spLocks noGrp="1"/>
+          </p:cNvSpPr>
+          <p:nvPr>
+            <p:ph type="title"/>
+          </p:nvPr>
+        </p:nvSpPr>
+        <p:spPr/>
+        <p:txBody>
+          <a:bodyPr/>
+          <a:lstStyle/>
+          <a:p>
+            <a:r>
+              <a:rPr lang="ko-KR" altLang="en-US"/>
+              <a:t>게시글 등록 </a:t>
+            </a:r>
+            <a:r>
+              <a:rPr lang="en-US" altLang="ko-KR"/>
+              <a:t>API </a:t>
+            </a:r>
+            <a:r>
+              <a:rPr lang="ko-KR" altLang="en-US"/>
+              <a:t>테스트</a:t>
+            </a:r>
+          </a:p>
+        </p:txBody>
+      </p:sp>
+      <p:pic>
+        <p:nvPicPr>
+          <p:cNvPr id="4" name="그림 3">
+            <a:extLst>
+              <a:ext uri="{FF2B5EF4-FFF2-40B4-BE49-F238E27FC236}">
+                <a16:creationId xmlns:a16="http://schemas.microsoft.com/office/drawing/2014/main" id="{B1A1A7AD-0FC2-F50C-A887-6071F940734F}"/>
+              </a:ext>
+            </a:extLst>
+          </p:cNvPr>
+          <p:cNvPicPr>
+            <a:picLocks noChangeAspect="1"/>
+          </p:cNvPicPr>
+          <p:nvPr/>
+        </p:nvPicPr>
+        <p:blipFill>
+          <a:blip r:embed="rId2"/>
+          <a:stretch>
+            <a:fillRect/>
+          </a:stretch>
+        </p:blipFill>
+        <p:spPr>
+          <a:xfrm>
+            <a:off x="525981" y="1982734"/>
+            <a:ext cx="5306165" cy="2581635"/>
+          </a:xfrm>
+          <a:prstGeom prst="rect">
+            <a:avLst/>
+          </a:prstGeom>
+        </p:spPr>
+      </p:pic>
+      <p:grpSp>
+        <p:nvGrpSpPr>
+          <p:cNvPr id="10" name="그룹 9">
+            <a:extLst>
+              <a:ext uri="{FF2B5EF4-FFF2-40B4-BE49-F238E27FC236}">
+                <a16:creationId xmlns:a16="http://schemas.microsoft.com/office/drawing/2014/main" id="{55DBA0B6-1FBA-482C-2C42-FF098BD0D503}"/>
+              </a:ext>
+            </a:extLst>
+          </p:cNvPr>
+          <p:cNvGrpSpPr/>
+          <p:nvPr/>
+        </p:nvGrpSpPr>
+        <p:grpSpPr>
+          <a:xfrm>
+            <a:off x="5945331" y="2009577"/>
+            <a:ext cx="2495898" cy="1419423"/>
+            <a:chOff x="5945331" y="2009577"/>
+            <a:chExt cx="2495898" cy="1419423"/>
+          </a:xfrm>
+        </p:grpSpPr>
+        <p:pic>
+          <p:nvPicPr>
+            <p:cNvPr id="6" name="그림 5">
+              <a:extLst>
+                <a:ext uri="{FF2B5EF4-FFF2-40B4-BE49-F238E27FC236}">
+                  <a16:creationId xmlns:a16="http://schemas.microsoft.com/office/drawing/2014/main" id="{5272CC7C-A0E4-C7E9-D37A-1B864A839137}"/>
+                </a:ext>
+              </a:extLst>
+            </p:cNvPr>
+            <p:cNvPicPr>
+              <a:picLocks noChangeAspect="1"/>
+            </p:cNvPicPr>
+            <p:nvPr/>
+          </p:nvPicPr>
+          <p:blipFill>
+            <a:blip r:embed="rId3"/>
+            <a:stretch>
+              <a:fillRect/>
+            </a:stretch>
+          </p:blipFill>
+          <p:spPr>
+            <a:xfrm>
+              <a:off x="5945331" y="2009577"/>
+              <a:ext cx="2495898" cy="1419423"/>
+            </a:xfrm>
+            <a:prstGeom prst="rect">
+              <a:avLst/>
+            </a:prstGeom>
+          </p:spPr>
+        </p:pic>
+        <p:sp>
+          <p:nvSpPr>
+            <p:cNvPr id="9" name="직사각형 8">
+              <a:extLst>
+                <a:ext uri="{FF2B5EF4-FFF2-40B4-BE49-F238E27FC236}">
+                  <a16:creationId xmlns:a16="http://schemas.microsoft.com/office/drawing/2014/main" id="{A1FE2AFF-6916-479A-F6B9-0AB4577FCADA}"/>
+                </a:ext>
+              </a:extLst>
+            </p:cNvPr>
+            <p:cNvSpPr/>
+            <p:nvPr/>
+          </p:nvSpPr>
+          <p:spPr>
+            <a:xfrm>
+              <a:off x="6748272" y="2926080"/>
+              <a:ext cx="731520" cy="182880"/>
+            </a:xfrm>
+            <a:prstGeom prst="rect">
+              <a:avLst/>
+            </a:prstGeom>
+            <a:noFill/>
+            <a:ln>
+              <a:solidFill>
+                <a:srgbClr val="FF0000"/>
+              </a:solidFill>
+            </a:ln>
+          </p:spPr>
+          <p:style>
+            <a:lnRef idx="2">
+              <a:schemeClr val="accent1">
+                <a:shade val="15000"/>
+              </a:schemeClr>
+            </a:lnRef>
+            <a:fillRef idx="1">
+              <a:schemeClr val="accent1"/>
+            </a:fillRef>
+            <a:effectRef idx="0">
+              <a:schemeClr val="accent1"/>
+            </a:effectRef>
+            <a:fontRef idx="minor">
+              <a:schemeClr val="lt1"/>
+            </a:fontRef>
+          </p:style>
+          <p:txBody>
+            <a:bodyPr rtlCol="0" anchor="ctr"/>
+            <a:lstStyle/>
+            <a:p>
+              <a:pPr algn="ctr"/>
+              <a:endParaRPr lang="ko-KR" altLang="en-US"/>
+            </a:p>
+          </p:txBody>
+        </p:sp>
+      </p:grpSp>
+      <p:grpSp>
+        <p:nvGrpSpPr>
+          <p:cNvPr id="12" name="그룹 11">
+            <a:extLst>
+              <a:ext uri="{FF2B5EF4-FFF2-40B4-BE49-F238E27FC236}">
+                <a16:creationId xmlns:a16="http://schemas.microsoft.com/office/drawing/2014/main" id="{8C0BD778-030A-4DAF-D9D0-76ECF75BEE87}"/>
+              </a:ext>
+            </a:extLst>
+          </p:cNvPr>
+          <p:cNvGrpSpPr/>
+          <p:nvPr/>
+        </p:nvGrpSpPr>
+        <p:grpSpPr>
+          <a:xfrm>
+            <a:off x="5983436" y="4290734"/>
+            <a:ext cx="2457793" cy="1257475"/>
+            <a:chOff x="5983436" y="4290734"/>
+            <a:chExt cx="2457793" cy="1257475"/>
+          </a:xfrm>
+        </p:grpSpPr>
+        <p:pic>
+          <p:nvPicPr>
+            <p:cNvPr id="8" name="그림 7">
+              <a:extLst>
+                <a:ext uri="{FF2B5EF4-FFF2-40B4-BE49-F238E27FC236}">
+                  <a16:creationId xmlns:a16="http://schemas.microsoft.com/office/drawing/2014/main" id="{FED46ACC-6565-230E-724A-0E98CBE59B47}"/>
+                </a:ext>
+              </a:extLst>
+            </p:cNvPr>
+            <p:cNvPicPr>
+              <a:picLocks noChangeAspect="1"/>
+            </p:cNvPicPr>
+            <p:nvPr/>
+          </p:nvPicPr>
+          <p:blipFill>
+            <a:blip r:embed="rId4"/>
+            <a:stretch>
+              <a:fillRect/>
+            </a:stretch>
+          </p:blipFill>
+          <p:spPr>
+            <a:xfrm>
+              <a:off x="5983436" y="4290734"/>
+              <a:ext cx="2457793" cy="1257475"/>
+            </a:xfrm>
+            <a:prstGeom prst="rect">
+              <a:avLst/>
+            </a:prstGeom>
+          </p:spPr>
+        </p:pic>
+        <p:sp>
+          <p:nvSpPr>
+            <p:cNvPr id="11" name="직사각형 10">
+              <a:extLst>
+                <a:ext uri="{FF2B5EF4-FFF2-40B4-BE49-F238E27FC236}">
+                  <a16:creationId xmlns:a16="http://schemas.microsoft.com/office/drawing/2014/main" id="{1A3A3F98-A9F1-BF4B-0C89-1AD0B7F330F0}"/>
+                </a:ext>
+              </a:extLst>
+            </p:cNvPr>
+            <p:cNvSpPr/>
+            <p:nvPr/>
+          </p:nvSpPr>
+          <p:spPr>
+            <a:xfrm>
+              <a:off x="6748272" y="5081016"/>
+              <a:ext cx="731520" cy="182880"/>
+            </a:xfrm>
+            <a:prstGeom prst="rect">
+              <a:avLst/>
+            </a:prstGeom>
+            <a:noFill/>
+            <a:ln>
+              <a:solidFill>
+                <a:srgbClr val="FF0000"/>
+              </a:solidFill>
+            </a:ln>
+          </p:spPr>
+          <p:style>
+            <a:lnRef idx="2">
+              <a:schemeClr val="accent1">
+                <a:shade val="15000"/>
+              </a:schemeClr>
+            </a:lnRef>
+            <a:fillRef idx="1">
+              <a:schemeClr val="accent1"/>
+            </a:fillRef>
+            <a:effectRef idx="0">
+              <a:schemeClr val="accent1"/>
+            </a:effectRef>
+            <a:fontRef idx="minor">
+              <a:schemeClr val="lt1"/>
+            </a:fontRef>
+          </p:style>
+          <p:txBody>
+            <a:bodyPr rtlCol="0" anchor="ctr"/>
+            <a:lstStyle/>
+            <a:p>
+              <a:pPr algn="ctr"/>
+              <a:endParaRPr lang="ko-KR" altLang="en-US"/>
+            </a:p>
+          </p:txBody>
+        </p:sp>
+      </p:grpSp>
+      <p:cxnSp>
+        <p:nvCxnSpPr>
+          <p:cNvPr id="14" name="직선 화살표 연결선 13">
+            <a:extLst>
+              <a:ext uri="{FF2B5EF4-FFF2-40B4-BE49-F238E27FC236}">
+                <a16:creationId xmlns:a16="http://schemas.microsoft.com/office/drawing/2014/main" id="{381483E1-8B09-48DD-7A59-0B94EC86A88A}"/>
+              </a:ext>
+            </a:extLst>
+          </p:cNvPr>
+          <p:cNvCxnSpPr>
+            <a:stCxn id="9" idx="2"/>
+            <a:endCxn id="11" idx="0"/>
+          </p:cNvCxnSpPr>
+          <p:nvPr/>
+        </p:nvCxnSpPr>
+        <p:spPr>
+          <a:xfrm>
+            <a:off x="7114032" y="3108960"/>
+            <a:ext cx="0" cy="1972056"/>
+          </a:xfrm>
+          <a:prstGeom prst="straightConnector1">
+            <a:avLst/>
+          </a:prstGeom>
+          <a:ln>
+            <a:solidFill>
+              <a:srgbClr val="FF0000"/>
+            </a:solidFill>
+            <a:tailEnd type="triangle"/>
+          </a:ln>
+        </p:spPr>
+        <p:style>
+          <a:lnRef idx="1">
+            <a:schemeClr val="accent1"/>
+          </a:lnRef>
+          <a:fillRef idx="0">
+            <a:schemeClr val="accent1"/>
+          </a:fillRef>
+          <a:effectRef idx="0">
+            <a:schemeClr val="accent1"/>
+          </a:effectRef>
+          <a:fontRef idx="minor">
+            <a:schemeClr val="tx1"/>
+          </a:fontRef>
+        </p:style>
+      </p:cxnSp>
+      <p:sp>
+        <p:nvSpPr>
+          <p:cNvPr id="15" name="TextBox 14">
+            <a:extLst>
+              <a:ext uri="{FF2B5EF4-FFF2-40B4-BE49-F238E27FC236}">
+                <a16:creationId xmlns:a16="http://schemas.microsoft.com/office/drawing/2014/main" id="{DD87402D-8BC5-48B0-894E-DAC92E171599}"/>
+              </a:ext>
+            </a:extLst>
+          </p:cNvPr>
+          <p:cNvSpPr txBox="1"/>
+          <p:nvPr/>
+        </p:nvSpPr>
+        <p:spPr>
+          <a:xfrm>
+            <a:off x="525981" y="4754880"/>
+            <a:ext cx="5260854" cy="646331"/>
+          </a:xfrm>
+          <a:prstGeom prst="rect">
+            <a:avLst/>
+          </a:prstGeom>
+          <a:noFill/>
+        </p:spPr>
+        <p:txBody>
+          <a:bodyPr wrap="square" rtlCol="0">
+            <a:spAutoFit/>
+          </a:bodyPr>
+          <a:lstStyle/>
+          <a:p>
+            <a:r>
+              <a:rPr lang="ko-KR" altLang="en-US"/>
+              <a:t>게시글 등록 후 </a:t>
+            </a:r>
+            <a:r>
+              <a:rPr lang="en-US" altLang="ko-KR"/>
+              <a:t>Point </a:t>
+            </a:r>
+            <a:r>
+              <a:rPr lang="ko-KR" altLang="en-US"/>
+              <a:t>의 </a:t>
+            </a:r>
+            <a:r>
+              <a:rPr lang="en-US" altLang="ko-KR"/>
+              <a:t>amount </a:t>
+            </a:r>
+            <a:r>
+              <a:rPr lang="ko-KR" altLang="en-US"/>
+              <a:t>정보가 감소한걸 확인 가능</a:t>
+            </a:r>
+          </a:p>
+        </p:txBody>
+      </p:sp>
+    </p:spTree>
+    <p:extLst>
+      <p:ext uri="{BB962C8B-B14F-4D97-AF65-F5344CB8AC3E}">
+        <p14:creationId xmlns:p14="http://schemas.microsoft.com/office/powerpoint/2010/main" val="2017140609"/>
       </p:ext>
     </p:extLst>
   </p:cSld>
@@ -14354,6 +24086,36 @@
           <a:chExt cx="0" cy="0"/>
         </a:xfrm>
       </p:grpSpPr>
+      <p:pic>
+        <p:nvPicPr>
+          <p:cNvPr id="5" name="그림 4">
+            <a:extLst>
+              <a:ext uri="{FF2B5EF4-FFF2-40B4-BE49-F238E27FC236}">
+                <a16:creationId xmlns:a16="http://schemas.microsoft.com/office/drawing/2014/main" id="{1F14A0E8-F63D-3356-1837-1D6E1E9B5564}"/>
+              </a:ext>
+            </a:extLst>
+          </p:cNvPr>
+          <p:cNvPicPr>
+            <a:picLocks noChangeAspect="1"/>
+          </p:cNvPicPr>
+          <p:nvPr/>
+        </p:nvPicPr>
+        <p:blipFill>
+          <a:blip r:embed="rId2"/>
+          <a:stretch>
+            <a:fillRect/>
+          </a:stretch>
+        </p:blipFill>
+        <p:spPr>
+          <a:xfrm>
+            <a:off x="3685838" y="1826305"/>
+            <a:ext cx="3618751" cy="4798778"/>
+          </a:xfrm>
+          <a:prstGeom prst="rect">
+            <a:avLst/>
+          </a:prstGeom>
+        </p:spPr>
+      </p:pic>
       <p:sp>
         <p:nvSpPr>
           <p:cNvPr id="2" name="제목 1">
@@ -14421,7 +24183,7 @@
             <p:nvPr/>
           </p:nvPicPr>
           <p:blipFill>
-            <a:blip r:embed="rId2"/>
+            <a:blip r:embed="rId3"/>
             <a:stretch>
               <a:fillRect/>
             </a:stretch>
@@ -14573,109 +24335,58 @@
           </a:p>
         </p:txBody>
       </p:sp>
-      <p:grpSp>
-        <p:nvGrpSpPr>
-          <p:cNvPr id="11" name="그룹 10">
+      <p:sp>
+        <p:nvSpPr>
+          <p:cNvPr id="10" name="직사각형 9">
             <a:extLst>
               <a:ext uri="{FF2B5EF4-FFF2-40B4-BE49-F238E27FC236}">
-                <a16:creationId xmlns:a16="http://schemas.microsoft.com/office/drawing/2014/main" id="{6E82DC9F-D25F-A726-FE1C-08AC5E7CA87A}"/>
+                <a16:creationId xmlns:a16="http://schemas.microsoft.com/office/drawing/2014/main" id="{2E107D83-594D-8232-06E0-4B5A743E41C1}"/>
               </a:ext>
             </a:extLst>
           </p:cNvPr>
-          <p:cNvGrpSpPr/>
+          <p:cNvSpPr/>
           <p:nvPr/>
-        </p:nvGrpSpPr>
-        <p:grpSpPr>
+        </p:nvSpPr>
+        <p:spPr>
           <a:xfrm>
-            <a:off x="3604865" y="1826305"/>
-            <a:ext cx="3856639" cy="4970124"/>
-            <a:chOff x="3604865" y="1826305"/>
-            <a:chExt cx="3856639" cy="4970124"/>
+            <a:off x="4160520" y="5477255"/>
+            <a:ext cx="2350008" cy="1094141"/>
           </a:xfrm>
-        </p:grpSpPr>
-        <p:pic>
-          <p:nvPicPr>
-            <p:cNvPr id="4" name="그림 3">
-              <a:extLst>
-                <a:ext uri="{FF2B5EF4-FFF2-40B4-BE49-F238E27FC236}">
-                  <a16:creationId xmlns:a16="http://schemas.microsoft.com/office/drawing/2014/main" id="{31A83447-9FE3-C031-B1FF-92B250B6A7E7}"/>
-                </a:ext>
-              </a:extLst>
-            </p:cNvPr>
-            <p:cNvPicPr>
-              <a:picLocks noChangeAspect="1"/>
-            </p:cNvPicPr>
-            <p:nvPr/>
-          </p:nvPicPr>
-          <p:blipFill>
-            <a:blip r:embed="rId3"/>
-            <a:stretch>
-              <a:fillRect/>
-            </a:stretch>
-          </p:blipFill>
-          <p:spPr>
-            <a:xfrm>
-              <a:off x="3604865" y="1826305"/>
-              <a:ext cx="3856639" cy="4970124"/>
-            </a:xfrm>
-            <a:prstGeom prst="rect">
-              <a:avLst/>
-            </a:prstGeom>
-          </p:spPr>
-        </p:pic>
-        <p:sp>
-          <p:nvSpPr>
-            <p:cNvPr id="10" name="직사각형 9">
-              <a:extLst>
-                <a:ext uri="{FF2B5EF4-FFF2-40B4-BE49-F238E27FC236}">
-                  <a16:creationId xmlns:a16="http://schemas.microsoft.com/office/drawing/2014/main" id="{2E107D83-594D-8232-06E0-4B5A743E41C1}"/>
-                </a:ext>
-              </a:extLst>
-            </p:cNvPr>
-            <p:cNvSpPr/>
-            <p:nvPr/>
-          </p:nvSpPr>
-          <p:spPr>
-            <a:xfrm>
-              <a:off x="4160520" y="5522976"/>
-              <a:ext cx="2478024" cy="1170432"/>
-            </a:xfrm>
-            <a:prstGeom prst="rect">
-              <a:avLst/>
-            </a:prstGeom>
-            <a:noFill/>
-            <a:ln>
-              <a:solidFill>
-                <a:srgbClr val="FF0000"/>
-              </a:solidFill>
-            </a:ln>
-          </p:spPr>
-          <p:style>
-            <a:lnRef idx="2">
-              <a:schemeClr val="accent1">
-                <a:shade val="15000"/>
-              </a:schemeClr>
-            </a:lnRef>
-            <a:fillRef idx="1">
-              <a:schemeClr val="accent1"/>
-            </a:fillRef>
-            <a:effectRef idx="0">
-              <a:schemeClr val="accent1"/>
-            </a:effectRef>
-            <a:fontRef idx="minor">
-              <a:schemeClr val="lt1"/>
-            </a:fontRef>
-          </p:style>
-          <p:txBody>
-            <a:bodyPr rtlCol="0" anchor="ctr"/>
-            <a:lstStyle/>
-            <a:p>
-              <a:pPr algn="ctr"/>
-              <a:endParaRPr lang="ko-KR" altLang="en-US"/>
-            </a:p>
-          </p:txBody>
-        </p:sp>
-      </p:grpSp>
+          <a:prstGeom prst="rect">
+            <a:avLst/>
+          </a:prstGeom>
+          <a:noFill/>
+          <a:ln>
+            <a:solidFill>
+              <a:srgbClr val="FF0000"/>
+            </a:solidFill>
+          </a:ln>
+        </p:spPr>
+        <p:style>
+          <a:lnRef idx="2">
+            <a:schemeClr val="accent1">
+              <a:shade val="15000"/>
+            </a:schemeClr>
+          </a:lnRef>
+          <a:fillRef idx="1">
+            <a:schemeClr val="accent1"/>
+          </a:fillRef>
+          <a:effectRef idx="0">
+            <a:schemeClr val="accent1"/>
+          </a:effectRef>
+          <a:fontRef idx="minor">
+            <a:schemeClr val="lt1"/>
+          </a:fontRef>
+        </p:style>
+        <p:txBody>
+          <a:bodyPr rtlCol="0" anchor="ctr"/>
+          <a:lstStyle/>
+          <a:p>
+            <a:pPr algn="ctr"/>
+            <a:endParaRPr lang="ko-KR" altLang="en-US"/>
+          </a:p>
+        </p:txBody>
+      </p:sp>
     </p:spTree>
     <p:extLst>
       <p:ext uri="{BB962C8B-B14F-4D97-AF65-F5344CB8AC3E}">
